--- a/Smart Opinion Survey Platform.pptx
+++ b/Smart Opinion Survey Platform.pptx
@@ -109,6 +109,11 @@
       </a:defRPr>
     </a:lvl9pPr>
   </p:defaultTextStyle>
+  <p:extLst>
+    <p:ext uri="{EFAFB233-063F-42B5-8137-9DF3F51BA10A}">
+      <p15:sldGuideLst xmlns:p15="http://schemas.microsoft.com/office/powerpoint/2012/main"/>
+    </p:ext>
+  </p:extLst>
 </p:presentation>
 </file>
 
@@ -3372,7 +3377,19 @@
                 <a:ea typeface="Times New Roman" panose="02020603050405020304" pitchFamily="18" charset="0"/>
                 <a:cs typeface="Arial" panose="020B0604020202020204" pitchFamily="34" charset="0"/>
               </a:rPr>
-              <a:t>Smart Opinion Survey Platform</a:t>
+              <a:t>Smart Opinion </a:t>
+            </a:r>
+            <a:r>
+              <a:rPr lang="en-US" sz="3200" b="1">
+                <a:solidFill>
+                  <a:srgbClr val="222A35"/>
+                </a:solidFill>
+                <a:effectLst/>
+                <a:latin typeface="Times New Roman" panose="02020603050405020304" pitchFamily="18" charset="0"/>
+                <a:ea typeface="Times New Roman" panose="02020603050405020304" pitchFamily="18" charset="0"/>
+                <a:cs typeface="Arial" panose="020B0604020202020204" pitchFamily="34" charset="0"/>
+              </a:rPr>
+              <a:t>Survey Platform</a:t>
             </a:r>
             <a:br>
               <a:rPr lang="en-US" sz="3200" b="1" dirty="0">
@@ -3699,8 +3716,8 @@
         </p:nvSpPr>
         <p:spPr>
           <a:xfrm>
-            <a:off x="1637522" y="298580"/>
-            <a:ext cx="9423918" cy="2334357"/>
+            <a:off x="746448" y="74645"/>
+            <a:ext cx="10314991" cy="2817438"/>
           </a:xfrm>
           <a:prstGeom prst="rect">
             <a:avLst/>
@@ -3715,7 +3732,7 @@
           <a:p>
             <a:pPr algn="r" rtl="1">
               <a:lnSpc>
-                <a:spcPct val="107000"/>
+                <a:spcPct val="150000"/>
               </a:lnSpc>
               <a:spcBef>
                 <a:spcPts val="800"/>
@@ -3725,72 +3742,109 @@
               </a:spcAft>
             </a:pPr>
             <a:r>
-              <a:rPr lang="ar-SA" sz="2000" b="1" dirty="0">
+              <a:rPr lang="ar-SA" b="1" dirty="0">
                 <a:solidFill>
                   <a:srgbClr val="2F5496"/>
                 </a:solidFill>
                 <a:effectLst/>
                 <a:latin typeface="Simplified Arabic" panose="02020603050405020304" pitchFamily="18" charset="-78"/>
                 <a:ea typeface="Times New Roman" panose="02020603050405020304" pitchFamily="18" charset="0"/>
-                <a:cs typeface="Simplified Arabic" panose="02020603050405020304" pitchFamily="18" charset="-78"/>
               </a:rPr>
               <a:t>مقدمة عن المشروع</a:t>
             </a:r>
-            <a:endParaRPr lang="en-US" sz="2000" b="1" dirty="0">
+            <a:endParaRPr lang="en-US" b="1" dirty="0">
               <a:solidFill>
                 <a:srgbClr val="2F5496"/>
               </a:solidFill>
               <a:effectLst/>
               <a:latin typeface="Simplified Arabic" panose="02020603050405020304" pitchFamily="18" charset="-78"/>
               <a:ea typeface="Times New Roman" panose="02020603050405020304" pitchFamily="18" charset="0"/>
-              <a:cs typeface="Simplified Arabic" panose="02020603050405020304" pitchFamily="18" charset="-78"/>
             </a:endParaRPr>
           </a:p>
           <a:p>
-            <a:pPr algn="r" rtl="1">
+            <a:pPr algn="r">
               <a:lnSpc>
-                <a:spcPct val="107000"/>
+                <a:spcPct val="150000"/>
               </a:lnSpc>
-              <a:spcAft>
-                <a:spcPts val="800"/>
-              </a:spcAft>
+              <a:buFont typeface="Arial" panose="020B0604020202020204" pitchFamily="34" charset="0"/>
+              <a:buChar char="•"/>
             </a:pPr>
             <a:r>
-              <a:rPr lang="ar-SA" sz="1800" dirty="0">
-                <a:effectLst/>
+              <a:rPr lang="ar-SA" sz="1700" b="1" dirty="0">
                 <a:latin typeface="Simplified Arabic" panose="02020603050405020304" pitchFamily="18" charset="-78"/>
-                <a:ea typeface="Times New Roman" panose="02020603050405020304" pitchFamily="18" charset="0"/>
-                <a:cs typeface="Simplified Arabic" panose="02020603050405020304" pitchFamily="18" charset="-78"/>
               </a:rPr>
-              <a:t>في عصر التحول الرقمي والتنافسية العالية في بيئة الأعمال، أصبحت التغذية الراجعة (</a:t>
-            </a:r>
-            <a:r>
-              <a:rPr lang="en-US" sz="1800" dirty="0">
-                <a:effectLst/>
+              <a:t>أهمية التغذية الراجعة </a:t>
+            </a:r>
+            <a:r>
+              <a:rPr lang="en-US" sz="1700" b="1" dirty="0">
                 <a:latin typeface="Simplified Arabic" panose="02020603050405020304" pitchFamily="18" charset="-78"/>
-                <a:ea typeface="Times New Roman" panose="02020603050405020304" pitchFamily="18" charset="0"/>
-                <a:cs typeface="Simplified Arabic" panose="02020603050405020304" pitchFamily="18" charset="-78"/>
               </a:rPr>
-              <a:t>Feedback</a:t>
-            </a:r>
-            <a:r>
-              <a:rPr lang="ar-SA" sz="1800" dirty="0">
-                <a:effectLst/>
+              <a:t>(Feedback)</a:t>
+            </a:r>
+            <a:r>
+              <a:rPr lang="ar-SA" sz="1700" b="1" dirty="0">
                 <a:latin typeface="Simplified Arabic" panose="02020603050405020304" pitchFamily="18" charset="-78"/>
-                <a:ea typeface="Times New Roman" panose="02020603050405020304" pitchFamily="18" charset="0"/>
-                <a:cs typeface="Simplified Arabic" panose="02020603050405020304" pitchFamily="18" charset="-78"/>
               </a:rPr>
-              <a:t>) من العملاء والمستخدمين الفعليين الركيزة الأساسية لنجاح أي خدمة أو منتج. لم يعد اتخاذ القرار الإداري أو التطويري يعتمد على التخمين، بل يتطلب بيانات دقيقة تعكس الاحتياجات الحقيقية للسوق. ومع التطور المتسارع في تقنيات الويب والذكاء الاصطناعي، برزت الحاجة الماسة لابتكار أدوات ذكية تتجاوز الطرق التقليدية في جمع وتحليل الآراء، مما يتيح للمؤسسات ومقدمي الخدمات فهماً أعمق لتطلعات جمهورهم المستهدف بطريقة علمية، سريعة، وموثوقة.</a:t>
-            </a:r>
-            <a:endParaRPr lang="en-US" sz="1800" dirty="0">
-              <a:effectLst/>
+              <a:t>: </a:t>
+            </a:r>
+            <a:r>
+              <a:rPr lang="ar-SA" sz="1700" dirty="0">
+                <a:latin typeface="Simplified Arabic" panose="02020603050405020304" pitchFamily="18" charset="-78"/>
+              </a:rPr>
+              <a:t>في عصر التحول الرقمي، أصبحت آراء المستخدمين الفعليين هي الركيزة الأساسية لنجاح أي خدمة أو منتج.</a:t>
+            </a:r>
+          </a:p>
+          <a:p>
+            <a:pPr>
+              <a:lnSpc>
+                <a:spcPct val="150000"/>
+              </a:lnSpc>
+              <a:buFont typeface="Arial" panose="020B0604020202020204" pitchFamily="34" charset="0"/>
+              <a:buChar char="•"/>
+            </a:pPr>
+            <a:r>
+              <a:rPr lang="ar-SA" sz="1700" b="1" dirty="0">
+                <a:latin typeface="Simplified Arabic" panose="02020603050405020304" pitchFamily="18" charset="-78"/>
+              </a:rPr>
+              <a:t>نهاية عصر التخمين الإداري:</a:t>
+            </a:r>
+            <a:r>
+              <a:rPr lang="ar-SA" sz="1700" dirty="0">
+                <a:latin typeface="Simplified Arabic" panose="02020603050405020304" pitchFamily="18" charset="-78"/>
+              </a:rPr>
+              <a:t> القرارات الاستراتيجية والتطويرية الناجحة لم تعد تُبنى على التوقعات، بل تتطلب بيانات دقيقة تعكس احتياجات السوق الحقيقية.</a:t>
+            </a:r>
+          </a:p>
+          <a:p>
+            <a:pPr>
+              <a:lnSpc>
+                <a:spcPct val="150000"/>
+              </a:lnSpc>
+              <a:buFont typeface="Arial" panose="020B0604020202020204" pitchFamily="34" charset="0"/>
+              <a:buChar char="•"/>
+            </a:pPr>
+            <a:r>
+              <a:rPr lang="ar-SA" sz="1700" b="1" dirty="0">
+                <a:latin typeface="Simplified Arabic" panose="02020603050405020304" pitchFamily="18" charset="-78"/>
+              </a:rPr>
+              <a:t>الحاجة لابتكار أدوات ذكية:</a:t>
+            </a:r>
+            <a:r>
+              <a:rPr lang="ar-SA" sz="1700" dirty="0">
+                <a:latin typeface="Simplified Arabic" panose="02020603050405020304" pitchFamily="18" charset="-78"/>
+              </a:rPr>
+              <a:t> مع التطور المتسارع للذكاء الاصطناعي وتقنيات الويب، أصبح من الضروري تجاوز الطرق التقليدية لجمع وتحليل الآراء، لفهم تطلعات الجمهور بطريقة علمية وسريعة.</a:t>
+            </a:r>
+          </a:p>
+          <a:p>
+            <a:pPr>
+              <a:lnSpc>
+                <a:spcPct val="150000"/>
+              </a:lnSpc>
+            </a:pPr>
+            <a:endParaRPr lang="ar-SA" sz="1400" dirty="0">
               <a:latin typeface="Simplified Arabic" panose="02020603050405020304" pitchFamily="18" charset="-78"/>
-              <a:ea typeface="Times New Roman" panose="02020603050405020304" pitchFamily="18" charset="0"/>
-              <a:cs typeface="Simplified Arabic" panose="02020603050405020304" pitchFamily="18" charset="-78"/>
             </a:endParaRPr>
-          </a:p>
-          <a:p>
-            <a:endParaRPr lang="ar-SA" dirty="0"/>
           </a:p>
         </p:txBody>
       </p:sp>
@@ -3808,8 +3862,8 @@
         </p:nvSpPr>
         <p:spPr>
           <a:xfrm>
-            <a:off x="1637522" y="2451617"/>
-            <a:ext cx="9498562" cy="1954766"/>
+            <a:off x="1562877" y="2792739"/>
+            <a:ext cx="9498562" cy="1749197"/>
           </a:xfrm>
           <a:prstGeom prst="rect">
             <a:avLst/>
@@ -3822,81 +3876,63 @@
           </a:bodyPr>
           <a:lstStyle/>
           <a:p>
-            <a:pPr algn="r" rtl="1">
+            <a:pPr>
               <a:lnSpc>
-                <a:spcPct val="107000"/>
+                <a:spcPct val="150000"/>
               </a:lnSpc>
-              <a:spcBef>
-                <a:spcPts val="800"/>
-              </a:spcBef>
-              <a:spcAft>
-                <a:spcPts val="400"/>
-              </a:spcAft>
             </a:pPr>
             <a:r>
               <a:rPr lang="ar-SA" sz="2000" b="1" dirty="0">
                 <a:solidFill>
-                  <a:srgbClr val="2F5496"/>
+                  <a:schemeClr val="accent1"/>
                 </a:solidFill>
-                <a:effectLst/>
-                <a:latin typeface="Calibri Light" panose="020F0302020204030204" pitchFamily="34" charset="0"/>
-                <a:ea typeface="Times New Roman" panose="02020603050405020304" pitchFamily="18" charset="0"/>
-                <a:cs typeface="Times New Roman" panose="02020603050405020304" pitchFamily="18" charset="0"/>
               </a:rPr>
               <a:t>مشكلة البحث</a:t>
             </a:r>
-            <a:endParaRPr lang="en-US" sz="2000" b="1" dirty="0">
+            <a:endParaRPr lang="ar-SA" sz="2000" dirty="0">
               <a:solidFill>
-                <a:srgbClr val="2F5496"/>
+                <a:schemeClr val="accent1"/>
               </a:solidFill>
-              <a:effectLst/>
-              <a:latin typeface="Calibri Light" panose="020F0302020204030204" pitchFamily="34" charset="0"/>
-              <a:ea typeface="Times New Roman" panose="02020603050405020304" pitchFamily="18" charset="0"/>
-              <a:cs typeface="Times New Roman" panose="02020603050405020304" pitchFamily="18" charset="0"/>
             </a:endParaRPr>
           </a:p>
           <a:p>
-            <a:pPr algn="r" rtl="1">
+            <a:pPr>
               <a:lnSpc>
-                <a:spcPct val="107000"/>
+                <a:spcPct val="150000"/>
               </a:lnSpc>
-              <a:spcAft>
-                <a:spcPts val="800"/>
-              </a:spcAft>
+              <a:buFont typeface="Arial" panose="020B0604020202020204" pitchFamily="34" charset="0"/>
+              <a:buChar char="•"/>
             </a:pPr>
             <a:r>
-              <a:rPr lang="ar-SA" sz="1800" b="1" dirty="0">
-                <a:effectLst/>
-                <a:latin typeface="Calibri" panose="020F0502020204030204" pitchFamily="34" charset="0"/>
-                <a:ea typeface="Times New Roman" panose="02020603050405020304" pitchFamily="18" charset="0"/>
-                <a:cs typeface="Simplified Arabic" panose="02020603050405020304" pitchFamily="18" charset="-78"/>
-              </a:rPr>
-              <a:t> </a:t>
-            </a:r>
-            <a:r>
-              <a:rPr lang="ar-SA" sz="1800" dirty="0">
-                <a:effectLst/>
-                <a:latin typeface="Calibri" panose="020F0502020204030204" pitchFamily="34" charset="0"/>
-                <a:ea typeface="Times New Roman" panose="02020603050405020304" pitchFamily="18" charset="0"/>
-                <a:cs typeface="Simplified Arabic" panose="02020603050405020304" pitchFamily="18" charset="-78"/>
-              </a:rPr>
-              <a:t> تكمن المشكلة الأساسية في الطرق التقليدية لجمع الآراء واستطلاعات الرأي (مثل الروابط المفتوحة للاستبيانات) في "عشوائية العينة". عندما تقوم مؤسسة بنشر استبيان لتقييم خدمة معينة، لا يوجد ضامن حقيقي بأن المجيبين هم فعلاً من مستخدمي الخدمة أو ضمن الفئة المستهدفة. هذا الخلل التقني والمنهجي يؤدي إلى جمع بيانات مشوهة أو غير دقيقة. وبناءً عليه، تتخذ الإدارة قرارات استراتيجية مبنية على آراء أشخاص غير معنيين، مما ينتج عنه إهدار للموارد، وفشل في تلبية الاحتياجات الحقيقية للعملاء. إضافة إلى ذلك، فإن التحليل اليدوي للردود النصية يستهلك وقتاً طويلاً ويكون عرضة للتحيز والخطأ البشري</a:t>
-            </a:r>
-            <a:r>
-              <a:rPr lang="en-US" sz="1800" dirty="0">
-                <a:effectLst/>
-                <a:latin typeface="Simplified Arabic" panose="02020603050405020304" pitchFamily="18" charset="-78"/>
-                <a:ea typeface="Times New Roman" panose="02020603050405020304" pitchFamily="18" charset="0"/>
-                <a:cs typeface="Arial" panose="020B0604020202020204" pitchFamily="34" charset="0"/>
-              </a:rPr>
-              <a:t>.</a:t>
-            </a:r>
-            <a:endParaRPr lang="en-US" sz="1800" dirty="0">
-              <a:effectLst/>
-              <a:latin typeface="Calibri" panose="020F0502020204030204" pitchFamily="34" charset="0"/>
-              <a:ea typeface="Times New Roman" panose="02020603050405020304" pitchFamily="18" charset="0"/>
-              <a:cs typeface="Arial" panose="020B0604020202020204" pitchFamily="34" charset="0"/>
-            </a:endParaRPr>
+              <a:rPr lang="ar-SA" dirty="0"/>
+              <a:t>الاعتماد على الروابط المفتوحة يسبب "عشوائية العينة" وجمع بيانات مشوهة.</a:t>
+            </a:r>
+          </a:p>
+          <a:p>
+            <a:pPr>
+              <a:lnSpc>
+                <a:spcPct val="150000"/>
+              </a:lnSpc>
+              <a:buFont typeface="Arial" panose="020B0604020202020204" pitchFamily="34" charset="0"/>
+              <a:buChar char="•"/>
+            </a:pPr>
+            <a:r>
+              <a:rPr lang="ar-SA" dirty="0"/>
+              <a:t>اتخاذ قرارات استراتيجية خاطئة وهدر للموارد بسبب مشاركة أشخاص غير معنيين بالخدمة.</a:t>
+            </a:r>
+          </a:p>
+          <a:p>
+            <a:pPr>
+              <a:lnSpc>
+                <a:spcPct val="150000"/>
+              </a:lnSpc>
+              <a:buFont typeface="Arial" panose="020B0604020202020204" pitchFamily="34" charset="0"/>
+              <a:buChar char="•"/>
+            </a:pPr>
+            <a:r>
+              <a:rPr lang="ar-SA" dirty="0"/>
+              <a:t>التحليل اليدوي للنصوص يستهلك وقتاً طويلاً ويكون عرضة للتحيز البشري.</a:t>
+            </a:r>
           </a:p>
         </p:txBody>
       </p:sp>
@@ -3914,8 +3950,8 @@
         </p:nvSpPr>
         <p:spPr>
           <a:xfrm>
-            <a:off x="1254967" y="4604654"/>
-            <a:ext cx="9806473" cy="1954766"/>
+            <a:off x="1254966" y="4687967"/>
+            <a:ext cx="9806473" cy="1758045"/>
           </a:xfrm>
           <a:prstGeom prst="rect">
             <a:avLst/>
@@ -3928,90 +3964,71 @@
           </a:bodyPr>
           <a:lstStyle/>
           <a:p>
-            <a:pPr algn="r" rtl="1">
+            <a:pPr>
               <a:lnSpc>
-                <a:spcPct val="107000"/>
+                <a:spcPct val="150000"/>
               </a:lnSpc>
-              <a:spcBef>
-                <a:spcPts val="800"/>
-              </a:spcBef>
-              <a:spcAft>
-                <a:spcPts val="400"/>
-              </a:spcAft>
             </a:pPr>
             <a:r>
               <a:rPr lang="ar-SA" sz="2000" b="1" dirty="0">
                 <a:solidFill>
-                  <a:srgbClr val="2F5496"/>
+                  <a:schemeClr val="accent1"/>
                 </a:solidFill>
-                <a:effectLst/>
-                <a:latin typeface="Calibri Light" panose="020F0302020204030204" pitchFamily="34" charset="0"/>
-                <a:ea typeface="Times New Roman" panose="02020603050405020304" pitchFamily="18" charset="0"/>
-                <a:cs typeface="Times New Roman" panose="02020603050405020304" pitchFamily="18" charset="0"/>
               </a:rPr>
-              <a:t>فكرة المشروع </a:t>
-            </a:r>
-            <a:endParaRPr lang="en-US" sz="2000" b="1" dirty="0">
+              <a:t>فكرة المشروع</a:t>
+            </a:r>
+            <a:endParaRPr lang="ar-SA" sz="2000" dirty="0">
               <a:solidFill>
-                <a:srgbClr val="2F5496"/>
+                <a:schemeClr val="accent1"/>
               </a:solidFill>
-              <a:effectLst/>
-              <a:latin typeface="Calibri Light" panose="020F0302020204030204" pitchFamily="34" charset="0"/>
-              <a:ea typeface="Times New Roman" panose="02020603050405020304" pitchFamily="18" charset="0"/>
-              <a:cs typeface="Times New Roman" panose="02020603050405020304" pitchFamily="18" charset="0"/>
             </a:endParaRPr>
           </a:p>
           <a:p>
-            <a:pPr algn="r" rtl="1">
+            <a:pPr>
               <a:lnSpc>
-                <a:spcPct val="107000"/>
+                <a:spcPct val="150000"/>
               </a:lnSpc>
-              <a:spcAft>
-                <a:spcPts val="800"/>
-              </a:spcAft>
+              <a:buFont typeface="Arial" panose="020B0604020202020204" pitchFamily="34" charset="0"/>
+              <a:buChar char="•"/>
             </a:pPr>
             <a:r>
-              <a:rPr lang="ar-SA" sz="1800" dirty="0">
-                <a:effectLst/>
-                <a:latin typeface="Calibri" panose="020F0502020204030204" pitchFamily="34" charset="0"/>
-                <a:ea typeface="Times New Roman" panose="02020603050405020304" pitchFamily="18" charset="0"/>
-                <a:cs typeface="Simplified Arabic" panose="02020603050405020304" pitchFamily="18" charset="-78"/>
-              </a:rPr>
-              <a:t>يقدم هذا المشروع حلاً تقنياً متكاملاً لمعالجة القصور السابق، وذلك من خلال تطوير "منصة استبيانات ثنائية الأطراف" مزودة بمحرك استهداف ذكي. تعتمد الفكرة على إنهاء عشوائية الردود عبر نظام فلترة مسبق؛ حيث لا يُعرض الاستبيان إلا للمستخدمين الذين تتطابق بياناتهم الديموغرافية والسلوكية مع الشروط التي يحددها مقدم الخدمة. ولتعظيم الفائدة، تدمج المنصة تقنيات الذكاء الاصطناعي</a:t>
-            </a:r>
-            <a:r>
-              <a:rPr lang="en-US" sz="1800" dirty="0">
-                <a:effectLst/>
-                <a:latin typeface="Simplified Arabic" panose="02020603050405020304" pitchFamily="18" charset="-78"/>
-                <a:ea typeface="Times New Roman" panose="02020603050405020304" pitchFamily="18" charset="0"/>
-                <a:cs typeface="Arial" panose="020B0604020202020204" pitchFamily="34" charset="0"/>
-              </a:rPr>
-              <a:t> (AI) </a:t>
-            </a:r>
-            <a:r>
-              <a:rPr lang="ar-SA" sz="1800" dirty="0">
-                <a:effectLst/>
-                <a:latin typeface="Calibri" panose="020F0502020204030204" pitchFamily="34" charset="0"/>
-                <a:ea typeface="Times New Roman" panose="02020603050405020304" pitchFamily="18" charset="0"/>
-                <a:cs typeface="Simplified Arabic" panose="02020603050405020304" pitchFamily="18" charset="-78"/>
-              </a:rPr>
-              <a:t>لتحليل الإجابات النصية المفتوحة وتصنيف مشاعر المجيبين آلياً، مما يوفر لمتخذي القرار لوحات تحكم إحصائية دقيقة، سريعة، وموثوقة</a:t>
-            </a:r>
-            <a:r>
-              <a:rPr lang="en-US" sz="1800" dirty="0">
-                <a:effectLst/>
-                <a:latin typeface="Simplified Arabic" panose="02020603050405020304" pitchFamily="18" charset="-78"/>
-                <a:ea typeface="Times New Roman" panose="02020603050405020304" pitchFamily="18" charset="0"/>
-                <a:cs typeface="Arial" panose="020B0604020202020204" pitchFamily="34" charset="0"/>
-              </a:rPr>
-              <a:t>.</a:t>
-            </a:r>
-            <a:endParaRPr lang="en-US" sz="1400" dirty="0">
-              <a:effectLst/>
-              <a:latin typeface="Calibri" panose="020F0502020204030204" pitchFamily="34" charset="0"/>
-              <a:ea typeface="Times New Roman" panose="02020603050405020304" pitchFamily="18" charset="0"/>
-              <a:cs typeface="Arial" panose="020B0604020202020204" pitchFamily="34" charset="0"/>
-            </a:endParaRPr>
+              <a:rPr lang="ar-SA" dirty="0"/>
+              <a:t>تطوير منصة استبيانات "ثنائية الأطراف" مزودة بمحرك استهداف ذكي.</a:t>
+            </a:r>
+          </a:p>
+          <a:p>
+            <a:pPr>
+              <a:lnSpc>
+                <a:spcPct val="150000"/>
+              </a:lnSpc>
+              <a:buFont typeface="Arial" panose="020B0604020202020204" pitchFamily="34" charset="0"/>
+              <a:buChar char="•"/>
+            </a:pPr>
+            <a:r>
+              <a:rPr lang="ar-SA" dirty="0"/>
+              <a:t>فلترة مسبقة تضمن عرض الاستبيان حصراً للمطابقين للشروط الديموغرافية.</a:t>
+            </a:r>
+          </a:p>
+          <a:p>
+            <a:pPr>
+              <a:lnSpc>
+                <a:spcPct val="150000"/>
+              </a:lnSpc>
+              <a:buFont typeface="Arial" panose="020B0604020202020204" pitchFamily="34" charset="0"/>
+              <a:buChar char="•"/>
+            </a:pPr>
+            <a:r>
+              <a:rPr lang="ar-SA" dirty="0"/>
+              <a:t>دمج تقنيات الذكاء الاصطناعي (</a:t>
+            </a:r>
+            <a:r>
+              <a:rPr lang="en-US" dirty="0"/>
+              <a:t>AI</a:t>
+            </a:r>
+            <a:r>
+              <a:rPr lang="ar-SA" dirty="0"/>
+              <a:t>) لتحليل الإجابات المفتوحة وتصنيف المشاعر آلياً.</a:t>
+            </a:r>
           </a:p>
         </p:txBody>
       </p:sp>
@@ -4059,8 +4076,8 @@
         </p:nvSpPr>
         <p:spPr>
           <a:xfrm>
-            <a:off x="483637" y="816047"/>
-            <a:ext cx="11224725" cy="4656275"/>
+            <a:off x="483636" y="85708"/>
+            <a:ext cx="11224725" cy="2224840"/>
           </a:xfrm>
           <a:prstGeom prst="rect">
             <a:avLst/>
@@ -4075,7 +4092,7 @@
           <a:p>
             <a:pPr algn="r" rtl="1">
               <a:lnSpc>
-                <a:spcPct val="107000"/>
+                <a:spcPct val="150000"/>
               </a:lnSpc>
               <a:spcBef>
                 <a:spcPts val="800"/>
@@ -4107,384 +4124,233 @@
             </a:endParaRPr>
           </a:p>
           <a:p>
-            <a:pPr algn="r" rtl="1">
+            <a:pPr>
               <a:lnSpc>
-                <a:spcPct val="107000"/>
+                <a:spcPct val="150000"/>
               </a:lnSpc>
-              <a:spcBef>
-                <a:spcPts val="800"/>
-              </a:spcBef>
-              <a:spcAft>
-                <a:spcPts val="400"/>
-              </a:spcAft>
+              <a:buFont typeface="Arial" panose="020B0604020202020204" pitchFamily="34" charset="0"/>
+              <a:buChar char="•"/>
             </a:pPr>
             <a:r>
-              <a:rPr lang="ar-SA" sz="1800" b="1" kern="0" dirty="0">
+              <a:rPr lang="ar-SA" dirty="0"/>
+              <a:t> بناء بيئة رقمية تربط مقدمي الخدمات بالمستخدمين الفعليين.</a:t>
+            </a:r>
+          </a:p>
+          <a:p>
+            <a:pPr>
+              <a:lnSpc>
+                <a:spcPct val="150000"/>
+              </a:lnSpc>
+              <a:buFont typeface="Arial" panose="020B0604020202020204" pitchFamily="34" charset="0"/>
+              <a:buChar char="•"/>
+            </a:pPr>
+            <a:r>
+              <a:rPr lang="ar-SA" dirty="0"/>
+              <a:t> القضاء على العشوائية عبر محرك الاستهداف </a:t>
+            </a:r>
+            <a:r>
+              <a:rPr lang="en-US" dirty="0"/>
+              <a:t>.(Targeting Engine)</a:t>
+            </a:r>
+          </a:p>
+          <a:p>
+            <a:pPr>
+              <a:lnSpc>
+                <a:spcPct val="150000"/>
+              </a:lnSpc>
+              <a:buFont typeface="Arial" panose="020B0604020202020204" pitchFamily="34" charset="0"/>
+              <a:buChar char="•"/>
+            </a:pPr>
+            <a:r>
+              <a:rPr lang="ar-SA" dirty="0"/>
+              <a:t> أتمتة تحليل النصوص </a:t>
+            </a:r>
+            <a:r>
+              <a:rPr lang="en-US" dirty="0"/>
+              <a:t> (NLP)</a:t>
+            </a:r>
+            <a:r>
+              <a:rPr lang="ar-SA" dirty="0"/>
+              <a:t>لاستخراج التوجهات العامة للجمهور.</a:t>
+            </a:r>
+          </a:p>
+          <a:p>
+            <a:pPr>
+              <a:lnSpc>
+                <a:spcPct val="150000"/>
+              </a:lnSpc>
+              <a:buFont typeface="Arial" panose="020B0604020202020204" pitchFamily="34" charset="0"/>
+              <a:buChar char="•"/>
+            </a:pPr>
+            <a:r>
+              <a:rPr lang="ar-SA" dirty="0"/>
+              <a:t> توفير لوحات تحكم </a:t>
+            </a:r>
+            <a:r>
+              <a:rPr lang="en-US" dirty="0"/>
+              <a:t> (Dashboards) </a:t>
+            </a:r>
+            <a:r>
+              <a:rPr lang="ar-SA" dirty="0"/>
+              <a:t>تفاعلية لدعم اتخاذ القرارات.</a:t>
+            </a:r>
+          </a:p>
+        </p:txBody>
+      </p:sp>
+      <p:sp>
+        <p:nvSpPr>
+          <p:cNvPr id="2" name="مربع نص 1">
+            <a:extLst>
+              <a:ext uri="{FF2B5EF4-FFF2-40B4-BE49-F238E27FC236}">
+                <a16:creationId xmlns:a16="http://schemas.microsoft.com/office/drawing/2014/main" id="{F7F6FF3F-29D5-9A78-3217-E0B14D6F14C4}"/>
+              </a:ext>
+            </a:extLst>
+          </p:cNvPr>
+          <p:cNvSpPr txBox="1"/>
+          <p:nvPr/>
+        </p:nvSpPr>
+        <p:spPr>
+          <a:xfrm>
+            <a:off x="483636" y="2286000"/>
+            <a:ext cx="11224725" cy="2542876"/>
+          </a:xfrm>
+          <a:prstGeom prst="rect">
+            <a:avLst/>
+          </a:prstGeom>
+          <a:noFill/>
+        </p:spPr>
+        <p:txBody>
+          <a:bodyPr wrap="square">
+            <a:spAutoFit/>
+          </a:bodyPr>
+          <a:lstStyle/>
+          <a:p>
+            <a:pPr>
+              <a:lnSpc>
+                <a:spcPct val="150000"/>
+              </a:lnSpc>
+            </a:pPr>
+            <a:r>
+              <a:rPr lang="ar-SA" b="1" dirty="0">
                 <a:solidFill>
-                  <a:srgbClr val="2F5496"/>
+                  <a:schemeClr val="accent1"/>
                 </a:solidFill>
-                <a:effectLst/>
-                <a:latin typeface="Calibri" panose="020F0502020204030204" pitchFamily="34" charset="0"/>
-                <a:ea typeface="Times New Roman" panose="02020603050405020304" pitchFamily="18" charset="0"/>
-                <a:cs typeface="Times New Roman" panose="02020603050405020304" pitchFamily="18" charset="0"/>
               </a:rPr>
-              <a:t>تطوير منصة ثنائية الأطراف</a:t>
-            </a:r>
-            <a:r>
-              <a:rPr lang="en-US" sz="1800" b="1" dirty="0">
-                <a:solidFill>
-                  <a:srgbClr val="2F5496"/>
-                </a:solidFill>
-                <a:effectLst/>
-                <a:latin typeface="Simplified Arabic" panose="02020603050405020304" pitchFamily="18" charset="-78"/>
-                <a:ea typeface="Times New Roman" panose="02020603050405020304" pitchFamily="18" charset="0"/>
-                <a:cs typeface="Times New Roman" panose="02020603050405020304" pitchFamily="18" charset="0"/>
-              </a:rPr>
-              <a:t>: </a:t>
-            </a:r>
-            <a:endParaRPr lang="en-US" sz="1800" b="1" dirty="0">
+              <a:t>نطاق المشروع</a:t>
+            </a:r>
+            <a:endParaRPr lang="en-US" dirty="0">
               <a:solidFill>
-                <a:srgbClr val="2F5496"/>
+                <a:schemeClr val="accent1"/>
               </a:solidFill>
-              <a:effectLst/>
-              <a:latin typeface="Calibri" panose="020F0502020204030204" pitchFamily="34" charset="0"/>
-              <a:ea typeface="Times New Roman" panose="02020603050405020304" pitchFamily="18" charset="0"/>
-              <a:cs typeface="Times New Roman" panose="02020603050405020304" pitchFamily="18" charset="0"/>
             </a:endParaRPr>
           </a:p>
           <a:p>
-            <a:pPr marL="457200" algn="r" rtl="1">
+            <a:pPr>
               <a:lnSpc>
-                <a:spcPct val="107000"/>
+                <a:spcPct val="150000"/>
               </a:lnSpc>
-              <a:spcAft>
-                <a:spcPts val="800"/>
-              </a:spcAft>
+              <a:buFont typeface="Arial" panose="020B0604020202020204" pitchFamily="34" charset="0"/>
+              <a:buChar char="•"/>
             </a:pPr>
             <a:r>
-              <a:rPr lang="ar-SA" sz="1800" dirty="0">
-                <a:effectLst/>
-                <a:latin typeface="Calibri" panose="020F0502020204030204" pitchFamily="34" charset="0"/>
-                <a:ea typeface="Times New Roman" panose="02020603050405020304" pitchFamily="18" charset="0"/>
-                <a:cs typeface="Simplified Arabic" panose="02020603050405020304" pitchFamily="18" charset="-78"/>
-              </a:rPr>
-              <a:t>بناء بيئة رقمية متكاملة تربط بين مقدمي الخدمات (الباحثين عن التغذية الراجعة) والمستخدمين المستهدفين بشكل مباشر</a:t>
-            </a:r>
-            <a:r>
-              <a:rPr lang="en-US" sz="1800" dirty="0">
-                <a:effectLst/>
-                <a:latin typeface="Simplified Arabic" panose="02020603050405020304" pitchFamily="18" charset="-78"/>
-                <a:ea typeface="Times New Roman" panose="02020603050405020304" pitchFamily="18" charset="0"/>
-                <a:cs typeface="Arial" panose="020B0604020202020204" pitchFamily="34" charset="0"/>
-              </a:rPr>
-              <a:t>.</a:t>
-            </a:r>
-            <a:endParaRPr lang="en-US" sz="1400" dirty="0">
-              <a:effectLst/>
-              <a:latin typeface="Calibri" panose="020F0502020204030204" pitchFamily="34" charset="0"/>
-              <a:ea typeface="Times New Roman" panose="02020603050405020304" pitchFamily="18" charset="0"/>
-              <a:cs typeface="Arial" panose="020B0604020202020204" pitchFamily="34" charset="0"/>
-            </a:endParaRPr>
-          </a:p>
-          <a:p>
-            <a:pPr algn="r">
+              <a:rPr lang="ar-SA" b="1" dirty="0"/>
+              <a:t>الفئات المستهدفة:</a:t>
+            </a:r>
+            <a:r>
+              <a:rPr lang="ar-SA" dirty="0"/>
+              <a:t> يخدم النظام فئتين: "مقدمي الخدمات" (لإنشاء الاستبيانات الموجهة) و"المستخدمين المسجلين" بملفات تعريفية (كعينة دقيقة للإجابة).</a:t>
+            </a:r>
+          </a:p>
+          <a:p>
+            <a:pPr>
               <a:lnSpc>
-                <a:spcPct val="107000"/>
+                <a:spcPct val="150000"/>
               </a:lnSpc>
-              <a:spcBef>
-                <a:spcPts val="800"/>
-              </a:spcBef>
-              <a:spcAft>
-                <a:spcPts val="400"/>
-              </a:spcAft>
+              <a:buFont typeface="Arial" panose="020B0604020202020204" pitchFamily="34" charset="0"/>
+              <a:buChar char="•"/>
             </a:pPr>
             <a:r>
-              <a:rPr lang="ar-SA" sz="1800" b="1" kern="0" dirty="0">
-                <a:solidFill>
-                  <a:srgbClr val="2F5496"/>
-                </a:solidFill>
-                <a:effectLst/>
-                <a:latin typeface="Calibri" panose="020F0502020204030204" pitchFamily="34" charset="0"/>
-                <a:ea typeface="Times New Roman" panose="02020603050405020304" pitchFamily="18" charset="0"/>
-                <a:cs typeface="Times New Roman" panose="02020603050405020304" pitchFamily="18" charset="0"/>
-              </a:rPr>
-              <a:t>القضاء على عشوائية العينات</a:t>
-            </a:r>
-            <a:r>
-              <a:rPr lang="en-US" sz="1800" b="1" kern="0" dirty="0">
-                <a:solidFill>
-                  <a:srgbClr val="2F5496"/>
-                </a:solidFill>
-                <a:effectLst/>
-                <a:latin typeface="Calibri" panose="020F0502020204030204" pitchFamily="34" charset="0"/>
-                <a:ea typeface="Times New Roman" panose="02020603050405020304" pitchFamily="18" charset="0"/>
-                <a:cs typeface="Times New Roman" panose="02020603050405020304" pitchFamily="18" charset="0"/>
-              </a:rPr>
-              <a:t>:</a:t>
-            </a:r>
-            <a:r>
-              <a:rPr lang="en-US" sz="1800" b="1" dirty="0">
-                <a:solidFill>
-                  <a:srgbClr val="2F5496"/>
-                </a:solidFill>
-                <a:effectLst/>
-                <a:latin typeface="Simplified Arabic" panose="02020603050405020304" pitchFamily="18" charset="-78"/>
-                <a:ea typeface="Times New Roman" panose="02020603050405020304" pitchFamily="18" charset="0"/>
-                <a:cs typeface="Times New Roman" panose="02020603050405020304" pitchFamily="18" charset="0"/>
-              </a:rPr>
-              <a:t> </a:t>
-            </a:r>
-            <a:endParaRPr lang="en-US" sz="1800" b="1" dirty="0">
-              <a:solidFill>
-                <a:srgbClr val="2F5496"/>
-              </a:solidFill>
-              <a:effectLst/>
-              <a:latin typeface="Calibri" panose="020F0502020204030204" pitchFamily="34" charset="0"/>
-              <a:ea typeface="Times New Roman" panose="02020603050405020304" pitchFamily="18" charset="0"/>
-              <a:cs typeface="Times New Roman" panose="02020603050405020304" pitchFamily="18" charset="0"/>
-            </a:endParaRPr>
-          </a:p>
-          <a:p>
-            <a:pPr marL="457200" algn="r" rtl="1">
+              <a:rPr lang="ar-SA" b="1" dirty="0"/>
+              <a:t>النطاق الوظيفي:</a:t>
+            </a:r>
+            <a:r>
+              <a:rPr lang="ar-SA" dirty="0"/>
+              <a:t> يشمل إدارة الحسابات، أداة بناء الاستبيانات المفلترة، تحليل المشاعر عبر الذكاء الاصطناعي </a:t>
+            </a:r>
+            <a:r>
+              <a:rPr lang="en-US" dirty="0"/>
+              <a:t>(NLP)، </a:t>
+            </a:r>
+            <a:r>
+              <a:rPr lang="ar-SA" dirty="0"/>
+              <a:t>وتوفير لوحات تحكم </a:t>
+            </a:r>
+            <a:r>
+              <a:rPr lang="en-US" dirty="0"/>
+              <a:t>   (Dashboards) </a:t>
+            </a:r>
+            <a:r>
+              <a:rPr lang="ar-SA" dirty="0"/>
+              <a:t> إحصائية.</a:t>
+            </a:r>
+          </a:p>
+          <a:p>
+            <a:pPr>
               <a:lnSpc>
-                <a:spcPct val="107000"/>
+                <a:spcPct val="150000"/>
               </a:lnSpc>
-              <a:spcAft>
-                <a:spcPts val="800"/>
-              </a:spcAft>
+              <a:buFont typeface="Arial" panose="020B0604020202020204" pitchFamily="34" charset="0"/>
+              <a:buChar char="•"/>
             </a:pPr>
             <a:r>
-              <a:rPr lang="ar-SA" sz="1800" dirty="0">
-                <a:effectLst/>
-                <a:latin typeface="Calibri" panose="020F0502020204030204" pitchFamily="34" charset="0"/>
-                <a:ea typeface="Times New Roman" panose="02020603050405020304" pitchFamily="18" charset="0"/>
-                <a:cs typeface="Simplified Arabic" panose="02020603050405020304" pitchFamily="18" charset="-78"/>
-              </a:rPr>
-              <a:t>برمجة محرك استهداف</a:t>
-            </a:r>
-            <a:r>
-              <a:rPr lang="en-US" sz="1800" dirty="0">
-                <a:effectLst/>
-                <a:latin typeface="Simplified Arabic" panose="02020603050405020304" pitchFamily="18" charset="-78"/>
-                <a:ea typeface="Times New Roman" panose="02020603050405020304" pitchFamily="18" charset="0"/>
-                <a:cs typeface="Arial" panose="020B0604020202020204" pitchFamily="34" charset="0"/>
-              </a:rPr>
-              <a:t> (Targeting Engine) </a:t>
-            </a:r>
-            <a:r>
-              <a:rPr lang="ar-SA" sz="1800" dirty="0">
-                <a:effectLst/>
-                <a:latin typeface="Calibri" panose="020F0502020204030204" pitchFamily="34" charset="0"/>
-                <a:ea typeface="Times New Roman" panose="02020603050405020304" pitchFamily="18" charset="0"/>
-                <a:cs typeface="Simplified Arabic" panose="02020603050405020304" pitchFamily="18" charset="-78"/>
-              </a:rPr>
-              <a:t>يضمن توجيه الاستبيانات وعرضها فقط للفئات التي تطابق شروط الفلترة الديموغرافية (مثل العمر، التخصص) التي يحددها منشئ الاستبيان</a:t>
-            </a:r>
-            <a:r>
-              <a:rPr lang="en-US" sz="1800" dirty="0">
-                <a:effectLst/>
-                <a:latin typeface="Simplified Arabic" panose="02020603050405020304" pitchFamily="18" charset="-78"/>
-                <a:ea typeface="Times New Roman" panose="02020603050405020304" pitchFamily="18" charset="0"/>
-                <a:cs typeface="Arial" panose="020B0604020202020204" pitchFamily="34" charset="0"/>
-              </a:rPr>
-              <a:t>.</a:t>
-            </a:r>
-            <a:endParaRPr lang="en-US" sz="1400" dirty="0">
-              <a:effectLst/>
-              <a:latin typeface="Calibri" panose="020F0502020204030204" pitchFamily="34" charset="0"/>
-              <a:ea typeface="Times New Roman" panose="02020603050405020304" pitchFamily="18" charset="0"/>
-              <a:cs typeface="Arial" panose="020B0604020202020204" pitchFamily="34" charset="0"/>
-            </a:endParaRPr>
-          </a:p>
-          <a:p>
-            <a:pPr algn="r" rtl="1">
+              <a:rPr lang="ar-SA" b="1" dirty="0"/>
+              <a:t>النطاق التقني:</a:t>
+            </a:r>
+            <a:r>
+              <a:rPr lang="ar-SA" dirty="0"/>
+              <a:t> بناء النظام كـ "تطبيق ويب" (</a:t>
+            </a:r>
+            <a:r>
+              <a:rPr lang="en-US" dirty="0"/>
+              <a:t>Web App) </a:t>
+            </a:r>
+            <a:r>
+              <a:rPr lang="ar-SA" dirty="0"/>
+              <a:t>متجاوب، والاعتماد على نماذج ذكاء اصطناعي مدربة مسبقاً (</a:t>
+            </a:r>
+            <a:r>
+              <a:rPr lang="en-US" dirty="0"/>
+              <a:t>APIs) </a:t>
+            </a:r>
+            <a:r>
+              <a:rPr lang="ar-SA" dirty="0"/>
+              <a:t>لتحليل النصوص.</a:t>
+            </a:r>
+          </a:p>
+          <a:p>
+            <a:pPr>
               <a:lnSpc>
-                <a:spcPct val="107000"/>
+                <a:spcPct val="150000"/>
               </a:lnSpc>
-              <a:spcBef>
-                <a:spcPts val="800"/>
-              </a:spcBef>
-              <a:spcAft>
-                <a:spcPts val="400"/>
-              </a:spcAft>
+              <a:buFont typeface="Arial" panose="020B0604020202020204" pitchFamily="34" charset="0"/>
+              <a:buChar char="•"/>
             </a:pPr>
             <a:r>
-              <a:rPr lang="ar-SA" sz="1800" b="1" kern="0" dirty="0">
-                <a:solidFill>
-                  <a:srgbClr val="2F5496"/>
-                </a:solidFill>
-                <a:effectLst/>
-                <a:latin typeface="Calibri" panose="020F0502020204030204" pitchFamily="34" charset="0"/>
-                <a:ea typeface="Times New Roman" panose="02020603050405020304" pitchFamily="18" charset="0"/>
-                <a:cs typeface="Times New Roman" panose="02020603050405020304" pitchFamily="18" charset="0"/>
-              </a:rPr>
-              <a:t>أتمتة تحليل البيانات النصية</a:t>
-            </a:r>
-            <a:endParaRPr lang="en-US" sz="1800" b="1" dirty="0">
-              <a:solidFill>
-                <a:srgbClr val="2F5496"/>
-              </a:solidFill>
-              <a:effectLst/>
-              <a:latin typeface="Calibri" panose="020F0502020204030204" pitchFamily="34" charset="0"/>
-              <a:ea typeface="Times New Roman" panose="02020603050405020304" pitchFamily="18" charset="0"/>
-              <a:cs typeface="Times New Roman" panose="02020603050405020304" pitchFamily="18" charset="0"/>
-            </a:endParaRPr>
-          </a:p>
-          <a:p>
-            <a:pPr marL="457200" algn="r" rtl="1">
-              <a:lnSpc>
-                <a:spcPct val="107000"/>
-              </a:lnSpc>
-              <a:spcAft>
-                <a:spcPts val="800"/>
-              </a:spcAft>
-            </a:pPr>
-            <a:r>
-              <a:rPr lang="ar-SA" sz="1800" dirty="0">
-                <a:effectLst/>
-                <a:latin typeface="Calibri" panose="020F0502020204030204" pitchFamily="34" charset="0"/>
-                <a:ea typeface="Times New Roman" panose="02020603050405020304" pitchFamily="18" charset="0"/>
-                <a:cs typeface="Simplified Arabic" panose="02020603050405020304" pitchFamily="18" charset="-78"/>
-              </a:rPr>
-              <a:t>دمج نماذج معالجة اللغات الطبيعية</a:t>
-            </a:r>
-            <a:r>
-              <a:rPr lang="en-US" sz="1800" dirty="0">
-                <a:effectLst/>
-                <a:latin typeface="Simplified Arabic" panose="02020603050405020304" pitchFamily="18" charset="-78"/>
-                <a:ea typeface="Times New Roman" panose="02020603050405020304" pitchFamily="18" charset="0"/>
-                <a:cs typeface="Arial" panose="020B0604020202020204" pitchFamily="34" charset="0"/>
-              </a:rPr>
-              <a:t> (NLP) </a:t>
-            </a:r>
-            <a:r>
-              <a:rPr lang="ar-SA" sz="1800" dirty="0">
-                <a:effectLst/>
-                <a:latin typeface="Calibri" panose="020F0502020204030204" pitchFamily="34" charset="0"/>
-                <a:ea typeface="Times New Roman" panose="02020603050405020304" pitchFamily="18" charset="0"/>
-                <a:cs typeface="Simplified Arabic" panose="02020603050405020304" pitchFamily="18" charset="-78"/>
-              </a:rPr>
-              <a:t>والذكاء الاصطناعي لتحليل المشاعر</a:t>
-            </a:r>
-            <a:r>
-              <a:rPr lang="en-US" sz="1800" dirty="0">
-                <a:effectLst/>
-                <a:latin typeface="Simplified Arabic" panose="02020603050405020304" pitchFamily="18" charset="-78"/>
-                <a:ea typeface="Times New Roman" panose="02020603050405020304" pitchFamily="18" charset="0"/>
-                <a:cs typeface="Arial" panose="020B0604020202020204" pitchFamily="34" charset="0"/>
-              </a:rPr>
-              <a:t> (Sentiment Analysis) </a:t>
-            </a:r>
-            <a:r>
-              <a:rPr lang="ar-SA" sz="1800" dirty="0">
-                <a:effectLst/>
-                <a:latin typeface="Calibri" panose="020F0502020204030204" pitchFamily="34" charset="0"/>
-                <a:ea typeface="Times New Roman" panose="02020603050405020304" pitchFamily="18" charset="0"/>
-                <a:cs typeface="Simplified Arabic" panose="02020603050405020304" pitchFamily="18" charset="-78"/>
-              </a:rPr>
-              <a:t>في الردود المفتوحة، وتصنيفها آلياً لاستخراج التوجهات العامة</a:t>
-            </a:r>
-            <a:r>
-              <a:rPr lang="en-US" sz="1800" dirty="0">
-                <a:effectLst/>
-                <a:latin typeface="Simplified Arabic" panose="02020603050405020304" pitchFamily="18" charset="-78"/>
-                <a:ea typeface="Times New Roman" panose="02020603050405020304" pitchFamily="18" charset="0"/>
-                <a:cs typeface="Arial" panose="020B0604020202020204" pitchFamily="34" charset="0"/>
-              </a:rPr>
-              <a:t>.</a:t>
-            </a:r>
-            <a:endParaRPr lang="en-US" sz="1400" dirty="0">
-              <a:effectLst/>
-              <a:latin typeface="Calibri" panose="020F0502020204030204" pitchFamily="34" charset="0"/>
-              <a:ea typeface="Times New Roman" panose="02020603050405020304" pitchFamily="18" charset="0"/>
-              <a:cs typeface="Arial" panose="020B0604020202020204" pitchFamily="34" charset="0"/>
-            </a:endParaRPr>
-          </a:p>
-          <a:p>
-            <a:pPr algn="r" rtl="1">
-              <a:lnSpc>
-                <a:spcPct val="107000"/>
-              </a:lnSpc>
-              <a:spcBef>
-                <a:spcPts val="800"/>
-              </a:spcBef>
-              <a:spcAft>
-                <a:spcPts val="400"/>
-              </a:spcAft>
-            </a:pPr>
-            <a:r>
-              <a:rPr lang="ar-SA" sz="1800" b="1" kern="0" dirty="0">
-                <a:solidFill>
-                  <a:srgbClr val="2F5496"/>
-                </a:solidFill>
-                <a:effectLst/>
-                <a:latin typeface="Calibri" panose="020F0502020204030204" pitchFamily="34" charset="0"/>
-                <a:ea typeface="Times New Roman" panose="02020603050405020304" pitchFamily="18" charset="0"/>
-                <a:cs typeface="Times New Roman" panose="02020603050405020304" pitchFamily="18" charset="0"/>
-              </a:rPr>
-              <a:t>دعم اتخاذ القرار</a:t>
-            </a:r>
-            <a:endParaRPr lang="en-US" sz="1800" b="1" dirty="0">
-              <a:solidFill>
-                <a:srgbClr val="2F5496"/>
-              </a:solidFill>
-              <a:effectLst/>
-              <a:latin typeface="Calibri" panose="020F0502020204030204" pitchFamily="34" charset="0"/>
-              <a:ea typeface="Times New Roman" panose="02020603050405020304" pitchFamily="18" charset="0"/>
-              <a:cs typeface="Times New Roman" panose="02020603050405020304" pitchFamily="18" charset="0"/>
-            </a:endParaRPr>
-          </a:p>
-          <a:p>
-            <a:pPr marL="457200" algn="r" rtl="1">
-              <a:lnSpc>
-                <a:spcPct val="107000"/>
-              </a:lnSpc>
-              <a:spcAft>
-                <a:spcPts val="800"/>
-              </a:spcAft>
-            </a:pPr>
-            <a:r>
-              <a:rPr lang="ar-SA" sz="1800" dirty="0">
-                <a:effectLst/>
-                <a:latin typeface="Calibri" panose="020F0502020204030204" pitchFamily="34" charset="0"/>
-                <a:ea typeface="Times New Roman" panose="02020603050405020304" pitchFamily="18" charset="0"/>
-                <a:cs typeface="Simplified Arabic" panose="02020603050405020304" pitchFamily="18" charset="-78"/>
-              </a:rPr>
-              <a:t>توفير لوحات تحكم</a:t>
-            </a:r>
-            <a:r>
-              <a:rPr lang="en-US" sz="1800" dirty="0">
-                <a:effectLst/>
-                <a:latin typeface="Simplified Arabic" panose="02020603050405020304" pitchFamily="18" charset="-78"/>
-                <a:ea typeface="Times New Roman" panose="02020603050405020304" pitchFamily="18" charset="0"/>
-                <a:cs typeface="Arial" panose="020B0604020202020204" pitchFamily="34" charset="0"/>
-              </a:rPr>
-              <a:t> (Dashboards) </a:t>
-            </a:r>
-            <a:r>
-              <a:rPr lang="ar-SA" sz="1800" dirty="0">
-                <a:effectLst/>
-                <a:latin typeface="Calibri" panose="020F0502020204030204" pitchFamily="34" charset="0"/>
-                <a:ea typeface="Times New Roman" panose="02020603050405020304" pitchFamily="18" charset="0"/>
-                <a:cs typeface="Simplified Arabic" panose="02020603050405020304" pitchFamily="18" charset="-78"/>
-              </a:rPr>
-              <a:t>إحصائية تفاعلية تعرض نتائج التحليل بصورة رسومية مبسطة، مما يساعد المؤسسات على اتخاذ قرارات تطويرية مبنية على بيانات دقيقة</a:t>
-            </a:r>
-            <a:r>
-              <a:rPr lang="en-US" sz="1800" dirty="0">
-                <a:effectLst/>
-                <a:latin typeface="Simplified Arabic" panose="02020603050405020304" pitchFamily="18" charset="-78"/>
-                <a:ea typeface="Times New Roman" panose="02020603050405020304" pitchFamily="18" charset="0"/>
-                <a:cs typeface="Arial" panose="020B0604020202020204" pitchFamily="34" charset="0"/>
-              </a:rPr>
-              <a:t>.</a:t>
-            </a:r>
-            <a:endParaRPr lang="en-US" sz="1400" dirty="0">
-              <a:effectLst/>
-              <a:latin typeface="Calibri" panose="020F0502020204030204" pitchFamily="34" charset="0"/>
-              <a:ea typeface="Times New Roman" panose="02020603050405020304" pitchFamily="18" charset="0"/>
-              <a:cs typeface="Arial" panose="020B0604020202020204" pitchFamily="34" charset="0"/>
-            </a:endParaRPr>
+              <a:rPr lang="ar-SA" b="1" dirty="0"/>
+              <a:t>خارج النطاق:</a:t>
+            </a:r>
+            <a:r>
+              <a:rPr lang="ar-SA" dirty="0"/>
+              <a:t> النظام لا يشمل برمجة تطبيق خاص للهواتف الذكية (</a:t>
+            </a:r>
+            <a:r>
+              <a:rPr lang="en-US" dirty="0"/>
+              <a:t>Mobile App)، </a:t>
+            </a:r>
+            <a:r>
+              <a:rPr lang="ar-SA" dirty="0"/>
+              <a:t>ولن يتم تدريب نماذج لغوية للذكاء الاصطناعي من الصفر.</a:t>
+            </a:r>
           </a:p>
         </p:txBody>
       </p:sp>
@@ -4520,10 +4386,10 @@
       </p:grpSpPr>
       <p:sp>
         <p:nvSpPr>
-          <p:cNvPr id="3" name="مربع نص 2">
-            <a:extLst>
-              <a:ext uri="{FF2B5EF4-FFF2-40B4-BE49-F238E27FC236}">
-                <a16:creationId xmlns:a16="http://schemas.microsoft.com/office/drawing/2014/main" id="{D0A885CA-A40A-6F43-1AD2-03CB75D99083}"/>
+          <p:cNvPr id="4" name="مربع نص 3">
+            <a:extLst>
+              <a:ext uri="{FF2B5EF4-FFF2-40B4-BE49-F238E27FC236}">
+                <a16:creationId xmlns:a16="http://schemas.microsoft.com/office/drawing/2014/main" id="{624C8765-612E-7110-7F73-5DB30F0569D7}"/>
               </a:ext>
             </a:extLst>
           </p:cNvPr>
@@ -4532,8 +4398,8 @@
         </p:nvSpPr>
         <p:spPr>
           <a:xfrm>
-            <a:off x="0" y="0"/>
-            <a:ext cx="12229322" cy="6858000"/>
+            <a:off x="1324946" y="0"/>
+            <a:ext cx="10207690" cy="3826689"/>
           </a:xfrm>
           <a:prstGeom prst="rect">
             <a:avLst/>
@@ -4546,820 +4412,116 @@
           </a:bodyPr>
           <a:lstStyle/>
           <a:p>
-            <a:pPr algn="r" rtl="1">
+            <a:pPr>
               <a:lnSpc>
-                <a:spcPct val="107000"/>
+                <a:spcPct val="150000"/>
               </a:lnSpc>
-              <a:spcBef>
-                <a:spcPts val="800"/>
-              </a:spcBef>
-              <a:spcAft>
-                <a:spcPts val="400"/>
-              </a:spcAft>
             </a:pPr>
             <a:r>
-              <a:rPr lang="ar-SA" b="1" dirty="0">
+              <a:rPr lang="ar-SA" sz="2000" b="1" dirty="0">
                 <a:solidFill>
-                  <a:srgbClr val="2F5496"/>
+                  <a:schemeClr val="accent1"/>
                 </a:solidFill>
-                <a:effectLst/>
-                <a:latin typeface="Calibri Light" panose="020F0302020204030204" pitchFamily="34" charset="0"/>
-                <a:ea typeface="Times New Roman" panose="02020603050405020304" pitchFamily="18" charset="0"/>
-                <a:cs typeface="Times New Roman" panose="02020603050405020304" pitchFamily="18" charset="0"/>
               </a:rPr>
-              <a:t>نطاق المشروع </a:t>
-            </a:r>
-            <a:endParaRPr lang="en-US" b="1" dirty="0">
+              <a:t>المفاهيم الأساسية </a:t>
+            </a:r>
+            <a:endParaRPr lang="en-US" sz="2000" dirty="0">
               <a:solidFill>
-                <a:srgbClr val="2F5496"/>
+                <a:schemeClr val="accent1"/>
               </a:solidFill>
-              <a:effectLst/>
-              <a:latin typeface="Calibri Light" panose="020F0302020204030204" pitchFamily="34" charset="0"/>
-              <a:ea typeface="Times New Roman" panose="02020603050405020304" pitchFamily="18" charset="0"/>
-              <a:cs typeface="Times New Roman" panose="02020603050405020304" pitchFamily="18" charset="0"/>
             </a:endParaRPr>
           </a:p>
           <a:p>
-            <a:pPr algn="r" rtl="1">
+            <a:pPr>
               <a:lnSpc>
-                <a:spcPct val="107000"/>
+                <a:spcPct val="150000"/>
               </a:lnSpc>
-              <a:spcBef>
-                <a:spcPts val="800"/>
-              </a:spcBef>
-              <a:spcAft>
-                <a:spcPts val="400"/>
-              </a:spcAft>
+              <a:buFont typeface="Arial" panose="020B0604020202020204" pitchFamily="34" charset="0"/>
+              <a:buChar char="•"/>
             </a:pPr>
             <a:r>
-              <a:rPr lang="ar-SA" sz="1600" b="1" dirty="0">
-                <a:solidFill>
-                  <a:srgbClr val="2F5496"/>
-                </a:solidFill>
-                <a:effectLst/>
-                <a:latin typeface="Times New Roman" panose="02020603050405020304" pitchFamily="18" charset="0"/>
-                <a:ea typeface="Times New Roman" panose="02020603050405020304" pitchFamily="18" charset="0"/>
-                <a:cs typeface="Times New Roman" panose="02020603050405020304" pitchFamily="18" charset="0"/>
-              </a:rPr>
-              <a:t>الفئات المستهدفة </a:t>
-            </a:r>
-            <a:r>
-              <a:rPr lang="en-US" sz="1600" b="1" dirty="0">
-                <a:solidFill>
-                  <a:srgbClr val="2F5496"/>
-                </a:solidFill>
-                <a:effectLst/>
-                <a:latin typeface="Calibri" panose="020F0502020204030204" pitchFamily="34" charset="0"/>
-                <a:ea typeface="Times New Roman" panose="02020603050405020304" pitchFamily="18" charset="0"/>
-                <a:cs typeface="Times New Roman" panose="02020603050405020304" pitchFamily="18" charset="0"/>
-              </a:rPr>
-              <a:t>(Target Audience)</a:t>
-            </a:r>
-          </a:p>
-          <a:p>
-            <a:pPr marL="342900" lvl="0" indent="-342900" algn="r" rtl="1">
+              <a:rPr lang="ar-SA" b="1" dirty="0"/>
+              <a:t>المنصات ثنائية الأطراف </a:t>
+            </a:r>
+            <a:r>
+              <a:rPr lang="en-US" b="1" dirty="0"/>
+              <a:t>Two-Sided Platforms)</a:t>
+            </a:r>
+            <a:r>
+              <a:rPr lang="ar-SA" b="1" dirty="0"/>
+              <a:t>): </a:t>
+            </a:r>
+            <a:r>
+              <a:rPr lang="ar-SA" dirty="0"/>
+              <a:t>بيئات رقمية تربط "صناع القرار" مع "المجيبين المستهدفين" مباشرة، وتعتمد على تأثير الشبكة لزيادة قيمتها.</a:t>
+            </a:r>
+          </a:p>
+          <a:p>
+            <a:pPr>
               <a:lnSpc>
-                <a:spcPct val="107000"/>
+                <a:spcPct val="150000"/>
               </a:lnSpc>
-              <a:spcAft>
-                <a:spcPts val="800"/>
-              </a:spcAft>
-              <a:buSzPts val="1000"/>
-              <a:buFont typeface="Symbol" panose="05050102010706020507" pitchFamily="18" charset="2"/>
-              <a:buChar char=""/>
-              <a:tabLst>
-                <a:tab pos="457200" algn="l"/>
-              </a:tabLst>
+              <a:buFont typeface="Arial" panose="020B0604020202020204" pitchFamily="34" charset="0"/>
+              <a:buChar char="•"/>
             </a:pPr>
             <a:r>
-              <a:rPr lang="ar-SA" sz="1600" dirty="0">
-                <a:effectLst/>
-                <a:latin typeface="Calibri" panose="020F0502020204030204" pitchFamily="34" charset="0"/>
-                <a:ea typeface="Times New Roman" panose="02020603050405020304" pitchFamily="18" charset="0"/>
-                <a:cs typeface="Simplified Arabic" panose="02020603050405020304" pitchFamily="18" charset="-78"/>
-              </a:rPr>
-              <a:t>مقدمو الخدمات</a:t>
-            </a:r>
-            <a:r>
-              <a:rPr lang="en-US" sz="1600" dirty="0">
-                <a:effectLst/>
-                <a:latin typeface="Simplified Arabic" panose="02020603050405020304" pitchFamily="18" charset="-78"/>
-                <a:ea typeface="Times New Roman" panose="02020603050405020304" pitchFamily="18" charset="0"/>
-                <a:cs typeface="Arial" panose="020B0604020202020204" pitchFamily="34" charset="0"/>
-              </a:rPr>
-              <a:t> (Service Providers): </a:t>
-            </a:r>
-            <a:r>
-              <a:rPr lang="ar-SA" sz="1600" dirty="0">
-                <a:effectLst/>
-                <a:latin typeface="Calibri" panose="020F0502020204030204" pitchFamily="34" charset="0"/>
-                <a:ea typeface="Times New Roman" panose="02020603050405020304" pitchFamily="18" charset="0"/>
-                <a:cs typeface="Simplified Arabic" panose="02020603050405020304" pitchFamily="18" charset="-78"/>
-              </a:rPr>
-              <a:t>المؤسسات، الشركات، أو الباحثون الذين يحتاجون إلى إنشاء استبيانات موجهة للحصول على تغذية راجعة دقيقة</a:t>
-            </a:r>
-            <a:r>
-              <a:rPr lang="en-US" sz="1600" dirty="0">
-                <a:effectLst/>
-                <a:latin typeface="Simplified Arabic" panose="02020603050405020304" pitchFamily="18" charset="-78"/>
-                <a:ea typeface="Times New Roman" panose="02020603050405020304" pitchFamily="18" charset="0"/>
-                <a:cs typeface="Arial" panose="020B0604020202020204" pitchFamily="34" charset="0"/>
-              </a:rPr>
-              <a:t>.</a:t>
-            </a:r>
-            <a:endParaRPr lang="en-US" sz="1200" dirty="0">
-              <a:effectLst/>
-              <a:latin typeface="Calibri" panose="020F0502020204030204" pitchFamily="34" charset="0"/>
-              <a:ea typeface="Times New Roman" panose="02020603050405020304" pitchFamily="18" charset="0"/>
-              <a:cs typeface="Arial" panose="020B0604020202020204" pitchFamily="34" charset="0"/>
-            </a:endParaRPr>
-          </a:p>
-          <a:p>
-            <a:pPr marL="342900" lvl="0" indent="-342900" algn="r" rtl="1">
+              <a:rPr lang="ar-SA" b="1" dirty="0"/>
+              <a:t>الاستهداف الديموغرافي والفلترة الآلية:</a:t>
+            </a:r>
+            <a:r>
+              <a:rPr lang="ar-SA" dirty="0"/>
+              <a:t> استخدام خوارزميات مطابقة لمنع "تحيز العينة" عبر توجيه الاستبيان للشريحة المطابقة فقط (عبر حقول الملف الشخصي).</a:t>
+            </a:r>
+          </a:p>
+          <a:p>
+            <a:pPr>
               <a:lnSpc>
-                <a:spcPct val="107000"/>
+                <a:spcPct val="150000"/>
               </a:lnSpc>
-              <a:spcAft>
-                <a:spcPts val="800"/>
-              </a:spcAft>
-              <a:buSzPts val="1000"/>
-              <a:buFont typeface="Symbol" panose="05050102010706020507" pitchFamily="18" charset="2"/>
-              <a:buChar char=""/>
-              <a:tabLst>
-                <a:tab pos="457200" algn="l"/>
-              </a:tabLst>
+              <a:buFont typeface="Arial" panose="020B0604020202020204" pitchFamily="34" charset="0"/>
+              <a:buChar char="•"/>
             </a:pPr>
             <a:r>
-              <a:rPr lang="ar-SA" sz="1600" dirty="0">
-                <a:effectLst/>
-                <a:latin typeface="Calibri" panose="020F0502020204030204" pitchFamily="34" charset="0"/>
-                <a:ea typeface="Times New Roman" panose="02020603050405020304" pitchFamily="18" charset="0"/>
-                <a:cs typeface="Simplified Arabic" panose="02020603050405020304" pitchFamily="18" charset="-78"/>
-              </a:rPr>
-              <a:t>المستخدمون المسجلون</a:t>
-            </a:r>
-            <a:r>
-              <a:rPr lang="en-US" sz="1600" dirty="0">
-                <a:effectLst/>
-                <a:latin typeface="Simplified Arabic" panose="02020603050405020304" pitchFamily="18" charset="-78"/>
-                <a:ea typeface="Times New Roman" panose="02020603050405020304" pitchFamily="18" charset="0"/>
-                <a:cs typeface="Arial" panose="020B0604020202020204" pitchFamily="34" charset="0"/>
-              </a:rPr>
-              <a:t> (Respondents): </a:t>
-            </a:r>
-            <a:r>
-              <a:rPr lang="ar-SA" sz="1600" dirty="0">
-                <a:effectLst/>
-                <a:latin typeface="Calibri" panose="020F0502020204030204" pitchFamily="34" charset="0"/>
-                <a:ea typeface="Times New Roman" panose="02020603050405020304" pitchFamily="18" charset="0"/>
-                <a:cs typeface="Simplified Arabic" panose="02020603050405020304" pitchFamily="18" charset="-78"/>
-              </a:rPr>
-              <a:t>الأفراد الذين يمتلكون حسابات شخصية وملفات تعريفية</a:t>
-            </a:r>
-            <a:r>
-              <a:rPr lang="en-US" sz="1600" dirty="0">
-                <a:effectLst/>
-                <a:latin typeface="Simplified Arabic" panose="02020603050405020304" pitchFamily="18" charset="-78"/>
-                <a:ea typeface="Times New Roman" panose="02020603050405020304" pitchFamily="18" charset="0"/>
-                <a:cs typeface="Arial" panose="020B0604020202020204" pitchFamily="34" charset="0"/>
-              </a:rPr>
-              <a:t> (Profiles) </a:t>
-            </a:r>
-            <a:r>
-              <a:rPr lang="ar-SA" sz="1600" dirty="0">
-                <a:effectLst/>
-                <a:latin typeface="Calibri" panose="020F0502020204030204" pitchFamily="34" charset="0"/>
-                <a:ea typeface="Times New Roman" panose="02020603050405020304" pitchFamily="18" charset="0"/>
-                <a:cs typeface="Simplified Arabic" panose="02020603050405020304" pitchFamily="18" charset="-78"/>
-              </a:rPr>
-              <a:t>تتضمن بياناتهم الديموغرافية والمهنية، والذين يشكلون العينة المستهدفة للإجابة على الاستبيانات</a:t>
-            </a:r>
-            <a:r>
-              <a:rPr lang="en-US" sz="1600" dirty="0">
-                <a:effectLst/>
-                <a:latin typeface="Simplified Arabic" panose="02020603050405020304" pitchFamily="18" charset="-78"/>
-                <a:ea typeface="Times New Roman" panose="02020603050405020304" pitchFamily="18" charset="0"/>
-                <a:cs typeface="Arial" panose="020B0604020202020204" pitchFamily="34" charset="0"/>
-              </a:rPr>
-              <a:t>.</a:t>
-            </a:r>
-            <a:endParaRPr lang="en-US" sz="1200" dirty="0">
-              <a:effectLst/>
-              <a:latin typeface="Calibri" panose="020F0502020204030204" pitchFamily="34" charset="0"/>
-              <a:ea typeface="Times New Roman" panose="02020603050405020304" pitchFamily="18" charset="0"/>
-              <a:cs typeface="Arial" panose="020B0604020202020204" pitchFamily="34" charset="0"/>
-            </a:endParaRPr>
-          </a:p>
-          <a:p>
-            <a:pPr algn="r" rtl="1">
+              <a:rPr lang="ar-SA" b="1" dirty="0"/>
+              <a:t>معالجة اللغات الطبيعية (</a:t>
+            </a:r>
+            <a:r>
+              <a:rPr lang="en-US" b="1" dirty="0"/>
+              <a:t> (NLP</a:t>
+            </a:r>
+            <a:r>
+              <a:rPr lang="ar-SA" dirty="0"/>
+              <a:t>تقنية ذكاء اصطناعي (</a:t>
+            </a:r>
+            <a:r>
+              <a:rPr lang="en-US" dirty="0"/>
+              <a:t> (AI</a:t>
+            </a:r>
+            <a:r>
+              <a:rPr lang="ar-SA" dirty="0"/>
+              <a:t>لتحويل "البيانات غير المهيكلة" (كالإجابات النصية) إلى بيانات كمية قابلة للقياس والتحليل.</a:t>
+            </a:r>
+          </a:p>
+          <a:p>
+            <a:pPr>
               <a:lnSpc>
-                <a:spcPct val="107000"/>
+                <a:spcPct val="150000"/>
               </a:lnSpc>
-              <a:spcBef>
-                <a:spcPts val="800"/>
-              </a:spcBef>
-              <a:spcAft>
-                <a:spcPts val="400"/>
-              </a:spcAft>
+              <a:buFont typeface="Arial" panose="020B0604020202020204" pitchFamily="34" charset="0"/>
+              <a:buChar char="•"/>
             </a:pPr>
             <a:r>
-              <a:rPr lang="ar-SA" sz="1600" b="1" dirty="0">
-                <a:solidFill>
-                  <a:srgbClr val="2F5496"/>
-                </a:solidFill>
-                <a:effectLst/>
-                <a:latin typeface="Calibri" panose="020F0502020204030204" pitchFamily="34" charset="0"/>
-                <a:ea typeface="Times New Roman" panose="02020603050405020304" pitchFamily="18" charset="0"/>
-                <a:cs typeface="Times New Roman" panose="02020603050405020304" pitchFamily="18" charset="0"/>
-              </a:rPr>
-              <a:t>النطاق الوظيفي </a:t>
-            </a:r>
-            <a:r>
-              <a:rPr lang="en-US" sz="1600" b="1" dirty="0">
-                <a:solidFill>
-                  <a:srgbClr val="2F5496"/>
-                </a:solidFill>
-                <a:effectLst/>
-                <a:latin typeface="Calibri" panose="020F0502020204030204" pitchFamily="34" charset="0"/>
-                <a:ea typeface="Times New Roman" panose="02020603050405020304" pitchFamily="18" charset="0"/>
-                <a:cs typeface="Times New Roman" panose="02020603050405020304" pitchFamily="18" charset="0"/>
-              </a:rPr>
-              <a:t>(Functional Scope)</a:t>
-            </a:r>
-          </a:p>
-          <a:p>
-            <a:pPr marL="342900" lvl="0" indent="-342900" algn="r" rtl="1">
-              <a:lnSpc>
-                <a:spcPct val="107000"/>
-              </a:lnSpc>
-              <a:spcAft>
-                <a:spcPts val="800"/>
-              </a:spcAft>
-              <a:buSzPts val="1000"/>
-              <a:buFont typeface="Symbol" panose="05050102010706020507" pitchFamily="18" charset="2"/>
-              <a:buChar char=""/>
-              <a:tabLst>
-                <a:tab pos="457200" algn="l"/>
-              </a:tabLst>
-            </a:pPr>
-            <a:r>
-              <a:rPr lang="ar-SA" sz="1600" dirty="0">
-                <a:effectLst/>
-                <a:latin typeface="Calibri" panose="020F0502020204030204" pitchFamily="34" charset="0"/>
-                <a:ea typeface="Times New Roman" panose="02020603050405020304" pitchFamily="18" charset="0"/>
-                <a:cs typeface="Simplified Arabic" panose="02020603050405020304" pitchFamily="18" charset="-78"/>
-              </a:rPr>
-              <a:t>إدارة الحسابات والملفات الشخصية</a:t>
-            </a:r>
-            <a:r>
-              <a:rPr lang="en-US" sz="1600" dirty="0">
-                <a:effectLst/>
-                <a:latin typeface="Simplified Arabic" panose="02020603050405020304" pitchFamily="18" charset="-78"/>
-                <a:ea typeface="Times New Roman" panose="02020603050405020304" pitchFamily="18" charset="0"/>
-                <a:cs typeface="Arial" panose="020B0604020202020204" pitchFamily="34" charset="0"/>
-              </a:rPr>
-              <a:t>: </a:t>
-            </a:r>
-            <a:r>
-              <a:rPr lang="ar-SA" sz="1600" dirty="0">
-                <a:effectLst/>
-                <a:latin typeface="Calibri" panose="020F0502020204030204" pitchFamily="34" charset="0"/>
-                <a:ea typeface="Times New Roman" panose="02020603050405020304" pitchFamily="18" charset="0"/>
-                <a:cs typeface="Simplified Arabic" panose="02020603050405020304" pitchFamily="18" charset="-78"/>
-              </a:rPr>
-              <a:t>توفير نظام تسجيل دخول آمن يتيح للمستخدمين إدخال وتحديث بياناتهم الديموغرافية (مثل العمر، التخصص، والاهتمامات) التي سيُبنى عليها محرك الفلترة</a:t>
-            </a:r>
-            <a:r>
-              <a:rPr lang="en-US" sz="1600" dirty="0">
-                <a:effectLst/>
-                <a:latin typeface="Simplified Arabic" panose="02020603050405020304" pitchFamily="18" charset="-78"/>
-                <a:ea typeface="Times New Roman" panose="02020603050405020304" pitchFamily="18" charset="0"/>
-                <a:cs typeface="Arial" panose="020B0604020202020204" pitchFamily="34" charset="0"/>
-              </a:rPr>
-              <a:t>.</a:t>
-            </a:r>
-            <a:endParaRPr lang="en-US" sz="1200" dirty="0">
-              <a:effectLst/>
-              <a:latin typeface="Calibri" panose="020F0502020204030204" pitchFamily="34" charset="0"/>
-              <a:ea typeface="Times New Roman" panose="02020603050405020304" pitchFamily="18" charset="0"/>
-              <a:cs typeface="Arial" panose="020B0604020202020204" pitchFamily="34" charset="0"/>
-            </a:endParaRPr>
-          </a:p>
-          <a:p>
-            <a:pPr marL="342900" lvl="0" indent="-342900" algn="r" rtl="1">
-              <a:lnSpc>
-                <a:spcPct val="107000"/>
-              </a:lnSpc>
-              <a:spcAft>
-                <a:spcPts val="800"/>
-              </a:spcAft>
-              <a:buSzPts val="1000"/>
-              <a:buFont typeface="Symbol" panose="05050102010706020507" pitchFamily="18" charset="2"/>
-              <a:buChar char=""/>
-              <a:tabLst>
-                <a:tab pos="457200" algn="l"/>
-              </a:tabLst>
-            </a:pPr>
-            <a:r>
-              <a:rPr lang="ar-SA" sz="1600" dirty="0">
-                <a:effectLst/>
-                <a:latin typeface="Calibri" panose="020F0502020204030204" pitchFamily="34" charset="0"/>
-                <a:ea typeface="Times New Roman" panose="02020603050405020304" pitchFamily="18" charset="0"/>
-                <a:cs typeface="Simplified Arabic" panose="02020603050405020304" pitchFamily="18" charset="-78"/>
-              </a:rPr>
-              <a:t>أداة بناء الاستبيانات ومحرك الاستهداف</a:t>
-            </a:r>
-            <a:r>
-              <a:rPr lang="en-US" sz="1600" dirty="0">
-                <a:effectLst/>
-                <a:latin typeface="Simplified Arabic" panose="02020603050405020304" pitchFamily="18" charset="-78"/>
-                <a:ea typeface="Times New Roman" panose="02020603050405020304" pitchFamily="18" charset="0"/>
-                <a:cs typeface="Arial" panose="020B0604020202020204" pitchFamily="34" charset="0"/>
-              </a:rPr>
-              <a:t>: </a:t>
-            </a:r>
-            <a:r>
-              <a:rPr lang="ar-SA" sz="1600" dirty="0">
-                <a:effectLst/>
-                <a:latin typeface="Calibri" panose="020F0502020204030204" pitchFamily="34" charset="0"/>
-                <a:ea typeface="Times New Roman" panose="02020603050405020304" pitchFamily="18" charset="0"/>
-                <a:cs typeface="Simplified Arabic" panose="02020603050405020304" pitchFamily="18" charset="-78"/>
-              </a:rPr>
-              <a:t>واجهة تتيح لمقدمي الخدمات صياغة الأسئلة وتحديد شروط الظهور (الفلترة) بدقة، بحيث يقوم النظام آلياً بمطابقة هذه الشروط مع قاعدة بيانات المستخدمين وعرض الاستبيان للفئة المطابقة فقط</a:t>
-            </a:r>
-            <a:r>
-              <a:rPr lang="en-US" sz="1600" dirty="0">
-                <a:effectLst/>
-                <a:latin typeface="Simplified Arabic" panose="02020603050405020304" pitchFamily="18" charset="-78"/>
-                <a:ea typeface="Times New Roman" panose="02020603050405020304" pitchFamily="18" charset="0"/>
-                <a:cs typeface="Arial" panose="020B0604020202020204" pitchFamily="34" charset="0"/>
-              </a:rPr>
-              <a:t>.</a:t>
-            </a:r>
-            <a:endParaRPr lang="en-US" sz="1200" dirty="0">
-              <a:effectLst/>
-              <a:latin typeface="Calibri" panose="020F0502020204030204" pitchFamily="34" charset="0"/>
-              <a:ea typeface="Times New Roman" panose="02020603050405020304" pitchFamily="18" charset="0"/>
-              <a:cs typeface="Arial" panose="020B0604020202020204" pitchFamily="34" charset="0"/>
-            </a:endParaRPr>
-          </a:p>
-          <a:p>
-            <a:pPr marL="342900" lvl="0" indent="-342900" algn="r" rtl="1">
-              <a:lnSpc>
-                <a:spcPct val="107000"/>
-              </a:lnSpc>
-              <a:spcAft>
-                <a:spcPts val="800"/>
-              </a:spcAft>
-              <a:buSzPts val="1000"/>
-              <a:buFont typeface="Symbol" panose="05050102010706020507" pitchFamily="18" charset="2"/>
-              <a:buChar char=""/>
-              <a:tabLst>
-                <a:tab pos="457200" algn="l"/>
-              </a:tabLst>
-            </a:pPr>
-            <a:r>
-              <a:rPr lang="ar-SA" sz="1600" dirty="0">
-                <a:effectLst/>
-                <a:latin typeface="Calibri" panose="020F0502020204030204" pitchFamily="34" charset="0"/>
-                <a:ea typeface="Times New Roman" panose="02020603050405020304" pitchFamily="18" charset="0"/>
-                <a:cs typeface="Simplified Arabic" panose="02020603050405020304" pitchFamily="18" charset="-78"/>
-              </a:rPr>
-              <a:t>تحليل البيانات المدعوم بالذكاء الاصطناعي</a:t>
-            </a:r>
-            <a:r>
-              <a:rPr lang="en-US" sz="1600" dirty="0">
-                <a:effectLst/>
-                <a:latin typeface="Simplified Arabic" panose="02020603050405020304" pitchFamily="18" charset="-78"/>
-                <a:ea typeface="Times New Roman" panose="02020603050405020304" pitchFamily="18" charset="0"/>
-                <a:cs typeface="Arial" panose="020B0604020202020204" pitchFamily="34" charset="0"/>
-              </a:rPr>
-              <a:t>: </a:t>
-            </a:r>
-            <a:r>
-              <a:rPr lang="ar-SA" sz="1600" dirty="0">
-                <a:effectLst/>
-                <a:latin typeface="Calibri" panose="020F0502020204030204" pitchFamily="34" charset="0"/>
-                <a:ea typeface="Times New Roman" panose="02020603050405020304" pitchFamily="18" charset="0"/>
-                <a:cs typeface="Simplified Arabic" panose="02020603050405020304" pitchFamily="18" charset="-78"/>
-              </a:rPr>
-              <a:t>معالجة الإجابات النصية المفتوحة باستخدام تقنيات معالجة اللغات الطبيعية</a:t>
-            </a:r>
-            <a:r>
-              <a:rPr lang="en-US" sz="1600" dirty="0">
-                <a:effectLst/>
-                <a:latin typeface="Simplified Arabic" panose="02020603050405020304" pitchFamily="18" charset="-78"/>
-                <a:ea typeface="Times New Roman" panose="02020603050405020304" pitchFamily="18" charset="0"/>
-                <a:cs typeface="Arial" panose="020B0604020202020204" pitchFamily="34" charset="0"/>
-              </a:rPr>
-              <a:t> (NLP) </a:t>
-            </a:r>
-            <a:r>
-              <a:rPr lang="ar-SA" sz="1600" dirty="0">
-                <a:effectLst/>
-                <a:latin typeface="Calibri" panose="020F0502020204030204" pitchFamily="34" charset="0"/>
-                <a:ea typeface="Times New Roman" panose="02020603050405020304" pitchFamily="18" charset="0"/>
-                <a:cs typeface="Simplified Arabic" panose="02020603050405020304" pitchFamily="18" charset="-78"/>
-              </a:rPr>
-              <a:t>لتصنيفها آلياً إلى مشاعر (إيجابية، سلبية، محايدة) واستخراج التوجهات العامة</a:t>
-            </a:r>
-            <a:r>
-              <a:rPr lang="en-US" sz="1600" dirty="0">
-                <a:effectLst/>
-                <a:latin typeface="Simplified Arabic" panose="02020603050405020304" pitchFamily="18" charset="-78"/>
-                <a:ea typeface="Times New Roman" panose="02020603050405020304" pitchFamily="18" charset="0"/>
-                <a:cs typeface="Arial" panose="020B0604020202020204" pitchFamily="34" charset="0"/>
-              </a:rPr>
-              <a:t>.</a:t>
-            </a:r>
-            <a:endParaRPr lang="en-US" sz="1200" dirty="0">
-              <a:effectLst/>
-              <a:latin typeface="Calibri" panose="020F0502020204030204" pitchFamily="34" charset="0"/>
-              <a:ea typeface="Times New Roman" panose="02020603050405020304" pitchFamily="18" charset="0"/>
-              <a:cs typeface="Arial" panose="020B0604020202020204" pitchFamily="34" charset="0"/>
-            </a:endParaRPr>
-          </a:p>
-          <a:p>
-            <a:pPr marL="342900" lvl="0" indent="-342900" algn="r" rtl="1">
-              <a:lnSpc>
-                <a:spcPct val="107000"/>
-              </a:lnSpc>
-              <a:spcAft>
-                <a:spcPts val="800"/>
-              </a:spcAft>
-              <a:buSzPts val="1000"/>
-              <a:buFont typeface="Symbol" panose="05050102010706020507" pitchFamily="18" charset="2"/>
-              <a:buChar char=""/>
-              <a:tabLst>
-                <a:tab pos="457200" algn="l"/>
-              </a:tabLst>
-            </a:pPr>
-            <a:r>
-              <a:rPr lang="ar-SA" sz="1600" dirty="0">
-                <a:effectLst/>
-                <a:latin typeface="Calibri" panose="020F0502020204030204" pitchFamily="34" charset="0"/>
-                <a:ea typeface="Times New Roman" panose="02020603050405020304" pitchFamily="18" charset="0"/>
-                <a:cs typeface="Simplified Arabic" panose="02020603050405020304" pitchFamily="18" charset="-78"/>
-              </a:rPr>
-              <a:t>لوحات التحكم الإحصائية</a:t>
-            </a:r>
-            <a:r>
-              <a:rPr lang="en-US" sz="1600" dirty="0">
-                <a:effectLst/>
-                <a:latin typeface="Simplified Arabic" panose="02020603050405020304" pitchFamily="18" charset="-78"/>
-                <a:ea typeface="Times New Roman" panose="02020603050405020304" pitchFamily="18" charset="0"/>
-                <a:cs typeface="Arial" panose="020B0604020202020204" pitchFamily="34" charset="0"/>
-              </a:rPr>
-              <a:t> (Dashboards): </a:t>
-            </a:r>
-            <a:r>
-              <a:rPr lang="ar-SA" sz="1600" dirty="0">
-                <a:effectLst/>
-                <a:latin typeface="Calibri" panose="020F0502020204030204" pitchFamily="34" charset="0"/>
-                <a:ea typeface="Times New Roman" panose="02020603050405020304" pitchFamily="18" charset="0"/>
-                <a:cs typeface="Simplified Arabic" panose="02020603050405020304" pitchFamily="18" charset="-78"/>
-              </a:rPr>
-              <a:t>عرض نتائج التحليل والاستبيانات بشكل رسومي وتفاعلي يسهل على متخذي القرار قراءتها واستيعابها</a:t>
-            </a:r>
-            <a:r>
-              <a:rPr lang="en-US" sz="1600" dirty="0">
-                <a:effectLst/>
-                <a:latin typeface="Simplified Arabic" panose="02020603050405020304" pitchFamily="18" charset="-78"/>
-                <a:ea typeface="Times New Roman" panose="02020603050405020304" pitchFamily="18" charset="0"/>
-                <a:cs typeface="Arial" panose="020B0604020202020204" pitchFamily="34" charset="0"/>
-              </a:rPr>
-              <a:t>.</a:t>
-            </a:r>
-            <a:endParaRPr lang="en-US" sz="1200" dirty="0">
-              <a:effectLst/>
-              <a:latin typeface="Calibri" panose="020F0502020204030204" pitchFamily="34" charset="0"/>
-              <a:ea typeface="Times New Roman" panose="02020603050405020304" pitchFamily="18" charset="0"/>
-              <a:cs typeface="Arial" panose="020B0604020202020204" pitchFamily="34" charset="0"/>
-            </a:endParaRPr>
-          </a:p>
-          <a:p>
-            <a:pPr algn="r" rtl="1">
-              <a:lnSpc>
-                <a:spcPct val="107000"/>
-              </a:lnSpc>
-              <a:spcBef>
-                <a:spcPts val="800"/>
-              </a:spcBef>
-              <a:spcAft>
-                <a:spcPts val="400"/>
-              </a:spcAft>
-            </a:pPr>
-            <a:r>
-              <a:rPr lang="ar-SA" sz="1600" b="1" dirty="0">
-                <a:solidFill>
-                  <a:srgbClr val="2F5496"/>
-                </a:solidFill>
-                <a:effectLst/>
-                <a:latin typeface="Times New Roman" panose="02020603050405020304" pitchFamily="18" charset="0"/>
-                <a:ea typeface="Times New Roman" panose="02020603050405020304" pitchFamily="18" charset="0"/>
-                <a:cs typeface="Times New Roman" panose="02020603050405020304" pitchFamily="18" charset="0"/>
-              </a:rPr>
-              <a:t>النطاق التقني</a:t>
-            </a:r>
-            <a:r>
-              <a:rPr lang="en-US" sz="1600" b="1" dirty="0">
-                <a:solidFill>
-                  <a:srgbClr val="2F5496"/>
-                </a:solidFill>
-                <a:effectLst/>
-                <a:latin typeface="Calibri" panose="020F0502020204030204" pitchFamily="34" charset="0"/>
-                <a:ea typeface="Times New Roman" panose="02020603050405020304" pitchFamily="18" charset="0"/>
-                <a:cs typeface="Times New Roman" panose="02020603050405020304" pitchFamily="18" charset="0"/>
-              </a:rPr>
-              <a:t> (Technical Scope) </a:t>
-            </a:r>
-          </a:p>
-          <a:p>
-            <a:pPr marL="342900" lvl="0" indent="-342900" algn="r" rtl="1">
-              <a:lnSpc>
-                <a:spcPct val="107000"/>
-              </a:lnSpc>
-              <a:spcAft>
-                <a:spcPts val="800"/>
-              </a:spcAft>
-              <a:buSzPts val="1000"/>
-              <a:buFont typeface="Symbol" panose="05050102010706020507" pitchFamily="18" charset="2"/>
-              <a:buChar char=""/>
-              <a:tabLst>
-                <a:tab pos="457200" algn="l"/>
-              </a:tabLst>
-            </a:pPr>
-            <a:r>
-              <a:rPr lang="ar-SA" sz="1600" dirty="0">
-                <a:effectLst/>
-                <a:latin typeface="Calibri" panose="020F0502020204030204" pitchFamily="34" charset="0"/>
-                <a:ea typeface="Times New Roman" panose="02020603050405020304" pitchFamily="18" charset="0"/>
-                <a:cs typeface="Simplified Arabic" panose="02020603050405020304" pitchFamily="18" charset="-78"/>
-              </a:rPr>
-              <a:t>سيتم تطوير النظام كتطبيق ويب</a:t>
-            </a:r>
-            <a:r>
-              <a:rPr lang="en-US" sz="1600" dirty="0">
-                <a:effectLst/>
-                <a:latin typeface="Simplified Arabic" panose="02020603050405020304" pitchFamily="18" charset="-78"/>
-                <a:ea typeface="Times New Roman" panose="02020603050405020304" pitchFamily="18" charset="0"/>
-                <a:cs typeface="Arial" panose="020B0604020202020204" pitchFamily="34" charset="0"/>
-              </a:rPr>
-              <a:t> (Web Application) </a:t>
-            </a:r>
-            <a:r>
-              <a:rPr lang="ar-SA" sz="1600" dirty="0">
-                <a:effectLst/>
-                <a:latin typeface="Calibri" panose="020F0502020204030204" pitchFamily="34" charset="0"/>
-                <a:ea typeface="Times New Roman" panose="02020603050405020304" pitchFamily="18" charset="0"/>
-                <a:cs typeface="Simplified Arabic" panose="02020603050405020304" pitchFamily="18" charset="-78"/>
-              </a:rPr>
-              <a:t>لضمان سهولة الوصول إليه عبر المتصفحات المختلفة</a:t>
-            </a:r>
-            <a:r>
-              <a:rPr lang="en-US" sz="1600" dirty="0">
-                <a:effectLst/>
-                <a:latin typeface="Simplified Arabic" panose="02020603050405020304" pitchFamily="18" charset="-78"/>
-                <a:ea typeface="Times New Roman" panose="02020603050405020304" pitchFamily="18" charset="0"/>
-                <a:cs typeface="Arial" panose="020B0604020202020204" pitchFamily="34" charset="0"/>
-              </a:rPr>
-              <a:t>.</a:t>
-            </a:r>
-            <a:endParaRPr lang="en-US" sz="1200" dirty="0">
-              <a:effectLst/>
-              <a:latin typeface="Calibri" panose="020F0502020204030204" pitchFamily="34" charset="0"/>
-              <a:ea typeface="Times New Roman" panose="02020603050405020304" pitchFamily="18" charset="0"/>
-              <a:cs typeface="Arial" panose="020B0604020202020204" pitchFamily="34" charset="0"/>
-            </a:endParaRPr>
-          </a:p>
-          <a:p>
-            <a:pPr marL="342900" lvl="0" indent="-342900" algn="r" rtl="1">
-              <a:lnSpc>
-                <a:spcPct val="107000"/>
-              </a:lnSpc>
-              <a:spcAft>
-                <a:spcPts val="800"/>
-              </a:spcAft>
-              <a:buSzPts val="1000"/>
-              <a:buFont typeface="Symbol" panose="05050102010706020507" pitchFamily="18" charset="2"/>
-              <a:buChar char=""/>
-              <a:tabLst>
-                <a:tab pos="457200" algn="l"/>
-              </a:tabLst>
-            </a:pPr>
-            <a:r>
-              <a:rPr lang="ar-SA" sz="1600" dirty="0">
-                <a:effectLst/>
-                <a:latin typeface="Calibri" panose="020F0502020204030204" pitchFamily="34" charset="0"/>
-                <a:ea typeface="Times New Roman" panose="02020603050405020304" pitchFamily="18" charset="0"/>
-                <a:cs typeface="Simplified Arabic" panose="02020603050405020304" pitchFamily="18" charset="-78"/>
-              </a:rPr>
-              <a:t>سيتم الاعتماد على نماذج ذكاء اصطناعي مدربة مسبقاً</a:t>
-            </a:r>
-            <a:r>
-              <a:rPr lang="en-US" sz="1600" dirty="0">
-                <a:effectLst/>
-                <a:latin typeface="Simplified Arabic" panose="02020603050405020304" pitchFamily="18" charset="-78"/>
-                <a:ea typeface="Times New Roman" panose="02020603050405020304" pitchFamily="18" charset="0"/>
-                <a:cs typeface="Arial" panose="020B0604020202020204" pitchFamily="34" charset="0"/>
-              </a:rPr>
-              <a:t> (Pre-trained Models) </a:t>
-            </a:r>
-            <a:r>
-              <a:rPr lang="ar-SA" sz="1600" dirty="0">
-                <a:effectLst/>
-                <a:latin typeface="Calibri" panose="020F0502020204030204" pitchFamily="34" charset="0"/>
-                <a:ea typeface="Times New Roman" panose="02020603050405020304" pitchFamily="18" charset="0"/>
-                <a:cs typeface="Simplified Arabic" panose="02020603050405020304" pitchFamily="18" charset="-78"/>
-              </a:rPr>
-              <a:t>أو واجهات برمجة تطبيقات متخصصة</a:t>
-            </a:r>
-            <a:r>
-              <a:rPr lang="en-US" sz="1600" dirty="0">
-                <a:effectLst/>
-                <a:latin typeface="Simplified Arabic" panose="02020603050405020304" pitchFamily="18" charset="-78"/>
-                <a:ea typeface="Times New Roman" panose="02020603050405020304" pitchFamily="18" charset="0"/>
-                <a:cs typeface="Arial" panose="020B0604020202020204" pitchFamily="34" charset="0"/>
-              </a:rPr>
-              <a:t> (APIs) </a:t>
-            </a:r>
-            <a:r>
-              <a:rPr lang="ar-SA" sz="1600" dirty="0">
-                <a:effectLst/>
-                <a:latin typeface="Calibri" panose="020F0502020204030204" pitchFamily="34" charset="0"/>
-                <a:ea typeface="Times New Roman" panose="02020603050405020304" pitchFamily="18" charset="0"/>
-                <a:cs typeface="Simplified Arabic" panose="02020603050405020304" pitchFamily="18" charset="-78"/>
-              </a:rPr>
-              <a:t>لتنفيذ مهام تحليل المشاعر</a:t>
-            </a:r>
-            <a:r>
-              <a:rPr lang="en-US" sz="1600" dirty="0">
-                <a:effectLst/>
-                <a:latin typeface="Simplified Arabic" panose="02020603050405020304" pitchFamily="18" charset="-78"/>
-                <a:ea typeface="Times New Roman" panose="02020603050405020304" pitchFamily="18" charset="0"/>
-                <a:cs typeface="Arial" panose="020B0604020202020204" pitchFamily="34" charset="0"/>
-              </a:rPr>
-              <a:t>.</a:t>
-            </a:r>
-            <a:endParaRPr lang="en-US" sz="1200" dirty="0">
-              <a:effectLst/>
-              <a:latin typeface="Calibri" panose="020F0502020204030204" pitchFamily="34" charset="0"/>
-              <a:ea typeface="Times New Roman" panose="02020603050405020304" pitchFamily="18" charset="0"/>
-              <a:cs typeface="Arial" panose="020B0604020202020204" pitchFamily="34" charset="0"/>
-            </a:endParaRPr>
-          </a:p>
-          <a:p>
-            <a:pPr algn="r" rtl="1">
-              <a:lnSpc>
-                <a:spcPct val="107000"/>
-              </a:lnSpc>
-              <a:spcBef>
-                <a:spcPts val="800"/>
-              </a:spcBef>
-              <a:spcAft>
-                <a:spcPts val="400"/>
-              </a:spcAft>
-            </a:pPr>
-            <a:r>
-              <a:rPr lang="ar-SA" sz="1600" b="1" dirty="0">
-                <a:solidFill>
-                  <a:srgbClr val="2F5496"/>
-                </a:solidFill>
-                <a:effectLst/>
-                <a:latin typeface="Times New Roman" panose="02020603050405020304" pitchFamily="18" charset="0"/>
-                <a:ea typeface="Times New Roman" panose="02020603050405020304" pitchFamily="18" charset="0"/>
-                <a:cs typeface="Times New Roman" panose="02020603050405020304" pitchFamily="18" charset="0"/>
-              </a:rPr>
-              <a:t>خارج النطاق</a:t>
-            </a:r>
-            <a:r>
-              <a:rPr lang="en-US" sz="1600" b="1" dirty="0">
-                <a:solidFill>
-                  <a:srgbClr val="2F5496"/>
-                </a:solidFill>
-                <a:effectLst/>
-                <a:latin typeface="Calibri" panose="020F0502020204030204" pitchFamily="34" charset="0"/>
-                <a:ea typeface="Times New Roman" panose="02020603050405020304" pitchFamily="18" charset="0"/>
-                <a:cs typeface="Times New Roman" panose="02020603050405020304" pitchFamily="18" charset="0"/>
-              </a:rPr>
-              <a:t> (Out of Scope) </a:t>
-            </a:r>
-          </a:p>
-          <a:p>
-            <a:pPr marL="342900" lvl="0" indent="-342900" algn="r" rtl="1">
-              <a:lnSpc>
-                <a:spcPct val="107000"/>
-              </a:lnSpc>
-              <a:spcAft>
-                <a:spcPts val="800"/>
-              </a:spcAft>
-              <a:buSzPts val="1000"/>
-              <a:buFont typeface="Symbol" panose="05050102010706020507" pitchFamily="18" charset="2"/>
-              <a:buChar char=""/>
-              <a:tabLst>
-                <a:tab pos="457200" algn="l"/>
-              </a:tabLst>
-            </a:pPr>
-            <a:r>
-              <a:rPr lang="ar-SA" sz="1600" dirty="0">
-                <a:effectLst/>
-                <a:latin typeface="Calibri" panose="020F0502020204030204" pitchFamily="34" charset="0"/>
-                <a:ea typeface="Times New Roman" panose="02020603050405020304" pitchFamily="18" charset="0"/>
-                <a:cs typeface="Simplified Arabic" panose="02020603050405020304" pitchFamily="18" charset="-78"/>
-              </a:rPr>
-              <a:t>لا يشمل المشروع بناء أو تدريب نماذج ذكاء اصطناعي لغوية من الصفر، نظراً لتكلفتها العالية وحاجتها لموارد حاسوبية ضخمة</a:t>
-            </a:r>
-            <a:r>
-              <a:rPr lang="en-US" sz="1600" dirty="0">
-                <a:effectLst/>
-                <a:latin typeface="Simplified Arabic" panose="02020603050405020304" pitchFamily="18" charset="-78"/>
-                <a:ea typeface="Times New Roman" panose="02020603050405020304" pitchFamily="18" charset="0"/>
-                <a:cs typeface="Arial" panose="020B0604020202020204" pitchFamily="34" charset="0"/>
-              </a:rPr>
-              <a:t>.</a:t>
-            </a:r>
-            <a:endParaRPr lang="en-US" sz="1200" dirty="0">
-              <a:effectLst/>
-              <a:latin typeface="Calibri" panose="020F0502020204030204" pitchFamily="34" charset="0"/>
-              <a:ea typeface="Times New Roman" panose="02020603050405020304" pitchFamily="18" charset="0"/>
-              <a:cs typeface="Arial" panose="020B0604020202020204" pitchFamily="34" charset="0"/>
-            </a:endParaRPr>
-          </a:p>
-          <a:p>
-            <a:pPr marL="342900" lvl="0" indent="-342900" algn="r" rtl="1">
-              <a:lnSpc>
-                <a:spcPct val="107000"/>
-              </a:lnSpc>
-              <a:spcAft>
-                <a:spcPts val="800"/>
-              </a:spcAft>
-              <a:buSzPts val="1000"/>
-              <a:buFont typeface="Symbol" panose="05050102010706020507" pitchFamily="18" charset="2"/>
-              <a:buChar char=""/>
-              <a:tabLst>
-                <a:tab pos="457200" algn="l"/>
-              </a:tabLst>
-            </a:pPr>
-            <a:r>
-              <a:rPr lang="ar-SA" sz="1600" dirty="0">
-                <a:effectLst/>
-                <a:latin typeface="Calibri" panose="020F0502020204030204" pitchFamily="34" charset="0"/>
-                <a:ea typeface="Times New Roman" panose="02020603050405020304" pitchFamily="18" charset="0"/>
-                <a:cs typeface="Simplified Arabic" panose="02020603050405020304" pitchFamily="18" charset="-78"/>
-              </a:rPr>
-              <a:t>لا يتضمن النظام في مرحلته الحالية بناء تطبيق للهواتف الذكية</a:t>
-            </a:r>
-            <a:r>
-              <a:rPr lang="en-US" sz="1600" dirty="0">
-                <a:effectLst/>
-                <a:latin typeface="Simplified Arabic" panose="02020603050405020304" pitchFamily="18" charset="-78"/>
-                <a:ea typeface="Times New Roman" panose="02020603050405020304" pitchFamily="18" charset="0"/>
-                <a:cs typeface="Arial" panose="020B0604020202020204" pitchFamily="34" charset="0"/>
-              </a:rPr>
-              <a:t> (Mobile App)</a:t>
-            </a:r>
-            <a:r>
-              <a:rPr lang="ar-SA" sz="1600" dirty="0">
-                <a:effectLst/>
-                <a:latin typeface="Calibri" panose="020F0502020204030204" pitchFamily="34" charset="0"/>
-                <a:ea typeface="Times New Roman" panose="02020603050405020304" pitchFamily="18" charset="0"/>
-                <a:cs typeface="Simplified Arabic" panose="02020603050405020304" pitchFamily="18" charset="-78"/>
-              </a:rPr>
-              <a:t>، بل سيعتمد على تصميم ويب متجاوب</a:t>
-            </a:r>
-            <a:r>
-              <a:rPr lang="en-US" sz="1600" dirty="0">
-                <a:effectLst/>
-                <a:latin typeface="Simplified Arabic" panose="02020603050405020304" pitchFamily="18" charset="-78"/>
-                <a:ea typeface="Times New Roman" panose="02020603050405020304" pitchFamily="18" charset="0"/>
-                <a:cs typeface="Arial" panose="020B0604020202020204" pitchFamily="34" charset="0"/>
-              </a:rPr>
-              <a:t> (Responsive Web Design) </a:t>
-            </a:r>
-            <a:r>
-              <a:rPr lang="ar-SA" sz="1600" dirty="0">
-                <a:effectLst/>
-                <a:latin typeface="Calibri" panose="020F0502020204030204" pitchFamily="34" charset="0"/>
-                <a:ea typeface="Times New Roman" panose="02020603050405020304" pitchFamily="18" charset="0"/>
-                <a:cs typeface="Simplified Arabic" panose="02020603050405020304" pitchFamily="18" charset="-78"/>
-              </a:rPr>
-              <a:t>ليعمل على شاشات الهواتف</a:t>
-            </a:r>
-            <a:r>
-              <a:rPr lang="en-US" sz="1600" dirty="0">
-                <a:effectLst/>
-                <a:latin typeface="Simplified Arabic" panose="02020603050405020304" pitchFamily="18" charset="-78"/>
-                <a:ea typeface="Times New Roman" panose="02020603050405020304" pitchFamily="18" charset="0"/>
-                <a:cs typeface="Arial" panose="020B0604020202020204" pitchFamily="34" charset="0"/>
-              </a:rPr>
-              <a:t>.</a:t>
-            </a:r>
-            <a:endParaRPr lang="en-US" sz="1200" dirty="0">
-              <a:effectLst/>
-              <a:latin typeface="Calibri" panose="020F0502020204030204" pitchFamily="34" charset="0"/>
-              <a:ea typeface="Times New Roman" panose="02020603050405020304" pitchFamily="18" charset="0"/>
-              <a:cs typeface="Arial" panose="020B0604020202020204" pitchFamily="34" charset="0"/>
-            </a:endParaRPr>
+              <a:rPr lang="ar-SA" b="1" dirty="0"/>
+              <a:t>تحليل المشاعر (</a:t>
+            </a:r>
+            <a:r>
+              <a:rPr lang="en-US" b="1" dirty="0"/>
+              <a:t> (Sentiment Analysis</a:t>
+            </a:r>
+            <a:r>
+              <a:rPr lang="ar-SA" dirty="0"/>
+              <a:t>قراءة النصوص آلياً وتصنيفها عاطفياً (إيجابية، سلبية، محايدة) لاستخراج توجهات الجمهور بسرعة ودقة.</a:t>
+            </a:r>
           </a:p>
         </p:txBody>
       </p:sp>
@@ -5393,558 +4555,6 @@
           <a:chExt cx="0" cy="0"/>
         </a:xfrm>
       </p:grpSpPr>
-      <p:sp>
-        <p:nvSpPr>
-          <p:cNvPr id="3" name="مربع نص 2">
-            <a:extLst>
-              <a:ext uri="{FF2B5EF4-FFF2-40B4-BE49-F238E27FC236}">
-                <a16:creationId xmlns:a16="http://schemas.microsoft.com/office/drawing/2014/main" id="{5E93B341-3CE9-93E2-18F5-A5047D5282E8}"/>
-              </a:ext>
-            </a:extLst>
-          </p:cNvPr>
-          <p:cNvSpPr txBox="1"/>
-          <p:nvPr/>
-        </p:nvSpPr>
-        <p:spPr>
-          <a:xfrm>
-            <a:off x="0" y="246204"/>
-            <a:ext cx="12192000" cy="5944320"/>
-          </a:xfrm>
-          <a:prstGeom prst="rect">
-            <a:avLst/>
-          </a:prstGeom>
-          <a:noFill/>
-        </p:spPr>
-        <p:txBody>
-          <a:bodyPr wrap="square">
-            <a:spAutoFit/>
-          </a:bodyPr>
-          <a:lstStyle/>
-          <a:p>
-            <a:pPr algn="r" rtl="1">
-              <a:lnSpc>
-                <a:spcPct val="107000"/>
-              </a:lnSpc>
-              <a:spcBef>
-                <a:spcPts val="800"/>
-              </a:spcBef>
-              <a:spcAft>
-                <a:spcPts val="400"/>
-              </a:spcAft>
-            </a:pPr>
-            <a:r>
-              <a:rPr lang="ar-SA" sz="2000" b="1" dirty="0">
-                <a:solidFill>
-                  <a:srgbClr val="2F5496"/>
-                </a:solidFill>
-                <a:effectLst/>
-                <a:latin typeface="Calibri Light" panose="020F0302020204030204" pitchFamily="34" charset="0"/>
-                <a:ea typeface="Times New Roman" panose="02020603050405020304" pitchFamily="18" charset="0"/>
-                <a:cs typeface="Times New Roman" panose="02020603050405020304" pitchFamily="18" charset="0"/>
-              </a:rPr>
-              <a:t>المفاهيم الأساسية</a:t>
-            </a:r>
-            <a:endParaRPr lang="en-US" sz="2000" b="1" dirty="0">
-              <a:solidFill>
-                <a:srgbClr val="2F5496"/>
-              </a:solidFill>
-              <a:effectLst/>
-              <a:latin typeface="Calibri Light" panose="020F0302020204030204" pitchFamily="34" charset="0"/>
-              <a:ea typeface="Times New Roman" panose="02020603050405020304" pitchFamily="18" charset="0"/>
-              <a:cs typeface="Times New Roman" panose="02020603050405020304" pitchFamily="18" charset="0"/>
-            </a:endParaRPr>
-          </a:p>
-          <a:p>
-            <a:pPr marL="457200" algn="r" rtl="1">
-              <a:lnSpc>
-                <a:spcPct val="107000"/>
-              </a:lnSpc>
-              <a:spcAft>
-                <a:spcPts val="800"/>
-              </a:spcAft>
-            </a:pPr>
-            <a:r>
-              <a:rPr lang="en-US" sz="1800" b="1" dirty="0">
-                <a:effectLst/>
-                <a:latin typeface="Simplified Arabic" panose="02020603050405020304" pitchFamily="18" charset="-78"/>
-                <a:ea typeface="Times New Roman" panose="02020603050405020304" pitchFamily="18" charset="0"/>
-                <a:cs typeface="Arial" panose="020B0604020202020204" pitchFamily="34" charset="0"/>
-              </a:rPr>
-              <a:t> </a:t>
-            </a:r>
-            <a:r>
-              <a:rPr lang="ar-SA" sz="1800" dirty="0">
-                <a:effectLst/>
-                <a:latin typeface="Calibri" panose="020F0502020204030204" pitchFamily="34" charset="0"/>
-                <a:ea typeface="Times New Roman" panose="02020603050405020304" pitchFamily="18" charset="0"/>
-                <a:cs typeface="Simplified Arabic" panose="02020603050405020304" pitchFamily="18" charset="-78"/>
-              </a:rPr>
-              <a:t>يعتمد تصميم وبناء هذه المنصة على تكامل مجموعة من المفاهيم المعمارية والتقنيات الحديثة لضمان تحقيق أهدافها</a:t>
-            </a:r>
-            <a:r>
-              <a:rPr lang="en-US" sz="1800" dirty="0">
-                <a:effectLst/>
-                <a:latin typeface="Simplified Arabic" panose="02020603050405020304" pitchFamily="18" charset="-78"/>
-                <a:ea typeface="Times New Roman" panose="02020603050405020304" pitchFamily="18" charset="0"/>
-                <a:cs typeface="Arial" panose="020B0604020202020204" pitchFamily="34" charset="0"/>
-              </a:rPr>
-              <a:t>:</a:t>
-            </a:r>
-            <a:endParaRPr lang="en-US" sz="1400" dirty="0">
-              <a:effectLst/>
-              <a:latin typeface="Calibri" panose="020F0502020204030204" pitchFamily="34" charset="0"/>
-              <a:ea typeface="Times New Roman" panose="02020603050405020304" pitchFamily="18" charset="0"/>
-              <a:cs typeface="Arial" panose="020B0604020202020204" pitchFamily="34" charset="0"/>
-            </a:endParaRPr>
-          </a:p>
-          <a:p>
-            <a:pPr algn="r" rtl="1">
-              <a:lnSpc>
-                <a:spcPct val="107000"/>
-              </a:lnSpc>
-              <a:spcBef>
-                <a:spcPts val="800"/>
-              </a:spcBef>
-              <a:spcAft>
-                <a:spcPts val="400"/>
-              </a:spcAft>
-            </a:pPr>
-            <a:r>
-              <a:rPr lang="ar-SA" sz="1800" b="1" dirty="0">
-                <a:solidFill>
-                  <a:srgbClr val="2F5496"/>
-                </a:solidFill>
-                <a:effectLst/>
-                <a:latin typeface="Calibri" panose="020F0502020204030204" pitchFamily="34" charset="0"/>
-                <a:ea typeface="Times New Roman" panose="02020603050405020304" pitchFamily="18" charset="0"/>
-                <a:cs typeface="Times New Roman" panose="02020603050405020304" pitchFamily="18" charset="0"/>
-              </a:rPr>
-              <a:t>المنصات ثنائية الأطراف</a:t>
-            </a:r>
-            <a:r>
-              <a:rPr lang="en-US" sz="1800" b="1" dirty="0">
-                <a:solidFill>
-                  <a:srgbClr val="2F5496"/>
-                </a:solidFill>
-                <a:effectLst/>
-                <a:latin typeface="Calibri" panose="020F0502020204030204" pitchFamily="34" charset="0"/>
-                <a:ea typeface="Times New Roman" panose="02020603050405020304" pitchFamily="18" charset="0"/>
-                <a:cs typeface="Times New Roman" panose="02020603050405020304" pitchFamily="18" charset="0"/>
-              </a:rPr>
-              <a:t> (Two-Sided Platforms) </a:t>
-            </a:r>
-            <a:r>
-              <a:rPr lang="ar-SA" sz="1800" b="1" dirty="0">
-                <a:solidFill>
-                  <a:srgbClr val="2F5496"/>
-                </a:solidFill>
-                <a:effectLst/>
-                <a:latin typeface="Calibri" panose="020F0502020204030204" pitchFamily="34" charset="0"/>
-                <a:ea typeface="Times New Roman" panose="02020603050405020304" pitchFamily="18" charset="0"/>
-                <a:cs typeface="Times New Roman" panose="02020603050405020304" pitchFamily="18" charset="0"/>
-              </a:rPr>
-              <a:t>وتأثير الشبكة</a:t>
-            </a:r>
-            <a:r>
-              <a:rPr lang="en-US" sz="1800" b="1" dirty="0">
-                <a:solidFill>
-                  <a:srgbClr val="2F5496"/>
-                </a:solidFill>
-                <a:effectLst/>
-                <a:latin typeface="Calibri" panose="020F0502020204030204" pitchFamily="34" charset="0"/>
-                <a:ea typeface="Times New Roman" panose="02020603050405020304" pitchFamily="18" charset="0"/>
-                <a:cs typeface="Times New Roman" panose="02020603050405020304" pitchFamily="18" charset="0"/>
-              </a:rPr>
-              <a:t>: </a:t>
-            </a:r>
-          </a:p>
-          <a:p>
-            <a:pPr marL="457200" algn="r" rtl="1">
-              <a:lnSpc>
-                <a:spcPct val="107000"/>
-              </a:lnSpc>
-              <a:spcAft>
-                <a:spcPts val="800"/>
-              </a:spcAft>
-            </a:pPr>
-            <a:r>
-              <a:rPr lang="en-US" sz="1800" dirty="0">
-                <a:effectLst/>
-                <a:latin typeface="Simplified Arabic" panose="02020603050405020304" pitchFamily="18" charset="-78"/>
-                <a:ea typeface="Times New Roman" panose="02020603050405020304" pitchFamily="18" charset="0"/>
-                <a:cs typeface="Arial" panose="020B0604020202020204" pitchFamily="34" charset="0"/>
-              </a:rPr>
-              <a:t> </a:t>
-            </a:r>
-            <a:r>
-              <a:rPr lang="ar-SA" sz="1800" dirty="0">
-                <a:effectLst/>
-                <a:latin typeface="Simplified Arabic" panose="02020603050405020304" pitchFamily="18" charset="-78"/>
-                <a:ea typeface="Times New Roman" panose="02020603050405020304" pitchFamily="18" charset="0"/>
-                <a:cs typeface="Arial" panose="020B0604020202020204" pitchFamily="34" charset="0"/>
-              </a:rPr>
-              <a:t>تُعرف هندسياً وتجارياً بأنها بيئات رقمية تخلق قيمة من خلال تمكين التفاعل المباشر بين مجموعتين مختلفتين من المستخدمين. في هذا المشروع، المجموعتان هما "صناع القرار/مقدمو الخدمات" و"المجيبون المستهدفون". يعتمد نجاح هذا الهيكل على "تأثير الشبكة</a:t>
-            </a:r>
-            <a:r>
-              <a:rPr lang="en-US" sz="1800" dirty="0">
-                <a:effectLst/>
-                <a:latin typeface="Simplified Arabic" panose="02020603050405020304" pitchFamily="18" charset="-78"/>
-                <a:ea typeface="Times New Roman" panose="02020603050405020304" pitchFamily="18" charset="0"/>
-                <a:cs typeface="Arial" panose="020B0604020202020204" pitchFamily="34" charset="0"/>
-              </a:rPr>
-              <a:t>" (Network Effect)</a:t>
-            </a:r>
-            <a:r>
-              <a:rPr lang="ar-SA" sz="1800" dirty="0">
-                <a:effectLst/>
-                <a:latin typeface="Calibri" panose="020F0502020204030204" pitchFamily="34" charset="0"/>
-                <a:ea typeface="Times New Roman" panose="02020603050405020304" pitchFamily="18" charset="0"/>
-                <a:cs typeface="Simplified Arabic" panose="02020603050405020304" pitchFamily="18" charset="-78"/>
-              </a:rPr>
-              <a:t>، حيث تزداد قيمة المنصة لمقدمي الخدمات كلما زاد عدد المستخدمين المسجلين بملفات تعريفية دقيقة، والعكس صحيح</a:t>
-            </a:r>
-            <a:r>
-              <a:rPr lang="en-US" sz="1800" dirty="0">
-                <a:effectLst/>
-                <a:latin typeface="Simplified Arabic" panose="02020603050405020304" pitchFamily="18" charset="-78"/>
-                <a:ea typeface="Times New Roman" panose="02020603050405020304" pitchFamily="18" charset="0"/>
-                <a:cs typeface="Arial" panose="020B0604020202020204" pitchFamily="34" charset="0"/>
-              </a:rPr>
-              <a:t>.</a:t>
-            </a:r>
-            <a:endParaRPr lang="en-US" sz="1400" dirty="0">
-              <a:effectLst/>
-              <a:latin typeface="Calibri" panose="020F0502020204030204" pitchFamily="34" charset="0"/>
-              <a:ea typeface="Times New Roman" panose="02020603050405020304" pitchFamily="18" charset="0"/>
-              <a:cs typeface="Arial" panose="020B0604020202020204" pitchFamily="34" charset="0"/>
-            </a:endParaRPr>
-          </a:p>
-          <a:p>
-            <a:pPr algn="r" rtl="1">
-              <a:lnSpc>
-                <a:spcPct val="107000"/>
-              </a:lnSpc>
-              <a:spcBef>
-                <a:spcPts val="800"/>
-              </a:spcBef>
-              <a:spcAft>
-                <a:spcPts val="400"/>
-              </a:spcAft>
-            </a:pPr>
-            <a:r>
-              <a:rPr lang="ar-SA" sz="1800" b="1" dirty="0">
-                <a:solidFill>
-                  <a:srgbClr val="2F5496"/>
-                </a:solidFill>
-                <a:effectLst/>
-                <a:latin typeface="Times New Roman" panose="02020603050405020304" pitchFamily="18" charset="0"/>
-                <a:ea typeface="Times New Roman" panose="02020603050405020304" pitchFamily="18" charset="0"/>
-                <a:cs typeface="Times New Roman" panose="02020603050405020304" pitchFamily="18" charset="0"/>
-              </a:rPr>
-              <a:t>الاستهداف الديموغرافي</a:t>
-            </a:r>
-            <a:r>
-              <a:rPr lang="en-US" sz="1800" b="1" dirty="0">
-                <a:solidFill>
-                  <a:srgbClr val="2F5496"/>
-                </a:solidFill>
-                <a:effectLst/>
-                <a:latin typeface="Calibri" panose="020F0502020204030204" pitchFamily="34" charset="0"/>
-                <a:ea typeface="Times New Roman" panose="02020603050405020304" pitchFamily="18" charset="0"/>
-                <a:cs typeface="Times New Roman" panose="02020603050405020304" pitchFamily="18" charset="0"/>
-              </a:rPr>
-              <a:t> (Demographic Targeting) </a:t>
-            </a:r>
-            <a:r>
-              <a:rPr lang="ar-SA" sz="1800" b="1" dirty="0">
-                <a:solidFill>
-                  <a:srgbClr val="2F5496"/>
-                </a:solidFill>
-                <a:effectLst/>
-                <a:latin typeface="Calibri" panose="020F0502020204030204" pitchFamily="34" charset="0"/>
-                <a:ea typeface="Times New Roman" panose="02020603050405020304" pitchFamily="18" charset="0"/>
-                <a:cs typeface="Times New Roman" panose="02020603050405020304" pitchFamily="18" charset="0"/>
-              </a:rPr>
-              <a:t>والفلترة الآلية:</a:t>
-            </a:r>
-            <a:endParaRPr lang="en-US" sz="1800" b="1" dirty="0">
-              <a:solidFill>
-                <a:srgbClr val="2F5496"/>
-              </a:solidFill>
-              <a:effectLst/>
-              <a:latin typeface="Calibri" panose="020F0502020204030204" pitchFamily="34" charset="0"/>
-              <a:ea typeface="Times New Roman" panose="02020603050405020304" pitchFamily="18" charset="0"/>
-              <a:cs typeface="Times New Roman" panose="02020603050405020304" pitchFamily="18" charset="0"/>
-            </a:endParaRPr>
-          </a:p>
-          <a:p>
-            <a:pPr marL="457200" algn="r" rtl="1">
-              <a:lnSpc>
-                <a:spcPct val="107000"/>
-              </a:lnSpc>
-              <a:spcAft>
-                <a:spcPts val="800"/>
-              </a:spcAft>
-            </a:pPr>
-            <a:r>
-              <a:rPr lang="ar-SA" sz="1800" dirty="0">
-                <a:effectLst/>
-                <a:latin typeface="Calibri" panose="020F0502020204030204" pitchFamily="34" charset="0"/>
-                <a:ea typeface="Times New Roman" panose="02020603050405020304" pitchFamily="18" charset="0"/>
-                <a:cs typeface="Simplified Arabic" panose="02020603050405020304" pitchFamily="18" charset="-78"/>
-              </a:rPr>
-              <a:t>هو آلية برمجية تعتمد على خوارزميات المطابقة</a:t>
-            </a:r>
-            <a:r>
-              <a:rPr lang="en-US" sz="1800" dirty="0">
-                <a:effectLst/>
-                <a:latin typeface="Simplified Arabic" panose="02020603050405020304" pitchFamily="18" charset="-78"/>
-                <a:ea typeface="Times New Roman" panose="02020603050405020304" pitchFamily="18" charset="0"/>
-                <a:cs typeface="Arial" panose="020B0604020202020204" pitchFamily="34" charset="0"/>
-              </a:rPr>
-              <a:t> (Matching Algorithms) </a:t>
-            </a:r>
-            <a:r>
-              <a:rPr lang="ar-SA" sz="1800" dirty="0">
-                <a:effectLst/>
-                <a:latin typeface="Calibri" panose="020F0502020204030204" pitchFamily="34" charset="0"/>
-                <a:ea typeface="Times New Roman" panose="02020603050405020304" pitchFamily="18" charset="0"/>
-                <a:cs typeface="Simplified Arabic" panose="02020603050405020304" pitchFamily="18" charset="-78"/>
-              </a:rPr>
-              <a:t>لتصفية قواعد البيانات. بدلاً من الاعتماد على أخذ العينات العشوائية</a:t>
-            </a:r>
-            <a:r>
-              <a:rPr lang="en-US" sz="1800" dirty="0">
-                <a:effectLst/>
-                <a:latin typeface="Simplified Arabic" panose="02020603050405020304" pitchFamily="18" charset="-78"/>
-                <a:ea typeface="Times New Roman" panose="02020603050405020304" pitchFamily="18" charset="0"/>
-                <a:cs typeface="Arial" panose="020B0604020202020204" pitchFamily="34" charset="0"/>
-              </a:rPr>
-              <a:t> (Random Sampling) </a:t>
-            </a:r>
-            <a:r>
-              <a:rPr lang="ar-SA" sz="1800" dirty="0">
-                <a:effectLst/>
-                <a:latin typeface="Calibri" panose="020F0502020204030204" pitchFamily="34" charset="0"/>
-                <a:ea typeface="Times New Roman" panose="02020603050405020304" pitchFamily="18" charset="0"/>
-                <a:cs typeface="Simplified Arabic" panose="02020603050405020304" pitchFamily="18" charset="-78"/>
-              </a:rPr>
-              <a:t>التي تهدد دقة نتائج البحث، يضمن محرك الاستهداف إيصال الاستبيان حصراً للشريحة الممثلة فعلياً للخدمة. يتم ذلك بمقاطعة شروط الاستبيان مع حقول البيانات الشخصية</a:t>
-            </a:r>
-            <a:r>
-              <a:rPr lang="en-US" sz="1800" dirty="0">
-                <a:effectLst/>
-                <a:latin typeface="Simplified Arabic" panose="02020603050405020304" pitchFamily="18" charset="-78"/>
-                <a:ea typeface="Times New Roman" panose="02020603050405020304" pitchFamily="18" charset="0"/>
-                <a:cs typeface="Arial" panose="020B0604020202020204" pitchFamily="34" charset="0"/>
-              </a:rPr>
-              <a:t> (Profile Data) </a:t>
-            </a:r>
-            <a:r>
-              <a:rPr lang="ar-SA" sz="1800" dirty="0">
-                <a:effectLst/>
-                <a:latin typeface="Calibri" panose="020F0502020204030204" pitchFamily="34" charset="0"/>
-                <a:ea typeface="Times New Roman" panose="02020603050405020304" pitchFamily="18" charset="0"/>
-                <a:cs typeface="Simplified Arabic" panose="02020603050405020304" pitchFamily="18" charset="-78"/>
-              </a:rPr>
-              <a:t>للمستخدمين، مما يقضي على مشكلة "تحيز العينة</a:t>
-            </a:r>
-            <a:r>
-              <a:rPr lang="en-US" sz="1800" dirty="0">
-                <a:effectLst/>
-                <a:latin typeface="Simplified Arabic" panose="02020603050405020304" pitchFamily="18" charset="-78"/>
-                <a:ea typeface="Times New Roman" panose="02020603050405020304" pitchFamily="18" charset="0"/>
-                <a:cs typeface="Arial" panose="020B0604020202020204" pitchFamily="34" charset="0"/>
-              </a:rPr>
-              <a:t>" (Sample Bias).</a:t>
-            </a:r>
-            <a:endParaRPr lang="en-US" sz="1400" dirty="0">
-              <a:effectLst/>
-              <a:latin typeface="Calibri" panose="020F0502020204030204" pitchFamily="34" charset="0"/>
-              <a:ea typeface="Times New Roman" panose="02020603050405020304" pitchFamily="18" charset="0"/>
-              <a:cs typeface="Arial" panose="020B0604020202020204" pitchFamily="34" charset="0"/>
-            </a:endParaRPr>
-          </a:p>
-          <a:p>
-            <a:pPr algn="r" rtl="1">
-              <a:lnSpc>
-                <a:spcPct val="107000"/>
-              </a:lnSpc>
-              <a:spcBef>
-                <a:spcPts val="800"/>
-              </a:spcBef>
-              <a:spcAft>
-                <a:spcPts val="400"/>
-              </a:spcAft>
-            </a:pPr>
-            <a:r>
-              <a:rPr lang="ar-SA" sz="1800" b="1" dirty="0">
-                <a:solidFill>
-                  <a:srgbClr val="2F5496"/>
-                </a:solidFill>
-                <a:effectLst/>
-                <a:latin typeface="Calibri" panose="020F0502020204030204" pitchFamily="34" charset="0"/>
-                <a:ea typeface="Times New Roman" panose="02020603050405020304" pitchFamily="18" charset="0"/>
-                <a:cs typeface="Times New Roman" panose="02020603050405020304" pitchFamily="18" charset="0"/>
-              </a:rPr>
-              <a:t>معالجة اللغات الطبيعية</a:t>
-            </a:r>
-            <a:r>
-              <a:rPr lang="en-US" sz="1800" b="1" dirty="0">
-                <a:solidFill>
-                  <a:srgbClr val="2F5496"/>
-                </a:solidFill>
-                <a:effectLst/>
-                <a:latin typeface="Calibri" panose="020F0502020204030204" pitchFamily="34" charset="0"/>
-                <a:ea typeface="Times New Roman" panose="02020603050405020304" pitchFamily="18" charset="0"/>
-                <a:cs typeface="Times New Roman" panose="02020603050405020304" pitchFamily="18" charset="0"/>
-              </a:rPr>
-              <a:t> (Natural Language Processing - NLP)  </a:t>
-            </a:r>
-          </a:p>
-          <a:p>
-            <a:pPr marL="457200" algn="r" rtl="1">
-              <a:lnSpc>
-                <a:spcPct val="107000"/>
-              </a:lnSpc>
-              <a:spcAft>
-                <a:spcPts val="800"/>
-              </a:spcAft>
-            </a:pPr>
-            <a:r>
-              <a:rPr lang="ar-SA" sz="1800" dirty="0">
-                <a:effectLst/>
-                <a:latin typeface="Calibri" panose="020F0502020204030204" pitchFamily="34" charset="0"/>
-                <a:ea typeface="Times New Roman" panose="02020603050405020304" pitchFamily="18" charset="0"/>
-                <a:cs typeface="Simplified Arabic" panose="02020603050405020304" pitchFamily="18" charset="-78"/>
-              </a:rPr>
-              <a:t>فرع متقدم من الذكاء الاصطناعي</a:t>
-            </a:r>
-            <a:r>
-              <a:rPr lang="en-US" sz="1800" dirty="0">
-                <a:effectLst/>
-                <a:latin typeface="Simplified Arabic" panose="02020603050405020304" pitchFamily="18" charset="-78"/>
-                <a:ea typeface="Times New Roman" panose="02020603050405020304" pitchFamily="18" charset="0"/>
-                <a:cs typeface="Arial" panose="020B0604020202020204" pitchFamily="34" charset="0"/>
-              </a:rPr>
-              <a:t> (AI) </a:t>
-            </a:r>
-            <a:r>
-              <a:rPr lang="ar-SA" sz="1800" dirty="0">
-                <a:effectLst/>
-                <a:latin typeface="Calibri" panose="020F0502020204030204" pitchFamily="34" charset="0"/>
-                <a:ea typeface="Times New Roman" panose="02020603050405020304" pitchFamily="18" charset="0"/>
-                <a:cs typeface="Simplified Arabic" panose="02020603050405020304" pitchFamily="18" charset="-78"/>
-              </a:rPr>
-              <a:t>يركز على التفاعل بين أجهزة الحاسوب واللغات البشرية. تُستخدم هذه التقنية في النظام لمعالجة "البيانات غير المهيكلة</a:t>
-            </a:r>
-            <a:r>
-              <a:rPr lang="en-US" sz="1800" dirty="0">
-                <a:effectLst/>
-                <a:latin typeface="Simplified Arabic" panose="02020603050405020304" pitchFamily="18" charset="-78"/>
-                <a:ea typeface="Times New Roman" panose="02020603050405020304" pitchFamily="18" charset="0"/>
-                <a:cs typeface="Arial" panose="020B0604020202020204" pitchFamily="34" charset="0"/>
-              </a:rPr>
-              <a:t>" (Unstructured Data) </a:t>
-            </a:r>
-            <a:r>
-              <a:rPr lang="ar-SA" sz="1800" dirty="0">
-                <a:effectLst/>
-                <a:latin typeface="Calibri" panose="020F0502020204030204" pitchFamily="34" charset="0"/>
-                <a:ea typeface="Times New Roman" panose="02020603050405020304" pitchFamily="18" charset="0"/>
-                <a:cs typeface="Simplified Arabic" panose="02020603050405020304" pitchFamily="18" charset="-78"/>
-              </a:rPr>
-              <a:t>الناتجة عن الإجابات النصية المفتوحة، وتحويلها إلى بيانات كمية قابلة للقياس</a:t>
-            </a:r>
-            <a:r>
-              <a:rPr lang="en-US" sz="1800" dirty="0">
-                <a:effectLst/>
-                <a:latin typeface="Simplified Arabic" panose="02020603050405020304" pitchFamily="18" charset="-78"/>
-                <a:ea typeface="Times New Roman" panose="02020603050405020304" pitchFamily="18" charset="0"/>
-                <a:cs typeface="Arial" panose="020B0604020202020204" pitchFamily="34" charset="0"/>
-              </a:rPr>
-              <a:t>.</a:t>
-            </a:r>
-            <a:endParaRPr lang="en-US" sz="1400" dirty="0">
-              <a:effectLst/>
-              <a:latin typeface="Calibri" panose="020F0502020204030204" pitchFamily="34" charset="0"/>
-              <a:ea typeface="Times New Roman" panose="02020603050405020304" pitchFamily="18" charset="0"/>
-              <a:cs typeface="Arial" panose="020B0604020202020204" pitchFamily="34" charset="0"/>
-            </a:endParaRPr>
-          </a:p>
-          <a:p>
-            <a:pPr algn="r" rtl="1">
-              <a:lnSpc>
-                <a:spcPct val="107000"/>
-              </a:lnSpc>
-              <a:spcBef>
-                <a:spcPts val="800"/>
-              </a:spcBef>
-              <a:spcAft>
-                <a:spcPts val="400"/>
-              </a:spcAft>
-            </a:pPr>
-            <a:r>
-              <a:rPr lang="ar-SA" sz="1800" b="1" dirty="0">
-                <a:solidFill>
-                  <a:srgbClr val="2F5496"/>
-                </a:solidFill>
-                <a:effectLst/>
-                <a:latin typeface="Calibri" panose="020F0502020204030204" pitchFamily="34" charset="0"/>
-                <a:ea typeface="Times New Roman" panose="02020603050405020304" pitchFamily="18" charset="0"/>
-                <a:cs typeface="Times New Roman" panose="02020603050405020304" pitchFamily="18" charset="0"/>
-              </a:rPr>
-              <a:t>تحليل المشاعر</a:t>
-            </a:r>
-            <a:r>
-              <a:rPr lang="en-US" sz="1800" b="1" dirty="0">
-                <a:solidFill>
-                  <a:srgbClr val="2F5496"/>
-                </a:solidFill>
-                <a:effectLst/>
-                <a:latin typeface="Calibri" panose="020F0502020204030204" pitchFamily="34" charset="0"/>
-                <a:ea typeface="Times New Roman" panose="02020603050405020304" pitchFamily="18" charset="0"/>
-                <a:cs typeface="Times New Roman" panose="02020603050405020304" pitchFamily="18" charset="0"/>
-              </a:rPr>
-              <a:t> (Sentiment Analysis) </a:t>
-            </a:r>
-          </a:p>
-          <a:p>
-            <a:pPr marL="457200" algn="r" rtl="1">
-              <a:lnSpc>
-                <a:spcPct val="107000"/>
-              </a:lnSpc>
-              <a:spcAft>
-                <a:spcPts val="800"/>
-              </a:spcAft>
-            </a:pPr>
-            <a:r>
-              <a:rPr lang="ar-SA" sz="1800" dirty="0">
-                <a:effectLst/>
-                <a:latin typeface="Calibri" panose="020F0502020204030204" pitchFamily="34" charset="0"/>
-                <a:ea typeface="Times New Roman" panose="02020603050405020304" pitchFamily="18" charset="0"/>
-                <a:cs typeface="Simplified Arabic" panose="02020603050405020304" pitchFamily="18" charset="-78"/>
-              </a:rPr>
-              <a:t>خوارزميات فرعية تعمل على قراءة النصوص رياضياً لتصنيف النبرة العاطفية للمجيب (إيجابية، سلبية، محايدة). تساعد هذه التقنية في استخراج التوجه العام للجمهور دون الحاجة للقراءة اليدوية لآلاف الردود، مما يسرع عملية اتخاذ القرار</a:t>
-            </a:r>
-            <a:r>
-              <a:rPr lang="en-US" sz="1800" dirty="0">
-                <a:effectLst/>
-                <a:latin typeface="Simplified Arabic" panose="02020603050405020304" pitchFamily="18" charset="-78"/>
-                <a:ea typeface="Times New Roman" panose="02020603050405020304" pitchFamily="18" charset="0"/>
-                <a:cs typeface="Arial" panose="020B0604020202020204" pitchFamily="34" charset="0"/>
-              </a:rPr>
-              <a:t>.</a:t>
-            </a:r>
-            <a:endParaRPr lang="en-US" sz="1400" dirty="0">
-              <a:effectLst/>
-              <a:latin typeface="Calibri" panose="020F0502020204030204" pitchFamily="34" charset="0"/>
-              <a:ea typeface="Times New Roman" panose="02020603050405020304" pitchFamily="18" charset="0"/>
-              <a:cs typeface="Arial" panose="020B0604020202020204" pitchFamily="34" charset="0"/>
-            </a:endParaRPr>
-          </a:p>
-        </p:txBody>
-      </p:sp>
     </p:spTree>
     <p:extLst>
       <p:ext uri="{BB962C8B-B14F-4D97-AF65-F5344CB8AC3E}">

--- a/Smart Opinion Survey Platform.pptx
+++ b/Smart Opinion Survey Platform.pptx
@@ -1,6 +1,6 @@
 
 <file path=ppt/presentation.xml><?xml version="1.0" encoding="utf-8"?>
-<p:presentation xmlns:a="http://schemas.openxmlformats.org/drawingml/2006/main" xmlns:r="http://schemas.openxmlformats.org/officeDocument/2006/relationships" xmlns:p="http://schemas.openxmlformats.org/presentationml/2006/main" rtl="1" saveSubsetFonts="1">
+<p:presentation xmlns:a="http://schemas.openxmlformats.org/drawingml/2006/main" xmlns:r="http://schemas.openxmlformats.org/officeDocument/2006/relationships" xmlns:p="http://schemas.openxmlformats.org/presentationml/2006/main" rtl="1" saveSubsetFonts="1" bookmarkIdSeed="2">
   <p:sldMasterIdLst>
     <p:sldMasterId id="2147483648" r:id="rId1"/>
   </p:sldMasterIdLst>
@@ -4398,8 +4398,8 @@
         </p:nvSpPr>
         <p:spPr>
           <a:xfrm>
-            <a:off x="1324946" y="0"/>
-            <a:ext cx="10207690" cy="3826689"/>
+            <a:off x="352425" y="0"/>
+            <a:ext cx="11180211" cy="3004540"/>
           </a:xfrm>
           <a:prstGeom prst="rect">
             <a:avLst/>
@@ -4522,6 +4522,1088 @@
               <a:rPr lang="ar-SA" dirty="0"/>
               <a:t>قراءة النصوص آلياً وتصنيفها عاطفياً (إيجابية، سلبية، محايدة) لاستخراج توجهات الجمهور بسرعة ودقة.</a:t>
             </a:r>
+          </a:p>
+        </p:txBody>
+      </p:sp>
+      <p:graphicFrame>
+        <p:nvGraphicFramePr>
+          <p:cNvPr id="2" name="جدول 1">
+            <a:extLst>
+              <a:ext uri="{FF2B5EF4-FFF2-40B4-BE49-F238E27FC236}">
+                <a16:creationId xmlns:a16="http://schemas.microsoft.com/office/drawing/2014/main" id="{17853753-72BB-5FEF-D502-D72BF06791E2}"/>
+              </a:ext>
+            </a:extLst>
+          </p:cNvPr>
+          <p:cNvGraphicFramePr>
+            <a:graphicFrameLocks noGrp="1"/>
+          </p:cNvGraphicFramePr>
+          <p:nvPr>
+            <p:extLst>
+              <p:ext uri="{D42A27DB-BD31-4B8C-83A1-F6EECF244321}">
+                <p14:modId xmlns:p14="http://schemas.microsoft.com/office/powerpoint/2010/main" val="1030643634"/>
+              </p:ext>
+            </p:extLst>
+          </p:nvPr>
+        </p:nvGraphicFramePr>
+        <p:xfrm>
+          <a:off x="1488828" y="3310467"/>
+          <a:ext cx="8785473" cy="3029517"/>
+        </p:xfrm>
+        <a:graphic>
+          <a:graphicData uri="http://schemas.openxmlformats.org/drawingml/2006/table">
+            <a:tbl>
+              <a:tblPr rtl="1" firstRow="1" firstCol="1" bandRow="1">
+                <a:tableStyleId>{5C22544A-7EE6-4342-B048-85BDC9FD1C3A}</a:tableStyleId>
+              </a:tblPr>
+              <a:tblGrid>
+                <a:gridCol w="1841054">
+                  <a:extLst>
+                    <a:ext uri="{9D8B030D-6E8A-4147-A177-3AD203B41FA5}">
+                      <a16:colId xmlns:a16="http://schemas.microsoft.com/office/drawing/2014/main" val="1950653663"/>
+                    </a:ext>
+                  </a:extLst>
+                </a:gridCol>
+                <a:gridCol w="1827679">
+                  <a:extLst>
+                    <a:ext uri="{9D8B030D-6E8A-4147-A177-3AD203B41FA5}">
+                      <a16:colId xmlns:a16="http://schemas.microsoft.com/office/drawing/2014/main" val="3310257874"/>
+                    </a:ext>
+                  </a:extLst>
+                </a:gridCol>
+                <a:gridCol w="2058968">
+                  <a:extLst>
+                    <a:ext uri="{9D8B030D-6E8A-4147-A177-3AD203B41FA5}">
+                      <a16:colId xmlns:a16="http://schemas.microsoft.com/office/drawing/2014/main" val="1449973089"/>
+                    </a:ext>
+                  </a:extLst>
+                </a:gridCol>
+                <a:gridCol w="3057772">
+                  <a:extLst>
+                    <a:ext uri="{9D8B030D-6E8A-4147-A177-3AD203B41FA5}">
+                      <a16:colId xmlns:a16="http://schemas.microsoft.com/office/drawing/2014/main" val="3274840695"/>
+                    </a:ext>
+                  </a:extLst>
+                </a:gridCol>
+              </a:tblGrid>
+              <a:tr h="489207">
+                <a:tc>
+                  <a:txBody>
+                    <a:bodyPr/>
+                    <a:lstStyle/>
+                    <a:p>
+                      <a:pPr algn="r" rtl="1">
+                        <a:lnSpc>
+                          <a:spcPct val="107000"/>
+                        </a:lnSpc>
+                        <a:spcAft>
+                          <a:spcPts val="800"/>
+                        </a:spcAft>
+                      </a:pPr>
+                      <a:r>
+                        <a:rPr lang="ar-SA" sz="1400" kern="100">
+                          <a:effectLst/>
+                        </a:rPr>
+                        <a:t>معيار المقارنة</a:t>
+                      </a:r>
+                      <a:endParaRPr lang="en-US" sz="1100" kern="100">
+                        <a:effectLst/>
+                        <a:latin typeface="Calibri" panose="020F0502020204030204" pitchFamily="34" charset="0"/>
+                        <a:ea typeface="Times New Roman" panose="02020603050405020304" pitchFamily="18" charset="0"/>
+                        <a:cs typeface="Arial" panose="020B0604020202020204" pitchFamily="34" charset="0"/>
+                      </a:endParaRPr>
+                    </a:p>
+                  </a:txBody>
+                  <a:tcPr marL="68580" marR="68580" marT="0" marB="0"/>
+                </a:tc>
+                <a:tc>
+                  <a:txBody>
+                    <a:bodyPr/>
+                    <a:lstStyle/>
+                    <a:p>
+                      <a:pPr algn="r" rtl="1">
+                        <a:lnSpc>
+                          <a:spcPct val="107000"/>
+                        </a:lnSpc>
+                        <a:spcAft>
+                          <a:spcPts val="800"/>
+                        </a:spcAft>
+                      </a:pPr>
+                      <a:r>
+                        <a:rPr lang="ar-SA" sz="1400" kern="100">
+                          <a:effectLst/>
+                        </a:rPr>
+                        <a:t>نماذج جوجل</a:t>
+                      </a:r>
+                      <a:r>
+                        <a:rPr lang="en-US" sz="1400" kern="100">
+                          <a:effectLst/>
+                        </a:rPr>
+                        <a:t> (Google Forms)</a:t>
+                      </a:r>
+                      <a:endParaRPr lang="en-US" sz="1100" kern="100">
+                        <a:effectLst/>
+                        <a:latin typeface="Calibri" panose="020F0502020204030204" pitchFamily="34" charset="0"/>
+                        <a:ea typeface="Times New Roman" panose="02020603050405020304" pitchFamily="18" charset="0"/>
+                        <a:cs typeface="Arial" panose="020B0604020202020204" pitchFamily="34" charset="0"/>
+                      </a:endParaRPr>
+                    </a:p>
+                  </a:txBody>
+                  <a:tcPr marL="68580" marR="68580" marT="0" marB="0"/>
+                </a:tc>
+                <a:tc>
+                  <a:txBody>
+                    <a:bodyPr/>
+                    <a:lstStyle/>
+                    <a:p>
+                      <a:pPr algn="r" rtl="1">
+                        <a:lnSpc>
+                          <a:spcPct val="107000"/>
+                        </a:lnSpc>
+                        <a:spcAft>
+                          <a:spcPts val="800"/>
+                        </a:spcAft>
+                      </a:pPr>
+                      <a:r>
+                        <a:rPr lang="ar-SA" sz="1400" kern="100" dirty="0">
+                          <a:effectLst/>
+                        </a:rPr>
+                        <a:t>منصة </a:t>
+                      </a:r>
+                      <a:r>
+                        <a:rPr lang="ar-SA" sz="1400" kern="100" dirty="0" err="1">
+                          <a:effectLst/>
+                        </a:rPr>
+                        <a:t>سيرفي</a:t>
+                      </a:r>
+                      <a:r>
+                        <a:rPr lang="ar-SA" sz="1400" kern="100" dirty="0">
+                          <a:effectLst/>
+                        </a:rPr>
+                        <a:t> </a:t>
+                      </a:r>
+                      <a:r>
+                        <a:rPr lang="ar-SA" sz="1400" kern="100" dirty="0" err="1">
+                          <a:effectLst/>
+                        </a:rPr>
+                        <a:t>مونكي</a:t>
+                      </a:r>
+                      <a:r>
+                        <a:rPr lang="en-US" sz="1400" kern="100" dirty="0">
+                          <a:effectLst/>
+                        </a:rPr>
+                        <a:t> (SurveyMonkey)</a:t>
+                      </a:r>
+                      <a:endParaRPr lang="en-US" sz="1100" kern="100" dirty="0">
+                        <a:effectLst/>
+                        <a:latin typeface="Calibri" panose="020F0502020204030204" pitchFamily="34" charset="0"/>
+                        <a:ea typeface="Times New Roman" panose="02020603050405020304" pitchFamily="18" charset="0"/>
+                        <a:cs typeface="Arial" panose="020B0604020202020204" pitchFamily="34" charset="0"/>
+                      </a:endParaRPr>
+                    </a:p>
+                  </a:txBody>
+                  <a:tcPr marL="68580" marR="68580" marT="0" marB="0"/>
+                </a:tc>
+                <a:tc>
+                  <a:txBody>
+                    <a:bodyPr/>
+                    <a:lstStyle/>
+                    <a:p>
+                      <a:pPr algn="r" rtl="1">
+                        <a:lnSpc>
+                          <a:spcPct val="107000"/>
+                        </a:lnSpc>
+                        <a:spcAft>
+                          <a:spcPts val="800"/>
+                        </a:spcAft>
+                      </a:pPr>
+                      <a:r>
+                        <a:rPr lang="ar-SA" sz="1400" kern="100">
+                          <a:effectLst/>
+                        </a:rPr>
+                        <a:t>المنصة المقترحة (مشروعك)</a:t>
+                      </a:r>
+                      <a:endParaRPr lang="en-US" sz="1100" kern="100">
+                        <a:effectLst/>
+                        <a:latin typeface="Calibri" panose="020F0502020204030204" pitchFamily="34" charset="0"/>
+                        <a:ea typeface="Times New Roman" panose="02020603050405020304" pitchFamily="18" charset="0"/>
+                        <a:cs typeface="Arial" panose="020B0604020202020204" pitchFamily="34" charset="0"/>
+                      </a:endParaRPr>
+                    </a:p>
+                  </a:txBody>
+                  <a:tcPr marL="68580" marR="68580" marT="0" marB="0"/>
+                </a:tc>
+                <a:extLst>
+                  <a:ext uri="{0D108BD9-81ED-4DB2-BD59-A6C34878D82A}">
+                    <a16:rowId xmlns:a16="http://schemas.microsoft.com/office/drawing/2014/main" val="1151723467"/>
+                  </a:ext>
+                </a:extLst>
+              </a:tr>
+              <a:tr h="501196">
+                <a:tc>
+                  <a:txBody>
+                    <a:bodyPr/>
+                    <a:lstStyle/>
+                    <a:p>
+                      <a:pPr algn="r" rtl="1">
+                        <a:lnSpc>
+                          <a:spcPct val="107000"/>
+                        </a:lnSpc>
+                        <a:spcAft>
+                          <a:spcPts val="800"/>
+                        </a:spcAft>
+                      </a:pPr>
+                      <a:r>
+                        <a:rPr lang="ar-SA" sz="1400" kern="100" dirty="0">
+                          <a:effectLst/>
+                        </a:rPr>
+                        <a:t>آلية الوصول للجمهور</a:t>
+                      </a:r>
+                      <a:endParaRPr lang="en-US" sz="1100" kern="100" dirty="0">
+                        <a:effectLst/>
+                        <a:latin typeface="Calibri" panose="020F0502020204030204" pitchFamily="34" charset="0"/>
+                        <a:ea typeface="Times New Roman" panose="02020603050405020304" pitchFamily="18" charset="0"/>
+                        <a:cs typeface="Arial" panose="020B0604020202020204" pitchFamily="34" charset="0"/>
+                      </a:endParaRPr>
+                    </a:p>
+                  </a:txBody>
+                  <a:tcPr marL="68580" marR="68580" marT="0" marB="0"/>
+                </a:tc>
+                <a:tc>
+                  <a:txBody>
+                    <a:bodyPr/>
+                    <a:lstStyle/>
+                    <a:p>
+                      <a:pPr algn="r" rtl="1">
+                        <a:lnSpc>
+                          <a:spcPct val="107000"/>
+                        </a:lnSpc>
+                        <a:spcAft>
+                          <a:spcPts val="800"/>
+                        </a:spcAft>
+                      </a:pPr>
+                      <a:r>
+                        <a:rPr lang="ar-SA" sz="1400" kern="100" dirty="0">
+                          <a:effectLst/>
+                        </a:rPr>
+                        <a:t>نشر يدوي للرابط (عينة عشوائية)</a:t>
+                      </a:r>
+                      <a:endParaRPr lang="en-US" sz="1100" kern="100" dirty="0">
+                        <a:effectLst/>
+                        <a:latin typeface="Calibri" panose="020F0502020204030204" pitchFamily="34" charset="0"/>
+                        <a:ea typeface="Times New Roman" panose="02020603050405020304" pitchFamily="18" charset="0"/>
+                        <a:cs typeface="Arial" panose="020B0604020202020204" pitchFamily="34" charset="0"/>
+                      </a:endParaRPr>
+                    </a:p>
+                  </a:txBody>
+                  <a:tcPr marL="68580" marR="68580" marT="0" marB="0"/>
+                </a:tc>
+                <a:tc>
+                  <a:txBody>
+                    <a:bodyPr/>
+                    <a:lstStyle/>
+                    <a:p>
+                      <a:pPr algn="r" rtl="1">
+                        <a:lnSpc>
+                          <a:spcPct val="107000"/>
+                        </a:lnSpc>
+                        <a:spcAft>
+                          <a:spcPts val="800"/>
+                        </a:spcAft>
+                      </a:pPr>
+                      <a:r>
+                        <a:rPr lang="ar-SA" sz="1400" kern="100" dirty="0">
+                          <a:effectLst/>
+                        </a:rPr>
+                        <a:t>مدفوعة الثمن</a:t>
+                      </a:r>
+                      <a:endParaRPr lang="en-US" sz="1100" kern="100" dirty="0">
+                        <a:effectLst/>
+                        <a:latin typeface="Calibri" panose="020F0502020204030204" pitchFamily="34" charset="0"/>
+                        <a:ea typeface="Times New Roman" panose="02020603050405020304" pitchFamily="18" charset="0"/>
+                        <a:cs typeface="Arial" panose="020B0604020202020204" pitchFamily="34" charset="0"/>
+                      </a:endParaRPr>
+                    </a:p>
+                  </a:txBody>
+                  <a:tcPr marL="68580" marR="68580" marT="0" marB="0"/>
+                </a:tc>
+                <a:tc>
+                  <a:txBody>
+                    <a:bodyPr/>
+                    <a:lstStyle/>
+                    <a:p>
+                      <a:pPr algn="r" rtl="1">
+                        <a:lnSpc>
+                          <a:spcPct val="107000"/>
+                        </a:lnSpc>
+                        <a:spcAft>
+                          <a:spcPts val="800"/>
+                        </a:spcAft>
+                      </a:pPr>
+                      <a:r>
+                        <a:rPr lang="ar-SA" sz="1400" kern="100">
+                          <a:effectLst/>
+                        </a:rPr>
+                        <a:t>استهداف ذكي ومجاني بناءً على ملفات المستخدمين</a:t>
+                      </a:r>
+                      <a:endParaRPr lang="en-US" sz="1100" kern="100">
+                        <a:effectLst/>
+                        <a:latin typeface="Calibri" panose="020F0502020204030204" pitchFamily="34" charset="0"/>
+                        <a:ea typeface="Times New Roman" panose="02020603050405020304" pitchFamily="18" charset="0"/>
+                        <a:cs typeface="Arial" panose="020B0604020202020204" pitchFamily="34" charset="0"/>
+                      </a:endParaRPr>
+                    </a:p>
+                  </a:txBody>
+                  <a:tcPr marL="68580" marR="68580" marT="0" marB="0"/>
+                </a:tc>
+                <a:extLst>
+                  <a:ext uri="{0D108BD9-81ED-4DB2-BD59-A6C34878D82A}">
+                    <a16:rowId xmlns:a16="http://schemas.microsoft.com/office/drawing/2014/main" val="3177327789"/>
+                  </a:ext>
+                </a:extLst>
+              </a:tr>
+              <a:tr h="540110">
+                <a:tc>
+                  <a:txBody>
+                    <a:bodyPr/>
+                    <a:lstStyle/>
+                    <a:p>
+                      <a:pPr algn="r" rtl="1">
+                        <a:lnSpc>
+                          <a:spcPct val="107000"/>
+                        </a:lnSpc>
+                        <a:spcAft>
+                          <a:spcPts val="800"/>
+                        </a:spcAft>
+                      </a:pPr>
+                      <a:r>
+                        <a:rPr lang="ar-SA" sz="1400" kern="100">
+                          <a:effectLst/>
+                        </a:rPr>
+                        <a:t>أتمتة تحليل النصوص</a:t>
+                      </a:r>
+                      <a:r>
+                        <a:rPr lang="en-US" sz="1400" kern="100">
+                          <a:effectLst/>
+                        </a:rPr>
+                        <a:t> (AI)</a:t>
+                      </a:r>
+                      <a:endParaRPr lang="en-US" sz="1100" kern="100">
+                        <a:effectLst/>
+                        <a:latin typeface="Calibri" panose="020F0502020204030204" pitchFamily="34" charset="0"/>
+                        <a:ea typeface="Times New Roman" panose="02020603050405020304" pitchFamily="18" charset="0"/>
+                        <a:cs typeface="Arial" panose="020B0604020202020204" pitchFamily="34" charset="0"/>
+                      </a:endParaRPr>
+                    </a:p>
+                  </a:txBody>
+                  <a:tcPr marL="68580" marR="68580" marT="0" marB="0"/>
+                </a:tc>
+                <a:tc>
+                  <a:txBody>
+                    <a:bodyPr/>
+                    <a:lstStyle/>
+                    <a:p>
+                      <a:pPr algn="r" rtl="1">
+                        <a:lnSpc>
+                          <a:spcPct val="107000"/>
+                        </a:lnSpc>
+                        <a:spcAft>
+                          <a:spcPts val="800"/>
+                        </a:spcAft>
+                      </a:pPr>
+                      <a:r>
+                        <a:rPr lang="ar-SA" sz="1400" kern="100" dirty="0">
+                          <a:effectLst/>
+                        </a:rPr>
+                        <a:t>غير متوفرة</a:t>
+                      </a:r>
+                      <a:endParaRPr lang="en-US" sz="1100" kern="100" dirty="0">
+                        <a:effectLst/>
+                        <a:latin typeface="Calibri" panose="020F0502020204030204" pitchFamily="34" charset="0"/>
+                        <a:ea typeface="Times New Roman" panose="02020603050405020304" pitchFamily="18" charset="0"/>
+                        <a:cs typeface="Arial" panose="020B0604020202020204" pitchFamily="34" charset="0"/>
+                      </a:endParaRPr>
+                    </a:p>
+                  </a:txBody>
+                  <a:tcPr marL="68580" marR="68580" marT="0" marB="0"/>
+                </a:tc>
+                <a:tc>
+                  <a:txBody>
+                    <a:bodyPr/>
+                    <a:lstStyle/>
+                    <a:p>
+                      <a:pPr algn="r" rtl="1">
+                        <a:lnSpc>
+                          <a:spcPct val="107000"/>
+                        </a:lnSpc>
+                        <a:spcAft>
+                          <a:spcPts val="800"/>
+                        </a:spcAft>
+                      </a:pPr>
+                      <a:r>
+                        <a:rPr lang="ar-SA" sz="1400" kern="100" dirty="0">
+                          <a:effectLst/>
+                        </a:rPr>
+                        <a:t>متوفرة في الخطط المدفوعة المتقدمة فقط</a:t>
+                      </a:r>
+                      <a:endParaRPr lang="en-US" sz="1100" kern="100" dirty="0">
+                        <a:effectLst/>
+                        <a:latin typeface="Calibri" panose="020F0502020204030204" pitchFamily="34" charset="0"/>
+                        <a:ea typeface="Times New Roman" panose="02020603050405020304" pitchFamily="18" charset="0"/>
+                        <a:cs typeface="Arial" panose="020B0604020202020204" pitchFamily="34" charset="0"/>
+                      </a:endParaRPr>
+                    </a:p>
+                  </a:txBody>
+                  <a:tcPr marL="68580" marR="68580" marT="0" marB="0"/>
+                </a:tc>
+                <a:tc>
+                  <a:txBody>
+                    <a:bodyPr/>
+                    <a:lstStyle/>
+                    <a:p>
+                      <a:pPr algn="r" rtl="1">
+                        <a:lnSpc>
+                          <a:spcPct val="107000"/>
+                        </a:lnSpc>
+                        <a:spcAft>
+                          <a:spcPts val="800"/>
+                        </a:spcAft>
+                      </a:pPr>
+                      <a:r>
+                        <a:rPr lang="ar-SA" sz="1400" kern="100">
+                          <a:effectLst/>
+                        </a:rPr>
+                        <a:t>مدمجة أساسياً لتحليل المشاعر واستخراج الكلمات</a:t>
+                      </a:r>
+                      <a:endParaRPr lang="en-US" sz="1100" kern="100">
+                        <a:effectLst/>
+                        <a:latin typeface="Calibri" panose="020F0502020204030204" pitchFamily="34" charset="0"/>
+                        <a:ea typeface="Times New Roman" panose="02020603050405020304" pitchFamily="18" charset="0"/>
+                        <a:cs typeface="Arial" panose="020B0604020202020204" pitchFamily="34" charset="0"/>
+                      </a:endParaRPr>
+                    </a:p>
+                  </a:txBody>
+                  <a:tcPr marL="68580" marR="68580" marT="0" marB="0"/>
+                </a:tc>
+                <a:extLst>
+                  <a:ext uri="{0D108BD9-81ED-4DB2-BD59-A6C34878D82A}">
+                    <a16:rowId xmlns:a16="http://schemas.microsoft.com/office/drawing/2014/main" val="4126195494"/>
+                  </a:ext>
+                </a:extLst>
+              </a:tr>
+              <a:tr h="499668">
+                <a:tc>
+                  <a:txBody>
+                    <a:bodyPr/>
+                    <a:lstStyle/>
+                    <a:p>
+                      <a:pPr indent="457200" algn="l" rtl="0">
+                        <a:lnSpc>
+                          <a:spcPct val="107000"/>
+                        </a:lnSpc>
+                        <a:spcAft>
+                          <a:spcPts val="800"/>
+                        </a:spcAft>
+                      </a:pPr>
+                      <a:r>
+                        <a:rPr lang="ar-SA" sz="1400" kern="100" dirty="0">
+                          <a:effectLst/>
+                        </a:rPr>
+                        <a:t>بيئة ثنائية الأطراف</a:t>
+                      </a:r>
+                      <a:endParaRPr lang="en-US" sz="1100" kern="100" dirty="0">
+                        <a:effectLst/>
+                        <a:latin typeface="Calibri" panose="020F0502020204030204" pitchFamily="34" charset="0"/>
+                        <a:ea typeface="Times New Roman" panose="02020603050405020304" pitchFamily="18" charset="0"/>
+                        <a:cs typeface="Arial" panose="020B0604020202020204" pitchFamily="34" charset="0"/>
+                      </a:endParaRPr>
+                    </a:p>
+                  </a:txBody>
+                  <a:tcPr marL="68580" marR="68580" marT="0" marB="0"/>
+                </a:tc>
+                <a:tc>
+                  <a:txBody>
+                    <a:bodyPr/>
+                    <a:lstStyle/>
+                    <a:p>
+                      <a:pPr algn="r" rtl="1">
+                        <a:lnSpc>
+                          <a:spcPct val="107000"/>
+                        </a:lnSpc>
+                        <a:spcAft>
+                          <a:spcPts val="800"/>
+                        </a:spcAft>
+                      </a:pPr>
+                      <a:r>
+                        <a:rPr lang="ar-SA" sz="1400" kern="100" dirty="0">
+                          <a:effectLst/>
+                        </a:rPr>
+                        <a:t>لا (منصة من طرف واحد)</a:t>
+                      </a:r>
+                      <a:endParaRPr lang="en-US" sz="1100" kern="100" dirty="0">
+                        <a:effectLst/>
+                        <a:latin typeface="Calibri" panose="020F0502020204030204" pitchFamily="34" charset="0"/>
+                        <a:ea typeface="Times New Roman" panose="02020603050405020304" pitchFamily="18" charset="0"/>
+                        <a:cs typeface="Arial" panose="020B0604020202020204" pitchFamily="34" charset="0"/>
+                      </a:endParaRPr>
+                    </a:p>
+                  </a:txBody>
+                  <a:tcPr marL="68580" marR="68580" marT="0" marB="0"/>
+                </a:tc>
+                <a:tc>
+                  <a:txBody>
+                    <a:bodyPr/>
+                    <a:lstStyle/>
+                    <a:p>
+                      <a:pPr algn="r" rtl="1">
+                        <a:lnSpc>
+                          <a:spcPct val="107000"/>
+                        </a:lnSpc>
+                        <a:spcAft>
+                          <a:spcPts val="800"/>
+                        </a:spcAft>
+                      </a:pPr>
+                      <a:r>
+                        <a:rPr lang="ar-SA" sz="1400" kern="100" dirty="0">
+                          <a:effectLst/>
+                        </a:rPr>
+                        <a:t>لا (منصة من طرف واحد)</a:t>
+                      </a:r>
+                      <a:endParaRPr lang="en-US" sz="1100" kern="100" dirty="0">
+                        <a:effectLst/>
+                        <a:latin typeface="Calibri" panose="020F0502020204030204" pitchFamily="34" charset="0"/>
+                        <a:ea typeface="Times New Roman" panose="02020603050405020304" pitchFamily="18" charset="0"/>
+                        <a:cs typeface="Arial" panose="020B0604020202020204" pitchFamily="34" charset="0"/>
+                      </a:endParaRPr>
+                    </a:p>
+                  </a:txBody>
+                  <a:tcPr marL="68580" marR="68580" marT="0" marB="0"/>
+                </a:tc>
+                <a:tc>
+                  <a:txBody>
+                    <a:bodyPr/>
+                    <a:lstStyle/>
+                    <a:p>
+                      <a:pPr algn="r" rtl="1">
+                        <a:lnSpc>
+                          <a:spcPct val="107000"/>
+                        </a:lnSpc>
+                        <a:spcAft>
+                          <a:spcPts val="800"/>
+                        </a:spcAft>
+                      </a:pPr>
+                      <a:r>
+                        <a:rPr lang="ar-SA" sz="1400" kern="100">
+                          <a:effectLst/>
+                        </a:rPr>
+                        <a:t>نعم (تجمع مقدم الخدمة والمجيب في نفس البيئة)</a:t>
+                      </a:r>
+                      <a:endParaRPr lang="en-US" sz="1100" kern="100">
+                        <a:effectLst/>
+                        <a:latin typeface="Calibri" panose="020F0502020204030204" pitchFamily="34" charset="0"/>
+                        <a:ea typeface="Times New Roman" panose="02020603050405020304" pitchFamily="18" charset="0"/>
+                        <a:cs typeface="Arial" panose="020B0604020202020204" pitchFamily="34" charset="0"/>
+                      </a:endParaRPr>
+                    </a:p>
+                  </a:txBody>
+                  <a:tcPr marL="68580" marR="68580" marT="0" marB="0"/>
+                </a:tc>
+                <a:extLst>
+                  <a:ext uri="{0D108BD9-81ED-4DB2-BD59-A6C34878D82A}">
+                    <a16:rowId xmlns:a16="http://schemas.microsoft.com/office/drawing/2014/main" val="1413788431"/>
+                  </a:ext>
+                </a:extLst>
+              </a:tr>
+              <a:tr h="499668">
+                <a:tc>
+                  <a:txBody>
+                    <a:bodyPr/>
+                    <a:lstStyle/>
+                    <a:p>
+                      <a:pPr algn="r" rtl="1">
+                        <a:lnSpc>
+                          <a:spcPct val="107000"/>
+                        </a:lnSpc>
+                        <a:spcAft>
+                          <a:spcPts val="800"/>
+                        </a:spcAft>
+                      </a:pPr>
+                      <a:r>
+                        <a:rPr lang="ar-SA" sz="1400" kern="100">
+                          <a:effectLst/>
+                        </a:rPr>
+                        <a:t>التحقق من ديموغرافية المجيب</a:t>
+                      </a:r>
+                      <a:endParaRPr lang="en-US" sz="1100" kern="100">
+                        <a:effectLst/>
+                        <a:latin typeface="Calibri" panose="020F0502020204030204" pitchFamily="34" charset="0"/>
+                        <a:ea typeface="Times New Roman" panose="02020603050405020304" pitchFamily="18" charset="0"/>
+                        <a:cs typeface="Arial" panose="020B0604020202020204" pitchFamily="34" charset="0"/>
+                      </a:endParaRPr>
+                    </a:p>
+                  </a:txBody>
+                  <a:tcPr marL="68580" marR="68580" marT="0" marB="0"/>
+                </a:tc>
+                <a:tc>
+                  <a:txBody>
+                    <a:bodyPr/>
+                    <a:lstStyle/>
+                    <a:p>
+                      <a:pPr algn="r" rtl="1">
+                        <a:lnSpc>
+                          <a:spcPct val="107000"/>
+                        </a:lnSpc>
+                        <a:spcAft>
+                          <a:spcPts val="800"/>
+                        </a:spcAft>
+                      </a:pPr>
+                      <a:r>
+                        <a:rPr lang="ar-SA" sz="1400" kern="100" dirty="0">
+                          <a:effectLst/>
+                        </a:rPr>
+                        <a:t>معدوم (إلا إذا سُأل يدوياً)</a:t>
+                      </a:r>
+                      <a:endParaRPr lang="en-US" sz="1100" kern="100" dirty="0">
+                        <a:effectLst/>
+                        <a:latin typeface="Calibri" panose="020F0502020204030204" pitchFamily="34" charset="0"/>
+                        <a:ea typeface="Times New Roman" panose="02020603050405020304" pitchFamily="18" charset="0"/>
+                        <a:cs typeface="Arial" panose="020B0604020202020204" pitchFamily="34" charset="0"/>
+                      </a:endParaRPr>
+                    </a:p>
+                  </a:txBody>
+                  <a:tcPr marL="68580" marR="68580" marT="0" marB="0"/>
+                </a:tc>
+                <a:tc>
+                  <a:txBody>
+                    <a:bodyPr/>
+                    <a:lstStyle/>
+                    <a:p>
+                      <a:pPr algn="r" rtl="1">
+                        <a:lnSpc>
+                          <a:spcPct val="107000"/>
+                        </a:lnSpc>
+                        <a:spcAft>
+                          <a:spcPts val="800"/>
+                        </a:spcAft>
+                      </a:pPr>
+                      <a:r>
+                        <a:rPr lang="ar-SA" sz="1400" kern="100">
+                          <a:effectLst/>
+                        </a:rPr>
+                        <a:t>متوفر بشروط مسبقة</a:t>
+                      </a:r>
+                      <a:endParaRPr lang="en-US" sz="1100" kern="100">
+                        <a:effectLst/>
+                        <a:latin typeface="Calibri" panose="020F0502020204030204" pitchFamily="34" charset="0"/>
+                        <a:ea typeface="Times New Roman" panose="02020603050405020304" pitchFamily="18" charset="0"/>
+                        <a:cs typeface="Arial" panose="020B0604020202020204" pitchFamily="34" charset="0"/>
+                      </a:endParaRPr>
+                    </a:p>
+                  </a:txBody>
+                  <a:tcPr marL="68580" marR="68580" marT="0" marB="0"/>
+                </a:tc>
+                <a:tc>
+                  <a:txBody>
+                    <a:bodyPr/>
+                    <a:lstStyle/>
+                    <a:p>
+                      <a:pPr algn="r" rtl="1">
+                        <a:lnSpc>
+                          <a:spcPct val="107000"/>
+                        </a:lnSpc>
+                        <a:spcAft>
+                          <a:spcPts val="800"/>
+                        </a:spcAft>
+                      </a:pPr>
+                      <a:r>
+                        <a:rPr lang="ar-SA" sz="1400" kern="100">
+                          <a:effectLst/>
+                        </a:rPr>
+                        <a:t>دقيق وآلي عبر بيانات الملف الشخصي</a:t>
+                      </a:r>
+                      <a:endParaRPr lang="en-US" sz="1100" kern="100">
+                        <a:effectLst/>
+                        <a:latin typeface="Calibri" panose="020F0502020204030204" pitchFamily="34" charset="0"/>
+                        <a:ea typeface="Times New Roman" panose="02020603050405020304" pitchFamily="18" charset="0"/>
+                        <a:cs typeface="Arial" panose="020B0604020202020204" pitchFamily="34" charset="0"/>
+                      </a:endParaRPr>
+                    </a:p>
+                  </a:txBody>
+                  <a:tcPr marL="68580" marR="68580" marT="0" marB="0"/>
+                </a:tc>
+                <a:extLst>
+                  <a:ext uri="{0D108BD9-81ED-4DB2-BD59-A6C34878D82A}">
+                    <a16:rowId xmlns:a16="http://schemas.microsoft.com/office/drawing/2014/main" val="3981537844"/>
+                  </a:ext>
+                </a:extLst>
+              </a:tr>
+              <a:tr h="499668">
+                <a:tc>
+                  <a:txBody>
+                    <a:bodyPr/>
+                    <a:lstStyle/>
+                    <a:p>
+                      <a:pPr algn="r" rtl="1">
+                        <a:lnSpc>
+                          <a:spcPct val="107000"/>
+                        </a:lnSpc>
+                        <a:spcAft>
+                          <a:spcPts val="800"/>
+                        </a:spcAft>
+                      </a:pPr>
+                      <a:r>
+                        <a:rPr lang="ar-SA" sz="1400" kern="100">
+                          <a:effectLst/>
+                        </a:rPr>
+                        <a:t>لوحات التحكم</a:t>
+                      </a:r>
+                      <a:r>
+                        <a:rPr lang="en-US" sz="1400" kern="100">
+                          <a:effectLst/>
+                        </a:rPr>
+                        <a:t> (Dashboards)</a:t>
+                      </a:r>
+                      <a:endParaRPr lang="en-US" sz="1100" kern="100">
+                        <a:effectLst/>
+                        <a:latin typeface="Calibri" panose="020F0502020204030204" pitchFamily="34" charset="0"/>
+                        <a:ea typeface="Times New Roman" panose="02020603050405020304" pitchFamily="18" charset="0"/>
+                        <a:cs typeface="Arial" panose="020B0604020202020204" pitchFamily="34" charset="0"/>
+                      </a:endParaRPr>
+                    </a:p>
+                  </a:txBody>
+                  <a:tcPr marL="68580" marR="68580" marT="0" marB="0"/>
+                </a:tc>
+                <a:tc>
+                  <a:txBody>
+                    <a:bodyPr/>
+                    <a:lstStyle/>
+                    <a:p>
+                      <a:pPr algn="r" rtl="1">
+                        <a:lnSpc>
+                          <a:spcPct val="107000"/>
+                        </a:lnSpc>
+                        <a:spcAft>
+                          <a:spcPts val="800"/>
+                        </a:spcAft>
+                      </a:pPr>
+                      <a:r>
+                        <a:rPr lang="ar-SA" sz="1400" kern="100">
+                          <a:effectLst/>
+                        </a:rPr>
+                        <a:t>أساسية جداً للأسئلة المغلقة</a:t>
+                      </a:r>
+                      <a:endParaRPr lang="en-US" sz="1100" kern="100">
+                        <a:effectLst/>
+                        <a:latin typeface="Calibri" panose="020F0502020204030204" pitchFamily="34" charset="0"/>
+                        <a:ea typeface="Times New Roman" panose="02020603050405020304" pitchFamily="18" charset="0"/>
+                        <a:cs typeface="Arial" panose="020B0604020202020204" pitchFamily="34" charset="0"/>
+                      </a:endParaRPr>
+                    </a:p>
+                  </a:txBody>
+                  <a:tcPr marL="68580" marR="68580" marT="0" marB="0"/>
+                </a:tc>
+                <a:tc>
+                  <a:txBody>
+                    <a:bodyPr/>
+                    <a:lstStyle/>
+                    <a:p>
+                      <a:pPr algn="r" rtl="1">
+                        <a:lnSpc>
+                          <a:spcPct val="107000"/>
+                        </a:lnSpc>
+                        <a:spcAft>
+                          <a:spcPts val="800"/>
+                        </a:spcAft>
+                      </a:pPr>
+                      <a:r>
+                        <a:rPr lang="ar-SA" sz="1400" kern="100">
+                          <a:effectLst/>
+                        </a:rPr>
+                        <a:t>متقدمة واحترافية</a:t>
+                      </a:r>
+                      <a:endParaRPr lang="en-US" sz="1100" kern="100">
+                        <a:effectLst/>
+                        <a:latin typeface="Calibri" panose="020F0502020204030204" pitchFamily="34" charset="0"/>
+                        <a:ea typeface="Times New Roman" panose="02020603050405020304" pitchFamily="18" charset="0"/>
+                        <a:cs typeface="Arial" panose="020B0604020202020204" pitchFamily="34" charset="0"/>
+                      </a:endParaRPr>
+                    </a:p>
+                  </a:txBody>
+                  <a:tcPr marL="68580" marR="68580" marT="0" marB="0"/>
+                </a:tc>
+                <a:tc>
+                  <a:txBody>
+                    <a:bodyPr/>
+                    <a:lstStyle/>
+                    <a:p>
+                      <a:pPr algn="r" rtl="1">
+                        <a:lnSpc>
+                          <a:spcPct val="107000"/>
+                        </a:lnSpc>
+                        <a:spcAft>
+                          <a:spcPts val="800"/>
+                        </a:spcAft>
+                      </a:pPr>
+                      <a:r>
+                        <a:rPr lang="ar-SA" sz="1400" kern="100" dirty="0">
+                          <a:effectLst/>
+                        </a:rPr>
+                        <a:t>دقيق وآلي عبر بيانات الملف الشخصي</a:t>
+                      </a:r>
+                      <a:endParaRPr lang="en-US" sz="1100" kern="100" dirty="0">
+                        <a:effectLst/>
+                        <a:latin typeface="Calibri" panose="020F0502020204030204" pitchFamily="34" charset="0"/>
+                        <a:ea typeface="Times New Roman" panose="02020603050405020304" pitchFamily="18" charset="0"/>
+                        <a:cs typeface="Arial" panose="020B0604020202020204" pitchFamily="34" charset="0"/>
+                      </a:endParaRPr>
+                    </a:p>
+                  </a:txBody>
+                  <a:tcPr marL="68580" marR="68580" marT="0" marB="0"/>
+                </a:tc>
+                <a:extLst>
+                  <a:ext uri="{0D108BD9-81ED-4DB2-BD59-A6C34878D82A}">
+                    <a16:rowId xmlns:a16="http://schemas.microsoft.com/office/drawing/2014/main" val="2921866674"/>
+                  </a:ext>
+                </a:extLst>
+              </a:tr>
+            </a:tbl>
+          </a:graphicData>
+        </a:graphic>
+      </p:graphicFrame>
+      <p:sp>
+        <p:nvSpPr>
+          <p:cNvPr id="3" name="Rectangle 1">
+            <a:extLst>
+              <a:ext uri="{FF2B5EF4-FFF2-40B4-BE49-F238E27FC236}">
+                <a16:creationId xmlns:a16="http://schemas.microsoft.com/office/drawing/2014/main" id="{AB6EE6E6-A843-67E4-5B43-A9EC121EE565}"/>
+              </a:ext>
+            </a:extLst>
+          </p:cNvPr>
+          <p:cNvSpPr>
+            <a:spLocks noChangeArrowheads="1"/>
+          </p:cNvSpPr>
+          <p:nvPr/>
+        </p:nvSpPr>
+        <p:spPr bwMode="auto">
+          <a:xfrm>
+            <a:off x="4288366" y="6339983"/>
+            <a:ext cx="3615267" cy="369283"/>
+          </a:xfrm>
+          <a:prstGeom prst="rect">
+            <a:avLst/>
+          </a:prstGeom>
+          <a:noFill/>
+          <a:ln>
+            <a:noFill/>
+          </a:ln>
+          <a:effectLst/>
+          <a:extLst>
+            <a:ext uri="{909E8E84-426E-40DD-AFC4-6F175D3DCCD1}">
+              <a14:hiddenFill xmlns:a14="http://schemas.microsoft.com/office/drawing/2010/main">
+                <a:solidFill>
+                  <a:schemeClr val="accent1"/>
+                </a:solidFill>
+              </a14:hiddenFill>
+            </a:ext>
+            <a:ext uri="{91240B29-F687-4F45-9708-019B960494DF}">
+              <a14:hiddenLine xmlns:a14="http://schemas.microsoft.com/office/drawing/2010/main" w="9525">
+                <a:solidFill>
+                  <a:schemeClr val="tx1"/>
+                </a:solidFill>
+                <a:miter lim="800000"/>
+                <a:headEnd/>
+                <a:tailEnd/>
+              </a14:hiddenLine>
+            </a:ext>
+            <a:ext uri="{AF507438-7753-43E0-B8FC-AC1667EBCBE1}">
+              <a14:hiddenEffects xmlns:a14="http://schemas.microsoft.com/office/drawing/2010/main">
+                <a:effectLst>
+                  <a:outerShdw dist="35921" dir="2700000" algn="ctr" rotWithShape="0">
+                    <a:schemeClr val="bg2"/>
+                  </a:outerShdw>
+                </a:effectLst>
+              </a14:hiddenEffects>
+            </a:ext>
+          </a:extLst>
+        </p:spPr>
+        <p:txBody>
+          <a:bodyPr vert="horz" wrap="square" lIns="91440" tIns="101568" rIns="91440" bIns="50784" numCol="1" anchor="ctr" anchorCtr="0" compatLnSpc="1">
+            <a:prstTxWarp prst="textNoShape">
+              <a:avLst/>
+            </a:prstTxWarp>
+            <a:spAutoFit/>
+          </a:bodyPr>
+          <a:lstStyle>
+            <a:lvl1pPr indent="457200" algn="l" rtl="0" eaLnBrk="0" fontAlgn="base" hangingPunct="0">
+              <a:spcBef>
+                <a:spcPct val="0"/>
+              </a:spcBef>
+              <a:spcAft>
+                <a:spcPct val="0"/>
+              </a:spcAft>
+              <a:defRPr>
+                <a:solidFill>
+                  <a:schemeClr val="tx1"/>
+                </a:solidFill>
+                <a:latin typeface="Arial" panose="020B0604020202020204" pitchFamily="34" charset="0"/>
+              </a:defRPr>
+            </a:lvl1pPr>
+            <a:lvl2pPr algn="l" rtl="0" eaLnBrk="0" fontAlgn="base" hangingPunct="0">
+              <a:spcBef>
+                <a:spcPct val="0"/>
+              </a:spcBef>
+              <a:spcAft>
+                <a:spcPct val="0"/>
+              </a:spcAft>
+              <a:defRPr>
+                <a:solidFill>
+                  <a:schemeClr val="tx1"/>
+                </a:solidFill>
+                <a:latin typeface="Arial" panose="020B0604020202020204" pitchFamily="34" charset="0"/>
+              </a:defRPr>
+            </a:lvl2pPr>
+            <a:lvl3pPr algn="l" rtl="0" eaLnBrk="0" fontAlgn="base" hangingPunct="0">
+              <a:spcBef>
+                <a:spcPct val="0"/>
+              </a:spcBef>
+              <a:spcAft>
+                <a:spcPct val="0"/>
+              </a:spcAft>
+              <a:defRPr>
+                <a:solidFill>
+                  <a:schemeClr val="tx1"/>
+                </a:solidFill>
+                <a:latin typeface="Arial" panose="020B0604020202020204" pitchFamily="34" charset="0"/>
+              </a:defRPr>
+            </a:lvl3pPr>
+            <a:lvl4pPr algn="l" rtl="0" eaLnBrk="0" fontAlgn="base" hangingPunct="0">
+              <a:spcBef>
+                <a:spcPct val="0"/>
+              </a:spcBef>
+              <a:spcAft>
+                <a:spcPct val="0"/>
+              </a:spcAft>
+              <a:defRPr>
+                <a:solidFill>
+                  <a:schemeClr val="tx1"/>
+                </a:solidFill>
+                <a:latin typeface="Arial" panose="020B0604020202020204" pitchFamily="34" charset="0"/>
+              </a:defRPr>
+            </a:lvl4pPr>
+            <a:lvl5pPr algn="l" rtl="0" eaLnBrk="0" fontAlgn="base" hangingPunct="0">
+              <a:spcBef>
+                <a:spcPct val="0"/>
+              </a:spcBef>
+              <a:spcAft>
+                <a:spcPct val="0"/>
+              </a:spcAft>
+              <a:defRPr>
+                <a:solidFill>
+                  <a:schemeClr val="tx1"/>
+                </a:solidFill>
+                <a:latin typeface="Arial" panose="020B0604020202020204" pitchFamily="34" charset="0"/>
+              </a:defRPr>
+            </a:lvl5pPr>
+            <a:lvl6pPr algn="l" rtl="0" eaLnBrk="0" fontAlgn="base" hangingPunct="0">
+              <a:spcBef>
+                <a:spcPct val="0"/>
+              </a:spcBef>
+              <a:spcAft>
+                <a:spcPct val="0"/>
+              </a:spcAft>
+              <a:defRPr>
+                <a:solidFill>
+                  <a:schemeClr val="tx1"/>
+                </a:solidFill>
+                <a:latin typeface="Arial" panose="020B0604020202020204" pitchFamily="34" charset="0"/>
+              </a:defRPr>
+            </a:lvl6pPr>
+            <a:lvl7pPr algn="l" rtl="0" eaLnBrk="0" fontAlgn="base" hangingPunct="0">
+              <a:spcBef>
+                <a:spcPct val="0"/>
+              </a:spcBef>
+              <a:spcAft>
+                <a:spcPct val="0"/>
+              </a:spcAft>
+              <a:defRPr>
+                <a:solidFill>
+                  <a:schemeClr val="tx1"/>
+                </a:solidFill>
+                <a:latin typeface="Arial" panose="020B0604020202020204" pitchFamily="34" charset="0"/>
+              </a:defRPr>
+            </a:lvl7pPr>
+            <a:lvl8pPr algn="l" rtl="0" eaLnBrk="0" fontAlgn="base" hangingPunct="0">
+              <a:spcBef>
+                <a:spcPct val="0"/>
+              </a:spcBef>
+              <a:spcAft>
+                <a:spcPct val="0"/>
+              </a:spcAft>
+              <a:defRPr>
+                <a:solidFill>
+                  <a:schemeClr val="tx1"/>
+                </a:solidFill>
+                <a:latin typeface="Arial" panose="020B0604020202020204" pitchFamily="34" charset="0"/>
+              </a:defRPr>
+            </a:lvl8pPr>
+            <a:lvl9pPr algn="l" rtl="0" eaLnBrk="0" fontAlgn="base" hangingPunct="0">
+              <a:spcBef>
+                <a:spcPct val="0"/>
+              </a:spcBef>
+              <a:spcAft>
+                <a:spcPct val="0"/>
+              </a:spcAft>
+              <a:defRPr>
+                <a:solidFill>
+                  <a:schemeClr val="tx1"/>
+                </a:solidFill>
+                <a:latin typeface="Arial" panose="020B0604020202020204" pitchFamily="34" charset="0"/>
+              </a:defRPr>
+            </a:lvl9pPr>
+          </a:lstStyle>
+          <a:p>
+            <a:pPr marL="0" marR="0" lvl="0" indent="457200" algn="l" defTabSz="914400" eaLnBrk="0" fontAlgn="base" latinLnBrk="0" hangingPunct="0">
+              <a:lnSpc>
+                <a:spcPct val="100000"/>
+              </a:lnSpc>
+              <a:spcBef>
+                <a:spcPct val="0"/>
+              </a:spcBef>
+              <a:spcAft>
+                <a:spcPct val="0"/>
+              </a:spcAft>
+              <a:buClrTx/>
+              <a:buSzTx/>
+              <a:buFontTx/>
+              <a:buNone/>
+              <a:tabLst/>
+            </a:pPr>
+            <a:r>
+              <a:rPr kumimoji="0" lang="ar-SA" altLang="ar-SA" sz="1400" b="0" i="0" u="none" strike="noStrike" cap="none" normalizeH="0" baseline="0" dirty="0" bmk="">
+                <a:ln>
+                  <a:noFill/>
+                </a:ln>
+                <a:solidFill>
+                  <a:schemeClr val="tx1"/>
+                </a:solidFill>
+                <a:effectLst/>
+                <a:latin typeface="Calibri" panose="020F0502020204030204" pitchFamily="34" charset="0"/>
+                <a:ea typeface="Times New Roman" panose="02020603050405020304" pitchFamily="18" charset="0"/>
+                <a:cs typeface="Times New Roman" panose="02020603050405020304" pitchFamily="18" charset="0"/>
+              </a:rPr>
+              <a:t>جدول: مقارنة بين المنصة المقترحة والأنظمة الحالية</a:t>
+            </a:r>
+            <a:endParaRPr kumimoji="0" lang="en-US" altLang="ar-SA" sz="1400" b="0" i="0" u="none" strike="noStrike" cap="none" normalizeH="0" baseline="0" dirty="0">
+              <a:ln>
+                <a:noFill/>
+              </a:ln>
+              <a:solidFill>
+                <a:srgbClr val="2F5496"/>
+              </a:solidFill>
+              <a:effectLst/>
+              <a:latin typeface="Calibri" panose="020F0502020204030204" pitchFamily="34" charset="0"/>
+              <a:ea typeface="Times New Roman" panose="02020603050405020304" pitchFamily="18" charset="0"/>
+              <a:cs typeface="Times New Roman" panose="02020603050405020304" pitchFamily="18" charset="0"/>
+            </a:endParaRPr>
           </a:p>
         </p:txBody>
       </p:sp>
@@ -4555,6 +5637,196 @@
           <a:chExt cx="0" cy="0"/>
         </a:xfrm>
       </p:grpSpPr>
+      <p:sp>
+        <p:nvSpPr>
+          <p:cNvPr id="3" name="مربع نص 2">
+            <a:extLst>
+              <a:ext uri="{FF2B5EF4-FFF2-40B4-BE49-F238E27FC236}">
+                <a16:creationId xmlns:a16="http://schemas.microsoft.com/office/drawing/2014/main" id="{590F3AF2-F4E8-4B17-0D30-4D06D9D13AB2}"/>
+              </a:ext>
+            </a:extLst>
+          </p:cNvPr>
+          <p:cNvSpPr txBox="1"/>
+          <p:nvPr/>
+        </p:nvSpPr>
+        <p:spPr>
+          <a:xfrm>
+            <a:off x="1024468" y="256739"/>
+            <a:ext cx="10312398" cy="2995692"/>
+          </a:xfrm>
+          <a:prstGeom prst="rect">
+            <a:avLst/>
+          </a:prstGeom>
+          <a:noFill/>
+        </p:spPr>
+        <p:txBody>
+          <a:bodyPr wrap="square">
+            <a:spAutoFit/>
+          </a:bodyPr>
+          <a:lstStyle/>
+          <a:p>
+            <a:pPr>
+              <a:lnSpc>
+                <a:spcPct val="150000"/>
+              </a:lnSpc>
+            </a:pPr>
+            <a:r>
+              <a:rPr lang="ar-SA" sz="2000" b="1" dirty="0">
+                <a:solidFill>
+                  <a:schemeClr val="accent1"/>
+                </a:solidFill>
+              </a:rPr>
+              <a:t>بيئة العمل والتقنيات </a:t>
+            </a:r>
+          </a:p>
+          <a:p>
+            <a:pPr>
+              <a:lnSpc>
+                <a:spcPct val="150000"/>
+              </a:lnSpc>
+            </a:pPr>
+            <a:r>
+              <a:rPr lang="ar-SA" b="1" dirty="0"/>
+              <a:t>الواجهة الخلفية (</a:t>
+            </a:r>
+            <a:r>
+              <a:rPr lang="en-US" b="1" dirty="0"/>
+              <a:t> :(Backend</a:t>
+            </a:r>
+            <a:r>
+              <a:rPr lang="ar-SA" dirty="0"/>
+              <a:t>لغة البرمجة </a:t>
+            </a:r>
+            <a:r>
+              <a:rPr lang="en-US" b="1" dirty="0"/>
+              <a:t>Python</a:t>
+            </a:r>
+            <a:r>
+              <a:rPr lang="en-US" dirty="0"/>
+              <a:t> </a:t>
+            </a:r>
+            <a:r>
+              <a:rPr lang="ar-SA" dirty="0"/>
+              <a:t> بالاعتماد على إطار العمل </a:t>
+            </a:r>
+            <a:r>
+              <a:rPr lang="en-US" dirty="0"/>
+              <a:t> (</a:t>
+            </a:r>
+            <a:r>
+              <a:rPr lang="en-US" b="1" dirty="0"/>
+              <a:t>Django)</a:t>
+            </a:r>
+            <a:r>
+              <a:rPr lang="ar-SA" dirty="0"/>
+              <a:t>لبناء بنية تحتية قوية، آمنة، وقابلة للتوسع.</a:t>
+            </a:r>
+          </a:p>
+          <a:p>
+            <a:pPr>
+              <a:lnSpc>
+                <a:spcPct val="150000"/>
+              </a:lnSpc>
+              <a:buFont typeface="Arial" panose="020B0604020202020204" pitchFamily="34" charset="0"/>
+              <a:buChar char="•"/>
+            </a:pPr>
+            <a:r>
+              <a:rPr lang="ar-SA" b="1" dirty="0"/>
+              <a:t>قواعد البيانات </a:t>
+            </a:r>
+            <a:r>
+              <a:rPr lang="en-US" b="1" dirty="0"/>
+              <a:t> :(Database)</a:t>
+            </a:r>
+            <a:r>
+              <a:rPr lang="ar-SA" dirty="0"/>
+              <a:t>قواعد بيانات علائقية</a:t>
+            </a:r>
+            <a:r>
+              <a:rPr lang="en-US" dirty="0"/>
+              <a:t> (</a:t>
+            </a:r>
+            <a:r>
+              <a:rPr lang="en-US" b="1" dirty="0"/>
+              <a:t>SQL) </a:t>
+            </a:r>
+            <a:r>
+              <a:rPr lang="ar-SA" dirty="0"/>
+              <a:t>لإدارة الملفات الشخصية، شروط الاستهداف، والردود بدقة وموثوقية).</a:t>
+            </a:r>
+          </a:p>
+          <a:p>
+            <a:pPr>
+              <a:lnSpc>
+                <a:spcPct val="150000"/>
+              </a:lnSpc>
+              <a:buFont typeface="Arial" panose="020B0604020202020204" pitchFamily="34" charset="0"/>
+              <a:buChar char="•"/>
+            </a:pPr>
+            <a:r>
+              <a:rPr lang="ar-SA" b="1" dirty="0"/>
+              <a:t>الواجهة الأمامية (</a:t>
+            </a:r>
+            <a:r>
+              <a:rPr lang="en-US" b="1" dirty="0"/>
+              <a:t>Frontend</a:t>
+            </a:r>
+            <a:r>
+              <a:rPr lang="ar-SA" b="1" dirty="0"/>
+              <a:t>): </a:t>
+            </a:r>
+            <a:r>
+              <a:rPr lang="ar-SA" dirty="0"/>
+              <a:t>تقنيات الويب القياسية </a:t>
+            </a:r>
+            <a:r>
+              <a:rPr lang="en-US" dirty="0"/>
+              <a:t> (HTML, CSS, JavaScript) </a:t>
+            </a:r>
+            <a:r>
+              <a:rPr lang="ar-SA" dirty="0"/>
+              <a:t>لتصميم واجهات مستخدم (</a:t>
+            </a:r>
+            <a:r>
+              <a:rPr lang="en-US" dirty="0"/>
+              <a:t>UI</a:t>
+            </a:r>
+            <a:r>
+              <a:rPr lang="ar-SA" dirty="0"/>
+              <a:t>) متجاوبة وسهلة الاستخدام.</a:t>
+            </a:r>
+          </a:p>
+          <a:p>
+            <a:pPr>
+              <a:lnSpc>
+                <a:spcPct val="150000"/>
+              </a:lnSpc>
+              <a:buFont typeface="Arial" panose="020B0604020202020204" pitchFamily="34" charset="0"/>
+              <a:buChar char="•"/>
+            </a:pPr>
+            <a:r>
+              <a:rPr lang="ar-SA" b="1" dirty="0"/>
+              <a:t>الذكاء الاصطناعي (</a:t>
+            </a:r>
+            <a:r>
+              <a:rPr lang="en-US" b="1" dirty="0"/>
+              <a:t> :(AI &amp; NLP</a:t>
+            </a:r>
+            <a:r>
+              <a:rPr lang="ar-SA" dirty="0"/>
+              <a:t>استغلال بيئة </a:t>
+            </a:r>
+            <a:r>
+              <a:rPr lang="en-US" dirty="0"/>
+              <a:t> Python </a:t>
+            </a:r>
+            <a:r>
+              <a:rPr lang="ar-SA" dirty="0"/>
+              <a:t>لدمج مكتبات ونماذج معالجة اللغات الطبيعية (لتحليل المشاعر واستخراج التوجهات).</a:t>
+            </a:r>
+          </a:p>
+        </p:txBody>
+      </p:sp>
     </p:spTree>
     <p:extLst>
       <p:ext uri="{BB962C8B-B14F-4D97-AF65-F5344CB8AC3E}">

--- a/Smart Opinion Survey Platform.pptx
+++ b/Smart Opinion Survey Platform.pptx
@@ -11,6 +11,10 @@
     <p:sldId id="259" r:id="rId5"/>
     <p:sldId id="260" r:id="rId6"/>
     <p:sldId id="261" r:id="rId7"/>
+    <p:sldId id="263" r:id="rId8"/>
+    <p:sldId id="264" r:id="rId9"/>
+    <p:sldId id="262" r:id="rId10"/>
+    <p:sldId id="265" r:id="rId11"/>
   </p:sldIdLst>
   <p:sldSz cx="12192000" cy="6858000"/>
   <p:notesSz cx="6858000" cy="9144000"/>
@@ -264,7 +268,7 @@
           <a:p>
             <a:fld id="{096A8431-2457-4B17-8EAD-CB7DD7790385}" type="datetimeFigureOut">
               <a:rPr lang="ar-SA" smtClean="0"/>
-              <a:t>18/09/47</a:t>
+              <a:t>19/09/47</a:t>
             </a:fld>
             <a:endParaRPr lang="ar-SA"/>
           </a:p>
@@ -462,7 +466,7 @@
           <a:p>
             <a:fld id="{096A8431-2457-4B17-8EAD-CB7DD7790385}" type="datetimeFigureOut">
               <a:rPr lang="ar-SA" smtClean="0"/>
-              <a:t>18/09/47</a:t>
+              <a:t>19/09/47</a:t>
             </a:fld>
             <a:endParaRPr lang="ar-SA"/>
           </a:p>
@@ -670,7 +674,7 @@
           <a:p>
             <a:fld id="{096A8431-2457-4B17-8EAD-CB7DD7790385}" type="datetimeFigureOut">
               <a:rPr lang="ar-SA" smtClean="0"/>
-              <a:t>18/09/47</a:t>
+              <a:t>19/09/47</a:t>
             </a:fld>
             <a:endParaRPr lang="ar-SA"/>
           </a:p>
@@ -868,7 +872,7 @@
           <a:p>
             <a:fld id="{096A8431-2457-4B17-8EAD-CB7DD7790385}" type="datetimeFigureOut">
               <a:rPr lang="ar-SA" smtClean="0"/>
-              <a:t>18/09/47</a:t>
+              <a:t>19/09/47</a:t>
             </a:fld>
             <a:endParaRPr lang="ar-SA"/>
           </a:p>
@@ -1143,7 +1147,7 @@
           <a:p>
             <a:fld id="{096A8431-2457-4B17-8EAD-CB7DD7790385}" type="datetimeFigureOut">
               <a:rPr lang="ar-SA" smtClean="0"/>
-              <a:t>18/09/47</a:t>
+              <a:t>19/09/47</a:t>
             </a:fld>
             <a:endParaRPr lang="ar-SA"/>
           </a:p>
@@ -1408,7 +1412,7 @@
           <a:p>
             <a:fld id="{096A8431-2457-4B17-8EAD-CB7DD7790385}" type="datetimeFigureOut">
               <a:rPr lang="ar-SA" smtClean="0"/>
-              <a:t>18/09/47</a:t>
+              <a:t>19/09/47</a:t>
             </a:fld>
             <a:endParaRPr lang="ar-SA"/>
           </a:p>
@@ -1820,7 +1824,7 @@
           <a:p>
             <a:fld id="{096A8431-2457-4B17-8EAD-CB7DD7790385}" type="datetimeFigureOut">
               <a:rPr lang="ar-SA" smtClean="0"/>
-              <a:t>18/09/47</a:t>
+              <a:t>19/09/47</a:t>
             </a:fld>
             <a:endParaRPr lang="ar-SA"/>
           </a:p>
@@ -1961,7 +1965,7 @@
           <a:p>
             <a:fld id="{096A8431-2457-4B17-8EAD-CB7DD7790385}" type="datetimeFigureOut">
               <a:rPr lang="ar-SA" smtClean="0"/>
-              <a:t>18/09/47</a:t>
+              <a:t>19/09/47</a:t>
             </a:fld>
             <a:endParaRPr lang="ar-SA"/>
           </a:p>
@@ -2074,7 +2078,7 @@
           <a:p>
             <a:fld id="{096A8431-2457-4B17-8EAD-CB7DD7790385}" type="datetimeFigureOut">
               <a:rPr lang="ar-SA" smtClean="0"/>
-              <a:t>18/09/47</a:t>
+              <a:t>19/09/47</a:t>
             </a:fld>
             <a:endParaRPr lang="ar-SA"/>
           </a:p>
@@ -2385,7 +2389,7 @@
           <a:p>
             <a:fld id="{096A8431-2457-4B17-8EAD-CB7DD7790385}" type="datetimeFigureOut">
               <a:rPr lang="ar-SA" smtClean="0"/>
-              <a:t>18/09/47</a:t>
+              <a:t>19/09/47</a:t>
             </a:fld>
             <a:endParaRPr lang="ar-SA"/>
           </a:p>
@@ -2673,7 +2677,7 @@
           <a:p>
             <a:fld id="{096A8431-2457-4B17-8EAD-CB7DD7790385}" type="datetimeFigureOut">
               <a:rPr lang="ar-SA" smtClean="0"/>
-              <a:t>18/09/47</a:t>
+              <a:t>19/09/47</a:t>
             </a:fld>
             <a:endParaRPr lang="ar-SA"/>
           </a:p>
@@ -2914,7 +2918,7 @@
           <a:p>
             <a:fld id="{096A8431-2457-4B17-8EAD-CB7DD7790385}" type="datetimeFigureOut">
               <a:rPr lang="ar-SA" smtClean="0"/>
-              <a:t>18/09/47</a:t>
+              <a:t>19/09/47</a:t>
             </a:fld>
             <a:endParaRPr lang="ar-SA"/>
           </a:p>
@@ -3685,6 +3689,83 @@
 </p:sld>
 </file>
 
+<file path=ppt/slides/slide10.xml><?xml version="1.0" encoding="utf-8"?>
+<p:sld xmlns:a="http://schemas.openxmlformats.org/drawingml/2006/main" xmlns:r="http://schemas.openxmlformats.org/officeDocument/2006/relationships" xmlns:p="http://schemas.openxmlformats.org/presentationml/2006/main">
+  <p:cSld>
+    <p:spTree>
+      <p:nvGrpSpPr>
+        <p:cNvPr id="1" name=""/>
+        <p:cNvGrpSpPr/>
+        <p:nvPr/>
+      </p:nvGrpSpPr>
+      <p:grpSpPr>
+        <a:xfrm>
+          <a:off x="0" y="0"/>
+          <a:ext cx="0" cy="0"/>
+          <a:chOff x="0" y="0"/>
+          <a:chExt cx="0" cy="0"/>
+        </a:xfrm>
+      </p:grpSpPr>
+      <p:pic>
+        <p:nvPicPr>
+          <p:cNvPr id="3074" name="Picture 2">
+            <a:extLst>
+              <a:ext uri="{FF2B5EF4-FFF2-40B4-BE49-F238E27FC236}">
+                <a16:creationId xmlns:a16="http://schemas.microsoft.com/office/drawing/2014/main" id="{8DD57BF0-A466-1E14-8F00-579B0A9C3D84}"/>
+              </a:ext>
+            </a:extLst>
+          </p:cNvPr>
+          <p:cNvPicPr>
+            <a:picLocks noChangeAspect="1" noChangeArrowheads="1"/>
+          </p:cNvPicPr>
+          <p:nvPr/>
+        </p:nvPicPr>
+        <p:blipFill>
+          <a:blip r:embed="rId2">
+            <a:extLst>
+              <a:ext uri="{28A0092B-C50C-407E-A947-70E740481C1C}">
+                <a14:useLocalDpi xmlns:a14="http://schemas.microsoft.com/office/drawing/2010/main" val="0"/>
+              </a:ext>
+            </a:extLst>
+          </a:blip>
+          <a:srcRect/>
+          <a:stretch>
+            <a:fillRect/>
+          </a:stretch>
+        </p:blipFill>
+        <p:spPr bwMode="auto">
+          <a:xfrm>
+            <a:off x="1390261" y="0"/>
+            <a:ext cx="10245011" cy="6858000"/>
+          </a:xfrm>
+          <a:prstGeom prst="rect">
+            <a:avLst/>
+          </a:prstGeom>
+          <a:noFill/>
+          <a:extLst>
+            <a:ext uri="{909E8E84-426E-40DD-AFC4-6F175D3DCCD1}">
+              <a14:hiddenFill xmlns:a14="http://schemas.microsoft.com/office/drawing/2010/main">
+                <a:solidFill>
+                  <a:srgbClr val="FFFFFF"/>
+                </a:solidFill>
+              </a14:hiddenFill>
+            </a:ext>
+          </a:extLst>
+        </p:spPr>
+      </p:pic>
+    </p:spTree>
+    <p:extLst>
+      <p:ext uri="{BB962C8B-B14F-4D97-AF65-F5344CB8AC3E}">
+        <p14:creationId xmlns:p14="http://schemas.microsoft.com/office/powerpoint/2010/main" val="1238364110"/>
+      </p:ext>
+    </p:extLst>
+  </p:cSld>
+  <p:clrMapOvr>
+    <a:masterClrMapping/>
+  </p:clrMapOvr>
+</p:sld>
+</file>
+
 <file path=ppt/slides/slide2.xml><?xml version="1.0" encoding="utf-8"?>
 <p:sld xmlns:a="http://schemas.openxmlformats.org/drawingml/2006/main" xmlns:r="http://schemas.openxmlformats.org/officeDocument/2006/relationships" xmlns:p="http://schemas.openxmlformats.org/presentationml/2006/main">
   <p:cSld>
@@ -3717,7 +3798,7 @@
         <p:spPr>
           <a:xfrm>
             <a:off x="746448" y="74645"/>
-            <a:ext cx="10314991" cy="2817438"/>
+            <a:ext cx="10314991" cy="2850589"/>
           </a:xfrm>
           <a:prstGeom prst="rect">
             <a:avLst/>
@@ -3742,7 +3823,7 @@
               </a:spcAft>
             </a:pPr>
             <a:r>
-              <a:rPr lang="ar-SA" b="1" dirty="0">
+              <a:rPr lang="ar-SA" sz="2000" b="1" dirty="0">
                 <a:solidFill>
                   <a:srgbClr val="2F5496"/>
                 </a:solidFill>
@@ -3752,7 +3833,7 @@
               </a:rPr>
               <a:t>مقدمة عن المشروع</a:t>
             </a:r>
-            <a:endParaRPr lang="en-US" b="1" dirty="0">
+            <a:endParaRPr lang="en-US" sz="2000" b="1" dirty="0">
               <a:solidFill>
                 <a:srgbClr val="2F5496"/>
               </a:solidFill>
@@ -3863,7 +3944,7 @@
         <p:spPr>
           <a:xfrm>
             <a:off x="1562877" y="2792739"/>
-            <a:ext cx="9498562" cy="1749197"/>
+            <a:ext cx="9498562" cy="1795363"/>
           </a:xfrm>
           <a:prstGeom prst="rect">
             <a:avLst/>
@@ -4308,7 +4389,7 @@
             </a:r>
             <a:r>
               <a:rPr lang="ar-SA" dirty="0"/>
-              <a:t> بناء النظام كـ "تطبيق ويب" (</a:t>
+              <a:t> بناء النظام كـ "تطبيق ويب"</a:t>
             </a:r>
             <a:r>
               <a:rPr lang="en-US" dirty="0"/>
@@ -4316,7 +4397,7 @@
             </a:r>
             <a:r>
               <a:rPr lang="ar-SA" dirty="0"/>
-              <a:t>متجاوب، والاعتماد على نماذج ذكاء اصطناعي مدربة مسبقاً (</a:t>
+              <a:t>) متجاوب، والاعتماد على نماذج ذكاء اصطناعي مدربة مسبقاً</a:t>
             </a:r>
             <a:r>
               <a:rPr lang="en-US" dirty="0"/>
@@ -4324,7 +4405,7 @@
             </a:r>
             <a:r>
               <a:rPr lang="ar-SA" dirty="0"/>
-              <a:t>لتحليل النصوص.</a:t>
+              <a:t>) لتحليل النصوص.</a:t>
             </a:r>
           </a:p>
           <a:p>
@@ -4345,7 +4426,7 @@
             </a:r>
             <a:r>
               <a:rPr lang="en-US" dirty="0"/>
-              <a:t>Mobile App)، </a:t>
+              <a:t>(Mobile App، </a:t>
             </a:r>
             <a:r>
               <a:rPr lang="ar-SA" dirty="0"/>
@@ -4525,12 +4606,450 @@
           </a:p>
         </p:txBody>
       </p:sp>
+      <p:sp>
+        <p:nvSpPr>
+          <p:cNvPr id="6" name="مربع نص 5">
+            <a:extLst>
+              <a:ext uri="{FF2B5EF4-FFF2-40B4-BE49-F238E27FC236}">
+                <a16:creationId xmlns:a16="http://schemas.microsoft.com/office/drawing/2014/main" id="{4FBF6A0A-C59A-595C-077B-309D8FBEDF45}"/>
+              </a:ext>
+            </a:extLst>
+          </p:cNvPr>
+          <p:cNvSpPr txBox="1"/>
+          <p:nvPr/>
+        </p:nvSpPr>
+        <p:spPr>
+          <a:xfrm>
+            <a:off x="0" y="3004540"/>
+            <a:ext cx="11532636" cy="3826689"/>
+          </a:xfrm>
+          <a:prstGeom prst="rect">
+            <a:avLst/>
+          </a:prstGeom>
+          <a:noFill/>
+        </p:spPr>
+        <p:txBody>
+          <a:bodyPr wrap="square">
+            <a:spAutoFit/>
+          </a:bodyPr>
+          <a:lstStyle/>
+          <a:p>
+            <a:pPr>
+              <a:lnSpc>
+                <a:spcPct val="150000"/>
+              </a:lnSpc>
+            </a:pPr>
+            <a:r>
+              <a:rPr lang="ar-SA" sz="2000" b="1" dirty="0">
+                <a:solidFill>
+                  <a:schemeClr val="accent1"/>
+                </a:solidFill>
+              </a:rPr>
+              <a:t>الدراسة المرجعية </a:t>
+            </a:r>
+            <a:endParaRPr lang="en-US" sz="2000" dirty="0">
+              <a:solidFill>
+                <a:schemeClr val="accent1"/>
+              </a:solidFill>
+            </a:endParaRPr>
+          </a:p>
+          <a:p>
+            <a:pPr>
+              <a:lnSpc>
+                <a:spcPct val="150000"/>
+              </a:lnSpc>
+              <a:buFont typeface="Arial" panose="020B0604020202020204" pitchFamily="34" charset="0"/>
+              <a:buChar char="•"/>
+            </a:pPr>
+            <a:r>
+              <a:rPr lang="ar-SA" b="1" dirty="0"/>
+              <a:t>النهج التقليدي في الأبحاث السابقة:</a:t>
+            </a:r>
+            <a:r>
+              <a:rPr lang="ar-SA" dirty="0"/>
+              <a:t> ركزت معظم الدراسات السابقة على بناء استبيانات إلكترونية تقليدية تعتمد على النشر العشوائي للروابط، مما أدى إلى نتائج تعاني من "تحيز العينة" (</a:t>
+            </a:r>
+            <a:r>
+              <a:rPr lang="en-US" dirty="0"/>
+              <a:t>.(Sample Bias</a:t>
+            </a:r>
+          </a:p>
+          <a:p>
+            <a:pPr>
+              <a:lnSpc>
+                <a:spcPct val="150000"/>
+              </a:lnSpc>
+              <a:buFont typeface="Arial" panose="020B0604020202020204" pitchFamily="34" charset="0"/>
+              <a:buChar char="•"/>
+            </a:pPr>
+            <a:r>
+              <a:rPr lang="ar-SA" b="1" dirty="0"/>
+              <a:t>الدراسات المعتمدة على الذكاء الاصطناعي:</a:t>
+            </a:r>
+            <a:r>
+              <a:rPr lang="ar-SA" dirty="0"/>
+              <a:t> الأبحاث الحديثة التي استخدمت معالجة اللغات الطبيعية (</a:t>
+            </a:r>
+            <a:r>
+              <a:rPr lang="en-US" dirty="0"/>
+              <a:t>(NLP</a:t>
+            </a:r>
+            <a:r>
+              <a:rPr lang="ar-SA" dirty="0"/>
+              <a:t> لتحليل الاستبيانات، غالباً ما كانت تطبق التحليل كـ "مرحلة منفصلة" (</a:t>
+            </a:r>
+            <a:r>
+              <a:rPr lang="en-US" dirty="0"/>
+              <a:t>Post-processing </a:t>
+            </a:r>
+            <a:r>
+              <a:rPr lang="ar-SA" dirty="0"/>
+              <a:t>) بعد جمع البيانات، وليست مدمجة في صلب المنصة.</a:t>
+            </a:r>
+          </a:p>
+          <a:p>
+            <a:pPr>
+              <a:lnSpc>
+                <a:spcPct val="150000"/>
+              </a:lnSpc>
+              <a:buFont typeface="Arial" panose="020B0604020202020204" pitchFamily="34" charset="0"/>
+              <a:buChar char="•"/>
+            </a:pPr>
+            <a:r>
+              <a:rPr lang="ar-SA" b="1" dirty="0"/>
+              <a:t>الفجوة البحثية (</a:t>
+            </a:r>
+            <a:r>
+              <a:rPr lang="en-US" b="1" dirty="0"/>
+              <a:t> (Research Gap</a:t>
+            </a:r>
+            <a:r>
+              <a:rPr lang="ar-SA" dirty="0"/>
+              <a:t>تفتقر الدراسات والأنظمة الحالية إلى وجود </a:t>
+            </a:r>
+            <a:r>
+              <a:rPr lang="ar-SA" b="1" dirty="0"/>
+              <a:t>"بيئة ثنائية الأطراف متكاملة"</a:t>
+            </a:r>
+            <a:r>
+              <a:rPr lang="ar-SA" dirty="0"/>
+              <a:t> تجمع بين:</a:t>
+            </a:r>
+          </a:p>
+          <a:p>
+            <a:pPr marL="742950" lvl="1" indent="-285750">
+              <a:lnSpc>
+                <a:spcPct val="150000"/>
+              </a:lnSpc>
+              <a:buFont typeface="Arial" panose="020B0604020202020204" pitchFamily="34" charset="0"/>
+              <a:buChar char="•"/>
+            </a:pPr>
+            <a:r>
+              <a:rPr lang="ar-SA" dirty="0"/>
+              <a:t>الاستهداف الآلي والمسبق للمجيبين (لضمان دقة العينة).</a:t>
+            </a:r>
+          </a:p>
+          <a:p>
+            <a:pPr marL="742950" lvl="1" indent="-285750">
+              <a:lnSpc>
+                <a:spcPct val="150000"/>
+              </a:lnSpc>
+              <a:buFont typeface="Arial" panose="020B0604020202020204" pitchFamily="34" charset="0"/>
+              <a:buChar char="•"/>
+            </a:pPr>
+            <a:r>
+              <a:rPr lang="ar-SA" dirty="0"/>
+              <a:t>التحليل الآلي والفوري للمشاعر (</a:t>
+            </a:r>
+            <a:r>
+              <a:rPr lang="en-US" dirty="0"/>
+              <a:t>NLP </a:t>
+            </a:r>
+            <a:r>
+              <a:rPr lang="ar-SA" dirty="0"/>
+              <a:t>) داخل نفس النظام.</a:t>
+            </a:r>
+          </a:p>
+          <a:p>
+            <a:pPr>
+              <a:lnSpc>
+                <a:spcPct val="150000"/>
+              </a:lnSpc>
+              <a:buFont typeface="Arial" panose="020B0604020202020204" pitchFamily="34" charset="0"/>
+              <a:buChar char="•"/>
+            </a:pPr>
+            <a:r>
+              <a:rPr lang="ar-SA" b="1" dirty="0"/>
+              <a:t>مساهمة مشروعنا:</a:t>
+            </a:r>
+            <a:r>
+              <a:rPr lang="ar-SA" dirty="0"/>
+              <a:t> تقديم حل هندسي يدمج محرك الاستهداف الذكي مع نماذج الذكاء الاصطناعي في منصة واحدة متكاملة.</a:t>
+            </a:r>
+          </a:p>
+        </p:txBody>
+      </p:sp>
+    </p:spTree>
+    <p:extLst>
+      <p:ext uri="{BB962C8B-B14F-4D97-AF65-F5344CB8AC3E}">
+        <p14:creationId xmlns:p14="http://schemas.microsoft.com/office/powerpoint/2010/main" val="2218134423"/>
+      </p:ext>
+    </p:extLst>
+  </p:cSld>
+  <p:clrMapOvr>
+    <a:masterClrMapping/>
+  </p:clrMapOvr>
+</p:sld>
+</file>
+
+<file path=ppt/slides/slide5.xml><?xml version="1.0" encoding="utf-8"?>
+<p:sld xmlns:a="http://schemas.openxmlformats.org/drawingml/2006/main" xmlns:r="http://schemas.openxmlformats.org/officeDocument/2006/relationships" xmlns:p="http://schemas.openxmlformats.org/presentationml/2006/main">
+  <p:cSld>
+    <p:spTree>
+      <p:nvGrpSpPr>
+        <p:cNvPr id="1" name=""/>
+        <p:cNvGrpSpPr/>
+        <p:nvPr/>
+      </p:nvGrpSpPr>
+      <p:grpSpPr>
+        <a:xfrm>
+          <a:off x="0" y="0"/>
+          <a:ext cx="0" cy="0"/>
+          <a:chOff x="0" y="0"/>
+          <a:chExt cx="0" cy="0"/>
+        </a:xfrm>
+      </p:grpSpPr>
+      <p:sp>
+        <p:nvSpPr>
+          <p:cNvPr id="3" name="مربع نص 2">
+            <a:extLst>
+              <a:ext uri="{FF2B5EF4-FFF2-40B4-BE49-F238E27FC236}">
+                <a16:creationId xmlns:a16="http://schemas.microsoft.com/office/drawing/2014/main" id="{590F3AF2-F4E8-4B17-0D30-4D06D9D13AB2}"/>
+              </a:ext>
+            </a:extLst>
+          </p:cNvPr>
+          <p:cNvSpPr txBox="1"/>
+          <p:nvPr/>
+        </p:nvSpPr>
+        <p:spPr>
+          <a:xfrm>
+            <a:off x="130629" y="3862308"/>
+            <a:ext cx="10991634" cy="2995692"/>
+          </a:xfrm>
+          <a:prstGeom prst="rect">
+            <a:avLst/>
+          </a:prstGeom>
+          <a:noFill/>
+        </p:spPr>
+        <p:txBody>
+          <a:bodyPr wrap="square">
+            <a:spAutoFit/>
+          </a:bodyPr>
+          <a:lstStyle/>
+          <a:p>
+            <a:pPr>
+              <a:lnSpc>
+                <a:spcPct val="150000"/>
+              </a:lnSpc>
+            </a:pPr>
+            <a:r>
+              <a:rPr lang="ar-SA" sz="2000" b="1" dirty="0">
+                <a:solidFill>
+                  <a:schemeClr val="accent1"/>
+                </a:solidFill>
+              </a:rPr>
+              <a:t>الأدوات والتقنيات المستخدمة </a:t>
+            </a:r>
+          </a:p>
+          <a:p>
+            <a:pPr>
+              <a:lnSpc>
+                <a:spcPct val="150000"/>
+              </a:lnSpc>
+            </a:pPr>
+            <a:r>
+              <a:rPr lang="ar-SA" b="1" dirty="0"/>
+              <a:t>الواجهة الخلفية (</a:t>
+            </a:r>
+            <a:r>
+              <a:rPr lang="en-US" b="1" dirty="0"/>
+              <a:t> :(Backend</a:t>
+            </a:r>
+            <a:r>
+              <a:rPr lang="ar-SA" dirty="0"/>
+              <a:t>لغة البرمجة </a:t>
+            </a:r>
+            <a:r>
+              <a:rPr lang="en-US" b="1" dirty="0"/>
+              <a:t>Python</a:t>
+            </a:r>
+            <a:r>
+              <a:rPr lang="en-US" dirty="0"/>
+              <a:t> </a:t>
+            </a:r>
+            <a:r>
+              <a:rPr lang="ar-SA" dirty="0"/>
+              <a:t> بالاعتماد على إطار العمل </a:t>
+            </a:r>
+            <a:r>
+              <a:rPr lang="en-US" dirty="0"/>
+              <a:t> (</a:t>
+            </a:r>
+            <a:r>
+              <a:rPr lang="en-US" b="1" dirty="0"/>
+              <a:t>Django)</a:t>
+            </a:r>
+            <a:r>
+              <a:rPr lang="ar-SA" dirty="0"/>
+              <a:t>لبناء بنية تحتية قوية، آمنة، وقابلة للتوسع.</a:t>
+            </a:r>
+          </a:p>
+          <a:p>
+            <a:pPr>
+              <a:lnSpc>
+                <a:spcPct val="150000"/>
+              </a:lnSpc>
+            </a:pPr>
+            <a:r>
+              <a:rPr lang="ar-SA" b="1" dirty="0"/>
+              <a:t> قواعد البيانات </a:t>
+            </a:r>
+            <a:r>
+              <a:rPr lang="en-US" b="1" dirty="0"/>
+              <a:t> :(Database)</a:t>
+            </a:r>
+            <a:r>
+              <a:rPr lang="ar-SA" dirty="0"/>
+              <a:t>قواعد بيانات علائقية</a:t>
+            </a:r>
+            <a:r>
+              <a:rPr lang="en-US" dirty="0"/>
+              <a:t> (</a:t>
+            </a:r>
+            <a:r>
+              <a:rPr lang="en-US" b="1" dirty="0"/>
+              <a:t>SQL) </a:t>
+            </a:r>
+            <a:r>
+              <a:rPr lang="ar-SA" dirty="0"/>
+              <a:t>لإدارة الملفات الشخصية، شروط الاستهداف، والردود بدقة وموثوقية.</a:t>
+            </a:r>
+          </a:p>
+          <a:p>
+            <a:pPr>
+              <a:lnSpc>
+                <a:spcPct val="150000"/>
+              </a:lnSpc>
+            </a:pPr>
+            <a:r>
+              <a:rPr lang="ar-SA" b="1" dirty="0"/>
+              <a:t> الواجهة الأمامية (</a:t>
+            </a:r>
+            <a:r>
+              <a:rPr lang="en-US" b="1" dirty="0"/>
+              <a:t>Frontend</a:t>
+            </a:r>
+            <a:r>
+              <a:rPr lang="ar-SA" b="1" dirty="0"/>
+              <a:t>): </a:t>
+            </a:r>
+            <a:r>
+              <a:rPr lang="ar-SA" dirty="0"/>
+              <a:t>تقنيات الويب القياسية </a:t>
+            </a:r>
+            <a:r>
+              <a:rPr lang="en-US" dirty="0"/>
+              <a:t> (HTML, CSS, JavaScript) </a:t>
+            </a:r>
+            <a:r>
+              <a:rPr lang="ar-SA" dirty="0"/>
+              <a:t>لتصميم واجهات مستخدم (</a:t>
+            </a:r>
+            <a:r>
+              <a:rPr lang="en-US" dirty="0"/>
+              <a:t>UI</a:t>
+            </a:r>
+            <a:r>
+              <a:rPr lang="ar-SA" dirty="0"/>
+              <a:t>) متجاوبة وسهلة الاستخدام.</a:t>
+            </a:r>
+          </a:p>
+          <a:p>
+            <a:pPr>
+              <a:lnSpc>
+                <a:spcPct val="150000"/>
+              </a:lnSpc>
+            </a:pPr>
+            <a:r>
+              <a:rPr lang="ar-SA" b="1" dirty="0"/>
+              <a:t> الذكاء الاصطناعي (</a:t>
+            </a:r>
+            <a:r>
+              <a:rPr lang="en-US" b="1" dirty="0"/>
+              <a:t> :(AI &amp; NLP</a:t>
+            </a:r>
+            <a:r>
+              <a:rPr lang="ar-SA" dirty="0"/>
+              <a:t>استغلال بيئة </a:t>
+            </a:r>
+            <a:r>
+              <a:rPr lang="en-US" dirty="0"/>
+              <a:t> Python </a:t>
+            </a:r>
+            <a:r>
+              <a:rPr lang="ar-SA" dirty="0"/>
+              <a:t>لدمج مكتبات ونماذج معالجة اللغات الطبيعية (لتحليل المشاعر واستخراج التوجهات).</a:t>
+            </a:r>
+          </a:p>
+          <a:p>
+            <a:pPr>
+              <a:lnSpc>
+                <a:spcPct val="150000"/>
+              </a:lnSpc>
+            </a:pPr>
+            <a:r>
+              <a:rPr lang="ar-SA" b="1" dirty="0"/>
+              <a:t>بيئة العمل الجماعي (</a:t>
+            </a:r>
+            <a:r>
+              <a:rPr lang="en-US" b="1" dirty="0"/>
+              <a:t>Version Control</a:t>
+            </a:r>
+            <a:r>
+              <a:rPr lang="ar-SA" b="1" dirty="0"/>
+              <a:t>): </a:t>
+            </a:r>
+            <a:r>
+              <a:rPr lang="ar-SA" dirty="0"/>
+              <a:t>استخدام </a:t>
+            </a:r>
+            <a:r>
+              <a:rPr lang="en-US" b="1" dirty="0"/>
+              <a:t>GitHub</a:t>
+            </a:r>
+            <a:r>
+              <a:rPr lang="ar-SA" dirty="0"/>
+              <a:t> لإدارة الأكواد وتنظيم العمل المشترك بين أعضاء الفريق.</a:t>
+            </a:r>
+          </a:p>
+          <a:p>
+            <a:pPr>
+              <a:lnSpc>
+                <a:spcPct val="150000"/>
+              </a:lnSpc>
+              <a:buFont typeface="Arial" panose="020B0604020202020204" pitchFamily="34" charset="0"/>
+              <a:buChar char="•"/>
+            </a:pPr>
+            <a:endParaRPr lang="ar-SA" dirty="0"/>
+          </a:p>
+        </p:txBody>
+      </p:sp>
       <p:graphicFrame>
         <p:nvGraphicFramePr>
           <p:cNvPr id="2" name="جدول 1">
             <a:extLst>
               <a:ext uri="{FF2B5EF4-FFF2-40B4-BE49-F238E27FC236}">
-                <a16:creationId xmlns:a16="http://schemas.microsoft.com/office/drawing/2014/main" id="{17853753-72BB-5FEF-D502-D72BF06791E2}"/>
+                <a16:creationId xmlns:a16="http://schemas.microsoft.com/office/drawing/2014/main" id="{5BD70ED0-19DD-4D96-8DEF-CDAFF24FDAEF}"/>
               </a:ext>
             </a:extLst>
           </p:cNvPr>
@@ -4540,14 +5059,14 @@
           <p:nvPr>
             <p:extLst>
               <p:ext uri="{D42A27DB-BD31-4B8C-83A1-F6EECF244321}">
-                <p14:modId xmlns:p14="http://schemas.microsoft.com/office/powerpoint/2010/main" val="1030643634"/>
+                <p14:modId xmlns:p14="http://schemas.microsoft.com/office/powerpoint/2010/main" val="2752978139"/>
               </p:ext>
             </p:extLst>
           </p:nvPr>
         </p:nvGraphicFramePr>
         <p:xfrm>
-          <a:off x="1488828" y="3310467"/>
-          <a:ext cx="8785473" cy="3029517"/>
+          <a:off x="1847461" y="93306"/>
+          <a:ext cx="9079983" cy="3278981"/>
         </p:xfrm>
         <a:graphic>
           <a:graphicData uri="http://schemas.openxmlformats.org/drawingml/2006/table">
@@ -4556,28 +5075,28 @@
                 <a:tableStyleId>{5C22544A-7EE6-4342-B048-85BDC9FD1C3A}</a:tableStyleId>
               </a:tblPr>
               <a:tblGrid>
-                <a:gridCol w="1841054">
+                <a:gridCol w="1902771">
                   <a:extLst>
                     <a:ext uri="{9D8B030D-6E8A-4147-A177-3AD203B41FA5}">
                       <a16:colId xmlns:a16="http://schemas.microsoft.com/office/drawing/2014/main" val="1950653663"/>
                     </a:ext>
                   </a:extLst>
                 </a:gridCol>
-                <a:gridCol w="1827679">
+                <a:gridCol w="1888948">
                   <a:extLst>
                     <a:ext uri="{9D8B030D-6E8A-4147-A177-3AD203B41FA5}">
                       <a16:colId xmlns:a16="http://schemas.microsoft.com/office/drawing/2014/main" val="3310257874"/>
                     </a:ext>
                   </a:extLst>
                 </a:gridCol>
-                <a:gridCol w="2058968">
+                <a:gridCol w="2127989">
                   <a:extLst>
                     <a:ext uri="{9D8B030D-6E8A-4147-A177-3AD203B41FA5}">
                       <a16:colId xmlns:a16="http://schemas.microsoft.com/office/drawing/2014/main" val="1449973089"/>
                     </a:ext>
                   </a:extLst>
                 </a:gridCol>
-                <a:gridCol w="3057772">
+                <a:gridCol w="3160275">
                   <a:extLst>
                     <a:ext uri="{9D8B030D-6E8A-4147-A177-3AD203B41FA5}">
                       <a16:colId xmlns:a16="http://schemas.microsoft.com/office/drawing/2014/main" val="3274840695"/>
@@ -4585,7 +5104,7 @@
                   </a:extLst>
                 </a:gridCol>
               </a:tblGrid>
-              <a:tr h="489207">
+              <a:tr h="529490">
                 <a:tc>
                   <a:txBody>
                     <a:bodyPr/>
@@ -4717,12 +5236,12 @@
                         </a:spcAft>
                       </a:pPr>
                       <a:r>
-                        <a:rPr lang="ar-SA" sz="1400" kern="100">
+                        <a:rPr lang="ar-SA" sz="1400" kern="100" dirty="0">
                           <a:effectLst/>
                         </a:rPr>
-                        <a:t>المنصة المقترحة (مشروعك)</a:t>
+                        <a:t>المنصة المقترحة (منصة استبيانات الآراء الذكية)</a:t>
                       </a:r>
-                      <a:endParaRPr lang="en-US" sz="1100" kern="100">
+                      <a:endParaRPr lang="en-US" sz="1100" kern="100" dirty="0">
                         <a:effectLst/>
                         <a:latin typeface="Calibri" panose="020F0502020204030204" pitchFamily="34" charset="0"/>
                         <a:ea typeface="Times New Roman" panose="02020603050405020304" pitchFamily="18" charset="0"/>
@@ -4738,7 +5257,7 @@
                   </a:ext>
                 </a:extLst>
               </a:tr>
-              <a:tr h="501196">
+              <a:tr h="542467">
                 <a:tc>
                   <a:txBody>
                     <a:bodyPr/>
@@ -4861,7 +5380,7 @@
                   </a:ext>
                 </a:extLst>
               </a:tr>
-              <a:tr h="540110">
+              <a:tr h="584585">
                 <a:tc>
                   <a:txBody>
                     <a:bodyPr/>
@@ -4990,7 +5509,7 @@
                   </a:ext>
                 </a:extLst>
               </a:tr>
-              <a:tr h="499668">
+              <a:tr h="540813">
                 <a:tc>
                   <a:txBody>
                     <a:bodyPr/>
@@ -5113,7 +5632,7 @@
                   </a:ext>
                 </a:extLst>
               </a:tr>
-              <a:tr h="499668">
+              <a:tr h="540813">
                 <a:tc>
                   <a:txBody>
                     <a:bodyPr/>
@@ -5236,7 +5755,7 @@
                   </a:ext>
                 </a:extLst>
               </a:tr>
-              <a:tr h="499668">
+              <a:tr h="540813">
                 <a:tc>
                   <a:txBody>
                     <a:bodyPr/>
@@ -5371,10 +5890,10 @@
       </p:graphicFrame>
       <p:sp>
         <p:nvSpPr>
-          <p:cNvPr id="3" name="Rectangle 1">
-            <a:extLst>
-              <a:ext uri="{FF2B5EF4-FFF2-40B4-BE49-F238E27FC236}">
-                <a16:creationId xmlns:a16="http://schemas.microsoft.com/office/drawing/2014/main" id="{AB6EE6E6-A843-67E4-5B43-A9EC121EE565}"/>
+          <p:cNvPr id="4" name="Rectangle 1">
+            <a:extLst>
+              <a:ext uri="{FF2B5EF4-FFF2-40B4-BE49-F238E27FC236}">
+                <a16:creationId xmlns:a16="http://schemas.microsoft.com/office/drawing/2014/main" id="{5C8CD114-3F11-4178-619F-7DA26E5A59B6}"/>
               </a:ext>
             </a:extLst>
           </p:cNvPr>
@@ -5385,7 +5904,7 @@
         </p:nvSpPr>
         <p:spPr bwMode="auto">
           <a:xfrm>
-            <a:off x="4288366" y="6339983"/>
+            <a:off x="4288366" y="3372288"/>
             <a:ext cx="3615267" cy="369283"/>
           </a:xfrm>
           <a:prstGeom prst="rect">
@@ -5610,226 +6129,6 @@
     </p:spTree>
     <p:extLst>
       <p:ext uri="{BB962C8B-B14F-4D97-AF65-F5344CB8AC3E}">
-        <p14:creationId xmlns:p14="http://schemas.microsoft.com/office/powerpoint/2010/main" val="2218134423"/>
-      </p:ext>
-    </p:extLst>
-  </p:cSld>
-  <p:clrMapOvr>
-    <a:masterClrMapping/>
-  </p:clrMapOvr>
-</p:sld>
-</file>
-
-<file path=ppt/slides/slide5.xml><?xml version="1.0" encoding="utf-8"?>
-<p:sld xmlns:a="http://schemas.openxmlformats.org/drawingml/2006/main" xmlns:r="http://schemas.openxmlformats.org/officeDocument/2006/relationships" xmlns:p="http://schemas.openxmlformats.org/presentationml/2006/main">
-  <p:cSld>
-    <p:spTree>
-      <p:nvGrpSpPr>
-        <p:cNvPr id="1" name=""/>
-        <p:cNvGrpSpPr/>
-        <p:nvPr/>
-      </p:nvGrpSpPr>
-      <p:grpSpPr>
-        <a:xfrm>
-          <a:off x="0" y="0"/>
-          <a:ext cx="0" cy="0"/>
-          <a:chOff x="0" y="0"/>
-          <a:chExt cx="0" cy="0"/>
-        </a:xfrm>
-      </p:grpSpPr>
-      <p:sp>
-        <p:nvSpPr>
-          <p:cNvPr id="3" name="مربع نص 2">
-            <a:extLst>
-              <a:ext uri="{FF2B5EF4-FFF2-40B4-BE49-F238E27FC236}">
-                <a16:creationId xmlns:a16="http://schemas.microsoft.com/office/drawing/2014/main" id="{590F3AF2-F4E8-4B17-0D30-4D06D9D13AB2}"/>
-              </a:ext>
-            </a:extLst>
-          </p:cNvPr>
-          <p:cNvSpPr txBox="1"/>
-          <p:nvPr/>
-        </p:nvSpPr>
-        <p:spPr>
-          <a:xfrm>
-            <a:off x="1024468" y="256739"/>
-            <a:ext cx="10312398" cy="2995692"/>
-          </a:xfrm>
-          <a:prstGeom prst="rect">
-            <a:avLst/>
-          </a:prstGeom>
-          <a:noFill/>
-        </p:spPr>
-        <p:txBody>
-          <a:bodyPr wrap="square">
-            <a:spAutoFit/>
-          </a:bodyPr>
-          <a:lstStyle/>
-          <a:p>
-            <a:pPr>
-              <a:lnSpc>
-                <a:spcPct val="150000"/>
-              </a:lnSpc>
-            </a:pPr>
-            <a:r>
-              <a:rPr lang="ar-SA" sz="2000" b="1" dirty="0">
-                <a:solidFill>
-                  <a:schemeClr val="accent1"/>
-                </a:solidFill>
-              </a:rPr>
-              <a:t>بيئة العمل والتقنيات </a:t>
-            </a:r>
-          </a:p>
-          <a:p>
-            <a:pPr>
-              <a:lnSpc>
-                <a:spcPct val="150000"/>
-              </a:lnSpc>
-            </a:pPr>
-            <a:r>
-              <a:rPr lang="ar-SA" b="1" dirty="0"/>
-              <a:t>الواجهة الخلفية (</a:t>
-            </a:r>
-            <a:r>
-              <a:rPr lang="en-US" b="1" dirty="0"/>
-              <a:t> :(Backend</a:t>
-            </a:r>
-            <a:r>
-              <a:rPr lang="ar-SA" dirty="0"/>
-              <a:t>لغة البرمجة </a:t>
-            </a:r>
-            <a:r>
-              <a:rPr lang="en-US" b="1" dirty="0"/>
-              <a:t>Python</a:t>
-            </a:r>
-            <a:r>
-              <a:rPr lang="en-US" dirty="0"/>
-              <a:t> </a:t>
-            </a:r>
-            <a:r>
-              <a:rPr lang="ar-SA" dirty="0"/>
-              <a:t> بالاعتماد على إطار العمل </a:t>
-            </a:r>
-            <a:r>
-              <a:rPr lang="en-US" dirty="0"/>
-              <a:t> (</a:t>
-            </a:r>
-            <a:r>
-              <a:rPr lang="en-US" b="1" dirty="0"/>
-              <a:t>Django)</a:t>
-            </a:r>
-            <a:r>
-              <a:rPr lang="ar-SA" dirty="0"/>
-              <a:t>لبناء بنية تحتية قوية، آمنة، وقابلة للتوسع.</a:t>
-            </a:r>
-          </a:p>
-          <a:p>
-            <a:pPr>
-              <a:lnSpc>
-                <a:spcPct val="150000"/>
-              </a:lnSpc>
-              <a:buFont typeface="Arial" panose="020B0604020202020204" pitchFamily="34" charset="0"/>
-              <a:buChar char="•"/>
-            </a:pPr>
-            <a:r>
-              <a:rPr lang="ar-SA" b="1" dirty="0"/>
-              <a:t>قواعد البيانات </a:t>
-            </a:r>
-            <a:r>
-              <a:rPr lang="en-US" b="1" dirty="0"/>
-              <a:t> :(Database)</a:t>
-            </a:r>
-            <a:r>
-              <a:rPr lang="ar-SA" dirty="0"/>
-              <a:t>قواعد بيانات علائقية</a:t>
-            </a:r>
-            <a:r>
-              <a:rPr lang="en-US" dirty="0"/>
-              <a:t> (</a:t>
-            </a:r>
-            <a:r>
-              <a:rPr lang="en-US" b="1" dirty="0"/>
-              <a:t>SQL) </a:t>
-            </a:r>
-            <a:r>
-              <a:rPr lang="ar-SA" dirty="0"/>
-              <a:t>لإدارة الملفات الشخصية، شروط الاستهداف، والردود بدقة وموثوقية).</a:t>
-            </a:r>
-          </a:p>
-          <a:p>
-            <a:pPr>
-              <a:lnSpc>
-                <a:spcPct val="150000"/>
-              </a:lnSpc>
-              <a:buFont typeface="Arial" panose="020B0604020202020204" pitchFamily="34" charset="0"/>
-              <a:buChar char="•"/>
-            </a:pPr>
-            <a:r>
-              <a:rPr lang="ar-SA" b="1" dirty="0"/>
-              <a:t>الواجهة الأمامية (</a:t>
-            </a:r>
-            <a:r>
-              <a:rPr lang="en-US" b="1" dirty="0"/>
-              <a:t>Frontend</a:t>
-            </a:r>
-            <a:r>
-              <a:rPr lang="ar-SA" b="1" dirty="0"/>
-              <a:t>): </a:t>
-            </a:r>
-            <a:r>
-              <a:rPr lang="ar-SA" dirty="0"/>
-              <a:t>تقنيات الويب القياسية </a:t>
-            </a:r>
-            <a:r>
-              <a:rPr lang="en-US" dirty="0"/>
-              <a:t> (HTML, CSS, JavaScript) </a:t>
-            </a:r>
-            <a:r>
-              <a:rPr lang="ar-SA" dirty="0"/>
-              <a:t>لتصميم واجهات مستخدم (</a:t>
-            </a:r>
-            <a:r>
-              <a:rPr lang="en-US" dirty="0"/>
-              <a:t>UI</a:t>
-            </a:r>
-            <a:r>
-              <a:rPr lang="ar-SA" dirty="0"/>
-              <a:t>) متجاوبة وسهلة الاستخدام.</a:t>
-            </a:r>
-          </a:p>
-          <a:p>
-            <a:pPr>
-              <a:lnSpc>
-                <a:spcPct val="150000"/>
-              </a:lnSpc>
-              <a:buFont typeface="Arial" panose="020B0604020202020204" pitchFamily="34" charset="0"/>
-              <a:buChar char="•"/>
-            </a:pPr>
-            <a:r>
-              <a:rPr lang="ar-SA" b="1" dirty="0"/>
-              <a:t>الذكاء الاصطناعي (</a:t>
-            </a:r>
-            <a:r>
-              <a:rPr lang="en-US" b="1" dirty="0"/>
-              <a:t> :(AI &amp; NLP</a:t>
-            </a:r>
-            <a:r>
-              <a:rPr lang="ar-SA" dirty="0"/>
-              <a:t>استغلال بيئة </a:t>
-            </a:r>
-            <a:r>
-              <a:rPr lang="en-US" dirty="0"/>
-              <a:t> Python </a:t>
-            </a:r>
-            <a:r>
-              <a:rPr lang="ar-SA" dirty="0"/>
-              <a:t>لدمج مكتبات ونماذج معالجة اللغات الطبيعية (لتحليل المشاعر واستخراج التوجهات).</a:t>
-            </a:r>
-          </a:p>
-        </p:txBody>
-      </p:sp>
-    </p:spTree>
-    <p:extLst>
-      <p:ext uri="{BB962C8B-B14F-4D97-AF65-F5344CB8AC3E}">
         <p14:creationId xmlns:p14="http://schemas.microsoft.com/office/powerpoint/2010/main" val="3741805348"/>
       </p:ext>
     </p:extLst>
@@ -5857,10 +6156,1418 @@
           <a:chExt cx="0" cy="0"/>
         </a:xfrm>
       </p:grpSpPr>
+      <p:pic>
+        <p:nvPicPr>
+          <p:cNvPr id="1026" name="Picture 2">
+            <a:extLst>
+              <a:ext uri="{FF2B5EF4-FFF2-40B4-BE49-F238E27FC236}">
+                <a16:creationId xmlns:a16="http://schemas.microsoft.com/office/drawing/2014/main" id="{6B91AAB6-8E48-1559-583A-D5828114BFCC}"/>
+              </a:ext>
+            </a:extLst>
+          </p:cNvPr>
+          <p:cNvPicPr>
+            <a:picLocks noChangeAspect="1" noChangeArrowheads="1"/>
+          </p:cNvPicPr>
+          <p:nvPr/>
+        </p:nvPicPr>
+        <p:blipFill>
+          <a:blip r:embed="rId2">
+            <a:extLst>
+              <a:ext uri="{28A0092B-C50C-407E-A947-70E740481C1C}">
+                <a14:useLocalDpi xmlns:a14="http://schemas.microsoft.com/office/drawing/2010/main" val="0"/>
+              </a:ext>
+            </a:extLst>
+          </a:blip>
+          <a:srcRect/>
+          <a:stretch>
+            <a:fillRect/>
+          </a:stretch>
+        </p:blipFill>
+        <p:spPr bwMode="auto">
+          <a:xfrm>
+            <a:off x="149290" y="112450"/>
+            <a:ext cx="11905861" cy="6605592"/>
+          </a:xfrm>
+          <a:prstGeom prst="rect">
+            <a:avLst/>
+          </a:prstGeom>
+          <a:ln w="88900" cap="sq" cmpd="thickThin">
+            <a:solidFill>
+              <a:srgbClr val="000000"/>
+            </a:solidFill>
+            <a:prstDash val="solid"/>
+            <a:miter lim="800000"/>
+          </a:ln>
+          <a:effectLst>
+            <a:innerShdw blurRad="76200">
+              <a:srgbClr val="000000"/>
+            </a:innerShdw>
+          </a:effectLst>
+          <a:extLst>
+            <a:ext uri="{909E8E84-426E-40DD-AFC4-6F175D3DCCD1}">
+              <a14:hiddenFill xmlns:a14="http://schemas.microsoft.com/office/drawing/2010/main">
+                <a:solidFill>
+                  <a:srgbClr val="FFFFFF"/>
+                </a:solidFill>
+              </a14:hiddenFill>
+            </a:ext>
+          </a:extLst>
+        </p:spPr>
+      </p:pic>
     </p:spTree>
     <p:extLst>
       <p:ext uri="{BB962C8B-B14F-4D97-AF65-F5344CB8AC3E}">
         <p14:creationId xmlns:p14="http://schemas.microsoft.com/office/powerpoint/2010/main" val="3130765992"/>
+      </p:ext>
+    </p:extLst>
+  </p:cSld>
+  <p:clrMapOvr>
+    <a:masterClrMapping/>
+  </p:clrMapOvr>
+</p:sld>
+</file>
+
+<file path=ppt/slides/slide7.xml><?xml version="1.0" encoding="utf-8"?>
+<p:sld xmlns:a="http://schemas.openxmlformats.org/drawingml/2006/main" xmlns:r="http://schemas.openxmlformats.org/officeDocument/2006/relationships" xmlns:p="http://schemas.openxmlformats.org/presentationml/2006/main">
+  <p:cSld>
+    <p:spTree>
+      <p:nvGrpSpPr>
+        <p:cNvPr id="1" name=""/>
+        <p:cNvGrpSpPr/>
+        <p:nvPr/>
+      </p:nvGrpSpPr>
+      <p:grpSpPr>
+        <a:xfrm>
+          <a:off x="0" y="0"/>
+          <a:ext cx="0" cy="0"/>
+          <a:chOff x="0" y="0"/>
+          <a:chExt cx="0" cy="0"/>
+        </a:xfrm>
+      </p:grpSpPr>
+      <p:sp>
+        <p:nvSpPr>
+          <p:cNvPr id="3" name="مربع نص 2">
+            <a:extLst>
+              <a:ext uri="{FF2B5EF4-FFF2-40B4-BE49-F238E27FC236}">
+                <a16:creationId xmlns:a16="http://schemas.microsoft.com/office/drawing/2014/main" id="{5FD39E78-D41F-8236-E1E0-A3D88CC477E0}"/>
+              </a:ext>
+            </a:extLst>
+          </p:cNvPr>
+          <p:cNvSpPr txBox="1"/>
+          <p:nvPr/>
+        </p:nvSpPr>
+        <p:spPr>
+          <a:xfrm>
+            <a:off x="502299" y="0"/>
+            <a:ext cx="11467321" cy="6282041"/>
+          </a:xfrm>
+          <a:prstGeom prst="rect">
+            <a:avLst/>
+          </a:prstGeom>
+          <a:noFill/>
+        </p:spPr>
+        <p:txBody>
+          <a:bodyPr wrap="square">
+            <a:spAutoFit/>
+          </a:bodyPr>
+          <a:lstStyle/>
+          <a:p>
+            <a:pPr>
+              <a:lnSpc>
+                <a:spcPct val="150000"/>
+              </a:lnSpc>
+            </a:pPr>
+            <a:r>
+              <a:rPr lang="ar-SA" sz="1500" b="1" dirty="0">
+                <a:solidFill>
+                  <a:schemeClr val="accent1"/>
+                </a:solidFill>
+              </a:rPr>
+              <a:t>المتطلبات الوظيفية</a:t>
+            </a:r>
+          </a:p>
+          <a:p>
+            <a:pPr>
+              <a:lnSpc>
+                <a:spcPct val="150000"/>
+              </a:lnSpc>
+            </a:pPr>
+            <a:r>
+              <a:rPr lang="ar-SA" sz="1500" b="1" dirty="0"/>
+              <a:t>1. وحدة إدارة الحسابات والمصادقة (</a:t>
+            </a:r>
+            <a:r>
+              <a:rPr lang="en-US" sz="1500" b="1" dirty="0"/>
+              <a:t>Authentication &amp; User Management)</a:t>
+            </a:r>
+            <a:endParaRPr lang="en-US" sz="1500" dirty="0"/>
+          </a:p>
+          <a:p>
+            <a:pPr>
+              <a:lnSpc>
+                <a:spcPct val="150000"/>
+              </a:lnSpc>
+              <a:buFont typeface="Arial" panose="020B0604020202020204" pitchFamily="34" charset="0"/>
+              <a:buChar char="•"/>
+            </a:pPr>
+            <a:r>
+              <a:rPr lang="ar-SA" sz="1500" dirty="0"/>
+              <a:t>يجب أن يتيح النظام إنشاء حسابات جديدة بتحديد نوع المستخدم (مقدم خدمة/باحث أو مُجيب).</a:t>
+            </a:r>
+          </a:p>
+          <a:p>
+            <a:pPr>
+              <a:lnSpc>
+                <a:spcPct val="150000"/>
+              </a:lnSpc>
+              <a:buFont typeface="Arial" panose="020B0604020202020204" pitchFamily="34" charset="0"/>
+              <a:buChar char="•"/>
+            </a:pPr>
+            <a:r>
+              <a:rPr lang="ar-SA" sz="1500" dirty="0"/>
+              <a:t>يجب أن يوفر النظام آلية لتسجيل الدخول الآمن واستعادة كلمة المرور.</a:t>
+            </a:r>
+          </a:p>
+          <a:p>
+            <a:pPr>
+              <a:lnSpc>
+                <a:spcPct val="150000"/>
+              </a:lnSpc>
+              <a:buFont typeface="Arial" panose="020B0604020202020204" pitchFamily="34" charset="0"/>
+              <a:buChar char="•"/>
+            </a:pPr>
+            <a:r>
+              <a:rPr lang="ar-SA" sz="1500" dirty="0"/>
+              <a:t>يجب أن يسمح النظام للمُجيبين بإدخال وتحديث بياناتهم الديموغرافية (العمر، الجنس، الموقع، الاهتمامات) في ملفاتهم الشخصية.</a:t>
+            </a:r>
+          </a:p>
+          <a:p>
+            <a:pPr>
+              <a:lnSpc>
+                <a:spcPct val="150000"/>
+              </a:lnSpc>
+            </a:pPr>
+            <a:r>
+              <a:rPr lang="ar-SA" sz="1500" b="1" dirty="0"/>
+              <a:t>2. وحدة إدارة الاستبيانات (</a:t>
+            </a:r>
+            <a:r>
+              <a:rPr lang="en-US" sz="1500" b="1" dirty="0"/>
+              <a:t> - Survey Management </a:t>
+            </a:r>
+            <a:r>
+              <a:rPr lang="ar-SA" sz="1500" b="1" dirty="0"/>
+              <a:t>لمقدم الخدمة)</a:t>
+            </a:r>
+            <a:endParaRPr lang="ar-SA" sz="1500" dirty="0"/>
+          </a:p>
+          <a:p>
+            <a:pPr>
+              <a:lnSpc>
+                <a:spcPct val="150000"/>
+              </a:lnSpc>
+              <a:buFont typeface="Arial" panose="020B0604020202020204" pitchFamily="34" charset="0"/>
+              <a:buChar char="•"/>
+            </a:pPr>
+            <a:r>
+              <a:rPr lang="ar-SA" sz="1500" dirty="0"/>
+              <a:t>يجب أن يمكن النظام مقدم الخدمة من إنشاء استبيان جديد وإضافة أسئلة متنوعة (نصية مفتوحة، خيارات متعددة).</a:t>
+            </a:r>
+          </a:p>
+          <a:p>
+            <a:pPr>
+              <a:lnSpc>
+                <a:spcPct val="150000"/>
+              </a:lnSpc>
+              <a:buFont typeface="Arial" panose="020B0604020202020204" pitchFamily="34" charset="0"/>
+              <a:buChar char="•"/>
+            </a:pPr>
+            <a:r>
+              <a:rPr lang="ar-SA" sz="1500" dirty="0"/>
+              <a:t>يجب أن يتيح النظام لمقدم الخدمة تحديد "شروط الاستهداف" (</a:t>
+            </a:r>
+            <a:r>
+              <a:rPr lang="en-US" sz="1500" dirty="0"/>
+              <a:t>Targeting Criteria) </a:t>
+            </a:r>
+            <a:r>
+              <a:rPr lang="ar-SA" sz="1500" dirty="0"/>
+              <a:t>لكل استبيان بناءً على البيانات الديموغرافية.</a:t>
+            </a:r>
+          </a:p>
+          <a:p>
+            <a:pPr>
+              <a:lnSpc>
+                <a:spcPct val="150000"/>
+              </a:lnSpc>
+            </a:pPr>
+            <a:r>
+              <a:rPr lang="ar-SA" sz="1500" b="1" dirty="0"/>
+              <a:t>3. وحدة محرك المطابقة (</a:t>
+            </a:r>
+            <a:r>
+              <a:rPr lang="en-US" sz="1500" b="1" dirty="0"/>
+              <a:t> - Targeting Engine </a:t>
+            </a:r>
+            <a:r>
+              <a:rPr lang="ar-SA" sz="1500" b="1" dirty="0"/>
+              <a:t>النظام الأساسي)</a:t>
+            </a:r>
+            <a:endParaRPr lang="ar-SA" sz="1500" dirty="0"/>
+          </a:p>
+          <a:p>
+            <a:pPr>
+              <a:lnSpc>
+                <a:spcPct val="150000"/>
+              </a:lnSpc>
+              <a:buFont typeface="Arial" panose="020B0604020202020204" pitchFamily="34" charset="0"/>
+              <a:buChar char="•"/>
+            </a:pPr>
+            <a:r>
+              <a:rPr lang="ar-SA" sz="1500" dirty="0"/>
+              <a:t>يجب أن يقوم النظام بمطابقة شروط الاستبيان مع قاعدة بيانات المُجيبين بشكل تلقائي.</a:t>
+            </a:r>
+          </a:p>
+          <a:p>
+            <a:pPr>
+              <a:lnSpc>
+                <a:spcPct val="150000"/>
+              </a:lnSpc>
+              <a:buFont typeface="Arial" panose="020B0604020202020204" pitchFamily="34" charset="0"/>
+              <a:buChar char="•"/>
+            </a:pPr>
+            <a:r>
+              <a:rPr lang="ar-SA" sz="1500" dirty="0"/>
+              <a:t>يجب أن يعرض النظام الاستبيانات المتاحة فقط للمُجيبين الذين تتطابق بياناتهم مع شروط الاستهداف.</a:t>
+            </a:r>
+          </a:p>
+          <a:p>
+            <a:pPr>
+              <a:lnSpc>
+                <a:spcPct val="150000"/>
+              </a:lnSpc>
+            </a:pPr>
+            <a:r>
+              <a:rPr lang="ar-SA" sz="1500" b="1" dirty="0"/>
+              <a:t>4. وحدة الإجابات والذكاء الاصطناعي (</a:t>
+            </a:r>
+            <a:r>
+              <a:rPr lang="en-US" sz="1500" b="1" dirty="0"/>
+              <a:t>Responses &amp; AI Integration</a:t>
+            </a:r>
+            <a:r>
+              <a:rPr lang="ar-SA" sz="1500" b="1" dirty="0"/>
+              <a:t>)</a:t>
+            </a:r>
+            <a:endParaRPr lang="en-US" sz="1500" dirty="0"/>
+          </a:p>
+          <a:p>
+            <a:pPr>
+              <a:lnSpc>
+                <a:spcPct val="150000"/>
+              </a:lnSpc>
+              <a:buFont typeface="Arial" panose="020B0604020202020204" pitchFamily="34" charset="0"/>
+              <a:buChar char="•"/>
+            </a:pPr>
+            <a:r>
+              <a:rPr lang="ar-SA" sz="1500" dirty="0"/>
+              <a:t>يجب أن يتيح النظام للمُجيبين إرسال إجاباتهم وحفظها في قاعدة البيانات.</a:t>
+            </a:r>
+          </a:p>
+          <a:p>
+            <a:pPr>
+              <a:lnSpc>
+                <a:spcPct val="150000"/>
+              </a:lnSpc>
+              <a:buFont typeface="Arial" panose="020B0604020202020204" pitchFamily="34" charset="0"/>
+              <a:buChar char="•"/>
+            </a:pPr>
+            <a:r>
+              <a:rPr lang="ar-SA" sz="1500" dirty="0"/>
+              <a:t>يجب أن يقوم النظام بتمرير الإجابات النصية المفتوحة إلى نموذج معالجة اللغات الطبيعية </a:t>
+            </a:r>
+            <a:r>
+              <a:rPr lang="en-US" sz="1500" dirty="0"/>
+              <a:t>.(NLP)</a:t>
+            </a:r>
+          </a:p>
+          <a:p>
+            <a:pPr>
+              <a:lnSpc>
+                <a:spcPct val="150000"/>
+              </a:lnSpc>
+              <a:buFont typeface="Arial" panose="020B0604020202020204" pitchFamily="34" charset="0"/>
+              <a:buChar char="•"/>
+            </a:pPr>
+            <a:r>
+              <a:rPr lang="ar-SA" sz="1500" dirty="0"/>
+              <a:t>يجب أن يصنف النظام الإجابات النصية تلقائياً إلى مشاعر (إيجابية، سلبية، محايدة).</a:t>
+            </a:r>
+          </a:p>
+          <a:p>
+            <a:pPr>
+              <a:lnSpc>
+                <a:spcPct val="150000"/>
+              </a:lnSpc>
+            </a:pPr>
+            <a:r>
+              <a:rPr lang="ar-SA" sz="1500" b="1" dirty="0"/>
+              <a:t>5. وحدة التقارير ولوحات التحكم (</a:t>
+            </a:r>
+            <a:r>
+              <a:rPr lang="en-US" sz="1500" b="1" dirty="0"/>
+              <a:t>(Dashboards &amp; Reporting</a:t>
+            </a:r>
+            <a:endParaRPr lang="en-US" sz="1500" dirty="0"/>
+          </a:p>
+          <a:p>
+            <a:pPr>
+              <a:lnSpc>
+                <a:spcPct val="150000"/>
+              </a:lnSpc>
+              <a:buFont typeface="Arial" panose="020B0604020202020204" pitchFamily="34" charset="0"/>
+              <a:buChar char="•"/>
+            </a:pPr>
+            <a:r>
+              <a:rPr lang="ar-SA" sz="1500" dirty="0"/>
+              <a:t>يجب أن يوفر النظام لوحة تحكم لمقدم الخدمة تعرض إحصائيات حية لعدد المجيبين.</a:t>
+            </a:r>
+          </a:p>
+          <a:p>
+            <a:pPr>
+              <a:lnSpc>
+                <a:spcPct val="150000"/>
+              </a:lnSpc>
+              <a:buFont typeface="Arial" panose="020B0604020202020204" pitchFamily="34" charset="0"/>
+              <a:buChar char="•"/>
+            </a:pPr>
+            <a:r>
+              <a:rPr lang="ar-SA" sz="1500" dirty="0"/>
+              <a:t>يجب أن يعرض النظام نتائج تحليل المشاعر (الذكاء الاصطناعي) على شكل رسوم بيانية تفاعلية.</a:t>
+            </a:r>
+          </a:p>
+        </p:txBody>
+      </p:sp>
+    </p:spTree>
+    <p:extLst>
+      <p:ext uri="{BB962C8B-B14F-4D97-AF65-F5344CB8AC3E}">
+        <p14:creationId xmlns:p14="http://schemas.microsoft.com/office/powerpoint/2010/main" val="2484457270"/>
+      </p:ext>
+    </p:extLst>
+  </p:cSld>
+  <p:clrMapOvr>
+    <a:masterClrMapping/>
+  </p:clrMapOvr>
+</p:sld>
+</file>
+
+<file path=ppt/slides/slide8.xml><?xml version="1.0" encoding="utf-8"?>
+<p:sld xmlns:a="http://schemas.openxmlformats.org/drawingml/2006/main" xmlns:r="http://schemas.openxmlformats.org/officeDocument/2006/relationships" xmlns:p="http://schemas.openxmlformats.org/presentationml/2006/main">
+  <p:cSld>
+    <p:spTree>
+      <p:nvGrpSpPr>
+        <p:cNvPr id="1" name=""/>
+        <p:cNvGrpSpPr/>
+        <p:nvPr/>
+      </p:nvGrpSpPr>
+      <p:grpSpPr>
+        <a:xfrm>
+          <a:off x="0" y="0"/>
+          <a:ext cx="0" cy="0"/>
+          <a:chOff x="0" y="0"/>
+          <a:chExt cx="0" cy="0"/>
+        </a:xfrm>
+      </p:grpSpPr>
+      <p:sp>
+        <p:nvSpPr>
+          <p:cNvPr id="4" name="مربع نص 3">
+            <a:extLst>
+              <a:ext uri="{FF2B5EF4-FFF2-40B4-BE49-F238E27FC236}">
+                <a16:creationId xmlns:a16="http://schemas.microsoft.com/office/drawing/2014/main" id="{94FE766C-8414-B6D3-12B6-103F4AC3BA32}"/>
+              </a:ext>
+            </a:extLst>
+          </p:cNvPr>
+          <p:cNvSpPr txBox="1"/>
+          <p:nvPr/>
+        </p:nvSpPr>
+        <p:spPr>
+          <a:xfrm>
+            <a:off x="342122" y="0"/>
+            <a:ext cx="11849878" cy="5909823"/>
+          </a:xfrm>
+          <a:prstGeom prst="rect">
+            <a:avLst/>
+          </a:prstGeom>
+          <a:noFill/>
+        </p:spPr>
+        <p:txBody>
+          <a:bodyPr wrap="square" rtlCol="1">
+            <a:spAutoFit/>
+          </a:bodyPr>
+          <a:lstStyle/>
+          <a:p>
+            <a:pPr>
+              <a:lnSpc>
+                <a:spcPct val="150000"/>
+              </a:lnSpc>
+            </a:pPr>
+            <a:r>
+              <a:rPr lang="ar-SA" sz="2000" b="1" dirty="0">
+                <a:solidFill>
+                  <a:schemeClr val="accent1"/>
+                </a:solidFill>
+              </a:rPr>
+              <a:t>المتطلبات غير وظيفية</a:t>
+            </a:r>
+          </a:p>
+          <a:p>
+            <a:pPr>
+              <a:lnSpc>
+                <a:spcPct val="150000"/>
+              </a:lnSpc>
+            </a:pPr>
+            <a:r>
+              <a:rPr lang="ar-SA" b="1" dirty="0"/>
+              <a:t>1.  الأداء والسرعة (</a:t>
+            </a:r>
+            <a:r>
+              <a:rPr lang="en-US" b="1" dirty="0"/>
+              <a:t>(Performance</a:t>
+            </a:r>
+            <a:endParaRPr lang="en-US" dirty="0"/>
+          </a:p>
+          <a:p>
+            <a:pPr>
+              <a:lnSpc>
+                <a:spcPct val="150000"/>
+              </a:lnSpc>
+              <a:buFont typeface="Arial" panose="020B0604020202020204" pitchFamily="34" charset="0"/>
+              <a:buChar char="•"/>
+            </a:pPr>
+            <a:r>
+              <a:rPr lang="ar-SA" sz="1600" dirty="0"/>
+              <a:t>يجب ألا يتجاوز زمن استجابة النظام لتمرير الإجابات لنموذج الذكاء الاصطناعي (</a:t>
+            </a:r>
+            <a:r>
+              <a:rPr lang="en-US" sz="1600" dirty="0"/>
+              <a:t> (NLP</a:t>
+            </a:r>
+            <a:r>
+              <a:rPr lang="ar-SA" sz="1600" dirty="0"/>
+              <a:t>وتحليلها 3 إلى 5 ثوانٍ.</a:t>
+            </a:r>
+          </a:p>
+          <a:p>
+            <a:pPr>
+              <a:lnSpc>
+                <a:spcPct val="150000"/>
+              </a:lnSpc>
+              <a:buFont typeface="Arial" panose="020B0604020202020204" pitchFamily="34" charset="0"/>
+              <a:buChar char="•"/>
+            </a:pPr>
+            <a:r>
+              <a:rPr lang="ar-SA" sz="1600" dirty="0"/>
+              <a:t>يجب تحميل صفحات الواجهة الأمامية بسرعة لضمان عدم ملل المستخدم أثناء الإجابة.</a:t>
+            </a:r>
+          </a:p>
+          <a:p>
+            <a:pPr>
+              <a:lnSpc>
+                <a:spcPct val="150000"/>
+              </a:lnSpc>
+            </a:pPr>
+            <a:r>
+              <a:rPr lang="ar-SA" b="1" dirty="0"/>
+              <a:t>2. الدقة (</a:t>
+            </a:r>
+            <a:r>
+              <a:rPr lang="en-US" b="1" dirty="0"/>
+              <a:t>Accuracy</a:t>
+            </a:r>
+            <a:r>
+              <a:rPr lang="ar-SA" b="1" dirty="0"/>
+              <a:t>)</a:t>
+            </a:r>
+            <a:endParaRPr lang="en-US" dirty="0"/>
+          </a:p>
+          <a:p>
+            <a:pPr>
+              <a:lnSpc>
+                <a:spcPct val="150000"/>
+              </a:lnSpc>
+              <a:buFont typeface="Arial" panose="020B0604020202020204" pitchFamily="34" charset="0"/>
+              <a:buChar char="•"/>
+            </a:pPr>
+            <a:r>
+              <a:rPr lang="ar-SA" sz="1600" dirty="0"/>
+              <a:t>يجب أن يحقق نموذج معالجة اللغات الطبيعية دقة تتراوح بين 75% إلى 80% في تصنيف المشاعر (إيجابي، سلبي، محايد) بشكل صحيح.</a:t>
+            </a:r>
+          </a:p>
+          <a:p>
+            <a:pPr>
+              <a:lnSpc>
+                <a:spcPct val="150000"/>
+              </a:lnSpc>
+            </a:pPr>
+            <a:r>
+              <a:rPr lang="ar-SA" b="1" dirty="0"/>
+              <a:t>3. الأمان والخصوصية </a:t>
+            </a:r>
+            <a:r>
+              <a:rPr lang="en-US" b="1" dirty="0"/>
+              <a:t>(Security &amp; Privacy)</a:t>
+            </a:r>
+            <a:endParaRPr lang="en-US" dirty="0"/>
+          </a:p>
+          <a:p>
+            <a:pPr>
+              <a:lnSpc>
+                <a:spcPct val="150000"/>
+              </a:lnSpc>
+              <a:buFont typeface="Arial" panose="020B0604020202020204" pitchFamily="34" charset="0"/>
+              <a:buChar char="•"/>
+            </a:pPr>
+            <a:r>
+              <a:rPr lang="ar-SA" sz="1600" dirty="0"/>
+              <a:t>يجب تشفير كلمات مرور المستخدمين في قاعدة البيانات ولا تُحفظ كنصوص مكشوفة (</a:t>
+            </a:r>
+            <a:r>
+              <a:rPr lang="en-US" sz="1600" dirty="0"/>
+              <a:t>(Hashing</a:t>
+            </a:r>
+          </a:p>
+          <a:p>
+            <a:pPr>
+              <a:lnSpc>
+                <a:spcPct val="150000"/>
+              </a:lnSpc>
+              <a:buFont typeface="Arial" panose="020B0604020202020204" pitchFamily="34" charset="0"/>
+              <a:buChar char="•"/>
+            </a:pPr>
+            <a:r>
+              <a:rPr lang="ar-SA" sz="1600" dirty="0"/>
+              <a:t>يجب حماية البيانات الديموغرافية للمجيبين ومنع الوصول غير المصرح به إليها، وحماية النظام من ثغرات الحقن (</a:t>
+            </a:r>
+            <a:r>
+              <a:rPr lang="en-US" sz="1600" dirty="0"/>
+              <a:t>(SQL Injection</a:t>
+            </a:r>
+          </a:p>
+          <a:p>
+            <a:pPr>
+              <a:lnSpc>
+                <a:spcPct val="150000"/>
+              </a:lnSpc>
+            </a:pPr>
+            <a:r>
+              <a:rPr lang="en-US" b="1" dirty="0"/>
+              <a:t> </a:t>
+            </a:r>
+            <a:r>
+              <a:rPr lang="ar-SA" b="1" dirty="0"/>
+              <a:t>4</a:t>
+            </a:r>
+            <a:r>
+              <a:rPr lang="en-US" b="1" dirty="0"/>
+              <a:t>.</a:t>
+            </a:r>
+            <a:r>
+              <a:rPr lang="ar-SA" b="1" dirty="0"/>
+              <a:t>  قابلية الاستخدام (</a:t>
+            </a:r>
+            <a:r>
+              <a:rPr lang="en-US" b="1" dirty="0"/>
+              <a:t>Usability</a:t>
+            </a:r>
+            <a:r>
+              <a:rPr lang="ar-SA" b="1" dirty="0"/>
+              <a:t>)</a:t>
+            </a:r>
+            <a:endParaRPr lang="en-US" dirty="0"/>
+          </a:p>
+          <a:p>
+            <a:pPr>
+              <a:lnSpc>
+                <a:spcPct val="150000"/>
+              </a:lnSpc>
+              <a:buFont typeface="Arial" panose="020B0604020202020204" pitchFamily="34" charset="0"/>
+              <a:buChar char="•"/>
+            </a:pPr>
+            <a:r>
+              <a:rPr lang="ar-SA" sz="1600" dirty="0"/>
+              <a:t>يجب أن تكون واجهات المنصة متجاوبة (</a:t>
+            </a:r>
+            <a:r>
+              <a:rPr lang="en-US" sz="1600" dirty="0"/>
+              <a:t>Responsive</a:t>
+            </a:r>
+            <a:r>
+              <a:rPr lang="ar-SA" sz="1600" dirty="0"/>
+              <a:t>) وتعمل بكفاءة على شاشات الحواسيب والهواتف المحمولة.</a:t>
+            </a:r>
+          </a:p>
+          <a:p>
+            <a:pPr>
+              <a:lnSpc>
+                <a:spcPct val="150000"/>
+              </a:lnSpc>
+              <a:buFont typeface="Arial" panose="020B0604020202020204" pitchFamily="34" charset="0"/>
+              <a:buChar char="•"/>
+            </a:pPr>
+            <a:r>
+              <a:rPr lang="ar-SA" sz="1600" dirty="0"/>
+              <a:t>يجب أن يكون مسار المستخدم بديهياً لتمكين الشركة أو الباحث من تصميم ونشر استبيان بخطوات واضحة وبسيطة.</a:t>
+            </a:r>
+          </a:p>
+          <a:p>
+            <a:pPr>
+              <a:lnSpc>
+                <a:spcPct val="150000"/>
+              </a:lnSpc>
+            </a:pPr>
+            <a:r>
+              <a:rPr lang="ar-SA" b="1" dirty="0"/>
+              <a:t>5. التوافرية وقابلية التوسع (</a:t>
+            </a:r>
+            <a:r>
+              <a:rPr lang="en-US" b="1" dirty="0"/>
+              <a:t>Availability &amp; Scalability</a:t>
+            </a:r>
+            <a:r>
+              <a:rPr lang="ar-SA" b="1" dirty="0"/>
+              <a:t>)</a:t>
+            </a:r>
+            <a:endParaRPr lang="en-US" b="1" dirty="0"/>
+          </a:p>
+          <a:p>
+            <a:pPr>
+              <a:lnSpc>
+                <a:spcPct val="150000"/>
+              </a:lnSpc>
+            </a:pPr>
+            <a:r>
+              <a:rPr lang="ar-SA" sz="1600" dirty="0"/>
+              <a:t>يجب أن يتحمل النظام دخول عدد محدد من المستخدمين (مثلاً 50 مستخدماً) في نفس الوقت للإجابة على استبيان واحد دون تعطل الخادم (وهو رقم واقعي لاختبار مشروع جامعي).</a:t>
+            </a:r>
+          </a:p>
+          <a:p>
+            <a:pPr>
+              <a:lnSpc>
+                <a:spcPct val="150000"/>
+              </a:lnSpc>
+            </a:pPr>
+            <a:endParaRPr lang="ar-SA" sz="1600" dirty="0"/>
+          </a:p>
+        </p:txBody>
+      </p:sp>
+    </p:spTree>
+    <p:extLst>
+      <p:ext uri="{BB962C8B-B14F-4D97-AF65-F5344CB8AC3E}">
+        <p14:creationId xmlns:p14="http://schemas.microsoft.com/office/powerpoint/2010/main" val="2662615565"/>
+      </p:ext>
+    </p:extLst>
+  </p:cSld>
+  <p:clrMapOvr>
+    <a:masterClrMapping/>
+  </p:clrMapOvr>
+</p:sld>
+</file>
+
+<file path=ppt/slides/slide9.xml><?xml version="1.0" encoding="utf-8"?>
+<p:sld xmlns:a="http://schemas.openxmlformats.org/drawingml/2006/main" xmlns:r="http://schemas.openxmlformats.org/officeDocument/2006/relationships" xmlns:p="http://schemas.openxmlformats.org/presentationml/2006/main">
+  <p:cSld>
+    <p:spTree>
+      <p:nvGrpSpPr>
+        <p:cNvPr id="1" name=""/>
+        <p:cNvGrpSpPr/>
+        <p:nvPr/>
+      </p:nvGrpSpPr>
+      <p:grpSpPr>
+        <a:xfrm>
+          <a:off x="0" y="0"/>
+          <a:ext cx="0" cy="0"/>
+          <a:chOff x="0" y="0"/>
+          <a:chExt cx="0" cy="0"/>
+        </a:xfrm>
+      </p:grpSpPr>
+      <p:sp>
+        <p:nvSpPr>
+          <p:cNvPr id="2" name="Rectangle 1">
+            <a:extLst>
+              <a:ext uri="{FF2B5EF4-FFF2-40B4-BE49-F238E27FC236}">
+                <a16:creationId xmlns:a16="http://schemas.microsoft.com/office/drawing/2014/main" id="{577396CD-93E4-6723-EC5E-95EAED088D56}"/>
+              </a:ext>
+            </a:extLst>
+          </p:cNvPr>
+          <p:cNvSpPr>
+            <a:spLocks noChangeArrowheads="1"/>
+          </p:cNvSpPr>
+          <p:nvPr/>
+        </p:nvSpPr>
+        <p:spPr bwMode="auto">
+          <a:xfrm>
+            <a:off x="2105220" y="761522"/>
+            <a:ext cx="9213973" cy="1287532"/>
+          </a:xfrm>
+          <a:prstGeom prst="rect">
+            <a:avLst/>
+          </a:prstGeom>
+          <a:noFill/>
+          <a:ln>
+            <a:noFill/>
+          </a:ln>
+          <a:effectLst/>
+          <a:extLst>
+            <a:ext uri="{909E8E84-426E-40DD-AFC4-6F175D3DCCD1}">
+              <a14:hiddenFill xmlns:a14="http://schemas.microsoft.com/office/drawing/2010/main">
+                <a:solidFill>
+                  <a:schemeClr val="accent1"/>
+                </a:solidFill>
+              </a14:hiddenFill>
+            </a:ext>
+            <a:ext uri="{91240B29-F687-4F45-9708-019B960494DF}">
+              <a14:hiddenLine xmlns:a14="http://schemas.microsoft.com/office/drawing/2010/main" w="9525">
+                <a:solidFill>
+                  <a:schemeClr val="tx1"/>
+                </a:solidFill>
+                <a:miter lim="800000"/>
+                <a:headEnd/>
+                <a:tailEnd/>
+              </a14:hiddenLine>
+            </a:ext>
+            <a:ext uri="{AF507438-7753-43E0-B8FC-AC1667EBCBE1}">
+              <a14:hiddenEffects xmlns:a14="http://schemas.microsoft.com/office/drawing/2010/main">
+                <a:effectLst>
+                  <a:outerShdw dist="35921" dir="2700000" algn="ctr" rotWithShape="0">
+                    <a:schemeClr val="bg2"/>
+                  </a:outerShdw>
+                </a:effectLst>
+              </a14:hiddenEffects>
+            </a:ext>
+          </a:extLst>
+        </p:spPr>
+        <p:txBody>
+          <a:bodyPr vert="horz" wrap="square" lIns="91440" tIns="45720" rIns="91440" bIns="45720" numCol="1" anchor="ctr" anchorCtr="0" compatLnSpc="1">
+            <a:prstTxWarp prst="textNoShape">
+              <a:avLst/>
+            </a:prstTxWarp>
+            <a:spAutoFit/>
+          </a:bodyPr>
+          <a:lstStyle/>
+          <a:p>
+            <a:pPr marL="0" marR="0" lvl="0" indent="0" defTabSz="914400" eaLnBrk="0" fontAlgn="base" latinLnBrk="0" hangingPunct="0">
+              <a:lnSpc>
+                <a:spcPct val="150000"/>
+              </a:lnSpc>
+              <a:spcBef>
+                <a:spcPct val="0"/>
+              </a:spcBef>
+              <a:spcAft>
+                <a:spcPct val="0"/>
+              </a:spcAft>
+              <a:buClrTx/>
+              <a:buSzTx/>
+              <a:buFontTx/>
+              <a:buChar char="•"/>
+              <a:tabLst/>
+            </a:pPr>
+            <a:r>
+              <a:rPr kumimoji="0" lang="ar-SA" altLang="ar-SA" b="1" i="0" u="none" strike="noStrike" cap="none" normalizeH="0" baseline="0" dirty="0">
+                <a:ln>
+                  <a:noFill/>
+                </a:ln>
+                <a:solidFill>
+                  <a:schemeClr val="tx1"/>
+                </a:solidFill>
+                <a:effectLst/>
+                <a:latin typeface="Arial" panose="020B0604020202020204" pitchFamily="34" charset="0"/>
+                <a:cs typeface="Arial" panose="020B0604020202020204" pitchFamily="34" charset="0"/>
+              </a:rPr>
+              <a:t> مقدم الخدمة / الباحث (Survey Creator):</a:t>
+            </a:r>
+            <a:r>
+              <a:rPr lang="ar-SA" altLang="ar-SA" dirty="0">
+                <a:latin typeface="Arial" panose="020B0604020202020204" pitchFamily="34" charset="0"/>
+              </a:rPr>
+              <a:t> </a:t>
+            </a:r>
+            <a:r>
+              <a:rPr kumimoji="0" lang="ar-SA" altLang="ar-SA" sz="1600" b="0" i="0" u="none" strike="noStrike" cap="none" normalizeH="0" baseline="0" dirty="0">
+                <a:ln>
+                  <a:noFill/>
+                </a:ln>
+                <a:solidFill>
+                  <a:schemeClr val="tx1"/>
+                </a:solidFill>
+                <a:effectLst/>
+                <a:latin typeface="Arial" panose="020B0604020202020204" pitchFamily="34" charset="0"/>
+                <a:cs typeface="Arial" panose="020B0604020202020204" pitchFamily="34" charset="0"/>
+              </a:rPr>
+              <a:t>الجهة المستفيدة من المنصة لجمع البيانات.</a:t>
+            </a:r>
+            <a:endParaRPr kumimoji="0" lang="ar-SA" altLang="ar-SA" sz="1600" b="0" i="0" u="none" strike="noStrike" cap="none" normalizeH="0" baseline="0" dirty="0">
+              <a:ln>
+                <a:noFill/>
+              </a:ln>
+              <a:solidFill>
+                <a:schemeClr val="tx1"/>
+              </a:solidFill>
+              <a:effectLst/>
+              <a:latin typeface="Arial" panose="020B0604020202020204" pitchFamily="34" charset="0"/>
+            </a:endParaRPr>
+          </a:p>
+          <a:p>
+            <a:pPr marL="0" marR="0" lvl="0" indent="0" defTabSz="914400" eaLnBrk="0" fontAlgn="base" latinLnBrk="0" hangingPunct="0">
+              <a:lnSpc>
+                <a:spcPct val="150000"/>
+              </a:lnSpc>
+              <a:spcBef>
+                <a:spcPct val="0"/>
+              </a:spcBef>
+              <a:spcAft>
+                <a:spcPct val="0"/>
+              </a:spcAft>
+              <a:buClrTx/>
+              <a:buSzTx/>
+              <a:buFontTx/>
+              <a:buChar char="•"/>
+              <a:tabLst/>
+            </a:pPr>
+            <a:r>
+              <a:rPr kumimoji="0" lang="ar-SA" altLang="ar-SA" b="1" i="0" u="none" strike="noStrike" cap="none" normalizeH="0" baseline="0" dirty="0">
+                <a:ln>
+                  <a:noFill/>
+                </a:ln>
+                <a:solidFill>
+                  <a:schemeClr val="tx1"/>
+                </a:solidFill>
+                <a:effectLst/>
+                <a:latin typeface="Arial" panose="020B0604020202020204" pitchFamily="34" charset="0"/>
+                <a:cs typeface="Arial" panose="020B0604020202020204" pitchFamily="34" charset="0"/>
+              </a:rPr>
+              <a:t> المستخدم المُجيب (Respondent): </a:t>
+            </a:r>
+            <a:r>
+              <a:rPr kumimoji="0" lang="ar-SA" altLang="ar-SA" sz="1600" b="0" i="0" u="none" strike="noStrike" cap="none" normalizeH="0" baseline="0" dirty="0">
+                <a:ln>
+                  <a:noFill/>
+                </a:ln>
+                <a:solidFill>
+                  <a:schemeClr val="tx1"/>
+                </a:solidFill>
+                <a:effectLst/>
+                <a:latin typeface="Arial" panose="020B0604020202020204" pitchFamily="34" charset="0"/>
+                <a:cs typeface="Arial" panose="020B0604020202020204" pitchFamily="34" charset="0"/>
+              </a:rPr>
+              <a:t>الفرد المستهدف للإجابة على الاستبيانات.</a:t>
+            </a:r>
+            <a:endParaRPr kumimoji="0" lang="ar-SA" altLang="ar-SA" sz="1600" b="0" i="0" u="none" strike="noStrike" cap="none" normalizeH="0" baseline="0" dirty="0">
+              <a:ln>
+                <a:noFill/>
+              </a:ln>
+              <a:solidFill>
+                <a:schemeClr val="tx1"/>
+              </a:solidFill>
+              <a:effectLst/>
+              <a:latin typeface="Arial" panose="020B0604020202020204" pitchFamily="34" charset="0"/>
+            </a:endParaRPr>
+          </a:p>
+          <a:p>
+            <a:pPr marL="0" marR="0" lvl="0" indent="0" defTabSz="914400" eaLnBrk="0" fontAlgn="base" latinLnBrk="0" hangingPunct="0">
+              <a:lnSpc>
+                <a:spcPct val="150000"/>
+              </a:lnSpc>
+              <a:spcBef>
+                <a:spcPct val="0"/>
+              </a:spcBef>
+              <a:spcAft>
+                <a:spcPct val="0"/>
+              </a:spcAft>
+              <a:buClrTx/>
+              <a:buSzTx/>
+              <a:buFontTx/>
+              <a:buChar char="•"/>
+              <a:tabLst/>
+            </a:pPr>
+            <a:r>
+              <a:rPr kumimoji="0" lang="ar-SA" altLang="ar-SA" b="1" i="0" u="none" strike="noStrike" cap="none" normalizeH="0" baseline="0" dirty="0">
+                <a:ln>
+                  <a:noFill/>
+                </a:ln>
+                <a:solidFill>
+                  <a:schemeClr val="tx1"/>
+                </a:solidFill>
+                <a:effectLst/>
+                <a:latin typeface="Arial" panose="020B0604020202020204" pitchFamily="34" charset="0"/>
+                <a:cs typeface="Arial" panose="020B0604020202020204" pitchFamily="34" charset="0"/>
+              </a:rPr>
+              <a:t> مدير النظام (System Administrator):</a:t>
+            </a:r>
+            <a:r>
+              <a:rPr lang="ar-SA" altLang="ar-SA" sz="1600" dirty="0">
+                <a:latin typeface="Arial" panose="020B0604020202020204" pitchFamily="34" charset="0"/>
+                <a:cs typeface="Arial" panose="020B0604020202020204" pitchFamily="34" charset="0"/>
+              </a:rPr>
+              <a:t> </a:t>
+            </a:r>
+            <a:r>
+              <a:rPr kumimoji="0" lang="ar-SA" altLang="ar-SA" sz="1600" b="0" i="0" u="none" strike="noStrike" cap="none" normalizeH="0" baseline="0" dirty="0">
+                <a:ln>
+                  <a:noFill/>
+                </a:ln>
+                <a:solidFill>
+                  <a:schemeClr val="tx1"/>
+                </a:solidFill>
+                <a:effectLst/>
+                <a:latin typeface="Arial" panose="020B0604020202020204" pitchFamily="34" charset="0"/>
+                <a:cs typeface="Arial" panose="020B0604020202020204" pitchFamily="34" charset="0"/>
+              </a:rPr>
+              <a:t>المشرف التقني على المنصة.</a:t>
+            </a:r>
+            <a:endParaRPr kumimoji="0" lang="ar-SA" altLang="ar-SA" sz="1600" b="0" i="0" u="none" strike="noStrike" cap="none" normalizeH="0" baseline="0" dirty="0">
+              <a:ln>
+                <a:noFill/>
+              </a:ln>
+              <a:solidFill>
+                <a:schemeClr val="tx1"/>
+              </a:solidFill>
+              <a:effectLst/>
+              <a:latin typeface="Arial" panose="020B0604020202020204" pitchFamily="34" charset="0"/>
+            </a:endParaRPr>
+          </a:p>
+        </p:txBody>
+      </p:sp>
+      <p:sp>
+        <p:nvSpPr>
+          <p:cNvPr id="3" name="مربع نص 2">
+            <a:extLst>
+              <a:ext uri="{FF2B5EF4-FFF2-40B4-BE49-F238E27FC236}">
+                <a16:creationId xmlns:a16="http://schemas.microsoft.com/office/drawing/2014/main" id="{2015423A-1BA5-AA35-708F-4B3914C45213}"/>
+              </a:ext>
+            </a:extLst>
+          </p:cNvPr>
+          <p:cNvSpPr txBox="1"/>
+          <p:nvPr/>
+        </p:nvSpPr>
+        <p:spPr>
+          <a:xfrm>
+            <a:off x="9038252" y="156517"/>
+            <a:ext cx="3013788" cy="584775"/>
+          </a:xfrm>
+          <a:prstGeom prst="rect">
+            <a:avLst/>
+          </a:prstGeom>
+          <a:noFill/>
+        </p:spPr>
+        <p:txBody>
+          <a:bodyPr wrap="square" rtlCol="1">
+            <a:spAutoFit/>
+          </a:bodyPr>
+          <a:lstStyle/>
+          <a:p>
+            <a:pPr algn="ctr"/>
+            <a:r>
+              <a:rPr lang="en-US" sz="3200" b="1" dirty="0">
+                <a:solidFill>
+                  <a:schemeClr val="accent1"/>
+                </a:solidFill>
+              </a:rPr>
+              <a:t>Actors</a:t>
+            </a:r>
+            <a:endParaRPr lang="ar-SA" b="1" dirty="0">
+              <a:solidFill>
+                <a:schemeClr val="accent1"/>
+              </a:solidFill>
+            </a:endParaRPr>
+          </a:p>
+        </p:txBody>
+      </p:sp>
+      <p:sp>
+        <p:nvSpPr>
+          <p:cNvPr id="7" name="مربع نص 6">
+            <a:extLst>
+              <a:ext uri="{FF2B5EF4-FFF2-40B4-BE49-F238E27FC236}">
+                <a16:creationId xmlns:a16="http://schemas.microsoft.com/office/drawing/2014/main" id="{73906974-904E-BDCD-A93D-E3B9C0E1FF56}"/>
+              </a:ext>
+            </a:extLst>
+          </p:cNvPr>
+          <p:cNvSpPr txBox="1"/>
+          <p:nvPr/>
+        </p:nvSpPr>
+        <p:spPr>
+          <a:xfrm>
+            <a:off x="7785619" y="3255526"/>
+            <a:ext cx="3533574" cy="3365024"/>
+          </a:xfrm>
+          <a:prstGeom prst="rect">
+            <a:avLst/>
+          </a:prstGeom>
+          <a:noFill/>
+        </p:spPr>
+        <p:txBody>
+          <a:bodyPr wrap="square">
+            <a:spAutoFit/>
+          </a:bodyPr>
+          <a:lstStyle/>
+          <a:p>
+            <a:pPr>
+              <a:lnSpc>
+                <a:spcPct val="150000"/>
+              </a:lnSpc>
+            </a:pPr>
+            <a:r>
+              <a:rPr lang="ar-SA" b="1" dirty="0"/>
+              <a:t>مقدم الخدمة (الشركة / الباحث):</a:t>
+            </a:r>
+            <a:endParaRPr lang="ar-SA" dirty="0"/>
+          </a:p>
+          <a:p>
+            <a:pPr>
+              <a:lnSpc>
+                <a:spcPct val="150000"/>
+              </a:lnSpc>
+              <a:buFont typeface="Arial" panose="020B0604020202020204" pitchFamily="34" charset="0"/>
+              <a:buChar char="•"/>
+            </a:pPr>
+            <a:r>
+              <a:rPr lang="ar-SA" dirty="0"/>
+              <a:t>إنشاء حساب</a:t>
+            </a:r>
+          </a:p>
+          <a:p>
+            <a:pPr>
+              <a:lnSpc>
+                <a:spcPct val="150000"/>
+              </a:lnSpc>
+              <a:buFont typeface="Arial" panose="020B0604020202020204" pitchFamily="34" charset="0"/>
+              <a:buChar char="•"/>
+            </a:pPr>
+            <a:r>
+              <a:rPr lang="ar-SA" dirty="0"/>
+              <a:t>إدارة الاستبيانات (تشمل الإنشاء والتعديل)</a:t>
+            </a:r>
+          </a:p>
+          <a:p>
+            <a:pPr>
+              <a:lnSpc>
+                <a:spcPct val="150000"/>
+              </a:lnSpc>
+              <a:buFont typeface="Arial" panose="020B0604020202020204" pitchFamily="34" charset="0"/>
+              <a:buChar char="•"/>
+            </a:pPr>
+            <a:r>
+              <a:rPr lang="ar-SA" dirty="0"/>
+              <a:t>تحديد شروط الاستهداف</a:t>
+            </a:r>
+          </a:p>
+          <a:p>
+            <a:pPr>
+              <a:lnSpc>
+                <a:spcPct val="150000"/>
+              </a:lnSpc>
+              <a:buFont typeface="Arial" panose="020B0604020202020204" pitchFamily="34" charset="0"/>
+              <a:buChar char="•"/>
+            </a:pPr>
+            <a:r>
+              <a:rPr lang="ar-SA" dirty="0"/>
+              <a:t>استعراض نتائج تحليل المشاعر</a:t>
+            </a:r>
+          </a:p>
+          <a:p>
+            <a:pPr>
+              <a:lnSpc>
+                <a:spcPct val="150000"/>
+              </a:lnSpc>
+              <a:buFont typeface="Arial" panose="020B0604020202020204" pitchFamily="34" charset="0"/>
+              <a:buChar char="•"/>
+            </a:pPr>
+            <a:r>
+              <a:rPr lang="ar-SA" dirty="0"/>
+              <a:t>تسجيل الدخول</a:t>
+            </a:r>
+          </a:p>
+          <a:p>
+            <a:pPr>
+              <a:lnSpc>
+                <a:spcPct val="150000"/>
+              </a:lnSpc>
+              <a:buFont typeface="Arial" panose="020B0604020202020204" pitchFamily="34" charset="0"/>
+              <a:buChar char="•"/>
+            </a:pPr>
+            <a:r>
+              <a:rPr lang="ar-SA" dirty="0"/>
+              <a:t> تسجيل الخروج</a:t>
+            </a:r>
+          </a:p>
+          <a:p>
+            <a:pPr>
+              <a:lnSpc>
+                <a:spcPct val="150000"/>
+              </a:lnSpc>
+            </a:pPr>
+            <a:endParaRPr lang="ar-SA" dirty="0"/>
+          </a:p>
+        </p:txBody>
+      </p:sp>
+      <p:sp>
+        <p:nvSpPr>
+          <p:cNvPr id="9" name="مربع نص 8">
+            <a:extLst>
+              <a:ext uri="{FF2B5EF4-FFF2-40B4-BE49-F238E27FC236}">
+                <a16:creationId xmlns:a16="http://schemas.microsoft.com/office/drawing/2014/main" id="{EFCD7154-06EF-7EF3-D731-6FB4A357D155}"/>
+              </a:ext>
+            </a:extLst>
+          </p:cNvPr>
+          <p:cNvSpPr txBox="1"/>
+          <p:nvPr/>
+        </p:nvSpPr>
+        <p:spPr>
+          <a:xfrm>
+            <a:off x="3890865" y="2606335"/>
+            <a:ext cx="7428328" cy="461665"/>
+          </a:xfrm>
+          <a:prstGeom prst="rect">
+            <a:avLst/>
+          </a:prstGeom>
+          <a:noFill/>
+        </p:spPr>
+        <p:txBody>
+          <a:bodyPr wrap="square">
+            <a:spAutoFit/>
+          </a:bodyPr>
+          <a:lstStyle/>
+          <a:p>
+            <a:r>
+              <a:rPr lang="ar-SA" sz="2400" b="1" dirty="0">
+                <a:solidFill>
+                  <a:schemeClr val="accent1"/>
+                </a:solidFill>
+              </a:rPr>
+              <a:t>حالات الاستخدام حسب الفاعلين (</a:t>
+            </a:r>
+            <a:r>
+              <a:rPr lang="en-US" sz="2400" b="1" dirty="0">
+                <a:solidFill>
+                  <a:schemeClr val="accent1"/>
+                </a:solidFill>
+              </a:rPr>
+              <a:t>(Use Cases by Actors</a:t>
+            </a:r>
+            <a:endParaRPr lang="ar-SA" sz="2400" b="1" dirty="0">
+              <a:solidFill>
+                <a:schemeClr val="accent1"/>
+              </a:solidFill>
+            </a:endParaRPr>
+          </a:p>
+        </p:txBody>
+      </p:sp>
+      <p:sp>
+        <p:nvSpPr>
+          <p:cNvPr id="11" name="مربع نص 10">
+            <a:extLst>
+              <a:ext uri="{FF2B5EF4-FFF2-40B4-BE49-F238E27FC236}">
+                <a16:creationId xmlns:a16="http://schemas.microsoft.com/office/drawing/2014/main" id="{CE8152E0-698A-86B7-7B47-C9999DE2B867}"/>
+              </a:ext>
+            </a:extLst>
+          </p:cNvPr>
+          <p:cNvSpPr txBox="1"/>
+          <p:nvPr/>
+        </p:nvSpPr>
+        <p:spPr>
+          <a:xfrm>
+            <a:off x="831009" y="3260620"/>
+            <a:ext cx="3725246" cy="2805320"/>
+          </a:xfrm>
+          <a:prstGeom prst="rect">
+            <a:avLst/>
+          </a:prstGeom>
+          <a:noFill/>
+        </p:spPr>
+        <p:txBody>
+          <a:bodyPr wrap="square">
+            <a:spAutoFit/>
+          </a:bodyPr>
+          <a:lstStyle/>
+          <a:p>
+            <a:pPr>
+              <a:lnSpc>
+                <a:spcPct val="150000"/>
+              </a:lnSpc>
+            </a:pPr>
+            <a:r>
+              <a:rPr lang="ar-SA" sz="2000" b="1" dirty="0"/>
+              <a:t>المُجيب (المستخدم):</a:t>
+            </a:r>
+            <a:endParaRPr lang="ar-SA" sz="2000" dirty="0"/>
+          </a:p>
+          <a:p>
+            <a:pPr>
+              <a:lnSpc>
+                <a:spcPct val="150000"/>
+              </a:lnSpc>
+              <a:buFont typeface="Arial" panose="020B0604020202020204" pitchFamily="34" charset="0"/>
+              <a:buChar char="•"/>
+            </a:pPr>
+            <a:r>
+              <a:rPr lang="ar-SA" sz="2000" dirty="0"/>
+              <a:t>إنشاء حساب</a:t>
+            </a:r>
+          </a:p>
+          <a:p>
+            <a:pPr>
+              <a:lnSpc>
+                <a:spcPct val="150000"/>
+              </a:lnSpc>
+              <a:buFont typeface="Arial" panose="020B0604020202020204" pitchFamily="34" charset="0"/>
+              <a:buChar char="•"/>
+            </a:pPr>
+            <a:r>
+              <a:rPr lang="ar-SA" sz="2000" dirty="0"/>
+              <a:t>إدارة الملف الديموغرافي</a:t>
+            </a:r>
+          </a:p>
+          <a:p>
+            <a:pPr>
+              <a:lnSpc>
+                <a:spcPct val="150000"/>
+              </a:lnSpc>
+              <a:buFont typeface="Arial" panose="020B0604020202020204" pitchFamily="34" charset="0"/>
+              <a:buChar char="•"/>
+            </a:pPr>
+            <a:r>
+              <a:rPr lang="ar-SA" sz="2000" dirty="0"/>
+              <a:t>الإجابة على الاستبيانات المطابقة</a:t>
+            </a:r>
+          </a:p>
+          <a:p>
+            <a:pPr>
+              <a:lnSpc>
+                <a:spcPct val="150000"/>
+              </a:lnSpc>
+              <a:buFont typeface="Arial" panose="020B0604020202020204" pitchFamily="34" charset="0"/>
+              <a:buChar char="•"/>
+            </a:pPr>
+            <a:r>
+              <a:rPr lang="ar-SA" sz="2000" dirty="0"/>
+              <a:t>تسجيل الدخول</a:t>
+            </a:r>
+          </a:p>
+          <a:p>
+            <a:pPr>
+              <a:lnSpc>
+                <a:spcPct val="150000"/>
+              </a:lnSpc>
+              <a:buFont typeface="Arial" panose="020B0604020202020204" pitchFamily="34" charset="0"/>
+              <a:buChar char="•"/>
+            </a:pPr>
+            <a:r>
+              <a:rPr lang="ar-SA" sz="2000" dirty="0"/>
+              <a:t> تسجيل الخروج</a:t>
+            </a:r>
+          </a:p>
+        </p:txBody>
+      </p:sp>
+      <p:sp>
+        <p:nvSpPr>
+          <p:cNvPr id="14" name="مربع نص 13">
+            <a:extLst>
+              <a:ext uri="{FF2B5EF4-FFF2-40B4-BE49-F238E27FC236}">
+                <a16:creationId xmlns:a16="http://schemas.microsoft.com/office/drawing/2014/main" id="{0DB0DE35-0EE9-AC75-31FC-364187A3F4C7}"/>
+              </a:ext>
+            </a:extLst>
+          </p:cNvPr>
+          <p:cNvSpPr txBox="1"/>
+          <p:nvPr/>
+        </p:nvSpPr>
+        <p:spPr>
+          <a:xfrm>
+            <a:off x="5221639" y="3260620"/>
+            <a:ext cx="2514215" cy="2343655"/>
+          </a:xfrm>
+          <a:prstGeom prst="rect">
+            <a:avLst/>
+          </a:prstGeom>
+          <a:noFill/>
+        </p:spPr>
+        <p:txBody>
+          <a:bodyPr wrap="square">
+            <a:spAutoFit/>
+          </a:bodyPr>
+          <a:lstStyle/>
+          <a:p>
+            <a:pPr>
+              <a:lnSpc>
+                <a:spcPct val="150000"/>
+              </a:lnSpc>
+            </a:pPr>
+            <a:r>
+              <a:rPr lang="ar-SA" sz="2000" b="1" dirty="0"/>
+              <a:t>مدير النظام (</a:t>
+            </a:r>
+            <a:r>
+              <a:rPr lang="en-US" sz="2000" b="1" dirty="0"/>
+              <a:t>(Admin</a:t>
+            </a:r>
+            <a:endParaRPr lang="en-US" sz="2000" dirty="0"/>
+          </a:p>
+          <a:p>
+            <a:pPr>
+              <a:lnSpc>
+                <a:spcPct val="150000"/>
+              </a:lnSpc>
+              <a:buFont typeface="Arial" panose="020B0604020202020204" pitchFamily="34" charset="0"/>
+              <a:buChar char="•"/>
+            </a:pPr>
+            <a:r>
+              <a:rPr lang="ar-SA" sz="2000" dirty="0"/>
+              <a:t>إدارة الحسابات </a:t>
+            </a:r>
+          </a:p>
+          <a:p>
+            <a:pPr>
+              <a:lnSpc>
+                <a:spcPct val="150000"/>
+              </a:lnSpc>
+              <a:buFont typeface="Arial" panose="020B0604020202020204" pitchFamily="34" charset="0"/>
+              <a:buChar char="•"/>
+            </a:pPr>
+            <a:r>
+              <a:rPr lang="ar-SA" sz="2000" dirty="0"/>
+              <a:t>استخراج تقارير الأداء العام</a:t>
+            </a:r>
+          </a:p>
+          <a:p>
+            <a:pPr>
+              <a:lnSpc>
+                <a:spcPct val="150000"/>
+              </a:lnSpc>
+              <a:buFont typeface="Arial" panose="020B0604020202020204" pitchFamily="34" charset="0"/>
+              <a:buChar char="•"/>
+            </a:pPr>
+            <a:r>
+              <a:rPr lang="ar-SA" sz="2000" dirty="0"/>
+              <a:t>تسجيل الدخول</a:t>
+            </a:r>
+          </a:p>
+          <a:p>
+            <a:pPr>
+              <a:lnSpc>
+                <a:spcPct val="150000"/>
+              </a:lnSpc>
+              <a:buFont typeface="Arial" panose="020B0604020202020204" pitchFamily="34" charset="0"/>
+              <a:buChar char="•"/>
+            </a:pPr>
+            <a:r>
+              <a:rPr lang="ar-SA" sz="2000" dirty="0"/>
+              <a:t> تسجيل الخروج</a:t>
+            </a:r>
+          </a:p>
+        </p:txBody>
+      </p:sp>
+    </p:spTree>
+    <p:extLst>
+      <p:ext uri="{BB962C8B-B14F-4D97-AF65-F5344CB8AC3E}">
+        <p14:creationId xmlns:p14="http://schemas.microsoft.com/office/powerpoint/2010/main" val="244173729"/>
       </p:ext>
     </p:extLst>
   </p:cSld>

--- a/Smart Opinion Survey Platform.pptx
+++ b/Smart Opinion Survey Platform.pptx
@@ -268,7 +268,7 @@
           <a:p>
             <a:fld id="{096A8431-2457-4B17-8EAD-CB7DD7790385}" type="datetimeFigureOut">
               <a:rPr lang="ar-SA" smtClean="0"/>
-              <a:t>19/09/47</a:t>
+              <a:t>21/09/47</a:t>
             </a:fld>
             <a:endParaRPr lang="ar-SA"/>
           </a:p>
@@ -466,7 +466,7 @@
           <a:p>
             <a:fld id="{096A8431-2457-4B17-8EAD-CB7DD7790385}" type="datetimeFigureOut">
               <a:rPr lang="ar-SA" smtClean="0"/>
-              <a:t>19/09/47</a:t>
+              <a:t>21/09/47</a:t>
             </a:fld>
             <a:endParaRPr lang="ar-SA"/>
           </a:p>
@@ -674,7 +674,7 @@
           <a:p>
             <a:fld id="{096A8431-2457-4B17-8EAD-CB7DD7790385}" type="datetimeFigureOut">
               <a:rPr lang="ar-SA" smtClean="0"/>
-              <a:t>19/09/47</a:t>
+              <a:t>21/09/47</a:t>
             </a:fld>
             <a:endParaRPr lang="ar-SA"/>
           </a:p>
@@ -872,7 +872,7 @@
           <a:p>
             <a:fld id="{096A8431-2457-4B17-8EAD-CB7DD7790385}" type="datetimeFigureOut">
               <a:rPr lang="ar-SA" smtClean="0"/>
-              <a:t>19/09/47</a:t>
+              <a:t>21/09/47</a:t>
             </a:fld>
             <a:endParaRPr lang="ar-SA"/>
           </a:p>
@@ -1147,7 +1147,7 @@
           <a:p>
             <a:fld id="{096A8431-2457-4B17-8EAD-CB7DD7790385}" type="datetimeFigureOut">
               <a:rPr lang="ar-SA" smtClean="0"/>
-              <a:t>19/09/47</a:t>
+              <a:t>21/09/47</a:t>
             </a:fld>
             <a:endParaRPr lang="ar-SA"/>
           </a:p>
@@ -1412,7 +1412,7 @@
           <a:p>
             <a:fld id="{096A8431-2457-4B17-8EAD-CB7DD7790385}" type="datetimeFigureOut">
               <a:rPr lang="ar-SA" smtClean="0"/>
-              <a:t>19/09/47</a:t>
+              <a:t>21/09/47</a:t>
             </a:fld>
             <a:endParaRPr lang="ar-SA"/>
           </a:p>
@@ -1824,7 +1824,7 @@
           <a:p>
             <a:fld id="{096A8431-2457-4B17-8EAD-CB7DD7790385}" type="datetimeFigureOut">
               <a:rPr lang="ar-SA" smtClean="0"/>
-              <a:t>19/09/47</a:t>
+              <a:t>21/09/47</a:t>
             </a:fld>
             <a:endParaRPr lang="ar-SA"/>
           </a:p>
@@ -1965,7 +1965,7 @@
           <a:p>
             <a:fld id="{096A8431-2457-4B17-8EAD-CB7DD7790385}" type="datetimeFigureOut">
               <a:rPr lang="ar-SA" smtClean="0"/>
-              <a:t>19/09/47</a:t>
+              <a:t>21/09/47</a:t>
             </a:fld>
             <a:endParaRPr lang="ar-SA"/>
           </a:p>
@@ -2078,7 +2078,7 @@
           <a:p>
             <a:fld id="{096A8431-2457-4B17-8EAD-CB7DD7790385}" type="datetimeFigureOut">
               <a:rPr lang="ar-SA" smtClean="0"/>
-              <a:t>19/09/47</a:t>
+              <a:t>21/09/47</a:t>
             </a:fld>
             <a:endParaRPr lang="ar-SA"/>
           </a:p>
@@ -2389,7 +2389,7 @@
           <a:p>
             <a:fld id="{096A8431-2457-4B17-8EAD-CB7DD7790385}" type="datetimeFigureOut">
               <a:rPr lang="ar-SA" smtClean="0"/>
-              <a:t>19/09/47</a:t>
+              <a:t>21/09/47</a:t>
             </a:fld>
             <a:endParaRPr lang="ar-SA"/>
           </a:p>
@@ -2677,7 +2677,7 @@
           <a:p>
             <a:fld id="{096A8431-2457-4B17-8EAD-CB7DD7790385}" type="datetimeFigureOut">
               <a:rPr lang="ar-SA" smtClean="0"/>
-              <a:t>19/09/47</a:t>
+              <a:t>21/09/47</a:t>
             </a:fld>
             <a:endParaRPr lang="ar-SA"/>
           </a:p>
@@ -2918,7 +2918,7 @@
           <a:p>
             <a:fld id="{096A8431-2457-4B17-8EAD-CB7DD7790385}" type="datetimeFigureOut">
               <a:rPr lang="ar-SA" smtClean="0"/>
-              <a:t>19/09/47</a:t>
+              <a:t>21/09/47</a:t>
             </a:fld>
             <a:endParaRPr lang="ar-SA"/>
           </a:p>
@@ -4157,7 +4157,7 @@
         </p:nvSpPr>
         <p:spPr>
           <a:xfrm>
-            <a:off x="483636" y="85708"/>
+            <a:off x="673941" y="0"/>
             <a:ext cx="11224725" cy="2224840"/>
           </a:xfrm>
           <a:prstGeom prst="rect">
@@ -4292,8 +4292,8 @@
         </p:nvSpPr>
         <p:spPr>
           <a:xfrm>
-            <a:off x="483636" y="2286000"/>
-            <a:ext cx="11224725" cy="2542876"/>
+            <a:off x="-293334" y="2224840"/>
+            <a:ext cx="12192000" cy="2173544"/>
           </a:xfrm>
           <a:prstGeom prst="rect">
             <a:avLst/>
@@ -4312,14 +4312,14 @@
               </a:lnSpc>
             </a:pPr>
             <a:r>
-              <a:rPr lang="ar-SA" b="1" dirty="0">
+              <a:rPr lang="ar-SA" sz="2000" b="1" dirty="0">
                 <a:solidFill>
                   <a:schemeClr val="accent1"/>
                 </a:solidFill>
               </a:rPr>
               <a:t>نطاق المشروع</a:t>
             </a:r>
-            <a:endParaRPr lang="en-US" dirty="0">
+            <a:endParaRPr lang="en-US" sz="2000" dirty="0">
               <a:solidFill>
                 <a:schemeClr val="accent1"/>
               </a:solidFill>
@@ -4352,26 +4352,30 @@
             </a:pPr>
             <a:r>
               <a:rPr lang="ar-SA" b="1" dirty="0"/>
-              <a:t>النطاق الوظيفي:</a:t>
-            </a:r>
-            <a:r>
-              <a:rPr lang="ar-SA" dirty="0"/>
+              <a:t>النطاق الوظيفي</a:t>
+            </a:r>
+            <a:r>
+              <a:rPr lang="ar-SA" sz="1700" b="1" dirty="0"/>
+              <a:t>:</a:t>
+            </a:r>
+            <a:r>
+              <a:rPr lang="ar-SA" sz="1700" dirty="0"/>
               <a:t> يشمل إدارة الحسابات، أداة بناء الاستبيانات المفلترة، تحليل المشاعر عبر الذكاء الاصطناعي </a:t>
             </a:r>
             <a:r>
-              <a:rPr lang="en-US" dirty="0"/>
+              <a:rPr lang="en-US" sz="1700" dirty="0"/>
               <a:t>(NLP)، </a:t>
             </a:r>
             <a:r>
-              <a:rPr lang="ar-SA" dirty="0"/>
+              <a:rPr lang="ar-SA" sz="1700" dirty="0"/>
               <a:t>وتوفير لوحات تحكم </a:t>
             </a:r>
             <a:r>
-              <a:rPr lang="en-US" dirty="0"/>
-              <a:t>   (Dashboards) </a:t>
-            </a:r>
-            <a:r>
-              <a:rPr lang="ar-SA" dirty="0"/>
+              <a:rPr lang="en-US" sz="1700" dirty="0"/>
+              <a:t>(Dashboards)</a:t>
+            </a:r>
+            <a:r>
+              <a:rPr lang="ar-SA" sz="1700" dirty="0"/>
               <a:t> إحصائية.</a:t>
             </a:r>
           </a:p>
@@ -4431,6 +4435,147 @@
             <a:r>
               <a:rPr lang="ar-SA" dirty="0"/>
               <a:t>ولن يتم تدريب نماذج لغوية للذكاء الاصطناعي من الصفر.</a:t>
+            </a:r>
+          </a:p>
+        </p:txBody>
+      </p:sp>
+      <p:sp>
+        <p:nvSpPr>
+          <p:cNvPr id="4" name="مربع نص 3">
+            <a:extLst>
+              <a:ext uri="{FF2B5EF4-FFF2-40B4-BE49-F238E27FC236}">
+                <a16:creationId xmlns:a16="http://schemas.microsoft.com/office/drawing/2014/main" id="{BB69BDC5-440E-97CE-FDDC-A2DD8FB1EBC1}"/>
+              </a:ext>
+            </a:extLst>
+          </p:cNvPr>
+          <p:cNvSpPr txBox="1"/>
+          <p:nvPr/>
+        </p:nvSpPr>
+        <p:spPr>
+          <a:xfrm>
+            <a:off x="718455" y="4398384"/>
+            <a:ext cx="11180211" cy="1993623"/>
+          </a:xfrm>
+          <a:prstGeom prst="rect">
+            <a:avLst/>
+          </a:prstGeom>
+          <a:noFill/>
+        </p:spPr>
+        <p:txBody>
+          <a:bodyPr wrap="square">
+            <a:spAutoFit/>
+          </a:bodyPr>
+          <a:lstStyle/>
+          <a:p>
+            <a:pPr>
+              <a:lnSpc>
+                <a:spcPct val="150000"/>
+              </a:lnSpc>
+            </a:pPr>
+            <a:r>
+              <a:rPr lang="ar-SA" sz="2000" b="1" dirty="0">
+                <a:solidFill>
+                  <a:schemeClr val="accent1"/>
+                </a:solidFill>
+              </a:rPr>
+              <a:t>المفاهيم الأساسية </a:t>
+            </a:r>
+            <a:endParaRPr lang="en-US" sz="2000" b="1" dirty="0">
+              <a:solidFill>
+                <a:schemeClr val="accent1"/>
+              </a:solidFill>
+            </a:endParaRPr>
+          </a:p>
+          <a:p>
+            <a:pPr>
+              <a:lnSpc>
+                <a:spcPct val="150000"/>
+              </a:lnSpc>
+              <a:buFont typeface="Arial" panose="020B0604020202020204" pitchFamily="34" charset="0"/>
+              <a:buChar char="•"/>
+            </a:pPr>
+            <a:r>
+              <a:rPr lang="ar-SA" sz="1600" b="1" dirty="0"/>
+              <a:t>المنصات ثنائية الأطراف </a:t>
+            </a:r>
+            <a:r>
+              <a:rPr lang="en-US" sz="1600" b="1" dirty="0"/>
+              <a:t>Two-Sided Platforms)</a:t>
+            </a:r>
+            <a:r>
+              <a:rPr lang="ar-SA" sz="1600" b="1" dirty="0"/>
+              <a:t>): </a:t>
+            </a:r>
+            <a:r>
+              <a:rPr lang="ar-SA" sz="1600" dirty="0"/>
+              <a:t>بيئات رقمية تربط "صناع القرار" مع "المجيبين المستهدفين" مباشرة، وتعتمد على تأثير الشبكة لزيادة قيمتها.</a:t>
+            </a:r>
+          </a:p>
+          <a:p>
+            <a:pPr>
+              <a:lnSpc>
+                <a:spcPct val="150000"/>
+              </a:lnSpc>
+              <a:buFont typeface="Arial" panose="020B0604020202020204" pitchFamily="34" charset="0"/>
+              <a:buChar char="•"/>
+            </a:pPr>
+            <a:r>
+              <a:rPr lang="ar-SA" sz="1600" b="1" dirty="0"/>
+              <a:t>الاستهداف الديموغرافي والفلترة الآلية:</a:t>
+            </a:r>
+            <a:r>
+              <a:rPr lang="ar-SA" sz="1600" dirty="0"/>
+              <a:t> استخدام خوارزميات مطابقة لمنع "تحيز العينة" عبر توجيه الاستبيان للشريحة المطابقة فقط (عبر حقول الملف الشخصي).</a:t>
+            </a:r>
+          </a:p>
+          <a:p>
+            <a:pPr>
+              <a:lnSpc>
+                <a:spcPct val="150000"/>
+              </a:lnSpc>
+              <a:buFont typeface="Arial" panose="020B0604020202020204" pitchFamily="34" charset="0"/>
+              <a:buChar char="•"/>
+            </a:pPr>
+            <a:r>
+              <a:rPr lang="ar-SA" sz="1600" b="1" dirty="0"/>
+              <a:t>معالجة اللغات الطبيعية (</a:t>
+            </a:r>
+            <a:r>
+              <a:rPr lang="en-US" sz="1600" b="1" dirty="0"/>
+              <a:t> (NLP</a:t>
+            </a:r>
+            <a:r>
+              <a:rPr lang="ar-SA" sz="1600" dirty="0"/>
+              <a:t>تقنية ذكاء اصطناعي (</a:t>
+            </a:r>
+            <a:r>
+              <a:rPr lang="en-US" sz="1600" dirty="0"/>
+              <a:t> (AI</a:t>
+            </a:r>
+            <a:r>
+              <a:rPr lang="ar-SA" sz="1600" dirty="0"/>
+              <a:t>لتحويل "البيانات غير المهيكلة" (كالإجابات النصية) إلى بيانات كمية قابلة للقياس والتحليل.</a:t>
+            </a:r>
+          </a:p>
+          <a:p>
+            <a:pPr>
+              <a:lnSpc>
+                <a:spcPct val="150000"/>
+              </a:lnSpc>
+              <a:buFont typeface="Arial" panose="020B0604020202020204" pitchFamily="34" charset="0"/>
+              <a:buChar char="•"/>
+            </a:pPr>
+            <a:r>
+              <a:rPr lang="ar-SA" sz="1600" b="1" dirty="0"/>
+              <a:t>تحليل المشاعر (</a:t>
+            </a:r>
+            <a:r>
+              <a:rPr lang="en-US" sz="1600" b="1" dirty="0"/>
+              <a:t> (Sentiment Analysis</a:t>
+            </a:r>
+            <a:r>
+              <a:rPr lang="ar-SA" sz="1600" dirty="0"/>
+              <a:t>قراءة النصوص آلياً وتصنيفها عاطفياً (إيجابية، سلبية، محايدة) لاستخراج توجهات الجمهور بسرعة ودقة.</a:t>
             </a:r>
           </a:p>
         </p:txBody>
@@ -4467,10 +4612,10 @@
       </p:grpSpPr>
       <p:sp>
         <p:nvSpPr>
-          <p:cNvPr id="4" name="مربع نص 3">
-            <a:extLst>
-              <a:ext uri="{FF2B5EF4-FFF2-40B4-BE49-F238E27FC236}">
-                <a16:creationId xmlns:a16="http://schemas.microsoft.com/office/drawing/2014/main" id="{624C8765-612E-7110-7F73-5DB30F0569D7}"/>
+          <p:cNvPr id="6" name="مربع نص 5">
+            <a:extLst>
+              <a:ext uri="{FF2B5EF4-FFF2-40B4-BE49-F238E27FC236}">
+                <a16:creationId xmlns:a16="http://schemas.microsoft.com/office/drawing/2014/main" id="{4FBF6A0A-C59A-595C-077B-309D8FBEDF45}"/>
               </a:ext>
             </a:extLst>
           </p:cNvPr>
@@ -4479,8 +4624,8 @@
         </p:nvSpPr>
         <p:spPr>
           <a:xfrm>
-            <a:off x="352425" y="0"/>
-            <a:ext cx="11180211" cy="3004540"/>
+            <a:off x="0" y="87876"/>
+            <a:ext cx="12192000" cy="3047501"/>
           </a:xfrm>
           <a:prstGeom prst="rect">
             <a:avLst/>
@@ -4499,155 +4644,14 @@
               </a:lnSpc>
             </a:pPr>
             <a:r>
-              <a:rPr lang="ar-SA" sz="2000" b="1" dirty="0">
-                <a:solidFill>
-                  <a:schemeClr val="accent1"/>
-                </a:solidFill>
-              </a:rPr>
-              <a:t>المفاهيم الأساسية </a:t>
-            </a:r>
-            <a:endParaRPr lang="en-US" sz="2000" dirty="0">
-              <a:solidFill>
-                <a:schemeClr val="accent1"/>
-              </a:solidFill>
-            </a:endParaRPr>
-          </a:p>
-          <a:p>
-            <a:pPr>
-              <a:lnSpc>
-                <a:spcPct val="150000"/>
-              </a:lnSpc>
-              <a:buFont typeface="Arial" panose="020B0604020202020204" pitchFamily="34" charset="0"/>
-              <a:buChar char="•"/>
-            </a:pPr>
-            <a:r>
-              <a:rPr lang="ar-SA" b="1" dirty="0"/>
-              <a:t>المنصات ثنائية الأطراف </a:t>
-            </a:r>
-            <a:r>
-              <a:rPr lang="en-US" b="1" dirty="0"/>
-              <a:t>Two-Sided Platforms)</a:t>
-            </a:r>
-            <a:r>
-              <a:rPr lang="ar-SA" b="1" dirty="0"/>
-              <a:t>): </a:t>
-            </a:r>
-            <a:r>
-              <a:rPr lang="ar-SA" dirty="0"/>
-              <a:t>بيئات رقمية تربط "صناع القرار" مع "المجيبين المستهدفين" مباشرة، وتعتمد على تأثير الشبكة لزيادة قيمتها.</a:t>
-            </a:r>
-          </a:p>
-          <a:p>
-            <a:pPr>
-              <a:lnSpc>
-                <a:spcPct val="150000"/>
-              </a:lnSpc>
-              <a:buFont typeface="Arial" panose="020B0604020202020204" pitchFamily="34" charset="0"/>
-              <a:buChar char="•"/>
-            </a:pPr>
-            <a:r>
-              <a:rPr lang="ar-SA" b="1" dirty="0"/>
-              <a:t>الاستهداف الديموغرافي والفلترة الآلية:</a:t>
-            </a:r>
-            <a:r>
-              <a:rPr lang="ar-SA" dirty="0"/>
-              <a:t> استخدام خوارزميات مطابقة لمنع "تحيز العينة" عبر توجيه الاستبيان للشريحة المطابقة فقط (عبر حقول الملف الشخصي).</a:t>
-            </a:r>
-          </a:p>
-          <a:p>
-            <a:pPr>
-              <a:lnSpc>
-                <a:spcPct val="150000"/>
-              </a:lnSpc>
-              <a:buFont typeface="Arial" panose="020B0604020202020204" pitchFamily="34" charset="0"/>
-              <a:buChar char="•"/>
-            </a:pPr>
-            <a:r>
-              <a:rPr lang="ar-SA" b="1" dirty="0"/>
-              <a:t>معالجة اللغات الطبيعية (</a:t>
-            </a:r>
-            <a:r>
-              <a:rPr lang="en-US" b="1" dirty="0"/>
-              <a:t> (NLP</a:t>
-            </a:r>
-            <a:r>
-              <a:rPr lang="ar-SA" dirty="0"/>
-              <a:t>تقنية ذكاء اصطناعي (</a:t>
-            </a:r>
-            <a:r>
-              <a:rPr lang="en-US" dirty="0"/>
-              <a:t> (AI</a:t>
-            </a:r>
-            <a:r>
-              <a:rPr lang="ar-SA" dirty="0"/>
-              <a:t>لتحويل "البيانات غير المهيكلة" (كالإجابات النصية) إلى بيانات كمية قابلة للقياس والتحليل.</a:t>
-            </a:r>
-          </a:p>
-          <a:p>
-            <a:pPr>
-              <a:lnSpc>
-                <a:spcPct val="150000"/>
-              </a:lnSpc>
-              <a:buFont typeface="Arial" panose="020B0604020202020204" pitchFamily="34" charset="0"/>
-              <a:buChar char="•"/>
-            </a:pPr>
-            <a:r>
-              <a:rPr lang="ar-SA" b="1" dirty="0"/>
-              <a:t>تحليل المشاعر (</a:t>
-            </a:r>
-            <a:r>
-              <a:rPr lang="en-US" b="1" dirty="0"/>
-              <a:t> (Sentiment Analysis</a:t>
-            </a:r>
-            <a:r>
-              <a:rPr lang="ar-SA" dirty="0"/>
-              <a:t>قراءة النصوص آلياً وتصنيفها عاطفياً (إيجابية، سلبية، محايدة) لاستخراج توجهات الجمهور بسرعة ودقة.</a:t>
-            </a:r>
-          </a:p>
-        </p:txBody>
-      </p:sp>
-      <p:sp>
-        <p:nvSpPr>
-          <p:cNvPr id="6" name="مربع نص 5">
-            <a:extLst>
-              <a:ext uri="{FF2B5EF4-FFF2-40B4-BE49-F238E27FC236}">
-                <a16:creationId xmlns:a16="http://schemas.microsoft.com/office/drawing/2014/main" id="{4FBF6A0A-C59A-595C-077B-309D8FBEDF45}"/>
-              </a:ext>
-            </a:extLst>
-          </p:cNvPr>
-          <p:cNvSpPr txBox="1"/>
-          <p:nvPr/>
-        </p:nvSpPr>
-        <p:spPr>
-          <a:xfrm>
-            <a:off x="0" y="3004540"/>
-            <a:ext cx="11532636" cy="3826689"/>
-          </a:xfrm>
-          <a:prstGeom prst="rect">
-            <a:avLst/>
-          </a:prstGeom>
-          <a:noFill/>
-        </p:spPr>
-        <p:txBody>
-          <a:bodyPr wrap="square">
-            <a:spAutoFit/>
-          </a:bodyPr>
-          <a:lstStyle/>
-          <a:p>
-            <a:pPr>
-              <a:lnSpc>
-                <a:spcPct val="150000"/>
-              </a:lnSpc>
-            </a:pPr>
-            <a:r>
-              <a:rPr lang="ar-SA" sz="2000" b="1" dirty="0">
+              <a:rPr lang="ar-SA" b="1" dirty="0">
                 <a:solidFill>
                   <a:schemeClr val="accent1"/>
                 </a:solidFill>
               </a:rPr>
               <a:t>الدراسة المرجعية </a:t>
             </a:r>
-            <a:endParaRPr lang="en-US" sz="2000" dirty="0">
+            <a:endParaRPr lang="en-US" dirty="0">
               <a:solidFill>
                 <a:schemeClr val="accent1"/>
               </a:solidFill>
@@ -4662,15 +4666,19 @@
               <a:buChar char="•"/>
             </a:pPr>
             <a:r>
-              <a:rPr lang="ar-SA" b="1" dirty="0"/>
+              <a:rPr lang="ar-SA" sz="1600" b="1" dirty="0"/>
               <a:t>النهج التقليدي في الأبحاث السابقة:</a:t>
             </a:r>
             <a:r>
-              <a:rPr lang="ar-SA" dirty="0"/>
-              <a:t> ركزت معظم الدراسات السابقة على بناء استبيانات إلكترونية تقليدية تعتمد على النشر العشوائي للروابط، مما أدى إلى نتائج تعاني من "تحيز العينة" (</a:t>
-            </a:r>
-            <a:r>
-              <a:rPr lang="en-US" dirty="0"/>
+              <a:rPr lang="ar-SA" sz="1600" dirty="0"/>
+              <a:t> </a:t>
+            </a:r>
+            <a:r>
+              <a:rPr lang="ar-SA" sz="1400" dirty="0"/>
+              <a:t>ركزت معظم الدراسات السابقة على بناء استبيانات إلكترونية تقليدية تعتمد على النشر العشوائي للروابط، مما أدى إلى نتائج تعاني من "تحيز العينة" (</a:t>
+            </a:r>
+            <a:r>
+              <a:rPr lang="en-US" sz="1400" dirty="0"/>
               <a:t>.(Sample Bias</a:t>
             </a:r>
           </a:p>
@@ -4683,27 +4691,27 @@
               <a:buChar char="•"/>
             </a:pPr>
             <a:r>
-              <a:rPr lang="ar-SA" b="1" dirty="0"/>
+              <a:rPr lang="ar-SA" sz="1600" b="1" dirty="0"/>
               <a:t>الدراسات المعتمدة على الذكاء الاصطناعي:</a:t>
             </a:r>
             <a:r>
-              <a:rPr lang="ar-SA" dirty="0"/>
+              <a:rPr lang="ar-SA" sz="1600" dirty="0"/>
               <a:t> الأبحاث الحديثة التي استخدمت معالجة اللغات الطبيعية (</a:t>
             </a:r>
             <a:r>
-              <a:rPr lang="en-US" dirty="0"/>
+              <a:rPr lang="en-US" sz="1600" dirty="0"/>
               <a:t>(NLP</a:t>
             </a:r>
             <a:r>
-              <a:rPr lang="ar-SA" dirty="0"/>
+              <a:rPr lang="ar-SA" sz="1600" dirty="0"/>
               <a:t> لتحليل الاستبيانات، غالباً ما كانت تطبق التحليل كـ "مرحلة منفصلة" (</a:t>
             </a:r>
             <a:r>
-              <a:rPr lang="en-US" dirty="0"/>
+              <a:rPr lang="en-US" sz="1600" dirty="0"/>
               <a:t>Post-processing </a:t>
             </a:r>
             <a:r>
-              <a:rPr lang="ar-SA" dirty="0"/>
+              <a:rPr lang="ar-SA" sz="1600" dirty="0"/>
               <a:t>) بعد جمع البيانات، وليست مدمجة في صلب المنصة.</a:t>
             </a:r>
           </a:p>
@@ -4716,23 +4724,23 @@
               <a:buChar char="•"/>
             </a:pPr>
             <a:r>
-              <a:rPr lang="ar-SA" b="1" dirty="0"/>
+              <a:rPr lang="ar-SA" sz="1600" b="1" dirty="0"/>
               <a:t>الفجوة البحثية (</a:t>
             </a:r>
             <a:r>
-              <a:rPr lang="en-US" b="1" dirty="0"/>
+              <a:rPr lang="en-US" sz="1600" b="1" dirty="0"/>
               <a:t> (Research Gap</a:t>
             </a:r>
             <a:r>
-              <a:rPr lang="ar-SA" dirty="0"/>
+              <a:rPr lang="ar-SA" sz="1600" dirty="0"/>
               <a:t>تفتقر الدراسات والأنظمة الحالية إلى وجود </a:t>
             </a:r>
             <a:r>
-              <a:rPr lang="ar-SA" b="1" dirty="0"/>
+              <a:rPr lang="ar-SA" sz="1600" b="1" dirty="0"/>
               <a:t>"بيئة ثنائية الأطراف متكاملة"</a:t>
             </a:r>
             <a:r>
-              <a:rPr lang="ar-SA" dirty="0"/>
+              <a:rPr lang="ar-SA" sz="1600" dirty="0"/>
               <a:t> تجمع بين:</a:t>
             </a:r>
           </a:p>
@@ -4745,7 +4753,7 @@
               <a:buChar char="•"/>
             </a:pPr>
             <a:r>
-              <a:rPr lang="ar-SA" dirty="0"/>
+              <a:rPr lang="ar-SA" sz="1600" dirty="0"/>
               <a:t>الاستهداف الآلي والمسبق للمجيبين (لضمان دقة العينة).</a:t>
             </a:r>
           </a:p>
@@ -4758,15 +4766,15 @@
               <a:buChar char="•"/>
             </a:pPr>
             <a:r>
-              <a:rPr lang="ar-SA" dirty="0"/>
+              <a:rPr lang="ar-SA" sz="1600" dirty="0"/>
               <a:t>التحليل الآلي والفوري للمشاعر (</a:t>
             </a:r>
             <a:r>
-              <a:rPr lang="en-US" dirty="0"/>
+              <a:rPr lang="en-US" sz="1600" dirty="0"/>
               <a:t>NLP </a:t>
             </a:r>
             <a:r>
-              <a:rPr lang="ar-SA" dirty="0"/>
+              <a:rPr lang="ar-SA" sz="1600" dirty="0"/>
               <a:t>) داخل نفس النظام.</a:t>
             </a:r>
           </a:p>
@@ -4779,277 +4787,22 @@
               <a:buChar char="•"/>
             </a:pPr>
             <a:r>
-              <a:rPr lang="ar-SA" b="1" dirty="0"/>
+              <a:rPr lang="ar-SA" sz="1600" b="1" dirty="0"/>
               <a:t>مساهمة مشروعنا:</a:t>
             </a:r>
             <a:r>
-              <a:rPr lang="ar-SA" dirty="0"/>
+              <a:rPr lang="ar-SA" sz="1600" dirty="0"/>
               <a:t> تقديم حل هندسي يدمج محرك الاستهداف الذكي مع نماذج الذكاء الاصطناعي في منصة واحدة متكاملة.</a:t>
             </a:r>
-          </a:p>
-        </p:txBody>
-      </p:sp>
-    </p:spTree>
-    <p:extLst>
-      <p:ext uri="{BB962C8B-B14F-4D97-AF65-F5344CB8AC3E}">
-        <p14:creationId xmlns:p14="http://schemas.microsoft.com/office/powerpoint/2010/main" val="2218134423"/>
-      </p:ext>
-    </p:extLst>
-  </p:cSld>
-  <p:clrMapOvr>
-    <a:masterClrMapping/>
-  </p:clrMapOvr>
-</p:sld>
-</file>
-
-<file path=ppt/slides/slide5.xml><?xml version="1.0" encoding="utf-8"?>
-<p:sld xmlns:a="http://schemas.openxmlformats.org/drawingml/2006/main" xmlns:r="http://schemas.openxmlformats.org/officeDocument/2006/relationships" xmlns:p="http://schemas.openxmlformats.org/presentationml/2006/main">
-  <p:cSld>
-    <p:spTree>
-      <p:nvGrpSpPr>
-        <p:cNvPr id="1" name=""/>
-        <p:cNvGrpSpPr/>
-        <p:nvPr/>
-      </p:nvGrpSpPr>
-      <p:grpSpPr>
-        <a:xfrm>
-          <a:off x="0" y="0"/>
-          <a:ext cx="0" cy="0"/>
-          <a:chOff x="0" y="0"/>
-          <a:chExt cx="0" cy="0"/>
-        </a:xfrm>
-      </p:grpSpPr>
-      <p:sp>
-        <p:nvSpPr>
-          <p:cNvPr id="3" name="مربع نص 2">
-            <a:extLst>
-              <a:ext uri="{FF2B5EF4-FFF2-40B4-BE49-F238E27FC236}">
-                <a16:creationId xmlns:a16="http://schemas.microsoft.com/office/drawing/2014/main" id="{590F3AF2-F4E8-4B17-0D30-4D06D9D13AB2}"/>
-              </a:ext>
-            </a:extLst>
-          </p:cNvPr>
-          <p:cNvSpPr txBox="1"/>
-          <p:nvPr/>
-        </p:nvSpPr>
-        <p:spPr>
-          <a:xfrm>
-            <a:off x="130629" y="3862308"/>
-            <a:ext cx="10991634" cy="2995692"/>
-          </a:xfrm>
-          <a:prstGeom prst="rect">
-            <a:avLst/>
-          </a:prstGeom>
-          <a:noFill/>
-        </p:spPr>
-        <p:txBody>
-          <a:bodyPr wrap="square">
-            <a:spAutoFit/>
-          </a:bodyPr>
-          <a:lstStyle/>
-          <a:p>
-            <a:pPr>
-              <a:lnSpc>
-                <a:spcPct val="150000"/>
-              </a:lnSpc>
-            </a:pPr>
-            <a:r>
-              <a:rPr lang="ar-SA" sz="2000" b="1" dirty="0">
-                <a:solidFill>
-                  <a:schemeClr val="accent1"/>
-                </a:solidFill>
-              </a:rPr>
-              <a:t>الأدوات والتقنيات المستخدمة </a:t>
-            </a:r>
-          </a:p>
-          <a:p>
-            <a:pPr>
-              <a:lnSpc>
-                <a:spcPct val="150000"/>
-              </a:lnSpc>
-            </a:pPr>
-            <a:r>
-              <a:rPr lang="ar-SA" b="1" dirty="0"/>
-              <a:t>الواجهة الخلفية (</a:t>
-            </a:r>
-            <a:r>
-              <a:rPr lang="en-US" b="1" dirty="0"/>
-              <a:t> :(Backend</a:t>
-            </a:r>
-            <a:r>
-              <a:rPr lang="ar-SA" dirty="0"/>
-              <a:t>لغة البرمجة </a:t>
-            </a:r>
-            <a:r>
-              <a:rPr lang="en-US" b="1" dirty="0"/>
-              <a:t>Python</a:t>
-            </a:r>
-            <a:r>
-              <a:rPr lang="en-US" dirty="0"/>
-              <a:t> </a:t>
-            </a:r>
-            <a:r>
-              <a:rPr lang="ar-SA" dirty="0"/>
-              <a:t> بالاعتماد على إطار العمل </a:t>
-            </a:r>
-            <a:r>
-              <a:rPr lang="en-US" dirty="0"/>
-              <a:t> (</a:t>
-            </a:r>
-            <a:r>
-              <a:rPr lang="en-US" b="1" dirty="0"/>
-              <a:t>Django)</a:t>
-            </a:r>
-            <a:r>
-              <a:rPr lang="ar-SA" dirty="0"/>
-              <a:t>لبناء بنية تحتية قوية، آمنة، وقابلة للتوسع.</a:t>
-            </a:r>
-          </a:p>
-          <a:p>
-            <a:pPr>
-              <a:lnSpc>
-                <a:spcPct val="150000"/>
-              </a:lnSpc>
-            </a:pPr>
-            <a:r>
-              <a:rPr lang="ar-SA" b="1" dirty="0"/>
-              <a:t> قواعد البيانات </a:t>
-            </a:r>
-            <a:r>
-              <a:rPr lang="en-US" b="1" dirty="0"/>
-              <a:t> :(Database)</a:t>
-            </a:r>
-            <a:r>
-              <a:rPr lang="ar-SA" dirty="0"/>
-              <a:t>قواعد بيانات علائقية</a:t>
-            </a:r>
-            <a:r>
-              <a:rPr lang="en-US" dirty="0"/>
-              <a:t> (</a:t>
-            </a:r>
-            <a:r>
-              <a:rPr lang="en-US" b="1" dirty="0"/>
-              <a:t>SQL) </a:t>
-            </a:r>
-            <a:r>
-              <a:rPr lang="ar-SA" dirty="0"/>
-              <a:t>لإدارة الملفات الشخصية، شروط الاستهداف، والردود بدقة وموثوقية.</a:t>
-            </a:r>
-          </a:p>
-          <a:p>
-            <a:pPr>
-              <a:lnSpc>
-                <a:spcPct val="150000"/>
-              </a:lnSpc>
-            </a:pPr>
-            <a:r>
-              <a:rPr lang="ar-SA" b="1" dirty="0"/>
-              <a:t> الواجهة الأمامية (</a:t>
-            </a:r>
-            <a:r>
-              <a:rPr lang="en-US" b="1" dirty="0"/>
-              <a:t>Frontend</a:t>
-            </a:r>
-            <a:r>
-              <a:rPr lang="ar-SA" b="1" dirty="0"/>
-              <a:t>): </a:t>
-            </a:r>
-            <a:r>
-              <a:rPr lang="ar-SA" dirty="0"/>
-              <a:t>تقنيات الويب القياسية </a:t>
-            </a:r>
-            <a:r>
-              <a:rPr lang="en-US" dirty="0"/>
-              <a:t> (HTML, CSS, JavaScript) </a:t>
-            </a:r>
-            <a:r>
-              <a:rPr lang="ar-SA" dirty="0"/>
-              <a:t>لتصميم واجهات مستخدم (</a:t>
-            </a:r>
-            <a:r>
-              <a:rPr lang="en-US" dirty="0"/>
-              <a:t>UI</a:t>
-            </a:r>
-            <a:r>
-              <a:rPr lang="ar-SA" dirty="0"/>
-              <a:t>) متجاوبة وسهلة الاستخدام.</a:t>
-            </a:r>
-          </a:p>
-          <a:p>
-            <a:pPr>
-              <a:lnSpc>
-                <a:spcPct val="150000"/>
-              </a:lnSpc>
-            </a:pPr>
-            <a:r>
-              <a:rPr lang="ar-SA" b="1" dirty="0"/>
-              <a:t> الذكاء الاصطناعي (</a:t>
-            </a:r>
-            <a:r>
-              <a:rPr lang="en-US" b="1" dirty="0"/>
-              <a:t> :(AI &amp; NLP</a:t>
-            </a:r>
-            <a:r>
-              <a:rPr lang="ar-SA" dirty="0"/>
-              <a:t>استغلال بيئة </a:t>
-            </a:r>
-            <a:r>
-              <a:rPr lang="en-US" dirty="0"/>
-              <a:t> Python </a:t>
-            </a:r>
-            <a:r>
-              <a:rPr lang="ar-SA" dirty="0"/>
-              <a:t>لدمج مكتبات ونماذج معالجة اللغات الطبيعية (لتحليل المشاعر واستخراج التوجهات).</a:t>
-            </a:r>
-          </a:p>
-          <a:p>
-            <a:pPr>
-              <a:lnSpc>
-                <a:spcPct val="150000"/>
-              </a:lnSpc>
-            </a:pPr>
-            <a:r>
-              <a:rPr lang="ar-SA" b="1" dirty="0"/>
-              <a:t>بيئة العمل الجماعي (</a:t>
-            </a:r>
-            <a:r>
-              <a:rPr lang="en-US" b="1" dirty="0"/>
-              <a:t>Version Control</a:t>
-            </a:r>
-            <a:r>
-              <a:rPr lang="ar-SA" b="1" dirty="0"/>
-              <a:t>): </a:t>
-            </a:r>
-            <a:r>
-              <a:rPr lang="ar-SA" dirty="0"/>
-              <a:t>استخدام </a:t>
-            </a:r>
-            <a:r>
-              <a:rPr lang="en-US" b="1" dirty="0"/>
-              <a:t>GitHub</a:t>
-            </a:r>
-            <a:r>
-              <a:rPr lang="ar-SA" dirty="0"/>
-              <a:t> لإدارة الأكواد وتنظيم العمل المشترك بين أعضاء الفريق.</a:t>
-            </a:r>
-          </a:p>
-          <a:p>
-            <a:pPr>
-              <a:lnSpc>
-                <a:spcPct val="150000"/>
-              </a:lnSpc>
-              <a:buFont typeface="Arial" panose="020B0604020202020204" pitchFamily="34" charset="0"/>
-              <a:buChar char="•"/>
-            </a:pPr>
-            <a:endParaRPr lang="ar-SA" dirty="0"/>
           </a:p>
         </p:txBody>
       </p:sp>
       <p:graphicFrame>
         <p:nvGraphicFramePr>
-          <p:cNvPr id="2" name="جدول 1">
-            <a:extLst>
-              <a:ext uri="{FF2B5EF4-FFF2-40B4-BE49-F238E27FC236}">
-                <a16:creationId xmlns:a16="http://schemas.microsoft.com/office/drawing/2014/main" id="{5BD70ED0-19DD-4D96-8DEF-CDAFF24FDAEF}"/>
+          <p:cNvPr id="3" name="جدول 2">
+            <a:extLst>
+              <a:ext uri="{FF2B5EF4-FFF2-40B4-BE49-F238E27FC236}">
+                <a16:creationId xmlns:a16="http://schemas.microsoft.com/office/drawing/2014/main" id="{F41C8213-FFEC-4A5E-3240-A95F4B57A9D9}"/>
               </a:ext>
             </a:extLst>
           </p:cNvPr>
@@ -5059,14 +4812,14 @@
           <p:nvPr>
             <p:extLst>
               <p:ext uri="{D42A27DB-BD31-4B8C-83A1-F6EECF244321}">
-                <p14:modId xmlns:p14="http://schemas.microsoft.com/office/powerpoint/2010/main" val="2752978139"/>
+                <p14:modId xmlns:p14="http://schemas.microsoft.com/office/powerpoint/2010/main" val="3678523836"/>
               </p:ext>
             </p:extLst>
           </p:nvPr>
         </p:nvGraphicFramePr>
         <p:xfrm>
-          <a:off x="1847461" y="93306"/>
-          <a:ext cx="9079983" cy="3278981"/>
+          <a:off x="758888" y="3237722"/>
+          <a:ext cx="10674221" cy="3250705"/>
         </p:xfrm>
         <a:graphic>
           <a:graphicData uri="http://schemas.openxmlformats.org/drawingml/2006/table">
@@ -5075,28 +4828,28 @@
                 <a:tableStyleId>{5C22544A-7EE6-4342-B048-85BDC9FD1C3A}</a:tableStyleId>
               </a:tblPr>
               <a:tblGrid>
-                <a:gridCol w="1902771">
+                <a:gridCol w="2236854">
                   <a:extLst>
                     <a:ext uri="{9D8B030D-6E8A-4147-A177-3AD203B41FA5}">
                       <a16:colId xmlns:a16="http://schemas.microsoft.com/office/drawing/2014/main" val="1950653663"/>
                     </a:ext>
                   </a:extLst>
                 </a:gridCol>
-                <a:gridCol w="1888948">
+                <a:gridCol w="2220604">
                   <a:extLst>
                     <a:ext uri="{9D8B030D-6E8A-4147-A177-3AD203B41FA5}">
                       <a16:colId xmlns:a16="http://schemas.microsoft.com/office/drawing/2014/main" val="3310257874"/>
                     </a:ext>
                   </a:extLst>
                 </a:gridCol>
-                <a:gridCol w="2127989">
+                <a:gridCol w="2501616">
                   <a:extLst>
                     <a:ext uri="{9D8B030D-6E8A-4147-A177-3AD203B41FA5}">
                       <a16:colId xmlns:a16="http://schemas.microsoft.com/office/drawing/2014/main" val="1449973089"/>
                     </a:ext>
                   </a:extLst>
                 </a:gridCol>
-                <a:gridCol w="3160275">
+                <a:gridCol w="3715147">
                   <a:extLst>
                     <a:ext uri="{9D8B030D-6E8A-4147-A177-3AD203B41FA5}">
                       <a16:colId xmlns:a16="http://schemas.microsoft.com/office/drawing/2014/main" val="3274840695"/>
@@ -5104,7 +4857,7 @@
                   </a:extLst>
                 </a:gridCol>
               </a:tblGrid>
-              <a:tr h="529490">
+              <a:tr h="524924">
                 <a:tc>
                   <a:txBody>
                     <a:bodyPr/>
@@ -5257,7 +5010,7 @@
                   </a:ext>
                 </a:extLst>
               </a:tr>
-              <a:tr h="542467">
+              <a:tr h="537790">
                 <a:tc>
                   <a:txBody>
                     <a:bodyPr/>
@@ -5380,7 +5133,7 @@
                   </a:ext>
                 </a:extLst>
               </a:tr>
-              <a:tr h="584585">
+              <a:tr h="579544">
                 <a:tc>
                   <a:txBody>
                     <a:bodyPr/>
@@ -5488,12 +5241,12 @@
                         </a:spcAft>
                       </a:pPr>
                       <a:r>
-                        <a:rPr lang="ar-SA" sz="1400" kern="100">
+                        <a:rPr lang="ar-SA" sz="1400" kern="100" dirty="0">
                           <a:effectLst/>
                         </a:rPr>
                         <a:t>مدمجة أساسياً لتحليل المشاعر واستخراج الكلمات</a:t>
                       </a:r>
-                      <a:endParaRPr lang="en-US" sz="1100" kern="100">
+                      <a:endParaRPr lang="en-US" sz="1100" kern="100" dirty="0">
                         <a:effectLst/>
                         <a:latin typeface="Calibri" panose="020F0502020204030204" pitchFamily="34" charset="0"/>
                         <a:ea typeface="Times New Roman" panose="02020603050405020304" pitchFamily="18" charset="0"/>
@@ -5509,7 +5262,7 @@
                   </a:ext>
                 </a:extLst>
               </a:tr>
-              <a:tr h="540813">
+              <a:tr h="536149">
                 <a:tc>
                   <a:txBody>
                     <a:bodyPr/>
@@ -5632,7 +5385,7 @@
                   </a:ext>
                 </a:extLst>
               </a:tr>
-              <a:tr h="540813">
+              <a:tr h="536149">
                 <a:tc>
                   <a:txBody>
                     <a:bodyPr/>
@@ -5755,7 +5508,7 @@
                   </a:ext>
                 </a:extLst>
               </a:tr>
-              <a:tr h="540813">
+              <a:tr h="536149">
                 <a:tc>
                   <a:txBody>
                     <a:bodyPr/>
@@ -5805,12 +5558,12 @@
                         </a:spcAft>
                       </a:pPr>
                       <a:r>
-                        <a:rPr lang="ar-SA" sz="1400" kern="100">
+                        <a:rPr lang="ar-SA" sz="1400" kern="100" dirty="0">
                           <a:effectLst/>
                         </a:rPr>
                         <a:t>أساسية جداً للأسئلة المغلقة</a:t>
                       </a:r>
-                      <a:endParaRPr lang="en-US" sz="1100" kern="100">
+                      <a:endParaRPr lang="en-US" sz="1100" kern="100" dirty="0">
                         <a:effectLst/>
                         <a:latin typeface="Calibri" panose="020F0502020204030204" pitchFamily="34" charset="0"/>
                         <a:ea typeface="Times New Roman" panose="02020603050405020304" pitchFamily="18" charset="0"/>
@@ -5890,10 +5643,10 @@
       </p:graphicFrame>
       <p:sp>
         <p:nvSpPr>
-          <p:cNvPr id="4" name="Rectangle 1">
-            <a:extLst>
-              <a:ext uri="{FF2B5EF4-FFF2-40B4-BE49-F238E27FC236}">
-                <a16:creationId xmlns:a16="http://schemas.microsoft.com/office/drawing/2014/main" id="{5C8CD114-3F11-4178-619F-7DA26E5A59B6}"/>
+          <p:cNvPr id="5" name="Rectangle 1">
+            <a:extLst>
+              <a:ext uri="{FF2B5EF4-FFF2-40B4-BE49-F238E27FC236}">
+                <a16:creationId xmlns:a16="http://schemas.microsoft.com/office/drawing/2014/main" id="{DD41E96A-93C9-D995-438A-F66E1DB2CD6A}"/>
               </a:ext>
             </a:extLst>
           </p:cNvPr>
@@ -5904,7 +5657,7 @@
         </p:nvSpPr>
         <p:spPr bwMode="auto">
           <a:xfrm>
-            <a:off x="4288366" y="3372288"/>
+            <a:off x="4288366" y="6488427"/>
             <a:ext cx="3615267" cy="369283"/>
           </a:xfrm>
           <a:prstGeom prst="rect">
@@ -6129,6 +5882,752 @@
     </p:spTree>
     <p:extLst>
       <p:ext uri="{BB962C8B-B14F-4D97-AF65-F5344CB8AC3E}">
+        <p14:creationId xmlns:p14="http://schemas.microsoft.com/office/powerpoint/2010/main" val="2218134423"/>
+      </p:ext>
+    </p:extLst>
+  </p:cSld>
+  <p:clrMapOvr>
+    <a:masterClrMapping/>
+  </p:clrMapOvr>
+</p:sld>
+</file>
+
+<file path=ppt/slides/slide5.xml><?xml version="1.0" encoding="utf-8"?>
+<p:sld xmlns:a="http://schemas.openxmlformats.org/drawingml/2006/main" xmlns:r="http://schemas.openxmlformats.org/officeDocument/2006/relationships" xmlns:p="http://schemas.openxmlformats.org/presentationml/2006/main">
+  <p:cSld>
+    <p:spTree>
+      <p:nvGrpSpPr>
+        <p:cNvPr id="1" name=""/>
+        <p:cNvGrpSpPr/>
+        <p:nvPr/>
+      </p:nvGrpSpPr>
+      <p:grpSpPr>
+        <a:xfrm>
+          <a:off x="0" y="0"/>
+          <a:ext cx="0" cy="0"/>
+          <a:chOff x="0" y="0"/>
+          <a:chExt cx="0" cy="0"/>
+        </a:xfrm>
+      </p:grpSpPr>
+      <p:sp>
+        <p:nvSpPr>
+          <p:cNvPr id="3" name="مربع نص 2">
+            <a:extLst>
+              <a:ext uri="{FF2B5EF4-FFF2-40B4-BE49-F238E27FC236}">
+                <a16:creationId xmlns:a16="http://schemas.microsoft.com/office/drawing/2014/main" id="{590F3AF2-F4E8-4B17-0D30-4D06D9D13AB2}"/>
+              </a:ext>
+            </a:extLst>
+          </p:cNvPr>
+          <p:cNvSpPr txBox="1"/>
+          <p:nvPr/>
+        </p:nvSpPr>
+        <p:spPr>
+          <a:xfrm>
+            <a:off x="401216" y="195378"/>
+            <a:ext cx="11644777" cy="2589042"/>
+          </a:xfrm>
+          <a:prstGeom prst="rect">
+            <a:avLst/>
+          </a:prstGeom>
+          <a:noFill/>
+        </p:spPr>
+        <p:txBody>
+          <a:bodyPr wrap="square">
+            <a:spAutoFit/>
+          </a:bodyPr>
+          <a:lstStyle/>
+          <a:p>
+            <a:pPr>
+              <a:lnSpc>
+                <a:spcPct val="150000"/>
+              </a:lnSpc>
+            </a:pPr>
+            <a:r>
+              <a:rPr lang="ar-SA" sz="2000" b="1" dirty="0">
+                <a:solidFill>
+                  <a:schemeClr val="accent1"/>
+                </a:solidFill>
+              </a:rPr>
+              <a:t>الأدوات والتقنيات المستخدمة </a:t>
+            </a:r>
+          </a:p>
+          <a:p>
+            <a:pPr marL="285750" indent="-285750">
+              <a:lnSpc>
+                <a:spcPct val="150000"/>
+              </a:lnSpc>
+              <a:buFont typeface="Arial" panose="020B0604020202020204" pitchFamily="34" charset="0"/>
+              <a:buChar char="•"/>
+            </a:pPr>
+            <a:r>
+              <a:rPr lang="ar-SA" b="1" dirty="0"/>
+              <a:t>الواجهة الخلفية (</a:t>
+            </a:r>
+            <a:r>
+              <a:rPr lang="en-US" b="1" dirty="0"/>
+              <a:t> :(Backend</a:t>
+            </a:r>
+            <a:r>
+              <a:rPr lang="ar-SA" dirty="0"/>
+              <a:t>لغة البرمجة </a:t>
+            </a:r>
+            <a:r>
+              <a:rPr lang="en-US" b="1" dirty="0"/>
+              <a:t>Python</a:t>
+            </a:r>
+            <a:r>
+              <a:rPr lang="en-US" dirty="0"/>
+              <a:t> </a:t>
+            </a:r>
+            <a:r>
+              <a:rPr lang="ar-SA" dirty="0"/>
+              <a:t> بالاعتماد على إطار العمل </a:t>
+            </a:r>
+            <a:r>
+              <a:rPr lang="en-US" dirty="0"/>
+              <a:t> (</a:t>
+            </a:r>
+            <a:r>
+              <a:rPr lang="en-US" b="1" dirty="0"/>
+              <a:t>Django)</a:t>
+            </a:r>
+            <a:r>
+              <a:rPr lang="ar-SA" dirty="0"/>
+              <a:t>لبناء بنية تحتية قوية، آمنة، وقابلة للتوسع.</a:t>
+            </a:r>
+          </a:p>
+          <a:p>
+            <a:pPr marL="285750" indent="-285750">
+              <a:lnSpc>
+                <a:spcPct val="150000"/>
+              </a:lnSpc>
+              <a:buFont typeface="Arial" panose="020B0604020202020204" pitchFamily="34" charset="0"/>
+              <a:buChar char="•"/>
+            </a:pPr>
+            <a:r>
+              <a:rPr lang="ar-SA" b="1" dirty="0"/>
+              <a:t> قواعد البيانات </a:t>
+            </a:r>
+            <a:r>
+              <a:rPr lang="en-US" b="1" dirty="0"/>
+              <a:t> :(Database)</a:t>
+            </a:r>
+            <a:r>
+              <a:rPr lang="ar-SA" dirty="0"/>
+              <a:t>قواعد بيانات علائقية</a:t>
+            </a:r>
+            <a:r>
+              <a:rPr lang="en-US" dirty="0"/>
+              <a:t> (</a:t>
+            </a:r>
+            <a:r>
+              <a:rPr lang="en-US" b="1" dirty="0"/>
+              <a:t>SQL) </a:t>
+            </a:r>
+            <a:r>
+              <a:rPr lang="ar-SA" dirty="0"/>
+              <a:t>لإدارة الملفات الشخصية، شروط الاستهداف، والردود بدقة وموثوقية.</a:t>
+            </a:r>
+          </a:p>
+          <a:p>
+            <a:pPr marL="285750" indent="-285750">
+              <a:lnSpc>
+                <a:spcPct val="150000"/>
+              </a:lnSpc>
+              <a:buFont typeface="Arial" panose="020B0604020202020204" pitchFamily="34" charset="0"/>
+              <a:buChar char="•"/>
+            </a:pPr>
+            <a:r>
+              <a:rPr lang="ar-SA" b="1" dirty="0"/>
+              <a:t>الواجهة الأمامية (</a:t>
+            </a:r>
+            <a:r>
+              <a:rPr lang="en-US" b="1" dirty="0"/>
+              <a:t>Frontend</a:t>
+            </a:r>
+            <a:r>
+              <a:rPr lang="ar-SA" b="1" dirty="0"/>
+              <a:t>): </a:t>
+            </a:r>
+            <a:r>
+              <a:rPr lang="ar-SA" dirty="0"/>
+              <a:t>تقنيات الويب القياسية </a:t>
+            </a:r>
+            <a:r>
+              <a:rPr lang="en-US" dirty="0"/>
+              <a:t> (HTML, CSS, JavaScript) </a:t>
+            </a:r>
+            <a:r>
+              <a:rPr lang="ar-SA" dirty="0"/>
+              <a:t>لتصميم واجهات مستخدم (</a:t>
+            </a:r>
+            <a:r>
+              <a:rPr lang="en-US" dirty="0"/>
+              <a:t>UI</a:t>
+            </a:r>
+            <a:r>
+              <a:rPr lang="ar-SA" dirty="0"/>
+              <a:t>) متجاوبة وسهلة الاستخدام.</a:t>
+            </a:r>
+          </a:p>
+          <a:p>
+            <a:pPr marL="285750" indent="-285750">
+              <a:lnSpc>
+                <a:spcPct val="150000"/>
+              </a:lnSpc>
+              <a:buFont typeface="Arial" panose="020B0604020202020204" pitchFamily="34" charset="0"/>
+              <a:buChar char="•"/>
+            </a:pPr>
+            <a:r>
+              <a:rPr lang="ar-SA" b="1" dirty="0"/>
+              <a:t>الذكاء الاصطناعي (</a:t>
+            </a:r>
+            <a:r>
+              <a:rPr lang="en-US" b="1" dirty="0"/>
+              <a:t> :(AI &amp; NLP</a:t>
+            </a:r>
+            <a:r>
+              <a:rPr lang="ar-SA" dirty="0"/>
+              <a:t>استغلال بيئة </a:t>
+            </a:r>
+            <a:r>
+              <a:rPr lang="en-US" dirty="0"/>
+              <a:t> Python </a:t>
+            </a:r>
+            <a:r>
+              <a:rPr lang="ar-SA" dirty="0"/>
+              <a:t>لدمج مكتبات ونماذج معالجة اللغات الطبيعية (لتحليل المشاعر واستخراج التوجهات).</a:t>
+            </a:r>
+          </a:p>
+          <a:p>
+            <a:pPr marL="285750" indent="-285750">
+              <a:lnSpc>
+                <a:spcPct val="150000"/>
+              </a:lnSpc>
+              <a:buFont typeface="Arial" panose="020B0604020202020204" pitchFamily="34" charset="0"/>
+              <a:buChar char="•"/>
+            </a:pPr>
+            <a:r>
+              <a:rPr lang="ar-SA" b="1" dirty="0"/>
+              <a:t>بيئة العمل الجماعي (</a:t>
+            </a:r>
+            <a:r>
+              <a:rPr lang="en-US" b="1" dirty="0"/>
+              <a:t>Version Control</a:t>
+            </a:r>
+            <a:r>
+              <a:rPr lang="ar-SA" b="1" dirty="0"/>
+              <a:t>): </a:t>
+            </a:r>
+            <a:r>
+              <a:rPr lang="ar-SA" dirty="0"/>
+              <a:t>استخدام </a:t>
+            </a:r>
+            <a:r>
+              <a:rPr lang="en-US" b="1" dirty="0"/>
+              <a:t>GitHub</a:t>
+            </a:r>
+            <a:r>
+              <a:rPr lang="ar-SA" dirty="0"/>
+              <a:t> لإدارة الأكواد وتنظيم العمل المشترك بين أعضاء الفريق.</a:t>
+            </a:r>
+          </a:p>
+        </p:txBody>
+      </p:sp>
+      <p:sp>
+        <p:nvSpPr>
+          <p:cNvPr id="5" name="Rectangle 1">
+            <a:extLst>
+              <a:ext uri="{FF2B5EF4-FFF2-40B4-BE49-F238E27FC236}">
+                <a16:creationId xmlns:a16="http://schemas.microsoft.com/office/drawing/2014/main" id="{16497CAC-B470-A997-F27B-A3823B1E2F4B}"/>
+              </a:ext>
+            </a:extLst>
+          </p:cNvPr>
+          <p:cNvSpPr>
+            <a:spLocks noChangeArrowheads="1"/>
+          </p:cNvSpPr>
+          <p:nvPr/>
+        </p:nvSpPr>
+        <p:spPr bwMode="auto">
+          <a:xfrm>
+            <a:off x="2700165" y="3269386"/>
+            <a:ext cx="9345828" cy="2580194"/>
+          </a:xfrm>
+          <a:prstGeom prst="rect">
+            <a:avLst/>
+          </a:prstGeom>
+          <a:noFill/>
+          <a:ln>
+            <a:noFill/>
+          </a:ln>
+          <a:effectLst/>
+          <a:extLst>
+            <a:ext uri="{909E8E84-426E-40DD-AFC4-6F175D3DCCD1}">
+              <a14:hiddenFill xmlns:a14="http://schemas.microsoft.com/office/drawing/2010/main">
+                <a:solidFill>
+                  <a:schemeClr val="accent1"/>
+                </a:solidFill>
+              </a14:hiddenFill>
+            </a:ext>
+            <a:ext uri="{91240B29-F687-4F45-9708-019B960494DF}">
+              <a14:hiddenLine xmlns:a14="http://schemas.microsoft.com/office/drawing/2010/main" w="9525">
+                <a:solidFill>
+                  <a:schemeClr val="tx1"/>
+                </a:solidFill>
+                <a:miter lim="800000"/>
+                <a:headEnd/>
+                <a:tailEnd/>
+              </a14:hiddenLine>
+            </a:ext>
+            <a:ext uri="{AF507438-7753-43E0-B8FC-AC1667EBCBE1}">
+              <a14:hiddenEffects xmlns:a14="http://schemas.microsoft.com/office/drawing/2010/main">
+                <a:effectLst>
+                  <a:outerShdw dist="35921" dir="2700000" algn="ctr" rotWithShape="0">
+                    <a:schemeClr val="bg2"/>
+                  </a:outerShdw>
+                </a:effectLst>
+              </a14:hiddenEffects>
+            </a:ext>
+          </a:extLst>
+        </p:spPr>
+        <p:txBody>
+          <a:bodyPr vert="horz" wrap="none" lIns="91440" tIns="45720" rIns="91440" bIns="45720" numCol="1" anchor="ctr" anchorCtr="0" compatLnSpc="1">
+            <a:prstTxWarp prst="textNoShape">
+              <a:avLst/>
+            </a:prstTxWarp>
+            <a:spAutoFit/>
+          </a:bodyPr>
+          <a:lstStyle/>
+          <a:p>
+            <a:pPr marL="0" marR="0" lvl="0" indent="0" algn="r" defTabSz="914400" eaLnBrk="0" fontAlgn="base" latinLnBrk="0" hangingPunct="0">
+              <a:lnSpc>
+                <a:spcPct val="150000"/>
+              </a:lnSpc>
+              <a:spcBef>
+                <a:spcPct val="0"/>
+              </a:spcBef>
+              <a:spcAft>
+                <a:spcPct val="0"/>
+              </a:spcAft>
+              <a:buClrTx/>
+              <a:buSzTx/>
+              <a:tabLst/>
+            </a:pPr>
+            <a:r>
+              <a:rPr kumimoji="0" lang="ar-SA" altLang="ar-SA" sz="2000" b="1" i="0" u="none" strike="noStrike" cap="none" normalizeH="0" baseline="0" dirty="0">
+                <a:ln>
+                  <a:noFill/>
+                </a:ln>
+                <a:solidFill>
+                  <a:schemeClr val="accent1"/>
+                </a:solidFill>
+                <a:effectLst/>
+                <a:latin typeface="Arial" panose="020B0604020202020204" pitchFamily="34" charset="0"/>
+                <a:cs typeface="Arial" panose="020B0604020202020204" pitchFamily="34" charset="0"/>
+              </a:rPr>
+              <a:t>المنهجية المتبعة:</a:t>
+            </a:r>
+            <a:r>
+              <a:rPr kumimoji="0" lang="ar-SA" altLang="ar-SA" sz="2000" b="0" i="0" u="none" strike="noStrike" cap="none" normalizeH="0" baseline="0" dirty="0">
+                <a:ln>
+                  <a:noFill/>
+                </a:ln>
+                <a:solidFill>
+                  <a:schemeClr val="accent1"/>
+                </a:solidFill>
+                <a:effectLst/>
+                <a:latin typeface="Arial" panose="020B0604020202020204" pitchFamily="34" charset="0"/>
+              </a:rPr>
+              <a:t> </a:t>
+            </a:r>
+            <a:r>
+              <a:rPr kumimoji="0" lang="ar-SA" altLang="ar-SA" sz="2000" b="0" i="0" u="none" strike="noStrike" cap="none" normalizeH="0" baseline="0" dirty="0">
+                <a:ln>
+                  <a:noFill/>
+                </a:ln>
+                <a:solidFill>
+                  <a:schemeClr val="accent1"/>
+                </a:solidFill>
+                <a:effectLst/>
+                <a:latin typeface="Arial" panose="020B0604020202020204" pitchFamily="34" charset="0"/>
+                <a:cs typeface="Arial" panose="020B0604020202020204" pitchFamily="34" charset="0"/>
+              </a:rPr>
+              <a:t>إطار العمل الرشيق</a:t>
+            </a:r>
+            <a:r>
+              <a:rPr kumimoji="0" lang="ar-SA" altLang="ar-SA" sz="2000" b="0" i="0" u="none" strike="noStrike" cap="none" normalizeH="0" baseline="0" dirty="0">
+                <a:ln>
+                  <a:noFill/>
+                </a:ln>
+                <a:solidFill>
+                  <a:schemeClr val="accent1"/>
+                </a:solidFill>
+                <a:effectLst/>
+                <a:latin typeface="Arial" panose="020B0604020202020204" pitchFamily="34" charset="0"/>
+              </a:rPr>
+              <a:t> (Agile)</a:t>
+            </a:r>
+          </a:p>
+          <a:p>
+            <a:pPr marL="0" marR="0" lvl="0" indent="0" algn="r" defTabSz="914400" eaLnBrk="0" fontAlgn="base" latinLnBrk="0" hangingPunct="0">
+              <a:lnSpc>
+                <a:spcPct val="150000"/>
+              </a:lnSpc>
+              <a:spcBef>
+                <a:spcPct val="0"/>
+              </a:spcBef>
+              <a:spcAft>
+                <a:spcPct val="0"/>
+              </a:spcAft>
+              <a:buClrTx/>
+              <a:buSzTx/>
+              <a:tabLst/>
+            </a:pPr>
+            <a:r>
+              <a:rPr kumimoji="0" lang="ar-SA" altLang="ar-SA" b="1" i="0" u="none" strike="noStrike" cap="none" normalizeH="0" baseline="0" dirty="0">
+                <a:ln>
+                  <a:noFill/>
+                </a:ln>
+                <a:solidFill>
+                  <a:schemeClr val="tx1"/>
+                </a:solidFill>
+                <a:effectLst/>
+                <a:latin typeface="Arial" panose="020B0604020202020204" pitchFamily="34" charset="0"/>
+                <a:cs typeface="Arial" panose="020B0604020202020204" pitchFamily="34" charset="0"/>
+              </a:rPr>
+              <a:t>أسباب الاختيار:</a:t>
+            </a:r>
+            <a:endParaRPr kumimoji="0" lang="ar-SA" altLang="ar-SA" b="0" i="0" u="none" strike="noStrike" cap="none" normalizeH="0" baseline="0" dirty="0">
+              <a:ln>
+                <a:noFill/>
+              </a:ln>
+              <a:solidFill>
+                <a:schemeClr val="tx1"/>
+              </a:solidFill>
+              <a:effectLst/>
+              <a:latin typeface="Arial" panose="020B0604020202020204" pitchFamily="34" charset="0"/>
+            </a:endParaRPr>
+          </a:p>
+          <a:p>
+            <a:pPr marL="0" marR="0" lvl="0" indent="0" algn="r" defTabSz="914400" eaLnBrk="0" fontAlgn="base" latinLnBrk="0" hangingPunct="0">
+              <a:lnSpc>
+                <a:spcPct val="150000"/>
+              </a:lnSpc>
+              <a:spcBef>
+                <a:spcPct val="0"/>
+              </a:spcBef>
+              <a:spcAft>
+                <a:spcPct val="0"/>
+              </a:spcAft>
+              <a:buClrTx/>
+              <a:buSzTx/>
+              <a:buFontTx/>
+              <a:buChar char="•"/>
+              <a:tabLst/>
+            </a:pPr>
+            <a:r>
+              <a:rPr kumimoji="0" lang="ar-SA" altLang="ar-SA" b="1" i="0" u="none" strike="noStrike" cap="none" normalizeH="0" baseline="0" dirty="0">
+                <a:ln>
+                  <a:noFill/>
+                </a:ln>
+                <a:solidFill>
+                  <a:schemeClr val="tx1"/>
+                </a:solidFill>
+                <a:effectLst/>
+                <a:latin typeface="Arial" panose="020B0604020202020204" pitchFamily="34" charset="0"/>
+                <a:cs typeface="Arial" panose="020B0604020202020204" pitchFamily="34" charset="0"/>
+              </a:rPr>
+              <a:t>المرونة العالية:</a:t>
+            </a:r>
+            <a:r>
+              <a:rPr kumimoji="0" lang="ar-SA" altLang="ar-SA" b="0" i="0" u="none" strike="noStrike" cap="none" normalizeH="0" baseline="0" dirty="0">
+                <a:ln>
+                  <a:noFill/>
+                </a:ln>
+                <a:solidFill>
+                  <a:schemeClr val="tx1"/>
+                </a:solidFill>
+                <a:effectLst/>
+                <a:latin typeface="Arial" panose="020B0604020202020204" pitchFamily="34" charset="0"/>
+              </a:rPr>
+              <a:t> </a:t>
+            </a:r>
+            <a:r>
+              <a:rPr kumimoji="0" lang="ar-SA" altLang="ar-SA" b="0" i="0" u="none" strike="noStrike" cap="none" normalizeH="0" baseline="0" dirty="0">
+                <a:ln>
+                  <a:noFill/>
+                </a:ln>
+                <a:solidFill>
+                  <a:schemeClr val="tx1"/>
+                </a:solidFill>
+                <a:effectLst/>
+                <a:latin typeface="Arial" panose="020B0604020202020204" pitchFamily="34" charset="0"/>
+                <a:cs typeface="Arial" panose="020B0604020202020204" pitchFamily="34" charset="0"/>
+              </a:rPr>
+              <a:t>التكيف السريع لتعديل وتحسين دقة نموذج الذكاء الاصطناعي</a:t>
+            </a:r>
+            <a:r>
+              <a:rPr kumimoji="0" lang="ar-SA" altLang="ar-SA" b="0" i="0" u="none" strike="noStrike" cap="none" normalizeH="0" baseline="0" dirty="0">
+                <a:ln>
+                  <a:noFill/>
+                </a:ln>
+                <a:solidFill>
+                  <a:schemeClr val="tx1"/>
+                </a:solidFill>
+                <a:effectLst/>
+                <a:latin typeface="Arial" panose="020B0604020202020204" pitchFamily="34" charset="0"/>
+              </a:rPr>
+              <a:t> (NLP) </a:t>
+            </a:r>
+            <a:r>
+              <a:rPr kumimoji="0" lang="ar-SA" altLang="ar-SA" b="0" i="0" u="none" strike="noStrike" cap="none" normalizeH="0" baseline="0" dirty="0">
+                <a:ln>
+                  <a:noFill/>
+                </a:ln>
+                <a:solidFill>
+                  <a:schemeClr val="tx1"/>
+                </a:solidFill>
+                <a:effectLst/>
+                <a:latin typeface="Arial" panose="020B0604020202020204" pitchFamily="34" charset="0"/>
+                <a:cs typeface="Arial" panose="020B0604020202020204" pitchFamily="34" charset="0"/>
+              </a:rPr>
+              <a:t>أثناء العمل</a:t>
+            </a:r>
+            <a:r>
+              <a:rPr kumimoji="0" lang="ar-SA" altLang="ar-SA" b="0" i="0" u="none" strike="noStrike" cap="none" normalizeH="0" baseline="0" dirty="0">
+                <a:ln>
+                  <a:noFill/>
+                </a:ln>
+                <a:solidFill>
+                  <a:schemeClr val="tx1"/>
+                </a:solidFill>
+                <a:effectLst/>
+                <a:latin typeface="Arial" panose="020B0604020202020204" pitchFamily="34" charset="0"/>
+              </a:rPr>
+              <a:t>.</a:t>
+            </a:r>
+          </a:p>
+          <a:p>
+            <a:pPr marL="0" marR="0" lvl="0" indent="0" algn="r" defTabSz="914400" eaLnBrk="0" fontAlgn="base" latinLnBrk="0" hangingPunct="0">
+              <a:lnSpc>
+                <a:spcPct val="150000"/>
+              </a:lnSpc>
+              <a:spcBef>
+                <a:spcPct val="0"/>
+              </a:spcBef>
+              <a:spcAft>
+                <a:spcPct val="0"/>
+              </a:spcAft>
+              <a:buClrTx/>
+              <a:buSzTx/>
+              <a:buFontTx/>
+              <a:buChar char="•"/>
+              <a:tabLst/>
+            </a:pPr>
+            <a:r>
+              <a:rPr kumimoji="0" lang="ar-SA" altLang="ar-SA" b="1" i="0" u="none" strike="noStrike" cap="none" normalizeH="0" baseline="0" dirty="0">
+                <a:ln>
+                  <a:noFill/>
+                </a:ln>
+                <a:solidFill>
+                  <a:schemeClr val="tx1"/>
+                </a:solidFill>
+                <a:effectLst/>
+                <a:latin typeface="Arial" panose="020B0604020202020204" pitchFamily="34" charset="0"/>
+                <a:cs typeface="Arial" panose="020B0604020202020204" pitchFamily="34" charset="0"/>
+              </a:rPr>
+              <a:t>التطوير المرحلي (Sprints):</a:t>
+            </a:r>
+            <a:r>
+              <a:rPr kumimoji="0" lang="ar-SA" altLang="ar-SA" b="0" i="0" u="none" strike="noStrike" cap="none" normalizeH="0" baseline="0" dirty="0">
+                <a:ln>
+                  <a:noFill/>
+                </a:ln>
+                <a:solidFill>
+                  <a:schemeClr val="tx1"/>
+                </a:solidFill>
+                <a:effectLst/>
+                <a:latin typeface="Arial" panose="020B0604020202020204" pitchFamily="34" charset="0"/>
+              </a:rPr>
+              <a:t> </a:t>
+            </a:r>
+            <a:r>
+              <a:rPr kumimoji="0" lang="ar-SA" altLang="ar-SA" b="0" i="0" u="none" strike="noStrike" cap="none" normalizeH="0" baseline="0" dirty="0">
+                <a:ln>
+                  <a:noFill/>
+                </a:ln>
+                <a:solidFill>
+                  <a:schemeClr val="tx1"/>
+                </a:solidFill>
+                <a:effectLst/>
+                <a:latin typeface="Arial" panose="020B0604020202020204" pitchFamily="34" charset="0"/>
+                <a:cs typeface="Arial" panose="020B0604020202020204" pitchFamily="34" charset="0"/>
+              </a:rPr>
+              <a:t>بناء النظام على مراحل متدرجة (إدارة الحسابات ⬅️ محرك المطابقة ⬅️ تحليل المشاعر)</a:t>
+            </a:r>
+            <a:r>
+              <a:rPr kumimoji="0" lang="ar-SA" altLang="ar-SA" b="0" i="0" u="none" strike="noStrike" cap="none" normalizeH="0" baseline="0" dirty="0">
+                <a:ln>
+                  <a:noFill/>
+                </a:ln>
+                <a:solidFill>
+                  <a:schemeClr val="tx1"/>
+                </a:solidFill>
+                <a:effectLst/>
+                <a:latin typeface="Arial" panose="020B0604020202020204" pitchFamily="34" charset="0"/>
+              </a:rPr>
+              <a:t>.</a:t>
+            </a:r>
+          </a:p>
+          <a:p>
+            <a:pPr marL="0" marR="0" lvl="0" indent="0" algn="r" defTabSz="914400" eaLnBrk="0" fontAlgn="base" latinLnBrk="0" hangingPunct="0">
+              <a:lnSpc>
+                <a:spcPct val="150000"/>
+              </a:lnSpc>
+              <a:spcBef>
+                <a:spcPct val="0"/>
+              </a:spcBef>
+              <a:spcAft>
+                <a:spcPct val="0"/>
+              </a:spcAft>
+              <a:buClrTx/>
+              <a:buSzTx/>
+              <a:buFontTx/>
+              <a:buChar char="•"/>
+              <a:tabLst/>
+            </a:pPr>
+            <a:r>
+              <a:rPr kumimoji="0" lang="ar-SA" altLang="ar-SA" b="1" i="0" u="none" strike="noStrike" cap="none" normalizeH="0" baseline="0" dirty="0">
+                <a:ln>
+                  <a:noFill/>
+                </a:ln>
+                <a:solidFill>
+                  <a:schemeClr val="tx1"/>
+                </a:solidFill>
+                <a:effectLst/>
+                <a:latin typeface="Arial" panose="020B0604020202020204" pitchFamily="34" charset="0"/>
+                <a:cs typeface="Arial" panose="020B0604020202020204" pitchFamily="34" charset="0"/>
+              </a:rPr>
+              <a:t>التقييم المستمر:</a:t>
+            </a:r>
+            <a:r>
+              <a:rPr kumimoji="0" lang="ar-SA" altLang="ar-SA" b="0" i="0" u="none" strike="noStrike" cap="none" normalizeH="0" baseline="0" dirty="0">
+                <a:ln>
+                  <a:noFill/>
+                </a:ln>
+                <a:solidFill>
+                  <a:schemeClr val="tx1"/>
+                </a:solidFill>
+                <a:effectLst/>
+                <a:latin typeface="Arial" panose="020B0604020202020204" pitchFamily="34" charset="0"/>
+              </a:rPr>
+              <a:t> </a:t>
+            </a:r>
+            <a:r>
+              <a:rPr kumimoji="0" lang="ar-SA" altLang="ar-SA" b="0" i="0" u="none" strike="noStrike" cap="none" normalizeH="0" baseline="0" dirty="0">
+                <a:ln>
+                  <a:noFill/>
+                </a:ln>
+                <a:solidFill>
+                  <a:schemeClr val="tx1"/>
+                </a:solidFill>
+                <a:effectLst/>
+                <a:latin typeface="Arial" panose="020B0604020202020204" pitchFamily="34" charset="0"/>
+                <a:cs typeface="Arial" panose="020B0604020202020204" pitchFamily="34" charset="0"/>
+              </a:rPr>
+              <a:t>استعراض الأجزاء المنجزة دورياً مع المشرف لتفادي تراكم الأخطاء برمجياً</a:t>
+            </a:r>
+            <a:r>
+              <a:rPr kumimoji="0" lang="ar-SA" altLang="ar-SA" b="0" i="0" u="none" strike="noStrike" cap="none" normalizeH="0" baseline="0" dirty="0">
+                <a:ln>
+                  <a:noFill/>
+                </a:ln>
+                <a:solidFill>
+                  <a:schemeClr val="tx1"/>
+                </a:solidFill>
+                <a:effectLst/>
+                <a:latin typeface="Arial" panose="020B0604020202020204" pitchFamily="34" charset="0"/>
+              </a:rPr>
+              <a:t>.</a:t>
+            </a:r>
+          </a:p>
+          <a:p>
+            <a:pPr marL="0" marR="0" lvl="0" indent="0" algn="r" defTabSz="914400" eaLnBrk="0" fontAlgn="base" latinLnBrk="0" hangingPunct="0">
+              <a:lnSpc>
+                <a:spcPct val="150000"/>
+              </a:lnSpc>
+              <a:spcBef>
+                <a:spcPct val="0"/>
+              </a:spcBef>
+              <a:spcAft>
+                <a:spcPct val="0"/>
+              </a:spcAft>
+              <a:buClrTx/>
+              <a:buSzTx/>
+              <a:buFontTx/>
+              <a:buChar char="•"/>
+              <a:tabLst/>
+            </a:pPr>
+            <a:r>
+              <a:rPr kumimoji="0" lang="ar-SA" altLang="ar-SA" b="1" i="0" u="none" strike="noStrike" cap="none" normalizeH="0" baseline="0" dirty="0">
+                <a:ln>
+                  <a:noFill/>
+                </a:ln>
+                <a:solidFill>
+                  <a:schemeClr val="tx1"/>
+                </a:solidFill>
+                <a:effectLst/>
+                <a:latin typeface="Arial" panose="020B0604020202020204" pitchFamily="34" charset="0"/>
+                <a:cs typeface="Arial" panose="020B0604020202020204" pitchFamily="34" charset="0"/>
+              </a:rPr>
+              <a:t>إدارة الوقت:</a:t>
+            </a:r>
+            <a:r>
+              <a:rPr kumimoji="0" lang="ar-SA" altLang="ar-SA" b="0" i="0" u="none" strike="noStrike" cap="none" normalizeH="0" baseline="0" dirty="0">
+                <a:ln>
+                  <a:noFill/>
+                </a:ln>
+                <a:solidFill>
+                  <a:schemeClr val="tx1"/>
+                </a:solidFill>
+                <a:effectLst/>
+                <a:latin typeface="Arial" panose="020B0604020202020204" pitchFamily="34" charset="0"/>
+              </a:rPr>
+              <a:t> </a:t>
+            </a:r>
+            <a:r>
+              <a:rPr kumimoji="0" lang="ar-SA" altLang="ar-SA" b="0" i="0" u="none" strike="noStrike" cap="none" normalizeH="0" baseline="0" dirty="0">
+                <a:ln>
+                  <a:noFill/>
+                </a:ln>
+                <a:solidFill>
+                  <a:schemeClr val="tx1"/>
+                </a:solidFill>
+                <a:effectLst/>
+                <a:latin typeface="Arial" panose="020B0604020202020204" pitchFamily="34" charset="0"/>
+                <a:cs typeface="Arial" panose="020B0604020202020204" pitchFamily="34" charset="0"/>
+              </a:rPr>
+              <a:t>ضمان تسليم المشروع بالكامل ضمن الإطار الزمني المحدد للفصل الدراسي</a:t>
+            </a:r>
+            <a:r>
+              <a:rPr kumimoji="0" lang="ar-SA" altLang="ar-SA" b="0" i="0" u="none" strike="noStrike" cap="none" normalizeH="0" baseline="0" dirty="0">
+                <a:ln>
+                  <a:noFill/>
+                </a:ln>
+                <a:solidFill>
+                  <a:schemeClr val="tx1"/>
+                </a:solidFill>
+                <a:effectLst/>
+                <a:latin typeface="Arial" panose="020B0604020202020204" pitchFamily="34" charset="0"/>
+              </a:rPr>
+              <a:t>.</a:t>
+            </a:r>
+          </a:p>
+        </p:txBody>
+      </p:sp>
+    </p:spTree>
+    <p:extLst>
+      <p:ext uri="{BB962C8B-B14F-4D97-AF65-F5344CB8AC3E}">
         <p14:creationId xmlns:p14="http://schemas.microsoft.com/office/powerpoint/2010/main" val="3741805348"/>
       </p:ext>
     </p:extLst>
@@ -6185,8 +6684,8 @@
         </p:blipFill>
         <p:spPr bwMode="auto">
           <a:xfrm>
-            <a:off x="149290" y="112450"/>
-            <a:ext cx="11905861" cy="6605592"/>
+            <a:off x="111967" y="606491"/>
+            <a:ext cx="12080033" cy="6111552"/>
           </a:xfrm>
           <a:prstGeom prst="rect">
             <a:avLst/>
@@ -6214,6 +6713,126 @@
           </a:extLst>
         </p:spPr>
       </p:pic>
+      <p:sp>
+        <p:nvSpPr>
+          <p:cNvPr id="4" name="Rectangle 1">
+            <a:extLst>
+              <a:ext uri="{FF2B5EF4-FFF2-40B4-BE49-F238E27FC236}">
+                <a16:creationId xmlns:a16="http://schemas.microsoft.com/office/drawing/2014/main" id="{80676D18-D5E8-BC30-F6F6-C2E4196021E0}"/>
+              </a:ext>
+            </a:extLst>
+          </p:cNvPr>
+          <p:cNvSpPr>
+            <a:spLocks noChangeArrowheads="1"/>
+          </p:cNvSpPr>
+          <p:nvPr/>
+        </p:nvSpPr>
+        <p:spPr bwMode="auto">
+          <a:xfrm>
+            <a:off x="4435930" y="0"/>
+            <a:ext cx="3320140" cy="461665"/>
+          </a:xfrm>
+          <a:prstGeom prst="rect">
+            <a:avLst/>
+          </a:prstGeom>
+          <a:noFill/>
+          <a:ln>
+            <a:noFill/>
+          </a:ln>
+          <a:effectLst/>
+          <a:extLst>
+            <a:ext uri="{909E8E84-426E-40DD-AFC4-6F175D3DCCD1}">
+              <a14:hiddenFill xmlns:a14="http://schemas.microsoft.com/office/drawing/2010/main">
+                <a:solidFill>
+                  <a:schemeClr val="accent1"/>
+                </a:solidFill>
+              </a14:hiddenFill>
+            </a:ext>
+            <a:ext uri="{91240B29-F687-4F45-9708-019B960494DF}">
+              <a14:hiddenLine xmlns:a14="http://schemas.microsoft.com/office/drawing/2010/main" w="9525">
+                <a:solidFill>
+                  <a:schemeClr val="tx1"/>
+                </a:solidFill>
+                <a:miter lim="800000"/>
+                <a:headEnd/>
+                <a:tailEnd/>
+              </a14:hiddenLine>
+            </a:ext>
+            <a:ext uri="{AF507438-7753-43E0-B8FC-AC1667EBCBE1}">
+              <a14:hiddenEffects xmlns:a14="http://schemas.microsoft.com/office/drawing/2010/main">
+                <a:effectLst>
+                  <a:outerShdw dist="35921" dir="2700000" algn="ctr" rotWithShape="0">
+                    <a:schemeClr val="bg2"/>
+                  </a:outerShdw>
+                </a:effectLst>
+              </a14:hiddenEffects>
+            </a:ext>
+          </a:extLst>
+        </p:spPr>
+        <p:txBody>
+          <a:bodyPr vert="horz" wrap="none" lIns="91440" tIns="45720" rIns="91440" bIns="45720" numCol="1" anchor="ctr" anchorCtr="0" compatLnSpc="1">
+            <a:prstTxWarp prst="textNoShape">
+              <a:avLst/>
+            </a:prstTxWarp>
+            <a:spAutoFit/>
+          </a:bodyPr>
+          <a:lstStyle/>
+          <a:p>
+            <a:pPr marL="0" marR="0" lvl="0" indent="0" algn="ctr" defTabSz="914400" eaLnBrk="0" fontAlgn="base" latinLnBrk="0" hangingPunct="0">
+              <a:lnSpc>
+                <a:spcPct val="100000"/>
+              </a:lnSpc>
+              <a:spcBef>
+                <a:spcPct val="0"/>
+              </a:spcBef>
+              <a:spcAft>
+                <a:spcPct val="0"/>
+              </a:spcAft>
+              <a:buClrTx/>
+              <a:buSzTx/>
+              <a:buFontTx/>
+              <a:buNone/>
+              <a:tabLst/>
+            </a:pPr>
+            <a:r>
+              <a:rPr kumimoji="0" lang="ar-SA" altLang="ar-SA" sz="2400" b="1" i="0" u="none" strike="noStrike" cap="none" normalizeH="0" baseline="0" dirty="0">
+                <a:ln>
+                  <a:noFill/>
+                </a:ln>
+                <a:solidFill>
+                  <a:schemeClr val="accent1"/>
+                </a:solidFill>
+                <a:effectLst/>
+                <a:latin typeface="Arial" panose="020B0604020202020204" pitchFamily="34" charset="0"/>
+              </a:rPr>
+              <a:t>مخطط غانت - </a:t>
+            </a:r>
+            <a:r>
+              <a:rPr kumimoji="0" lang="en-US" altLang="ar-SA" sz="2400" b="1" i="0" u="none" strike="noStrike" cap="none" normalizeH="0" baseline="0" dirty="0">
+                <a:ln>
+                  <a:noFill/>
+                </a:ln>
+                <a:solidFill>
+                  <a:schemeClr val="accent1"/>
+                </a:solidFill>
+                <a:effectLst/>
+                <a:latin typeface="Arial" panose="020B0604020202020204" pitchFamily="34" charset="0"/>
+              </a:rPr>
+              <a:t>Gantt chart</a:t>
+            </a:r>
+            <a:endParaRPr kumimoji="0" lang="ar-SA" altLang="ar-SA" sz="2400" b="1" i="0" u="none" strike="noStrike" cap="none" normalizeH="0" baseline="0" dirty="0">
+              <a:ln>
+                <a:noFill/>
+              </a:ln>
+              <a:solidFill>
+                <a:schemeClr val="accent1"/>
+              </a:solidFill>
+              <a:effectLst/>
+              <a:latin typeface="Arial" panose="020B0604020202020204" pitchFamily="34" charset="0"/>
+            </a:endParaRPr>
+          </a:p>
+        </p:txBody>
+      </p:sp>
     </p:spTree>
     <p:extLst>
       <p:ext uri="{BB962C8B-B14F-4D97-AF65-F5344CB8AC3E}">
@@ -6294,12 +6913,16 @@
             </a:pPr>
             <a:r>
               <a:rPr lang="ar-SA" sz="1500" b="1" dirty="0"/>
-              <a:t>1. وحدة إدارة الحسابات والمصادقة (</a:t>
+              <a:t>1. وحدة إدارة الحسابات والمصادقة </a:t>
             </a:r>
             <a:r>
               <a:rPr lang="en-US" sz="1500" b="1" dirty="0"/>
               <a:t>Authentication &amp; User Management)</a:t>
             </a:r>
+            <a:r>
+              <a:rPr lang="ar-SA" sz="1500" b="1" dirty="0"/>
+              <a:t>)</a:t>
+            </a:r>
             <a:endParaRPr lang="en-US" sz="1500" dirty="0"/>
           </a:p>
           <a:p>
@@ -6388,11 +7011,11 @@
             </a:r>
             <a:r>
               <a:rPr lang="en-US" sz="1500" dirty="0"/>
-              <a:t>Targeting Criteria) </a:t>
+              <a:t>Targeting Criteria</a:t>
             </a:r>
             <a:r>
               <a:rPr lang="ar-SA" sz="1500" dirty="0"/>
-              <a:t>لكل استبيان بناءً على البيانات الديموغرافية.</a:t>
+              <a:t>) لكل استبيان بناءً على البيانات الديموغرافية.</a:t>
             </a:r>
           </a:p>
           <a:p>

--- a/Smart Opinion Survey Platform.pptx
+++ b/Smart Opinion Survey Platform.pptx
@@ -11,10 +11,11 @@
     <p:sldId id="259" r:id="rId5"/>
     <p:sldId id="260" r:id="rId6"/>
     <p:sldId id="261" r:id="rId7"/>
-    <p:sldId id="263" r:id="rId8"/>
-    <p:sldId id="264" r:id="rId9"/>
+    <p:sldId id="267" r:id="rId8"/>
+    <p:sldId id="263" r:id="rId9"/>
     <p:sldId id="262" r:id="rId10"/>
     <p:sldId id="265" r:id="rId11"/>
+    <p:sldId id="268" r:id="rId12"/>
   </p:sldIdLst>
   <p:sldSz cx="12192000" cy="6858000"/>
   <p:notesSz cx="6858000" cy="9144000"/>
@@ -268,7 +269,7 @@
           <a:p>
             <a:fld id="{096A8431-2457-4B17-8EAD-CB7DD7790385}" type="datetimeFigureOut">
               <a:rPr lang="ar-SA" smtClean="0"/>
-              <a:t>21/09/47</a:t>
+              <a:t>24/09/47</a:t>
             </a:fld>
             <a:endParaRPr lang="ar-SA"/>
           </a:p>
@@ -466,7 +467,7 @@
           <a:p>
             <a:fld id="{096A8431-2457-4B17-8EAD-CB7DD7790385}" type="datetimeFigureOut">
               <a:rPr lang="ar-SA" smtClean="0"/>
-              <a:t>21/09/47</a:t>
+              <a:t>24/09/47</a:t>
             </a:fld>
             <a:endParaRPr lang="ar-SA"/>
           </a:p>
@@ -674,7 +675,7 @@
           <a:p>
             <a:fld id="{096A8431-2457-4B17-8EAD-CB7DD7790385}" type="datetimeFigureOut">
               <a:rPr lang="ar-SA" smtClean="0"/>
-              <a:t>21/09/47</a:t>
+              <a:t>24/09/47</a:t>
             </a:fld>
             <a:endParaRPr lang="ar-SA"/>
           </a:p>
@@ -872,7 +873,7 @@
           <a:p>
             <a:fld id="{096A8431-2457-4B17-8EAD-CB7DD7790385}" type="datetimeFigureOut">
               <a:rPr lang="ar-SA" smtClean="0"/>
-              <a:t>21/09/47</a:t>
+              <a:t>24/09/47</a:t>
             </a:fld>
             <a:endParaRPr lang="ar-SA"/>
           </a:p>
@@ -1147,7 +1148,7 @@
           <a:p>
             <a:fld id="{096A8431-2457-4B17-8EAD-CB7DD7790385}" type="datetimeFigureOut">
               <a:rPr lang="ar-SA" smtClean="0"/>
-              <a:t>21/09/47</a:t>
+              <a:t>24/09/47</a:t>
             </a:fld>
             <a:endParaRPr lang="ar-SA"/>
           </a:p>
@@ -1412,7 +1413,7 @@
           <a:p>
             <a:fld id="{096A8431-2457-4B17-8EAD-CB7DD7790385}" type="datetimeFigureOut">
               <a:rPr lang="ar-SA" smtClean="0"/>
-              <a:t>21/09/47</a:t>
+              <a:t>24/09/47</a:t>
             </a:fld>
             <a:endParaRPr lang="ar-SA"/>
           </a:p>
@@ -1824,7 +1825,7 @@
           <a:p>
             <a:fld id="{096A8431-2457-4B17-8EAD-CB7DD7790385}" type="datetimeFigureOut">
               <a:rPr lang="ar-SA" smtClean="0"/>
-              <a:t>21/09/47</a:t>
+              <a:t>24/09/47</a:t>
             </a:fld>
             <a:endParaRPr lang="ar-SA"/>
           </a:p>
@@ -1965,7 +1966,7 @@
           <a:p>
             <a:fld id="{096A8431-2457-4B17-8EAD-CB7DD7790385}" type="datetimeFigureOut">
               <a:rPr lang="ar-SA" smtClean="0"/>
-              <a:t>21/09/47</a:t>
+              <a:t>24/09/47</a:t>
             </a:fld>
             <a:endParaRPr lang="ar-SA"/>
           </a:p>
@@ -2078,7 +2079,7 @@
           <a:p>
             <a:fld id="{096A8431-2457-4B17-8EAD-CB7DD7790385}" type="datetimeFigureOut">
               <a:rPr lang="ar-SA" smtClean="0"/>
-              <a:t>21/09/47</a:t>
+              <a:t>24/09/47</a:t>
             </a:fld>
             <a:endParaRPr lang="ar-SA"/>
           </a:p>
@@ -2389,7 +2390,7 @@
           <a:p>
             <a:fld id="{096A8431-2457-4B17-8EAD-CB7DD7790385}" type="datetimeFigureOut">
               <a:rPr lang="ar-SA" smtClean="0"/>
-              <a:t>21/09/47</a:t>
+              <a:t>24/09/47</a:t>
             </a:fld>
             <a:endParaRPr lang="ar-SA"/>
           </a:p>
@@ -2677,7 +2678,7 @@
           <a:p>
             <a:fld id="{096A8431-2457-4B17-8EAD-CB7DD7790385}" type="datetimeFigureOut">
               <a:rPr lang="ar-SA" smtClean="0"/>
-              <a:t>21/09/47</a:t>
+              <a:t>24/09/47</a:t>
             </a:fld>
             <a:endParaRPr lang="ar-SA"/>
           </a:p>
@@ -2918,7 +2919,7 @@
           <a:p>
             <a:fld id="{096A8431-2457-4B17-8EAD-CB7DD7790385}" type="datetimeFigureOut">
               <a:rPr lang="ar-SA" smtClean="0"/>
-              <a:t>21/09/47</a:t>
+              <a:t>24/09/47</a:t>
             </a:fld>
             <a:endParaRPr lang="ar-SA"/>
           </a:p>
@@ -3353,7 +3354,7 @@
         </p:nvSpPr>
         <p:spPr>
           <a:xfrm>
-            <a:off x="1523999" y="716060"/>
+            <a:off x="1524000" y="1175092"/>
             <a:ext cx="9144000" cy="2306637"/>
           </a:xfrm>
         </p:spPr>
@@ -3455,7 +3456,7 @@
         </p:nvSpPr>
         <p:spPr>
           <a:xfrm>
-            <a:off x="1523999" y="2545991"/>
+            <a:off x="1524000" y="2816579"/>
             <a:ext cx="9144001" cy="1303953"/>
           </a:xfrm>
           <a:prstGeom prst="rect">
@@ -3553,7 +3554,7 @@
         </p:nvSpPr>
         <p:spPr>
           <a:xfrm>
-            <a:off x="2325498" y="4338112"/>
+            <a:off x="2325499" y="4608700"/>
             <a:ext cx="7541002" cy="2033918"/>
           </a:xfrm>
           <a:prstGeom prst="rect">
@@ -3676,6 +3677,86 @@
           </a:p>
         </p:txBody>
       </p:sp>
+      <p:pic>
+        <p:nvPicPr>
+          <p:cNvPr id="6" name="Picture 50">
+            <a:extLst>
+              <a:ext uri="{FF2B5EF4-FFF2-40B4-BE49-F238E27FC236}">
+                <a16:creationId xmlns:a16="http://schemas.microsoft.com/office/drawing/2014/main" id="{1221C0D0-4679-D5A3-CF19-712E805FEB20}"/>
+              </a:ext>
+            </a:extLst>
+          </p:cNvPr>
+          <p:cNvPicPr>
+            <a:picLocks noChangeAspect="1"/>
+          </p:cNvPicPr>
+          <p:nvPr/>
+        </p:nvPicPr>
+        <p:blipFill rotWithShape="1">
+          <a:blip r:embed="rId2">
+            <a:extLst>
+              <a:ext uri="{BEBA8EAE-BF5A-486C-A8C5-ECC9F3942E4B}">
+                <a14:imgProps xmlns:a14="http://schemas.microsoft.com/office/drawing/2010/main">
+                  <a14:imgLayer r:embed="rId3">
+                    <a14:imgEffect>
+                      <a14:saturation sat="200000"/>
+                    </a14:imgEffect>
+                  </a14:imgLayer>
+                </a14:imgProps>
+              </a:ext>
+            </a:extLst>
+          </a:blip>
+          <a:srcRect l="7096" t="14058" r="7395" b="12127"/>
+          <a:stretch/>
+        </p:blipFill>
+        <p:spPr bwMode="auto">
+          <a:xfrm>
+            <a:off x="0" y="0"/>
+            <a:ext cx="2489187" cy="1857958"/>
+          </a:xfrm>
+          <a:prstGeom prst="rect">
+            <a:avLst/>
+          </a:prstGeom>
+          <a:ln>
+            <a:noFill/>
+          </a:ln>
+          <a:effectLst/>
+          <a:extLst>
+            <a:ext uri="{53640926-AAD7-44D8-BBD7-CCE9431645EC}">
+              <a14:shadowObscured xmlns:a14="http://schemas.microsoft.com/office/drawing/2010/main"/>
+            </a:ext>
+          </a:extLst>
+        </p:spPr>
+      </p:pic>
+      <p:pic>
+        <p:nvPicPr>
+          <p:cNvPr id="7" name="Image 16">
+            <a:extLst>
+              <a:ext uri="{FF2B5EF4-FFF2-40B4-BE49-F238E27FC236}">
+                <a16:creationId xmlns:a16="http://schemas.microsoft.com/office/drawing/2014/main" id="{76CE22C2-6123-D1A8-2E06-140C3C095A66}"/>
+              </a:ext>
+            </a:extLst>
+          </p:cNvPr>
+          <p:cNvPicPr>
+            <a:picLocks/>
+          </p:cNvPicPr>
+          <p:nvPr/>
+        </p:nvPicPr>
+        <p:blipFill>
+          <a:blip r:embed="rId4" cstate="print"/>
+          <a:stretch>
+            <a:fillRect/>
+          </a:stretch>
+        </p:blipFill>
+        <p:spPr>
+          <a:xfrm>
+            <a:off x="9702813" y="0"/>
+            <a:ext cx="2489187" cy="1716834"/>
+          </a:xfrm>
+          <a:prstGeom prst="rect">
+            <a:avLst/>
+          </a:prstGeom>
+        </p:spPr>
+      </p:pic>
     </p:spTree>
     <p:extLst>
       <p:ext uri="{BB962C8B-B14F-4D97-AF65-F5344CB8AC3E}">
@@ -3766,6 +3847,382 @@
 </p:sld>
 </file>
 
+<file path=ppt/slides/slide11.xml><?xml version="1.0" encoding="utf-8"?>
+<p:sld xmlns:a="http://schemas.openxmlformats.org/drawingml/2006/main" xmlns:r="http://schemas.openxmlformats.org/officeDocument/2006/relationships" xmlns:p="http://schemas.openxmlformats.org/presentationml/2006/main">
+  <p:cSld>
+    <p:spTree>
+      <p:nvGrpSpPr>
+        <p:cNvPr id="1" name=""/>
+        <p:cNvGrpSpPr/>
+        <p:nvPr/>
+      </p:nvGrpSpPr>
+      <p:grpSpPr>
+        <a:xfrm>
+          <a:off x="0" y="0"/>
+          <a:ext cx="0" cy="0"/>
+          <a:chOff x="0" y="0"/>
+          <a:chExt cx="0" cy="0"/>
+        </a:xfrm>
+      </p:grpSpPr>
+      <p:sp>
+        <p:nvSpPr>
+          <p:cNvPr id="2" name="Rectangle 1">
+            <a:extLst>
+              <a:ext uri="{FF2B5EF4-FFF2-40B4-BE49-F238E27FC236}">
+                <a16:creationId xmlns:a16="http://schemas.microsoft.com/office/drawing/2014/main" id="{520CE5F3-9BF6-0139-3D36-E258C0CB383C}"/>
+              </a:ext>
+            </a:extLst>
+          </p:cNvPr>
+          <p:cNvSpPr>
+            <a:spLocks noChangeArrowheads="1"/>
+          </p:cNvSpPr>
+          <p:nvPr/>
+        </p:nvSpPr>
+        <p:spPr bwMode="auto">
+          <a:xfrm>
+            <a:off x="653142" y="1730708"/>
+            <a:ext cx="11308703" cy="2995692"/>
+          </a:xfrm>
+          <a:prstGeom prst="rect">
+            <a:avLst/>
+          </a:prstGeom>
+          <a:noFill/>
+          <a:ln>
+            <a:noFill/>
+          </a:ln>
+          <a:effectLst/>
+          <a:extLst>
+            <a:ext uri="{909E8E84-426E-40DD-AFC4-6F175D3DCCD1}">
+              <a14:hiddenFill xmlns:a14="http://schemas.microsoft.com/office/drawing/2010/main">
+                <a:solidFill>
+                  <a:schemeClr val="accent1"/>
+                </a:solidFill>
+              </a14:hiddenFill>
+            </a:ext>
+            <a:ext uri="{91240B29-F687-4F45-9708-019B960494DF}">
+              <a14:hiddenLine xmlns:a14="http://schemas.microsoft.com/office/drawing/2010/main" w="9525">
+                <a:solidFill>
+                  <a:schemeClr val="tx1"/>
+                </a:solidFill>
+                <a:miter lim="800000"/>
+                <a:headEnd/>
+                <a:tailEnd/>
+              </a14:hiddenLine>
+            </a:ext>
+            <a:ext uri="{AF507438-7753-43E0-B8FC-AC1667EBCBE1}">
+              <a14:hiddenEffects xmlns:a14="http://schemas.microsoft.com/office/drawing/2010/main">
+                <a:effectLst>
+                  <a:outerShdw dist="35921" dir="2700000" algn="ctr" rotWithShape="0">
+                    <a:schemeClr val="bg2"/>
+                  </a:outerShdw>
+                </a:effectLst>
+              </a14:hiddenEffects>
+            </a:ext>
+          </a:extLst>
+        </p:spPr>
+        <p:txBody>
+          <a:bodyPr vert="horz" wrap="square" lIns="91440" tIns="45720" rIns="91440" bIns="45720" numCol="1" anchor="ctr" anchorCtr="0" compatLnSpc="1">
+            <a:prstTxWarp prst="textNoShape">
+              <a:avLst/>
+            </a:prstTxWarp>
+            <a:spAutoFit/>
+          </a:bodyPr>
+          <a:lstStyle/>
+          <a:p>
+            <a:pPr marL="0" marR="0" lvl="0" indent="0" defTabSz="914400" eaLnBrk="0" fontAlgn="base" latinLnBrk="0" hangingPunct="0">
+              <a:lnSpc>
+                <a:spcPct val="150000"/>
+              </a:lnSpc>
+              <a:spcBef>
+                <a:spcPct val="0"/>
+              </a:spcBef>
+              <a:spcAft>
+                <a:spcPct val="0"/>
+              </a:spcAft>
+              <a:buClrTx/>
+              <a:buSzTx/>
+              <a:buFontTx/>
+              <a:buNone/>
+              <a:tabLst/>
+            </a:pPr>
+            <a:r>
+              <a:rPr kumimoji="0" lang="ar-SA" altLang="ar-SA" sz="2000" b="1" i="0" u="none" strike="noStrike" cap="none" normalizeH="0" baseline="0" dirty="0">
+                <a:ln>
+                  <a:noFill/>
+                </a:ln>
+                <a:solidFill>
+                  <a:schemeClr val="tx1"/>
+                </a:solidFill>
+                <a:effectLst/>
+                <a:latin typeface="Arial" panose="020B0604020202020204" pitchFamily="34" charset="0"/>
+                <a:cs typeface="Arial" panose="020B0604020202020204" pitchFamily="34" charset="0"/>
+              </a:rPr>
+              <a:t>المراجع الرئيسية (Key References)</a:t>
+            </a:r>
+            <a:endParaRPr kumimoji="0" lang="ar-SA" altLang="ar-SA" sz="2000" b="1" i="0" u="none" strike="noStrike" cap="none" normalizeH="0" baseline="0" dirty="0">
+              <a:ln>
+                <a:noFill/>
+              </a:ln>
+              <a:solidFill>
+                <a:schemeClr val="tx1"/>
+              </a:solidFill>
+              <a:effectLst/>
+              <a:latin typeface="Arial" panose="020B0604020202020204" pitchFamily="34" charset="0"/>
+            </a:endParaRPr>
+          </a:p>
+          <a:p>
+            <a:pPr marL="0" marR="0" lvl="0" indent="0" defTabSz="914400" eaLnBrk="0" fontAlgn="base" latinLnBrk="0" hangingPunct="0">
+              <a:lnSpc>
+                <a:spcPct val="150000"/>
+              </a:lnSpc>
+              <a:spcBef>
+                <a:spcPct val="0"/>
+              </a:spcBef>
+              <a:spcAft>
+                <a:spcPct val="0"/>
+              </a:spcAft>
+              <a:buClrTx/>
+              <a:buSzTx/>
+              <a:buFontTx/>
+              <a:buChar char="•"/>
+              <a:tabLst/>
+            </a:pPr>
+            <a:r>
+              <a:rPr kumimoji="0" lang="ar-SA" altLang="ar-SA" b="1" i="0" u="none" strike="noStrike" cap="none" normalizeH="0" baseline="0" dirty="0">
+                <a:ln>
+                  <a:noFill/>
+                </a:ln>
+                <a:solidFill>
+                  <a:schemeClr val="tx1"/>
+                </a:solidFill>
+                <a:effectLst/>
+                <a:latin typeface="Arial" panose="020B0604020202020204" pitchFamily="34" charset="0"/>
+                <a:cs typeface="Arial" panose="020B0604020202020204" pitchFamily="34" charset="0"/>
+              </a:rPr>
+              <a:t>في منهجية الاستبيانات ومشاكل العينة (Survey Methodology):</a:t>
+            </a:r>
+            <a:endParaRPr kumimoji="0" lang="ar-SA" altLang="ar-SA" b="0" i="0" u="none" strike="noStrike" cap="none" normalizeH="0" baseline="0" dirty="0">
+              <a:ln>
+                <a:noFill/>
+              </a:ln>
+              <a:solidFill>
+                <a:schemeClr val="tx1"/>
+              </a:solidFill>
+              <a:effectLst/>
+              <a:latin typeface="Arial" panose="020B0604020202020204" pitchFamily="34" charset="0"/>
+            </a:endParaRPr>
+          </a:p>
+          <a:p>
+            <a:pPr marL="0" marR="0" lvl="0" indent="0" defTabSz="914400" eaLnBrk="0" fontAlgn="base" latinLnBrk="0" hangingPunct="0">
+              <a:lnSpc>
+                <a:spcPct val="150000"/>
+              </a:lnSpc>
+              <a:spcBef>
+                <a:spcPct val="0"/>
+              </a:spcBef>
+              <a:spcAft>
+                <a:spcPct val="0"/>
+              </a:spcAft>
+              <a:buClrTx/>
+              <a:buSzTx/>
+              <a:buFontTx/>
+              <a:buNone/>
+              <a:tabLst/>
+            </a:pPr>
+            <a:r>
+              <a:rPr kumimoji="0" lang="en-US" altLang="ar-SA" b="0" i="0" u="none" strike="noStrike" cap="none" normalizeH="0" baseline="0" dirty="0">
+                <a:ln>
+                  <a:noFill/>
+                </a:ln>
+                <a:solidFill>
+                  <a:schemeClr val="tx1"/>
+                </a:solidFill>
+                <a:effectLst/>
+                <a:latin typeface="Arial" panose="020B0604020202020204" pitchFamily="34" charset="0"/>
+              </a:rPr>
+              <a:t>Groves, R. M., et al. (2011). Survey Methodology. John Wiley &amp; Sons.</a:t>
+            </a:r>
+            <a:endParaRPr kumimoji="0" lang="ar-SA" altLang="ar-SA" b="0" i="0" u="none" strike="noStrike" cap="none" normalizeH="0" baseline="0" dirty="0">
+              <a:ln>
+                <a:noFill/>
+              </a:ln>
+              <a:solidFill>
+                <a:schemeClr val="tx1"/>
+              </a:solidFill>
+              <a:effectLst/>
+              <a:latin typeface="Arial" panose="020B0604020202020204" pitchFamily="34" charset="0"/>
+            </a:endParaRPr>
+          </a:p>
+          <a:p>
+            <a:pPr marL="0" marR="0" lvl="0" indent="0" defTabSz="914400" eaLnBrk="0" fontAlgn="base" latinLnBrk="0" hangingPunct="0">
+              <a:lnSpc>
+                <a:spcPct val="150000"/>
+              </a:lnSpc>
+              <a:spcBef>
+                <a:spcPct val="0"/>
+              </a:spcBef>
+              <a:spcAft>
+                <a:spcPct val="0"/>
+              </a:spcAft>
+              <a:buClrTx/>
+              <a:buSzTx/>
+              <a:buFontTx/>
+              <a:buChar char="•"/>
+              <a:tabLst/>
+            </a:pPr>
+            <a:r>
+              <a:rPr kumimoji="0" lang="ar-SA" altLang="ar-SA" b="1" i="0" u="none" strike="noStrike" cap="none" normalizeH="0" baseline="0" dirty="0">
+                <a:ln>
+                  <a:noFill/>
+                </a:ln>
+                <a:solidFill>
+                  <a:schemeClr val="tx1"/>
+                </a:solidFill>
+                <a:effectLst/>
+                <a:latin typeface="Arial" panose="020B0604020202020204" pitchFamily="34" charset="0"/>
+                <a:cs typeface="Arial" panose="020B0604020202020204" pitchFamily="34" charset="0"/>
+              </a:rPr>
+              <a:t>في الذكاء الاصطناعي وتحليل المشاعر (AI &amp; Sentiment Analysis):</a:t>
+            </a:r>
+          </a:p>
+          <a:p>
+            <a:pPr marL="0" marR="0" lvl="0" indent="0" defTabSz="914400" eaLnBrk="0" fontAlgn="base" latinLnBrk="0" hangingPunct="0">
+              <a:lnSpc>
+                <a:spcPct val="150000"/>
+              </a:lnSpc>
+              <a:spcBef>
+                <a:spcPct val="0"/>
+              </a:spcBef>
+              <a:spcAft>
+                <a:spcPct val="0"/>
+              </a:spcAft>
+              <a:buClrTx/>
+              <a:buSzTx/>
+              <a:buFontTx/>
+              <a:buChar char="•"/>
+              <a:tabLst/>
+            </a:pPr>
+            <a:r>
+              <a:rPr lang="en-US" dirty="0"/>
+              <a:t>Liu, B. (2020). </a:t>
+            </a:r>
+            <a:r>
+              <a:rPr lang="en-US" i="1" dirty="0"/>
+              <a:t>Sentiment Analysis: Mining Opinions, Sentiments, and Emotions</a:t>
+            </a:r>
+            <a:r>
+              <a:rPr lang="en-US" dirty="0"/>
+              <a:t>. Cambridge University Press.</a:t>
+            </a:r>
+            <a:endParaRPr kumimoji="0" lang="ar-SA" altLang="ar-SA" b="0" i="0" u="none" strike="noStrike" cap="none" normalizeH="0" baseline="0" dirty="0">
+              <a:ln>
+                <a:noFill/>
+              </a:ln>
+              <a:solidFill>
+                <a:schemeClr val="tx1"/>
+              </a:solidFill>
+              <a:effectLst/>
+              <a:latin typeface="Arial" panose="020B0604020202020204" pitchFamily="34" charset="0"/>
+            </a:endParaRPr>
+          </a:p>
+          <a:p>
+            <a:pPr marL="0" marR="0" lvl="0" indent="0" defTabSz="914400" eaLnBrk="0" fontAlgn="base" latinLnBrk="0" hangingPunct="0">
+              <a:lnSpc>
+                <a:spcPct val="150000"/>
+              </a:lnSpc>
+              <a:spcBef>
+                <a:spcPct val="0"/>
+              </a:spcBef>
+              <a:spcAft>
+                <a:spcPct val="0"/>
+              </a:spcAft>
+              <a:buClrTx/>
+              <a:buSzTx/>
+              <a:buFontTx/>
+              <a:buChar char="•"/>
+              <a:tabLst/>
+            </a:pPr>
+            <a:r>
+              <a:rPr kumimoji="0" lang="ar-SA" altLang="ar-SA" b="1" i="0" u="none" strike="noStrike" cap="none" normalizeH="0" baseline="0" dirty="0">
+                <a:ln>
+                  <a:noFill/>
+                </a:ln>
+                <a:solidFill>
+                  <a:schemeClr val="tx1"/>
+                </a:solidFill>
+                <a:effectLst/>
+                <a:latin typeface="Arial" panose="020B0604020202020204" pitchFamily="34" charset="0"/>
+                <a:cs typeface="Arial" panose="020B0604020202020204" pitchFamily="34" charset="0"/>
+              </a:rPr>
+              <a:t>في هندسة البرمجيات ومنهجية Agile (Software Engineering):</a:t>
+            </a:r>
+            <a:endParaRPr kumimoji="0" lang="ar-SA" altLang="ar-SA" b="0" i="0" u="none" strike="noStrike" cap="none" normalizeH="0" baseline="0" dirty="0">
+              <a:ln>
+                <a:noFill/>
+              </a:ln>
+              <a:solidFill>
+                <a:schemeClr val="tx1"/>
+              </a:solidFill>
+              <a:effectLst/>
+              <a:latin typeface="Arial" panose="020B0604020202020204" pitchFamily="34" charset="0"/>
+            </a:endParaRPr>
+          </a:p>
+          <a:p>
+            <a:pPr marL="0" marR="0" lvl="0" indent="0" defTabSz="914400" eaLnBrk="0" fontAlgn="base" latinLnBrk="0" hangingPunct="0">
+              <a:lnSpc>
+                <a:spcPct val="150000"/>
+              </a:lnSpc>
+              <a:spcBef>
+                <a:spcPct val="0"/>
+              </a:spcBef>
+              <a:spcAft>
+                <a:spcPct val="0"/>
+              </a:spcAft>
+              <a:buClrTx/>
+              <a:buSzTx/>
+              <a:buFontTx/>
+              <a:buNone/>
+              <a:tabLst/>
+            </a:pPr>
+            <a:r>
+              <a:rPr kumimoji="0" lang="en-US" altLang="ar-SA" b="0" i="0" u="none" strike="noStrike" cap="none" normalizeH="0" baseline="0" dirty="0">
+                <a:ln>
+                  <a:noFill/>
+                </a:ln>
+                <a:solidFill>
+                  <a:schemeClr val="tx1"/>
+                </a:solidFill>
+                <a:effectLst/>
+                <a:latin typeface="Arial" panose="020B0604020202020204" pitchFamily="34" charset="0"/>
+              </a:rPr>
+              <a:t>Sommerville, I. (2015). Software Engineering (10th ed.). Pearson.</a:t>
+            </a:r>
+            <a:endParaRPr kumimoji="0" lang="ar-SA" altLang="ar-SA" b="0" i="0" u="none" strike="noStrike" cap="none" normalizeH="0" baseline="0" dirty="0">
+              <a:ln>
+                <a:noFill/>
+              </a:ln>
+              <a:solidFill>
+                <a:schemeClr val="tx1"/>
+              </a:solidFill>
+              <a:effectLst/>
+              <a:latin typeface="Arial" panose="020B0604020202020204" pitchFamily="34" charset="0"/>
+            </a:endParaRPr>
+          </a:p>
+        </p:txBody>
+      </p:sp>
+    </p:spTree>
+    <p:extLst>
+      <p:ext uri="{BB962C8B-B14F-4D97-AF65-F5344CB8AC3E}">
+        <p14:creationId xmlns:p14="http://schemas.microsoft.com/office/powerpoint/2010/main" val="2650861852"/>
+      </p:ext>
+    </p:extLst>
+  </p:cSld>
+  <p:clrMapOvr>
+    <a:masterClrMapping/>
+  </p:clrMapOvr>
+</p:sld>
+</file>
+
 <file path=ppt/slides/slide2.xml><?xml version="1.0" encoding="utf-8"?>
 <p:sld xmlns:a="http://schemas.openxmlformats.org/drawingml/2006/main" xmlns:r="http://schemas.openxmlformats.org/officeDocument/2006/relationships" xmlns:p="http://schemas.openxmlformats.org/presentationml/2006/main">
   <p:cSld>
@@ -3797,8 +4254,8 @@
         </p:nvSpPr>
         <p:spPr>
           <a:xfrm>
-            <a:off x="746448" y="74645"/>
-            <a:ext cx="10314991" cy="2850589"/>
+            <a:off x="352229" y="552186"/>
+            <a:ext cx="10921480" cy="1620957"/>
           </a:xfrm>
           <a:prstGeom prst="rect">
             <a:avLst/>
@@ -3823,7 +4280,7 @@
               </a:spcAft>
             </a:pPr>
             <a:r>
-              <a:rPr lang="ar-SA" sz="2000" b="1" dirty="0">
+              <a:rPr lang="ar-SA" sz="2400" b="1" dirty="0">
                 <a:solidFill>
                   <a:srgbClr val="2F5496"/>
                 </a:solidFill>
@@ -3833,7 +4290,7 @@
               </a:rPr>
               <a:t>مقدمة عن المشروع</a:t>
             </a:r>
-            <a:endParaRPr lang="en-US" sz="2000" b="1" dirty="0">
+            <a:endParaRPr lang="en-US" sz="2400" b="1" dirty="0">
               <a:solidFill>
                 <a:srgbClr val="2F5496"/>
               </a:solidFill>
@@ -3843,89 +4300,46 @@
             </a:endParaRPr>
           </a:p>
           <a:p>
-            <a:pPr algn="r">
-              <a:lnSpc>
-                <a:spcPct val="150000"/>
-              </a:lnSpc>
+            <a:pPr>
               <a:buFont typeface="Arial" panose="020B0604020202020204" pitchFamily="34" charset="0"/>
               <a:buChar char="•"/>
             </a:pPr>
             <a:r>
-              <a:rPr lang="ar-SA" sz="1700" b="1" dirty="0">
-                <a:latin typeface="Simplified Arabic" panose="02020603050405020304" pitchFamily="18" charset="-78"/>
-              </a:rPr>
-              <a:t>أهمية التغذية الراجعة </a:t>
-            </a:r>
-            <a:r>
-              <a:rPr lang="en-US" sz="1700" b="1" dirty="0">
-                <a:latin typeface="Simplified Arabic" panose="02020603050405020304" pitchFamily="18" charset="-78"/>
-              </a:rPr>
-              <a:t>(Feedback)</a:t>
-            </a:r>
-            <a:r>
-              <a:rPr lang="ar-SA" sz="1700" b="1" dirty="0">
-                <a:latin typeface="Simplified Arabic" panose="02020603050405020304" pitchFamily="18" charset="-78"/>
-              </a:rPr>
-              <a:t>: </a:t>
-            </a:r>
-            <a:r>
-              <a:rPr lang="ar-SA" sz="1700" dirty="0">
-                <a:latin typeface="Simplified Arabic" panose="02020603050405020304" pitchFamily="18" charset="-78"/>
-              </a:rPr>
-              <a:t>في عصر التحول الرقمي، أصبحت آراء المستخدمين الفعليين هي الركيزة الأساسية لنجاح أي خدمة أو منتج.</a:t>
+              <a:rPr lang="ar-SA" sz="2000" b="1" dirty="0"/>
+              <a:t> التغذية الراجعة:</a:t>
+            </a:r>
+            <a:r>
+              <a:rPr lang="ar-SA" sz="2000" dirty="0"/>
+              <a:t> الركيزة الأساسية لنجاح المنتجات والخدمات في العصر الرقمي.</a:t>
             </a:r>
           </a:p>
           <a:p>
             <a:pPr>
-              <a:lnSpc>
-                <a:spcPct val="150000"/>
-              </a:lnSpc>
               <a:buFont typeface="Arial" panose="020B0604020202020204" pitchFamily="34" charset="0"/>
               <a:buChar char="•"/>
             </a:pPr>
             <a:r>
-              <a:rPr lang="ar-SA" sz="1700" b="1" dirty="0">
-                <a:latin typeface="Simplified Arabic" panose="02020603050405020304" pitchFamily="18" charset="-78"/>
-              </a:rPr>
-              <a:t>نهاية عصر التخمين الإداري:</a:t>
-            </a:r>
-            <a:r>
-              <a:rPr lang="ar-SA" sz="1700" dirty="0">
-                <a:latin typeface="Simplified Arabic" panose="02020603050405020304" pitchFamily="18" charset="-78"/>
-              </a:rPr>
-              <a:t> القرارات الاستراتيجية والتطويرية الناجحة لم تعد تُبنى على التوقعات، بل تتطلب بيانات دقيقة تعكس احتياجات السوق الحقيقية.</a:t>
+              <a:rPr lang="ar-SA" sz="2000" b="1" dirty="0"/>
+              <a:t> نهاية التخمين:</a:t>
+            </a:r>
+            <a:r>
+              <a:rPr lang="ar-SA" sz="2000" dirty="0"/>
+              <a:t> بناء القرارات الاستراتيجية على بيانات دقيقة تعكس احتياجات السوق، وليس على التوقعات.</a:t>
             </a:r>
           </a:p>
           <a:p>
             <a:pPr>
-              <a:lnSpc>
-                <a:spcPct val="150000"/>
-              </a:lnSpc>
               <a:buFont typeface="Arial" panose="020B0604020202020204" pitchFamily="34" charset="0"/>
               <a:buChar char="•"/>
             </a:pPr>
             <a:r>
-              <a:rPr lang="ar-SA" sz="1700" b="1" dirty="0">
-                <a:latin typeface="Simplified Arabic" panose="02020603050405020304" pitchFamily="18" charset="-78"/>
-              </a:rPr>
-              <a:t>الحاجة لابتكار أدوات ذكية:</a:t>
-            </a:r>
-            <a:r>
-              <a:rPr lang="ar-SA" sz="1700" dirty="0">
-                <a:latin typeface="Simplified Arabic" panose="02020603050405020304" pitchFamily="18" charset="-78"/>
-              </a:rPr>
-              <a:t> مع التطور المتسارع للذكاء الاصطناعي وتقنيات الويب، أصبح من الضروري تجاوز الطرق التقليدية لجمع وتحليل الآراء، لفهم تطلعات الجمهور بطريقة علمية وسريعة.</a:t>
-            </a:r>
-          </a:p>
-          <a:p>
-            <a:pPr>
-              <a:lnSpc>
-                <a:spcPct val="150000"/>
-              </a:lnSpc>
-            </a:pPr>
-            <a:endParaRPr lang="ar-SA" sz="1400" dirty="0">
-              <a:latin typeface="Simplified Arabic" panose="02020603050405020304" pitchFamily="18" charset="-78"/>
-            </a:endParaRPr>
+              <a:rPr lang="ar-SA" sz="2000" b="1" dirty="0"/>
+              <a:t> الابتكار الذكي:</a:t>
+            </a:r>
+            <a:r>
+              <a:rPr lang="ar-SA" sz="2000" dirty="0"/>
+              <a:t> تجاوز الطرق التقليدية لجمع الآراء عبر دمج تقنيات الذكاء الاصطناعي لفهم الجمهور أسرع.</a:t>
+            </a:r>
           </a:p>
         </p:txBody>
       </p:sp>
@@ -3943,8 +4357,8 @@
         </p:nvSpPr>
         <p:spPr>
           <a:xfrm>
-            <a:off x="1562877" y="2792739"/>
-            <a:ext cx="9498562" cy="1795363"/>
+            <a:off x="475861" y="2804345"/>
+            <a:ext cx="10797848" cy="1569660"/>
           </a:xfrm>
           <a:prstGeom prst="rect">
             <a:avLst/>
@@ -3963,14 +4377,14 @@
               </a:lnSpc>
             </a:pPr>
             <a:r>
-              <a:rPr lang="ar-SA" sz="2000" b="1" dirty="0">
+              <a:rPr lang="ar-SA" sz="2400" b="1" dirty="0">
                 <a:solidFill>
                   <a:schemeClr val="accent1"/>
                 </a:solidFill>
               </a:rPr>
               <a:t>مشكلة البحث</a:t>
             </a:r>
-            <a:endParaRPr lang="ar-SA" sz="2000" dirty="0">
+            <a:endParaRPr lang="ar-SA" sz="2400" dirty="0">
               <a:solidFill>
                 <a:schemeClr val="accent1"/>
               </a:solidFill>
@@ -3978,41 +4392,44 @@
           </a:p>
           <a:p>
             <a:pPr>
-              <a:lnSpc>
-                <a:spcPct val="150000"/>
-              </a:lnSpc>
               <a:buFont typeface="Arial" panose="020B0604020202020204" pitchFamily="34" charset="0"/>
               <a:buChar char="•"/>
             </a:pPr>
             <a:r>
-              <a:rPr lang="ar-SA" dirty="0"/>
-              <a:t>الاعتماد على الروابط المفتوحة يسبب "عشوائية العينة" وجمع بيانات مشوهة.</a:t>
+              <a:rPr lang="ar-SA" sz="2000" b="1" dirty="0"/>
+              <a:t> عشوائية العينة:</a:t>
+            </a:r>
+            <a:r>
+              <a:rPr lang="ar-SA" sz="2000" dirty="0"/>
+              <a:t> نشر الاستبيانات عبر روابط مفتوحة يجلب بيانات مشوهة وغير دقيقة.</a:t>
             </a:r>
           </a:p>
           <a:p>
             <a:pPr>
-              <a:lnSpc>
-                <a:spcPct val="150000"/>
-              </a:lnSpc>
               <a:buFont typeface="Arial" panose="020B0604020202020204" pitchFamily="34" charset="0"/>
               <a:buChar char="•"/>
             </a:pPr>
             <a:r>
-              <a:rPr lang="ar-SA" dirty="0"/>
-              <a:t>اتخاذ قرارات استراتيجية خاطئة وهدر للموارد بسبب مشاركة أشخاص غير معنيين بالخدمة.</a:t>
+              <a:rPr lang="ar-SA" sz="2000" b="1" dirty="0"/>
+              <a:t> هدر الموارد:</a:t>
+            </a:r>
+            <a:r>
+              <a:rPr lang="ar-SA" sz="2000" dirty="0"/>
+              <a:t> اتخاذ قرارات خاطئة نتيجة مشاركة أشخاص غير معنيين بالخدمة.</a:t>
             </a:r>
           </a:p>
           <a:p>
             <a:pPr>
-              <a:lnSpc>
-                <a:spcPct val="150000"/>
-              </a:lnSpc>
               <a:buFont typeface="Arial" panose="020B0604020202020204" pitchFamily="34" charset="0"/>
               <a:buChar char="•"/>
             </a:pPr>
             <a:r>
-              <a:rPr lang="ar-SA" dirty="0"/>
-              <a:t>التحليل اليدوي للنصوص يستهلك وقتاً طويلاً ويكون عرضة للتحيز البشري.</a:t>
+              <a:rPr lang="ar-SA" sz="2000" b="1" dirty="0"/>
+              <a:t> بطء التحليل:</a:t>
+            </a:r>
+            <a:r>
+              <a:rPr lang="ar-SA" sz="2000" dirty="0"/>
+              <a:t> قراءة وتحليل الإجابات النصية يدوياً يستهلك وقتاً طويلاً ومُعرض لـ "التحيز البشري".</a:t>
             </a:r>
           </a:p>
         </p:txBody>
@@ -4031,8 +4448,8 @@
         </p:nvSpPr>
         <p:spPr>
           <a:xfrm>
-            <a:off x="1254966" y="4687967"/>
-            <a:ext cx="9806473" cy="1758045"/>
+            <a:off x="1467236" y="5005207"/>
+            <a:ext cx="9806473" cy="1477328"/>
           </a:xfrm>
           <a:prstGeom prst="rect">
             <a:avLst/>
@@ -4058,57 +4475,55 @@
               </a:rPr>
               <a:t>فكرة المشروع</a:t>
             </a:r>
-            <a:endParaRPr lang="ar-SA" sz="2000" dirty="0">
-              <a:solidFill>
-                <a:schemeClr val="accent1"/>
-              </a:solidFill>
-            </a:endParaRPr>
           </a:p>
           <a:p>
             <a:pPr>
-              <a:lnSpc>
-                <a:spcPct val="150000"/>
-              </a:lnSpc>
               <a:buFont typeface="Arial" panose="020B0604020202020204" pitchFamily="34" charset="0"/>
               <a:buChar char="•"/>
             </a:pPr>
             <a:r>
-              <a:rPr lang="ar-SA" dirty="0"/>
-              <a:t>تطوير منصة استبيانات "ثنائية الأطراف" مزودة بمحرك استهداف ذكي.</a:t>
+              <a:rPr lang="ar-SA" sz="2000" b="1" dirty="0"/>
+              <a:t> منصة ثنائية الأطراف:</a:t>
+            </a:r>
+            <a:r>
+              <a:rPr lang="ar-SA" sz="2000" dirty="0"/>
+              <a:t> بيئة ذكية تربط بين صُناع القرار والمُجيبين المستهدفين.</a:t>
             </a:r>
           </a:p>
           <a:p>
             <a:pPr>
-              <a:lnSpc>
-                <a:spcPct val="150000"/>
-              </a:lnSpc>
               <a:buFont typeface="Arial" panose="020B0604020202020204" pitchFamily="34" charset="0"/>
               <a:buChar char="•"/>
             </a:pPr>
             <a:r>
-              <a:rPr lang="ar-SA" dirty="0"/>
-              <a:t>فلترة مسبقة تضمن عرض الاستبيان حصراً للمطابقين للشروط الديموغرافية.</a:t>
+              <a:rPr lang="ar-SA" sz="2000" b="1" dirty="0"/>
+              <a:t> فلترة مسبقة:</a:t>
+            </a:r>
+            <a:r>
+              <a:rPr lang="ar-SA" sz="2000" dirty="0"/>
+              <a:t> عرض الاستبيانات حصرياً للفئة التي تطابق الشروط الديموغرافية (عبر محرك استهداف ذكي).</a:t>
             </a:r>
           </a:p>
           <a:p>
             <a:pPr>
-              <a:lnSpc>
-                <a:spcPct val="150000"/>
-              </a:lnSpc>
               <a:buFont typeface="Arial" panose="020B0604020202020204" pitchFamily="34" charset="0"/>
               <a:buChar char="•"/>
             </a:pPr>
             <a:r>
-              <a:rPr lang="ar-SA" dirty="0"/>
-              <a:t>دمج تقنيات الذكاء الاصطناعي (</a:t>
-            </a:r>
-            <a:r>
-              <a:rPr lang="en-US" dirty="0"/>
-              <a:t>AI</a:t>
-            </a:r>
-            <a:r>
-              <a:rPr lang="ar-SA" dirty="0"/>
-              <a:t>) لتحليل الإجابات المفتوحة وتصنيف المشاعر آلياً.</a:t>
+              <a:rPr lang="ar-SA" sz="2000" b="1" dirty="0"/>
+              <a:t> تحليل ذكي:</a:t>
+            </a:r>
+            <a:r>
+              <a:rPr lang="ar-SA" sz="2000" dirty="0"/>
+              <a:t> دمج الذكاء الاصطناعي (</a:t>
+            </a:r>
+            <a:r>
+              <a:rPr lang="en-US" sz="2000" dirty="0"/>
+              <a:t> (AI</a:t>
+            </a:r>
+            <a:r>
+              <a:rPr lang="ar-SA" sz="2000" dirty="0"/>
+              <a:t>لتصنيف مشاعر الإجابات المفتوحة آلياً.</a:t>
             </a:r>
           </a:p>
         </p:txBody>
@@ -4157,8 +4572,8 @@
         </p:nvSpPr>
         <p:spPr>
           <a:xfrm>
-            <a:off x="673941" y="0"/>
-            <a:ext cx="11224725" cy="2224840"/>
+            <a:off x="1826441" y="149290"/>
+            <a:ext cx="9325776" cy="2224840"/>
           </a:xfrm>
           <a:prstGeom prst="rect">
             <a:avLst/>
@@ -4292,8 +4707,8 @@
         </p:nvSpPr>
         <p:spPr>
           <a:xfrm>
-            <a:off x="-293334" y="2224840"/>
-            <a:ext cx="12192000" cy="2173544"/>
+            <a:off x="1899043" y="4773959"/>
+            <a:ext cx="9253174" cy="1754326"/>
           </a:xfrm>
           <a:prstGeom prst="rect">
             <a:avLst/>
@@ -4312,78 +4727,49 @@
               </a:lnSpc>
             </a:pPr>
             <a:r>
-              <a:rPr lang="ar-SA" sz="2000" b="1" dirty="0">
+              <a:rPr lang="ar-SA" sz="2400" b="1" dirty="0">
                 <a:solidFill>
                   <a:schemeClr val="accent1"/>
                 </a:solidFill>
               </a:rPr>
               <a:t>نطاق المشروع</a:t>
             </a:r>
-            <a:endParaRPr lang="en-US" sz="2000" dirty="0">
+            <a:endParaRPr lang="en-US" sz="2400" dirty="0">
               <a:solidFill>
                 <a:schemeClr val="accent1"/>
               </a:solidFill>
             </a:endParaRPr>
           </a:p>
           <a:p>
-            <a:pPr>
-              <a:lnSpc>
-                <a:spcPct val="150000"/>
-              </a:lnSpc>
+            <a:pPr marL="285750" indent="-285750">
               <a:buFont typeface="Arial" panose="020B0604020202020204" pitchFamily="34" charset="0"/>
               <a:buChar char="•"/>
             </a:pPr>
             <a:r>
               <a:rPr lang="ar-SA" b="1" dirty="0"/>
-              <a:t>الفئات المستهدفة:</a:t>
+              <a:t>الفئات المشمولة:</a:t>
             </a:r>
             <a:r>
               <a:rPr lang="ar-SA" dirty="0"/>
-              <a:t> يخدم النظام فئتين: "مقدمي الخدمات" (لإنشاء الاستبيانات الموجهة) و"المستخدمين المسجلين" بملفات تعريفية (كعينة دقيقة للإجابة).</a:t>
-            </a:r>
-          </a:p>
-          <a:p>
-            <a:pPr>
-              <a:lnSpc>
-                <a:spcPct val="150000"/>
-              </a:lnSpc>
+              <a:t> مقدمو الخدمات (لإنشاء الاستبيان) والمستخدمون (كعينة للإجابة).</a:t>
+            </a:r>
+          </a:p>
+          <a:p>
+            <a:pPr marL="285750" indent="-285750">
               <a:buFont typeface="Arial" panose="020B0604020202020204" pitchFamily="34" charset="0"/>
               <a:buChar char="•"/>
             </a:pPr>
             <a:r>
               <a:rPr lang="ar-SA" b="1" dirty="0"/>
-              <a:t>النطاق الوظيفي</a:t>
-            </a:r>
-            <a:r>
-              <a:rPr lang="ar-SA" sz="1700" b="1" dirty="0"/>
-              <a:t>:</a:t>
-            </a:r>
-            <a:r>
-              <a:rPr lang="ar-SA" sz="1700" dirty="0"/>
-              <a:t> يشمل إدارة الحسابات، أداة بناء الاستبيانات المفلترة، تحليل المشاعر عبر الذكاء الاصطناعي </a:t>
-            </a:r>
-            <a:r>
-              <a:rPr lang="en-US" sz="1700" dirty="0"/>
-              <a:t>(NLP)، </a:t>
-            </a:r>
-            <a:r>
-              <a:rPr lang="ar-SA" sz="1700" dirty="0"/>
-              <a:t>وتوفير لوحات تحكم </a:t>
-            </a:r>
-            <a:r>
-              <a:rPr lang="en-US" sz="1700" dirty="0"/>
-              <a:t>(Dashboards)</a:t>
-            </a:r>
-            <a:r>
-              <a:rPr lang="ar-SA" sz="1700" dirty="0"/>
-              <a:t> إحصائية.</a:t>
-            </a:r>
-          </a:p>
-          <a:p>
-            <a:pPr>
-              <a:lnSpc>
-                <a:spcPct val="150000"/>
-              </a:lnSpc>
+              <a:t>النطاق الوظيفي:</a:t>
+            </a:r>
+            <a:r>
+              <a:rPr lang="ar-SA" dirty="0"/>
+              <a:t> أداة بناء الاستبيانات، محرك المطابقة، تحليل المشاعر، ولوحات تحكم إحصائية.</a:t>
+            </a:r>
+          </a:p>
+          <a:p>
+            <a:pPr marL="285750" indent="-285750">
               <a:buFont typeface="Arial" panose="020B0604020202020204" pitchFamily="34" charset="0"/>
               <a:buChar char="•"/>
             </a:pPr>
@@ -4393,30 +4779,20 @@
             </a:r>
             <a:r>
               <a:rPr lang="ar-SA" dirty="0"/>
-              <a:t> بناء النظام كـ "تطبيق ويب"</a:t>
+              <a:t> تطبيق ويب</a:t>
             </a:r>
             <a:r>
               <a:rPr lang="en-US" dirty="0"/>
-              <a:t>Web App) </a:t>
+              <a:t> (Web App) </a:t>
             </a:r>
             <a:r>
               <a:rPr lang="ar-SA" dirty="0"/>
-              <a:t>) متجاوب، والاعتماد على نماذج ذكاء اصطناعي مدربة مسبقاً</a:t>
-            </a:r>
-            <a:r>
-              <a:rPr lang="en-US" dirty="0"/>
-              <a:t>APIs) </a:t>
-            </a:r>
-            <a:r>
-              <a:rPr lang="ar-SA" dirty="0"/>
-              <a:t>) لتحليل النصوص.</a:t>
-            </a:r>
-          </a:p>
-          <a:p>
-            <a:pPr>
-              <a:lnSpc>
-                <a:spcPct val="150000"/>
-              </a:lnSpc>
+              <a:t>واستخدام نماذج ذكاء اصطناعي.</a:t>
+            </a:r>
+            <a:endParaRPr lang="en-US" dirty="0"/>
+          </a:p>
+          <a:p>
+            <a:pPr marL="285750" indent="-285750">
               <a:buFont typeface="Arial" panose="020B0604020202020204" pitchFamily="34" charset="0"/>
               <a:buChar char="•"/>
             </a:pPr>
@@ -4426,15 +4802,7 @@
             </a:r>
             <a:r>
               <a:rPr lang="ar-SA" dirty="0"/>
-              <a:t> النظام لا يشمل برمجة تطبيق خاص للهواتف الذكية (</a:t>
-            </a:r>
-            <a:r>
-              <a:rPr lang="en-US" dirty="0"/>
-              <a:t>(Mobile App، </a:t>
-            </a:r>
-            <a:r>
-              <a:rPr lang="ar-SA" dirty="0"/>
-              <a:t>ولن يتم تدريب نماذج لغوية للذكاء الاصطناعي من الصفر.</a:t>
+              <a:t> تطبيقات الموبايل، أو تدريب نماذج لغوية من الصفر.</a:t>
             </a:r>
           </a:p>
         </p:txBody>
@@ -4453,8 +4821,8 @@
         </p:nvSpPr>
         <p:spPr>
           <a:xfrm>
-            <a:off x="718455" y="4398384"/>
-            <a:ext cx="11180211" cy="1993623"/>
+            <a:off x="1826441" y="2606434"/>
+            <a:ext cx="9325776" cy="1785104"/>
           </a:xfrm>
           <a:prstGeom prst="rect">
             <a:avLst/>
@@ -4487,95 +4855,71 @@
             </a:endParaRPr>
           </a:p>
           <a:p>
-            <a:pPr>
-              <a:lnSpc>
-                <a:spcPct val="150000"/>
-              </a:lnSpc>
+            <a:pPr marL="342900" indent="-342900">
               <a:buFont typeface="Arial" panose="020B0604020202020204" pitchFamily="34" charset="0"/>
               <a:buChar char="•"/>
             </a:pPr>
             <a:r>
-              <a:rPr lang="ar-SA" sz="1600" b="1" dirty="0"/>
-              <a:t>المنصات ثنائية الأطراف </a:t>
-            </a:r>
-            <a:r>
-              <a:rPr lang="en-US" sz="1600" b="1" dirty="0"/>
-              <a:t>Two-Sided Platforms)</a:t>
-            </a:r>
-            <a:r>
-              <a:rPr lang="ar-SA" sz="1600" b="1" dirty="0"/>
-              <a:t>): </a:t>
-            </a:r>
-            <a:r>
-              <a:rPr lang="ar-SA" sz="1600" dirty="0"/>
-              <a:t>بيئات رقمية تربط "صناع القرار" مع "المجيبين المستهدفين" مباشرة، وتعتمد على تأثير الشبكة لزيادة قيمتها.</a:t>
-            </a:r>
-          </a:p>
-          <a:p>
-            <a:pPr>
-              <a:lnSpc>
-                <a:spcPct val="150000"/>
-              </a:lnSpc>
+              <a:rPr lang="ar-SA" sz="2000" b="1" dirty="0"/>
+              <a:t>منصة ثنائية الأطراف:</a:t>
+            </a:r>
+            <a:r>
+              <a:rPr lang="ar-SA" sz="2000" dirty="0"/>
+              <a:t> ربط مباشر يعتمد على تأثير الشبكة.</a:t>
+            </a:r>
+          </a:p>
+          <a:p>
+            <a:pPr marL="342900" indent="-342900">
               <a:buFont typeface="Arial" panose="020B0604020202020204" pitchFamily="34" charset="0"/>
               <a:buChar char="•"/>
             </a:pPr>
             <a:r>
-              <a:rPr lang="ar-SA" sz="1600" b="1" dirty="0"/>
-              <a:t>الاستهداف الديموغرافي والفلترة الآلية:</a:t>
-            </a:r>
-            <a:r>
-              <a:rPr lang="ar-SA" sz="1600" dirty="0"/>
-              <a:t> استخدام خوارزميات مطابقة لمنع "تحيز العينة" عبر توجيه الاستبيان للشريحة المطابقة فقط (عبر حقول الملف الشخصي).</a:t>
-            </a:r>
-          </a:p>
-          <a:p>
-            <a:pPr>
-              <a:lnSpc>
-                <a:spcPct val="150000"/>
-              </a:lnSpc>
+              <a:rPr lang="ar-SA" sz="2000" b="1" dirty="0"/>
+              <a:t>الاستهداف الآلي:</a:t>
+            </a:r>
+            <a:r>
+              <a:rPr lang="ar-SA" sz="2000" dirty="0"/>
+              <a:t> خوارزميات لمنع "تحيز العينة" (</a:t>
+            </a:r>
+            <a:r>
+              <a:rPr lang="en-US" sz="2000" dirty="0"/>
+              <a:t>.(Sample Bias</a:t>
+            </a:r>
+          </a:p>
+          <a:p>
+            <a:pPr marL="342900" indent="-342900">
               <a:buFont typeface="Arial" panose="020B0604020202020204" pitchFamily="34" charset="0"/>
               <a:buChar char="•"/>
             </a:pPr>
             <a:r>
-              <a:rPr lang="ar-SA" sz="1600" b="1" dirty="0"/>
-              <a:t>معالجة اللغات الطبيعية (</a:t>
-            </a:r>
-            <a:r>
-              <a:rPr lang="en-US" sz="1600" b="1" dirty="0"/>
-              <a:t> (NLP</a:t>
-            </a:r>
-            <a:r>
-              <a:rPr lang="ar-SA" sz="1600" dirty="0"/>
-              <a:t>تقنية ذكاء اصطناعي (</a:t>
-            </a:r>
-            <a:r>
-              <a:rPr lang="en-US" sz="1600" dirty="0"/>
-              <a:t> (AI</a:t>
-            </a:r>
-            <a:r>
-              <a:rPr lang="ar-SA" sz="1600" dirty="0"/>
-              <a:t>لتحويل "البيانات غير المهيكلة" (كالإجابات النصية) إلى بيانات كمية قابلة للقياس والتحليل.</a:t>
-            </a:r>
-          </a:p>
-          <a:p>
-            <a:pPr>
-              <a:lnSpc>
-                <a:spcPct val="150000"/>
-              </a:lnSpc>
+              <a:rPr lang="ar-SA" sz="2000" b="1" dirty="0"/>
+              <a:t>معالجة اللغات</a:t>
+            </a:r>
+            <a:r>
+              <a:rPr lang="en-US" sz="2000" b="1" dirty="0"/>
+              <a:t>NLP)</a:t>
+            </a:r>
+            <a:r>
+              <a:rPr lang="ar-SA" sz="2000" b="1" dirty="0"/>
+              <a:t>): </a:t>
+            </a:r>
+            <a:r>
+              <a:rPr lang="ar-SA" sz="2000" dirty="0"/>
+              <a:t>تحويل النصوص غير المهيكلة إلى بيانات قابلة للقياس.</a:t>
+            </a:r>
+          </a:p>
+          <a:p>
+            <a:pPr marL="342900" indent="-342900">
               <a:buFont typeface="Arial" panose="020B0604020202020204" pitchFamily="34" charset="0"/>
               <a:buChar char="•"/>
             </a:pPr>
             <a:r>
-              <a:rPr lang="ar-SA" sz="1600" b="1" dirty="0"/>
-              <a:t>تحليل المشاعر (</a:t>
-            </a:r>
-            <a:r>
-              <a:rPr lang="en-US" sz="1600" b="1" dirty="0"/>
-              <a:t> (Sentiment Analysis</a:t>
-            </a:r>
-            <a:r>
-              <a:rPr lang="ar-SA" sz="1600" dirty="0"/>
-              <a:t>قراءة النصوص آلياً وتصنيفها عاطفياً (إيجابية، سلبية، محايدة) لاستخراج توجهات الجمهور بسرعة ودقة.</a:t>
+              <a:rPr lang="ar-SA" sz="2000" b="1" dirty="0"/>
+              <a:t>تحليل المشاعر:</a:t>
+            </a:r>
+            <a:r>
+              <a:rPr lang="ar-SA" sz="2000" dirty="0"/>
+              <a:t> تصنيف الردود عاطفياً (إيجابي، سلبي، محايد).</a:t>
             </a:r>
           </a:p>
         </p:txBody>
@@ -4624,8 +4968,8 @@
         </p:nvSpPr>
         <p:spPr>
           <a:xfrm>
-            <a:off x="0" y="87876"/>
-            <a:ext cx="12192000" cy="3047501"/>
+            <a:off x="-758891" y="162521"/>
+            <a:ext cx="12192000" cy="1749197"/>
           </a:xfrm>
           <a:prstGeom prst="rect">
             <a:avLst/>
@@ -4644,14 +4988,14 @@
               </a:lnSpc>
             </a:pPr>
             <a:r>
-              <a:rPr lang="ar-SA" b="1" dirty="0">
+              <a:rPr lang="ar-SA" sz="2000" b="1" dirty="0">
                 <a:solidFill>
                   <a:schemeClr val="accent1"/>
                 </a:solidFill>
               </a:rPr>
               <a:t>الدراسة المرجعية </a:t>
             </a:r>
-            <a:endParaRPr lang="en-US" dirty="0">
+            <a:endParaRPr lang="en-US" sz="2000" dirty="0">
               <a:solidFill>
                 <a:schemeClr val="accent1"/>
               </a:solidFill>
@@ -4666,20 +5010,12 @@
               <a:buChar char="•"/>
             </a:pPr>
             <a:r>
-              <a:rPr lang="ar-SA" sz="1600" b="1" dirty="0"/>
-              <a:t>النهج التقليدي في الأبحاث السابقة:</a:t>
-            </a:r>
-            <a:r>
-              <a:rPr lang="ar-SA" sz="1600" dirty="0"/>
-              <a:t> </a:t>
-            </a:r>
-            <a:r>
-              <a:rPr lang="ar-SA" sz="1400" dirty="0"/>
-              <a:t>ركزت معظم الدراسات السابقة على بناء استبيانات إلكترونية تقليدية تعتمد على النشر العشوائي للروابط، مما أدى إلى نتائج تعاني من "تحيز العينة" (</a:t>
-            </a:r>
-            <a:r>
-              <a:rPr lang="en-US" sz="1400" dirty="0"/>
-              <a:t>.(Sample Bias</a:t>
+              <a:rPr lang="ar-SA" b="1" dirty="0"/>
+              <a:t>الأنظمة التقليدية:</a:t>
+            </a:r>
+            <a:r>
+              <a:rPr lang="ar-SA" dirty="0"/>
+              <a:t> تعاني من تحيز العينة بسبب النشر العشوائي.</a:t>
             </a:r>
           </a:p>
           <a:p>
@@ -4691,28 +5027,20 @@
               <a:buChar char="•"/>
             </a:pPr>
             <a:r>
-              <a:rPr lang="ar-SA" sz="1600" b="1" dirty="0"/>
-              <a:t>الدراسات المعتمدة على الذكاء الاصطناعي:</a:t>
-            </a:r>
-            <a:r>
-              <a:rPr lang="ar-SA" sz="1600" dirty="0"/>
-              <a:t> الأبحاث الحديثة التي استخدمت معالجة اللغات الطبيعية (</a:t>
-            </a:r>
-            <a:r>
-              <a:rPr lang="en-US" sz="1600" dirty="0"/>
-              <a:t>(NLP</a:t>
-            </a:r>
-            <a:r>
-              <a:rPr lang="ar-SA" sz="1600" dirty="0"/>
-              <a:t> لتحليل الاستبيانات، غالباً ما كانت تطبق التحليل كـ "مرحلة منفصلة" (</a:t>
-            </a:r>
-            <a:r>
-              <a:rPr lang="en-US" sz="1600" dirty="0"/>
-              <a:t>Post-processing </a:t>
-            </a:r>
-            <a:r>
-              <a:rPr lang="ar-SA" sz="1600" dirty="0"/>
-              <a:t>) بعد جمع البيانات، وليست مدمجة في صلب المنصة.</a:t>
+              <a:rPr lang="ar-SA" b="1" dirty="0"/>
+              <a:t>أنظمة الـ </a:t>
+            </a:r>
+            <a:r>
+              <a:rPr lang="en-US" b="1" dirty="0"/>
+              <a:t>AI </a:t>
+            </a:r>
+            <a:r>
+              <a:rPr lang="ar-SA" b="1" dirty="0"/>
+              <a:t>الحالية:</a:t>
+            </a:r>
+            <a:r>
+              <a:rPr lang="ar-SA" dirty="0"/>
+              <a:t> تفصل بين مرحلتي جمع البيانات وتحليلها.</a:t>
             </a:r>
           </a:p>
           <a:p>
@@ -4724,74 +5052,11 @@
               <a:buChar char="•"/>
             </a:pPr>
             <a:r>
-              <a:rPr lang="ar-SA" sz="1600" b="1" dirty="0"/>
-              <a:t>الفجوة البحثية (</a:t>
-            </a:r>
-            <a:r>
-              <a:rPr lang="en-US" sz="1600" b="1" dirty="0"/>
-              <a:t> (Research Gap</a:t>
-            </a:r>
-            <a:r>
-              <a:rPr lang="ar-SA" sz="1600" dirty="0"/>
-              <a:t>تفتقر الدراسات والأنظمة الحالية إلى وجود </a:t>
-            </a:r>
-            <a:r>
-              <a:rPr lang="ar-SA" sz="1600" b="1" dirty="0"/>
-              <a:t>"بيئة ثنائية الأطراف متكاملة"</a:t>
-            </a:r>
-            <a:r>
-              <a:rPr lang="ar-SA" sz="1600" dirty="0"/>
-              <a:t> تجمع بين:</a:t>
-            </a:r>
-          </a:p>
-          <a:p>
-            <a:pPr marL="742950" lvl="1" indent="-285750">
-              <a:lnSpc>
-                <a:spcPct val="150000"/>
-              </a:lnSpc>
-              <a:buFont typeface="Arial" panose="020B0604020202020204" pitchFamily="34" charset="0"/>
-              <a:buChar char="•"/>
-            </a:pPr>
-            <a:r>
-              <a:rPr lang="ar-SA" sz="1600" dirty="0"/>
-              <a:t>الاستهداف الآلي والمسبق للمجيبين (لضمان دقة العينة).</a:t>
-            </a:r>
-          </a:p>
-          <a:p>
-            <a:pPr marL="742950" lvl="1" indent="-285750">
-              <a:lnSpc>
-                <a:spcPct val="150000"/>
-              </a:lnSpc>
-              <a:buFont typeface="Arial" panose="020B0604020202020204" pitchFamily="34" charset="0"/>
-              <a:buChar char="•"/>
-            </a:pPr>
-            <a:r>
-              <a:rPr lang="ar-SA" sz="1600" dirty="0"/>
-              <a:t>التحليل الآلي والفوري للمشاعر (</a:t>
-            </a:r>
-            <a:r>
-              <a:rPr lang="en-US" sz="1600" dirty="0"/>
-              <a:t>NLP </a:t>
-            </a:r>
-            <a:r>
-              <a:rPr lang="ar-SA" sz="1600" dirty="0"/>
-              <a:t>) داخل نفس النظام.</a:t>
-            </a:r>
-          </a:p>
-          <a:p>
-            <a:pPr>
-              <a:lnSpc>
-                <a:spcPct val="150000"/>
-              </a:lnSpc>
-              <a:buFont typeface="Arial" panose="020B0604020202020204" pitchFamily="34" charset="0"/>
-              <a:buChar char="•"/>
-            </a:pPr>
-            <a:r>
-              <a:rPr lang="ar-SA" sz="1600" b="1" dirty="0"/>
+              <a:rPr lang="ar-SA" b="1" dirty="0"/>
               <a:t>مساهمة مشروعنا:</a:t>
             </a:r>
             <a:r>
-              <a:rPr lang="ar-SA" sz="1600" dirty="0"/>
+              <a:rPr lang="ar-SA" dirty="0"/>
               <a:t> تقديم حل هندسي يدمج محرك الاستهداف الذكي مع نماذج الذكاء الاصطناعي في منصة واحدة متكاملة.</a:t>
             </a:r>
           </a:p>
@@ -4812,14 +5077,14 @@
           <p:nvPr>
             <p:extLst>
               <p:ext uri="{D42A27DB-BD31-4B8C-83A1-F6EECF244321}">
-                <p14:modId xmlns:p14="http://schemas.microsoft.com/office/powerpoint/2010/main" val="3678523836"/>
+                <p14:modId xmlns:p14="http://schemas.microsoft.com/office/powerpoint/2010/main" val="4194633664"/>
               </p:ext>
             </p:extLst>
           </p:nvPr>
         </p:nvGraphicFramePr>
         <p:xfrm>
-          <a:off x="758888" y="3237722"/>
-          <a:ext cx="10674221" cy="3250705"/>
+          <a:off x="758888" y="2565918"/>
+          <a:ext cx="10674221" cy="3651919"/>
         </p:xfrm>
         <a:graphic>
           <a:graphicData uri="http://schemas.openxmlformats.org/drawingml/2006/table">
@@ -4857,7 +5122,7 @@
                   </a:extLst>
                 </a:gridCol>
               </a:tblGrid>
-              <a:tr h="524924">
+              <a:tr h="589712">
                 <a:tc>
                   <a:txBody>
                     <a:bodyPr/>
@@ -4872,12 +5137,12 @@
                         </a:spcAft>
                       </a:pPr>
                       <a:r>
-                        <a:rPr lang="ar-SA" sz="1400" kern="100">
+                        <a:rPr lang="ar-SA" sz="1400" kern="100" dirty="0">
                           <a:effectLst/>
                         </a:rPr>
                         <a:t>معيار المقارنة</a:t>
                       </a:r>
-                      <a:endParaRPr lang="en-US" sz="1100" kern="100">
+                      <a:endParaRPr lang="en-US" sz="1100" kern="100" dirty="0">
                         <a:effectLst/>
                         <a:latin typeface="Calibri" panose="020F0502020204030204" pitchFamily="34" charset="0"/>
                         <a:ea typeface="Times New Roman" panose="02020603050405020304" pitchFamily="18" charset="0"/>
@@ -5010,7 +5275,7 @@
                   </a:ext>
                 </a:extLst>
               </a:tr>
-              <a:tr h="537790">
+              <a:tr h="604167">
                 <a:tc>
                   <a:txBody>
                     <a:bodyPr/>
@@ -5133,7 +5398,7 @@
                   </a:ext>
                 </a:extLst>
               </a:tr>
-              <a:tr h="579544">
+              <a:tr h="651074">
                 <a:tc>
                   <a:txBody>
                     <a:bodyPr/>
@@ -5262,7 +5527,7 @@
                   </a:ext>
                 </a:extLst>
               </a:tr>
-              <a:tr h="536149">
+              <a:tr h="602322">
                 <a:tc>
                   <a:txBody>
                     <a:bodyPr/>
@@ -5385,7 +5650,7 @@
                   </a:ext>
                 </a:extLst>
               </a:tr>
-              <a:tr h="536149">
+              <a:tr h="602322">
                 <a:tc>
                   <a:txBody>
                     <a:bodyPr/>
@@ -5508,7 +5773,7 @@
                   </a:ext>
                 </a:extLst>
               </a:tr>
-              <a:tr h="536149">
+              <a:tr h="602322">
                 <a:tc>
                   <a:txBody>
                     <a:bodyPr/>
@@ -5657,8 +5922,8 @@
         </p:nvSpPr>
         <p:spPr bwMode="auto">
           <a:xfrm>
-            <a:off x="4288366" y="6488427"/>
-            <a:ext cx="3615267" cy="369283"/>
+            <a:off x="3517642" y="6295418"/>
+            <a:ext cx="4563274" cy="400061"/>
           </a:xfrm>
           <a:prstGeom prst="rect">
             <a:avLst/>
@@ -5850,7 +6115,7 @@
               <a:tabLst/>
             </a:pPr>
             <a:r>
-              <a:rPr kumimoji="0" lang="ar-SA" altLang="ar-SA" sz="1400" b="0" i="0" u="none" strike="noStrike" cap="none" normalizeH="0" baseline="0" dirty="0" bmk="">
+              <a:rPr kumimoji="0" lang="ar-SA" altLang="ar-SA" sz="1600" b="1" i="0" u="none" strike="noStrike" cap="none" normalizeH="0" baseline="0" dirty="0" bmk="">
                 <a:ln>
                   <a:noFill/>
                 </a:ln>
@@ -5864,7 +6129,7 @@
               </a:rPr>
               <a:t>جدول: مقارنة بين المنصة المقترحة والأنظمة الحالية</a:t>
             </a:r>
-            <a:endParaRPr kumimoji="0" lang="en-US" altLang="ar-SA" sz="1400" b="0" i="0" u="none" strike="noStrike" cap="none" normalizeH="0" baseline="0" dirty="0">
+            <a:endParaRPr kumimoji="0" lang="en-US" altLang="ar-SA" sz="1600" b="1" i="0" u="none" strike="noStrike" cap="none" normalizeH="0" baseline="0" dirty="0">
               <a:ln>
                 <a:noFill/>
               </a:ln>
@@ -5911,231 +6176,6 @@
       </p:grpSpPr>
       <p:sp>
         <p:nvSpPr>
-          <p:cNvPr id="3" name="مربع نص 2">
-            <a:extLst>
-              <a:ext uri="{FF2B5EF4-FFF2-40B4-BE49-F238E27FC236}">
-                <a16:creationId xmlns:a16="http://schemas.microsoft.com/office/drawing/2014/main" id="{590F3AF2-F4E8-4B17-0D30-4D06D9D13AB2}"/>
-              </a:ext>
-            </a:extLst>
-          </p:cNvPr>
-          <p:cNvSpPr txBox="1"/>
-          <p:nvPr/>
-        </p:nvSpPr>
-        <p:spPr>
-          <a:xfrm>
-            <a:off x="401216" y="195378"/>
-            <a:ext cx="11644777" cy="2589042"/>
-          </a:xfrm>
-          <a:prstGeom prst="rect">
-            <a:avLst/>
-          </a:prstGeom>
-          <a:noFill/>
-        </p:spPr>
-        <p:txBody>
-          <a:bodyPr wrap="square">
-            <a:spAutoFit/>
-          </a:bodyPr>
-          <a:lstStyle/>
-          <a:p>
-            <a:pPr>
-              <a:lnSpc>
-                <a:spcPct val="150000"/>
-              </a:lnSpc>
-            </a:pPr>
-            <a:r>
-              <a:rPr lang="ar-SA" sz="2000" b="1" dirty="0">
-                <a:solidFill>
-                  <a:schemeClr val="accent1"/>
-                </a:solidFill>
-              </a:rPr>
-              <a:t>الأدوات والتقنيات المستخدمة </a:t>
-            </a:r>
-          </a:p>
-          <a:p>
-            <a:pPr marL="285750" indent="-285750">
-              <a:lnSpc>
-                <a:spcPct val="150000"/>
-              </a:lnSpc>
-              <a:buFont typeface="Arial" panose="020B0604020202020204" pitchFamily="34" charset="0"/>
-              <a:buChar char="•"/>
-            </a:pPr>
-            <a:r>
-              <a:rPr lang="ar-SA" b="1" dirty="0"/>
-              <a:t>الواجهة الخلفية (</a:t>
-            </a:r>
-            <a:r>
-              <a:rPr lang="en-US" b="1" dirty="0"/>
-              <a:t> :(Backend</a:t>
-            </a:r>
-            <a:r>
-              <a:rPr lang="ar-SA" dirty="0"/>
-              <a:t>لغة البرمجة </a:t>
-            </a:r>
-            <a:r>
-              <a:rPr lang="en-US" b="1" dirty="0"/>
-              <a:t>Python</a:t>
-            </a:r>
-            <a:r>
-              <a:rPr lang="en-US" dirty="0"/>
-              <a:t> </a:t>
-            </a:r>
-            <a:r>
-              <a:rPr lang="ar-SA" dirty="0"/>
-              <a:t> بالاعتماد على إطار العمل </a:t>
-            </a:r>
-            <a:r>
-              <a:rPr lang="en-US" dirty="0"/>
-              <a:t> (</a:t>
-            </a:r>
-            <a:r>
-              <a:rPr lang="en-US" b="1" dirty="0"/>
-              <a:t>Django)</a:t>
-            </a:r>
-            <a:r>
-              <a:rPr lang="ar-SA" dirty="0"/>
-              <a:t>لبناء بنية تحتية قوية، آمنة، وقابلة للتوسع.</a:t>
-            </a:r>
-          </a:p>
-          <a:p>
-            <a:pPr marL="285750" indent="-285750">
-              <a:lnSpc>
-                <a:spcPct val="150000"/>
-              </a:lnSpc>
-              <a:buFont typeface="Arial" panose="020B0604020202020204" pitchFamily="34" charset="0"/>
-              <a:buChar char="•"/>
-            </a:pPr>
-            <a:r>
-              <a:rPr lang="ar-SA" b="1" dirty="0"/>
-              <a:t> قواعد البيانات </a:t>
-            </a:r>
-            <a:r>
-              <a:rPr lang="en-US" b="1" dirty="0"/>
-              <a:t> :(Database)</a:t>
-            </a:r>
-            <a:r>
-              <a:rPr lang="ar-SA" dirty="0"/>
-              <a:t>قواعد بيانات علائقية</a:t>
-            </a:r>
-            <a:r>
-              <a:rPr lang="en-US" dirty="0"/>
-              <a:t> (</a:t>
-            </a:r>
-            <a:r>
-              <a:rPr lang="en-US" b="1" dirty="0"/>
-              <a:t>SQL) </a:t>
-            </a:r>
-            <a:r>
-              <a:rPr lang="ar-SA" dirty="0"/>
-              <a:t>لإدارة الملفات الشخصية، شروط الاستهداف، والردود بدقة وموثوقية.</a:t>
-            </a:r>
-          </a:p>
-          <a:p>
-            <a:pPr marL="285750" indent="-285750">
-              <a:lnSpc>
-                <a:spcPct val="150000"/>
-              </a:lnSpc>
-              <a:buFont typeface="Arial" panose="020B0604020202020204" pitchFamily="34" charset="0"/>
-              <a:buChar char="•"/>
-            </a:pPr>
-            <a:r>
-              <a:rPr lang="ar-SA" b="1" dirty="0"/>
-              <a:t>الواجهة الأمامية (</a:t>
-            </a:r>
-            <a:r>
-              <a:rPr lang="en-US" b="1" dirty="0"/>
-              <a:t>Frontend</a:t>
-            </a:r>
-            <a:r>
-              <a:rPr lang="ar-SA" b="1" dirty="0"/>
-              <a:t>): </a:t>
-            </a:r>
-            <a:r>
-              <a:rPr lang="ar-SA" dirty="0"/>
-              <a:t>تقنيات الويب القياسية </a:t>
-            </a:r>
-            <a:r>
-              <a:rPr lang="en-US" dirty="0"/>
-              <a:t> (HTML, CSS, JavaScript) </a:t>
-            </a:r>
-            <a:r>
-              <a:rPr lang="ar-SA" dirty="0"/>
-              <a:t>لتصميم واجهات مستخدم (</a:t>
-            </a:r>
-            <a:r>
-              <a:rPr lang="en-US" dirty="0"/>
-              <a:t>UI</a:t>
-            </a:r>
-            <a:r>
-              <a:rPr lang="ar-SA" dirty="0"/>
-              <a:t>) متجاوبة وسهلة الاستخدام.</a:t>
-            </a:r>
-          </a:p>
-          <a:p>
-            <a:pPr marL="285750" indent="-285750">
-              <a:lnSpc>
-                <a:spcPct val="150000"/>
-              </a:lnSpc>
-              <a:buFont typeface="Arial" panose="020B0604020202020204" pitchFamily="34" charset="0"/>
-              <a:buChar char="•"/>
-            </a:pPr>
-            <a:r>
-              <a:rPr lang="ar-SA" b="1" dirty="0"/>
-              <a:t>الذكاء الاصطناعي (</a:t>
-            </a:r>
-            <a:r>
-              <a:rPr lang="en-US" b="1" dirty="0"/>
-              <a:t> :(AI &amp; NLP</a:t>
-            </a:r>
-            <a:r>
-              <a:rPr lang="ar-SA" dirty="0"/>
-              <a:t>استغلال بيئة </a:t>
-            </a:r>
-            <a:r>
-              <a:rPr lang="en-US" dirty="0"/>
-              <a:t> Python </a:t>
-            </a:r>
-            <a:r>
-              <a:rPr lang="ar-SA" dirty="0"/>
-              <a:t>لدمج مكتبات ونماذج معالجة اللغات الطبيعية (لتحليل المشاعر واستخراج التوجهات).</a:t>
-            </a:r>
-          </a:p>
-          <a:p>
-            <a:pPr marL="285750" indent="-285750">
-              <a:lnSpc>
-                <a:spcPct val="150000"/>
-              </a:lnSpc>
-              <a:buFont typeface="Arial" panose="020B0604020202020204" pitchFamily="34" charset="0"/>
-              <a:buChar char="•"/>
-            </a:pPr>
-            <a:r>
-              <a:rPr lang="ar-SA" b="1" dirty="0"/>
-              <a:t>بيئة العمل الجماعي (</a:t>
-            </a:r>
-            <a:r>
-              <a:rPr lang="en-US" b="1" dirty="0"/>
-              <a:t>Version Control</a:t>
-            </a:r>
-            <a:r>
-              <a:rPr lang="ar-SA" b="1" dirty="0"/>
-              <a:t>): </a:t>
-            </a:r>
-            <a:r>
-              <a:rPr lang="ar-SA" dirty="0"/>
-              <a:t>استخدام </a:t>
-            </a:r>
-            <a:r>
-              <a:rPr lang="en-US" b="1" dirty="0"/>
-              <a:t>GitHub</a:t>
-            </a:r>
-            <a:r>
-              <a:rPr lang="ar-SA" dirty="0"/>
-              <a:t> لإدارة الأكواد وتنظيم العمل المشترك بين أعضاء الفريق.</a:t>
-            </a:r>
-          </a:p>
-        </p:txBody>
-      </p:sp>
-      <p:sp>
-        <p:nvSpPr>
           <p:cNvPr id="5" name="Rectangle 1">
             <a:extLst>
               <a:ext uri="{FF2B5EF4-FFF2-40B4-BE49-F238E27FC236}">
@@ -6150,8 +6190,8 @@
         </p:nvSpPr>
         <p:spPr bwMode="auto">
           <a:xfrm>
-            <a:off x="2700165" y="3269386"/>
-            <a:ext cx="9345828" cy="2580194"/>
+            <a:off x="642171" y="1980173"/>
+            <a:ext cx="10907658" cy="2897653"/>
           </a:xfrm>
           <a:prstGeom prst="rect">
             <a:avLst/>
@@ -6191,7 +6231,7 @@
           </a:extLst>
         </p:spPr>
         <p:txBody>
-          <a:bodyPr vert="horz" wrap="none" lIns="91440" tIns="45720" rIns="91440" bIns="45720" numCol="1" anchor="ctr" anchorCtr="0" compatLnSpc="1">
+          <a:bodyPr vert="horz" wrap="square" lIns="91440" tIns="45720" rIns="91440" bIns="45720" numCol="1" anchor="ctr" anchorCtr="0" compatLnSpc="1">
             <a:prstTxWarp prst="textNoShape">
               <a:avLst/>
             </a:prstTxWarp>
@@ -6214,7 +6254,7 @@
               <a:tabLst/>
             </a:pPr>
             <a:r>
-              <a:rPr kumimoji="0" lang="ar-SA" altLang="ar-SA" sz="2000" b="1" i="0" u="none" strike="noStrike" cap="none" normalizeH="0" baseline="0" dirty="0">
+              <a:rPr kumimoji="0" lang="ar-SA" altLang="ar-SA" sz="2400" b="1" i="0" u="none" strike="noStrike" cap="none" normalizeH="0" baseline="0" dirty="0">
                 <a:ln>
                   <a:noFill/>
                 </a:ln>
@@ -6228,7 +6268,7 @@
               <a:t>المنهجية المتبعة:</a:t>
             </a:r>
             <a:r>
-              <a:rPr kumimoji="0" lang="ar-SA" altLang="ar-SA" sz="2000" b="0" i="0" u="none" strike="noStrike" cap="none" normalizeH="0" baseline="0" dirty="0">
+              <a:rPr kumimoji="0" lang="ar-SA" altLang="ar-SA" sz="2400" b="0" i="0" u="none" strike="noStrike" cap="none" normalizeH="0" baseline="0" dirty="0">
                 <a:ln>
                   <a:noFill/>
                 </a:ln>
@@ -6241,7 +6281,7 @@
               <a:t> </a:t>
             </a:r>
             <a:r>
-              <a:rPr kumimoji="0" lang="ar-SA" altLang="ar-SA" sz="2000" b="0" i="0" u="none" strike="noStrike" cap="none" normalizeH="0" baseline="0" dirty="0">
+              <a:rPr kumimoji="0" lang="ar-SA" altLang="ar-SA" sz="2400" b="0" i="0" u="none" strike="noStrike" cap="none" normalizeH="0" baseline="0" dirty="0">
                 <a:ln>
                   <a:noFill/>
                 </a:ln>
@@ -6255,7 +6295,7 @@
               <a:t>إطار العمل الرشيق</a:t>
             </a:r>
             <a:r>
-              <a:rPr kumimoji="0" lang="ar-SA" altLang="ar-SA" sz="2000" b="0" i="0" u="none" strike="noStrike" cap="none" normalizeH="0" baseline="0" dirty="0">
+              <a:rPr kumimoji="0" lang="ar-SA" altLang="ar-SA" sz="2400" b="0" i="0" u="none" strike="noStrike" cap="none" normalizeH="0" baseline="0" dirty="0">
                 <a:ln>
                   <a:noFill/>
                 </a:ln>
@@ -6284,7 +6324,7 @@
               <a:tabLst/>
             </a:pPr>
             <a:r>
-              <a:rPr kumimoji="0" lang="ar-SA" altLang="ar-SA" b="1" i="0" u="none" strike="noStrike" cap="none" normalizeH="0" baseline="0" dirty="0">
+              <a:rPr kumimoji="0" lang="ar-SA" altLang="ar-SA" sz="2000" b="1" i="0" u="none" strike="noStrike" cap="none" normalizeH="0" baseline="0" dirty="0">
                 <a:ln>
                   <a:noFill/>
                 </a:ln>
@@ -6297,7 +6337,7 @@
               </a:rPr>
               <a:t>أسباب الاختيار:</a:t>
             </a:r>
-            <a:endParaRPr kumimoji="0" lang="ar-SA" altLang="ar-SA" b="0" i="0" u="none" strike="noStrike" cap="none" normalizeH="0" baseline="0" dirty="0">
+            <a:endParaRPr kumimoji="0" lang="ar-SA" altLang="ar-SA" sz="2000" b="0" i="0" u="none" strike="noStrike" cap="none" normalizeH="0" baseline="0" dirty="0">
               <a:ln>
                 <a:noFill/>
               </a:ln>
@@ -6309,7 +6349,7 @@
             </a:endParaRPr>
           </a:p>
           <a:p>
-            <a:pPr marL="0" marR="0" lvl="0" indent="0" algn="r" defTabSz="914400" eaLnBrk="0" fontAlgn="base" latinLnBrk="0" hangingPunct="0">
+            <a:pPr marL="342900" marR="0" lvl="0" indent="-342900" algn="r" defTabSz="914400" eaLnBrk="0" fontAlgn="base" latinLnBrk="0" hangingPunct="0">
               <a:lnSpc>
                 <a:spcPct val="150000"/>
               </a:lnSpc>
@@ -6321,12 +6361,12 @@
               </a:spcAft>
               <a:buClrTx/>
               <a:buSzTx/>
-              <a:buFontTx/>
+              <a:buFont typeface="Arial" panose="020B0604020202020204" pitchFamily="34" charset="0"/>
               <a:buChar char="•"/>
               <a:tabLst/>
             </a:pPr>
             <a:r>
-              <a:rPr kumimoji="0" lang="ar-SA" altLang="ar-SA" b="1" i="0" u="none" strike="noStrike" cap="none" normalizeH="0" baseline="0" dirty="0">
+              <a:rPr kumimoji="0" lang="ar-SA" altLang="ar-SA" sz="2000" b="1" i="0" u="none" strike="noStrike" cap="none" normalizeH="0" baseline="0" dirty="0">
                 <a:ln>
                   <a:noFill/>
                 </a:ln>
@@ -6340,7 +6380,7 @@
               <a:t>المرونة العالية:</a:t>
             </a:r>
             <a:r>
-              <a:rPr kumimoji="0" lang="ar-SA" altLang="ar-SA" b="0" i="0" u="none" strike="noStrike" cap="none" normalizeH="0" baseline="0" dirty="0">
+              <a:rPr kumimoji="0" lang="ar-SA" altLang="ar-SA" sz="2000" b="0" i="0" u="none" strike="noStrike" cap="none" normalizeH="0" baseline="0" dirty="0">
                 <a:ln>
                   <a:noFill/>
                 </a:ln>
@@ -6353,7 +6393,7 @@
               <a:t> </a:t>
             </a:r>
             <a:r>
-              <a:rPr kumimoji="0" lang="ar-SA" altLang="ar-SA" b="0" i="0" u="none" strike="noStrike" cap="none" normalizeH="0" baseline="0" dirty="0">
+              <a:rPr kumimoji="0" lang="ar-SA" altLang="ar-SA" sz="2000" b="0" i="0" u="none" strike="noStrike" cap="none" normalizeH="0" baseline="0" dirty="0">
                 <a:ln>
                   <a:noFill/>
                 </a:ln>
@@ -6364,10 +6404,10 @@
                 <a:latin typeface="Arial" panose="020B0604020202020204" pitchFamily="34" charset="0"/>
                 <a:cs typeface="Arial" panose="020B0604020202020204" pitchFamily="34" charset="0"/>
               </a:rPr>
-              <a:t>التكيف السريع لتعديل وتحسين دقة نموذج الذكاء الاصطناعي</a:t>
-            </a:r>
-            <a:r>
-              <a:rPr kumimoji="0" lang="ar-SA" altLang="ar-SA" b="0" i="0" u="none" strike="noStrike" cap="none" normalizeH="0" baseline="0" dirty="0">
+              <a:t>التكيف السريع لتعديل وتحسين دقة نموذج </a:t>
+            </a:r>
+            <a:r>
+              <a:rPr kumimoji="0" lang="ar-SA" altLang="ar-SA" sz="2000" b="0" i="0" u="none" strike="noStrike" cap="none" normalizeH="0" baseline="0" dirty="0">
                 <a:ln>
                   <a:noFill/>
                 </a:ln>
@@ -6377,10 +6417,10 @@
                 <a:effectLst/>
                 <a:latin typeface="Arial" panose="020B0604020202020204" pitchFamily="34" charset="0"/>
               </a:rPr>
-              <a:t> (NLP) </a:t>
-            </a:r>
-            <a:r>
-              <a:rPr kumimoji="0" lang="ar-SA" altLang="ar-SA" b="0" i="0" u="none" strike="noStrike" cap="none" normalizeH="0" baseline="0" dirty="0">
+              <a:t>(NLP) </a:t>
+            </a:r>
+            <a:r>
+              <a:rPr kumimoji="0" lang="ar-SA" altLang="ar-SA" sz="2000" b="0" i="0" u="none" strike="noStrike" cap="none" normalizeH="0" baseline="0" dirty="0">
                 <a:ln>
                   <a:noFill/>
                 </a:ln>
@@ -6394,7 +6434,7 @@
               <a:t>أثناء العمل</a:t>
             </a:r>
             <a:r>
-              <a:rPr kumimoji="0" lang="ar-SA" altLang="ar-SA" b="0" i="0" u="none" strike="noStrike" cap="none" normalizeH="0" baseline="0" dirty="0">
+              <a:rPr kumimoji="0" lang="ar-SA" altLang="ar-SA" sz="2000" b="0" i="0" u="none" strike="noStrike" cap="none" normalizeH="0" baseline="0" dirty="0">
                 <a:ln>
                   <a:noFill/>
                 </a:ln>
@@ -6408,7 +6448,7 @@
             </a:r>
           </a:p>
           <a:p>
-            <a:pPr marL="0" marR="0" lvl="0" indent="0" algn="r" defTabSz="914400" eaLnBrk="0" fontAlgn="base" latinLnBrk="0" hangingPunct="0">
+            <a:pPr marL="342900" marR="0" lvl="0" indent="-342900" algn="r" defTabSz="914400" eaLnBrk="0" fontAlgn="base" latinLnBrk="0" hangingPunct="0">
               <a:lnSpc>
                 <a:spcPct val="150000"/>
               </a:lnSpc>
@@ -6420,12 +6460,12 @@
               </a:spcAft>
               <a:buClrTx/>
               <a:buSzTx/>
-              <a:buFontTx/>
+              <a:buFont typeface="Arial" panose="020B0604020202020204" pitchFamily="34" charset="0"/>
               <a:buChar char="•"/>
               <a:tabLst/>
             </a:pPr>
             <a:r>
-              <a:rPr kumimoji="0" lang="ar-SA" altLang="ar-SA" b="1" i="0" u="none" strike="noStrike" cap="none" normalizeH="0" baseline="0" dirty="0">
+              <a:rPr kumimoji="0" lang="ar-SA" altLang="ar-SA" sz="2000" b="1" i="0" u="none" strike="noStrike" cap="none" normalizeH="0" baseline="0" dirty="0">
                 <a:ln>
                   <a:noFill/>
                 </a:ln>
@@ -6439,7 +6479,7 @@
               <a:t>التطوير المرحلي (Sprints):</a:t>
             </a:r>
             <a:r>
-              <a:rPr kumimoji="0" lang="ar-SA" altLang="ar-SA" b="0" i="0" u="none" strike="noStrike" cap="none" normalizeH="0" baseline="0" dirty="0">
+              <a:rPr kumimoji="0" lang="ar-SA" altLang="ar-SA" sz="2000" b="0" i="0" u="none" strike="noStrike" cap="none" normalizeH="0" baseline="0" dirty="0">
                 <a:ln>
                   <a:noFill/>
                 </a:ln>
@@ -6452,7 +6492,7 @@
               <a:t> </a:t>
             </a:r>
             <a:r>
-              <a:rPr kumimoji="0" lang="ar-SA" altLang="ar-SA" b="0" i="0" u="none" strike="noStrike" cap="none" normalizeH="0" baseline="0" dirty="0">
+              <a:rPr kumimoji="0" lang="ar-SA" altLang="ar-SA" sz="2000" b="0" i="0" u="none" strike="noStrike" cap="none" normalizeH="0" baseline="0" dirty="0">
                 <a:ln>
                   <a:noFill/>
                 </a:ln>
@@ -6466,7 +6506,7 @@
               <a:t>بناء النظام على مراحل متدرجة (إدارة الحسابات ⬅️ محرك المطابقة ⬅️ تحليل المشاعر)</a:t>
             </a:r>
             <a:r>
-              <a:rPr kumimoji="0" lang="ar-SA" altLang="ar-SA" b="0" i="0" u="none" strike="noStrike" cap="none" normalizeH="0" baseline="0" dirty="0">
+              <a:rPr kumimoji="0" lang="ar-SA" altLang="ar-SA" sz="2000" b="0" i="0" u="none" strike="noStrike" cap="none" normalizeH="0" baseline="0" dirty="0">
                 <a:ln>
                   <a:noFill/>
                 </a:ln>
@@ -6480,7 +6520,7 @@
             </a:r>
           </a:p>
           <a:p>
-            <a:pPr marL="0" marR="0" lvl="0" indent="0" algn="r" defTabSz="914400" eaLnBrk="0" fontAlgn="base" latinLnBrk="0" hangingPunct="0">
+            <a:pPr marL="342900" marR="0" lvl="0" indent="-342900" algn="r" defTabSz="914400" eaLnBrk="0" fontAlgn="base" latinLnBrk="0" hangingPunct="0">
               <a:lnSpc>
                 <a:spcPct val="150000"/>
               </a:lnSpc>
@@ -6492,12 +6532,12 @@
               </a:spcAft>
               <a:buClrTx/>
               <a:buSzTx/>
-              <a:buFontTx/>
+              <a:buFont typeface="Arial" panose="020B0604020202020204" pitchFamily="34" charset="0"/>
               <a:buChar char="•"/>
               <a:tabLst/>
             </a:pPr>
             <a:r>
-              <a:rPr kumimoji="0" lang="ar-SA" altLang="ar-SA" b="1" i="0" u="none" strike="noStrike" cap="none" normalizeH="0" baseline="0" dirty="0">
+              <a:rPr kumimoji="0" lang="ar-SA" altLang="ar-SA" sz="2000" b="1" i="0" u="none" strike="noStrike" cap="none" normalizeH="0" baseline="0" dirty="0">
                 <a:ln>
                   <a:noFill/>
                 </a:ln>
@@ -6511,7 +6551,7 @@
               <a:t>التقييم المستمر:</a:t>
             </a:r>
             <a:r>
-              <a:rPr kumimoji="0" lang="ar-SA" altLang="ar-SA" b="0" i="0" u="none" strike="noStrike" cap="none" normalizeH="0" baseline="0" dirty="0">
+              <a:rPr kumimoji="0" lang="ar-SA" altLang="ar-SA" sz="2000" b="0" i="0" u="none" strike="noStrike" cap="none" normalizeH="0" baseline="0" dirty="0">
                 <a:ln>
                   <a:noFill/>
                 </a:ln>
@@ -6524,7 +6564,7 @@
               <a:t> </a:t>
             </a:r>
             <a:r>
-              <a:rPr kumimoji="0" lang="ar-SA" altLang="ar-SA" b="0" i="0" u="none" strike="noStrike" cap="none" normalizeH="0" baseline="0" dirty="0">
+              <a:rPr kumimoji="0" lang="ar-SA" altLang="ar-SA" sz="2000" b="0" i="0" u="none" strike="noStrike" cap="none" normalizeH="0" baseline="0" dirty="0">
                 <a:ln>
                   <a:noFill/>
                 </a:ln>
@@ -6538,7 +6578,7 @@
               <a:t>استعراض الأجزاء المنجزة دورياً مع المشرف لتفادي تراكم الأخطاء برمجياً</a:t>
             </a:r>
             <a:r>
-              <a:rPr kumimoji="0" lang="ar-SA" altLang="ar-SA" b="0" i="0" u="none" strike="noStrike" cap="none" normalizeH="0" baseline="0" dirty="0">
+              <a:rPr kumimoji="0" lang="ar-SA" altLang="ar-SA" sz="2000" b="0" i="0" u="none" strike="noStrike" cap="none" normalizeH="0" baseline="0" dirty="0">
                 <a:ln>
                   <a:noFill/>
                 </a:ln>
@@ -6552,7 +6592,7 @@
             </a:r>
           </a:p>
           <a:p>
-            <a:pPr marL="0" marR="0" lvl="0" indent="0" algn="r" defTabSz="914400" eaLnBrk="0" fontAlgn="base" latinLnBrk="0" hangingPunct="0">
+            <a:pPr marL="342900" marR="0" lvl="0" indent="-342900" algn="r" defTabSz="914400" eaLnBrk="0" fontAlgn="base" latinLnBrk="0" hangingPunct="0">
               <a:lnSpc>
                 <a:spcPct val="150000"/>
               </a:lnSpc>
@@ -6564,12 +6604,12 @@
               </a:spcAft>
               <a:buClrTx/>
               <a:buSzTx/>
-              <a:buFontTx/>
+              <a:buFont typeface="Arial" panose="020B0604020202020204" pitchFamily="34" charset="0"/>
               <a:buChar char="•"/>
               <a:tabLst/>
             </a:pPr>
             <a:r>
-              <a:rPr kumimoji="0" lang="ar-SA" altLang="ar-SA" b="1" i="0" u="none" strike="noStrike" cap="none" normalizeH="0" baseline="0" dirty="0">
+              <a:rPr kumimoji="0" lang="ar-SA" altLang="ar-SA" sz="2000" b="1" i="0" u="none" strike="noStrike" cap="none" normalizeH="0" baseline="0" dirty="0">
                 <a:ln>
                   <a:noFill/>
                 </a:ln>
@@ -6583,7 +6623,7 @@
               <a:t>إدارة الوقت:</a:t>
             </a:r>
             <a:r>
-              <a:rPr kumimoji="0" lang="ar-SA" altLang="ar-SA" b="0" i="0" u="none" strike="noStrike" cap="none" normalizeH="0" baseline="0" dirty="0">
+              <a:rPr kumimoji="0" lang="ar-SA" altLang="ar-SA" sz="2000" b="0" i="0" u="none" strike="noStrike" cap="none" normalizeH="0" baseline="0" dirty="0">
                 <a:ln>
                   <a:noFill/>
                 </a:ln>
@@ -6596,7 +6636,7 @@
               <a:t> </a:t>
             </a:r>
             <a:r>
-              <a:rPr kumimoji="0" lang="ar-SA" altLang="ar-SA" b="0" i="0" u="none" strike="noStrike" cap="none" normalizeH="0" baseline="0" dirty="0">
+              <a:rPr kumimoji="0" lang="ar-SA" altLang="ar-SA" sz="2000" b="0" i="0" u="none" strike="noStrike" cap="none" normalizeH="0" baseline="0" dirty="0">
                 <a:ln>
                   <a:noFill/>
                 </a:ln>
@@ -6610,7 +6650,7 @@
               <a:t>ضمان تسليم المشروع بالكامل ضمن الإطار الزمني المحدد للفصل الدراسي</a:t>
             </a:r>
             <a:r>
-              <a:rPr kumimoji="0" lang="ar-SA" altLang="ar-SA" b="0" i="0" u="none" strike="noStrike" cap="none" normalizeH="0" baseline="0" dirty="0">
+              <a:rPr kumimoji="0" lang="ar-SA" altLang="ar-SA" sz="2000" b="0" i="0" u="none" strike="noStrike" cap="none" normalizeH="0" baseline="0" dirty="0">
                 <a:ln>
                   <a:noFill/>
                 </a:ln>
@@ -6865,10 +6905,10 @@
       </p:grpSpPr>
       <p:sp>
         <p:nvSpPr>
-          <p:cNvPr id="3" name="مربع نص 2">
+          <p:cNvPr id="2" name="مربع نص 1">
             <a:extLst>
               <a:ext uri="{FF2B5EF4-FFF2-40B4-BE49-F238E27FC236}">
-                <a16:creationId xmlns:a16="http://schemas.microsoft.com/office/drawing/2014/main" id="{5FD39E78-D41F-8236-E1E0-A3D88CC477E0}"/>
+                <a16:creationId xmlns:a16="http://schemas.microsoft.com/office/drawing/2014/main" id="{2FB54EBE-E44C-C5CD-12BF-287427556F84}"/>
               </a:ext>
             </a:extLst>
           </p:cNvPr>
@@ -6877,8 +6917,8 @@
         </p:nvSpPr>
         <p:spPr>
           <a:xfrm>
-            <a:off x="502299" y="0"/>
-            <a:ext cx="11467321" cy="6282041"/>
+            <a:off x="273611" y="1714011"/>
+            <a:ext cx="11644777" cy="2907463"/>
           </a:xfrm>
           <a:prstGeom prst="rect">
             <a:avLst/>
@@ -6897,36 +6937,16 @@
               </a:lnSpc>
             </a:pPr>
             <a:r>
-              <a:rPr lang="ar-SA" sz="1500" b="1" dirty="0">
+              <a:rPr lang="ar-SA" sz="2400" b="1" dirty="0">
                 <a:solidFill>
                   <a:schemeClr val="accent1"/>
                 </a:solidFill>
               </a:rPr>
-              <a:t>المتطلبات الوظيفية</a:t>
-            </a:r>
-          </a:p>
-          <a:p>
-            <a:pPr>
-              <a:lnSpc>
-                <a:spcPct val="150000"/>
-              </a:lnSpc>
-            </a:pPr>
-            <a:r>
-              <a:rPr lang="ar-SA" sz="1500" b="1" dirty="0"/>
-              <a:t>1. وحدة إدارة الحسابات والمصادقة </a:t>
-            </a:r>
-            <a:r>
-              <a:rPr lang="en-US" sz="1500" b="1" dirty="0"/>
-              <a:t>Authentication &amp; User Management)</a:t>
-            </a:r>
-            <a:r>
-              <a:rPr lang="ar-SA" sz="1500" b="1" dirty="0"/>
-              <a:t>)</a:t>
-            </a:r>
-            <a:endParaRPr lang="en-US" sz="1500" dirty="0"/>
-          </a:p>
-          <a:p>
-            <a:pPr>
+              <a:t>الأدوات والتقنيات المستخدمة </a:t>
+            </a:r>
+          </a:p>
+          <a:p>
+            <a:pPr marL="285750" indent="-285750">
               <a:lnSpc>
                 <a:spcPct val="150000"/>
               </a:lnSpc>
@@ -6934,12 +6954,44 @@
               <a:buChar char="•"/>
             </a:pPr>
             <a:r>
-              <a:rPr lang="ar-SA" sz="1500" dirty="0"/>
-              <a:t>يجب أن يتيح النظام إنشاء حسابات جديدة بتحديد نوع المستخدم (مقدم خدمة/باحث أو مُجيب).</a:t>
-            </a:r>
-          </a:p>
-          <a:p>
-            <a:pPr>
+              <a:rPr lang="ar-SA" sz="2000" b="1" dirty="0"/>
+              <a:t>الواجهة الخلفية (</a:t>
+            </a:r>
+            <a:r>
+              <a:rPr lang="en-US" sz="2000" b="1" dirty="0"/>
+              <a:t> :(Backend</a:t>
+            </a:r>
+            <a:r>
+              <a:rPr lang="ar-SA" sz="2000" dirty="0"/>
+              <a:t>لغة البرمجة </a:t>
+            </a:r>
+            <a:r>
+              <a:rPr lang="en-US" sz="2000" b="1" dirty="0"/>
+              <a:t>Python</a:t>
+            </a:r>
+            <a:r>
+              <a:rPr lang="en-US" sz="2000" dirty="0"/>
+              <a:t> </a:t>
+            </a:r>
+            <a:r>
+              <a:rPr lang="ar-SA" sz="2000" dirty="0"/>
+              <a:t> بالاعتماد على إطار العمل </a:t>
+            </a:r>
+            <a:r>
+              <a:rPr lang="en-US" sz="2000" dirty="0"/>
+              <a:t> (</a:t>
+            </a:r>
+            <a:r>
+              <a:rPr lang="en-US" sz="2000" b="1" dirty="0"/>
+              <a:t>Django)</a:t>
+            </a:r>
+            <a:r>
+              <a:rPr lang="ar-SA" sz="2000" dirty="0"/>
+              <a:t>.</a:t>
+            </a:r>
+          </a:p>
+          <a:p>
+            <a:pPr marL="285750" indent="-285750">
               <a:lnSpc>
                 <a:spcPct val="150000"/>
               </a:lnSpc>
@@ -6947,12 +6999,32 @@
               <a:buChar char="•"/>
             </a:pPr>
             <a:r>
-              <a:rPr lang="ar-SA" sz="1500" dirty="0"/>
-              <a:t>يجب أن يوفر النظام آلية لتسجيل الدخول الآمن واستعادة كلمة المرور.</a:t>
-            </a:r>
-          </a:p>
-          <a:p>
-            <a:pPr>
+              <a:rPr lang="ar-SA" sz="2000" b="1" dirty="0"/>
+              <a:t> قواعد البيانات </a:t>
+            </a:r>
+            <a:r>
+              <a:rPr lang="en-US" sz="2000" b="1" dirty="0"/>
+              <a:t> :(Database)</a:t>
+            </a:r>
+            <a:r>
+              <a:rPr lang="ar-SA" sz="2000" dirty="0"/>
+              <a:t>قواعد بيانات علائقية</a:t>
+            </a:r>
+            <a:r>
+              <a:rPr lang="en-US" sz="2000" dirty="0"/>
+              <a:t> (</a:t>
+            </a:r>
+            <a:r>
+              <a:rPr lang="en-US" sz="2000" b="1" dirty="0"/>
+              <a:t>SQL) </a:t>
+            </a:r>
+            <a:r>
+              <a:rPr lang="ar-SA" sz="2000" dirty="0"/>
+              <a:t>للدقة والموثوقية.</a:t>
+            </a:r>
+          </a:p>
+          <a:p>
+            <a:pPr marL="285750" indent="-285750">
               <a:lnSpc>
                 <a:spcPct val="150000"/>
               </a:lnSpc>
@@ -6960,32 +7032,32 @@
               <a:buChar char="•"/>
             </a:pPr>
             <a:r>
-              <a:rPr lang="ar-SA" sz="1500" dirty="0"/>
-              <a:t>يجب أن يسمح النظام للمُجيبين بإدخال وتحديث بياناتهم الديموغرافية (العمر، الجنس، الموقع، الاهتمامات) في ملفاتهم الشخصية.</a:t>
-            </a:r>
-          </a:p>
-          <a:p>
-            <a:pPr>
-              <a:lnSpc>
-                <a:spcPct val="150000"/>
-              </a:lnSpc>
-            </a:pPr>
-            <a:r>
-              <a:rPr lang="ar-SA" sz="1500" b="1" dirty="0"/>
-              <a:t>2. وحدة إدارة الاستبيانات (</a:t>
-            </a:r>
-            <a:r>
-              <a:rPr lang="en-US" sz="1500" b="1" dirty="0"/>
-              <a:t> - Survey Management </a:t>
-            </a:r>
-            <a:r>
-              <a:rPr lang="ar-SA" sz="1500" b="1" dirty="0"/>
-              <a:t>لمقدم الخدمة)</a:t>
-            </a:r>
-            <a:endParaRPr lang="ar-SA" sz="1500" dirty="0"/>
-          </a:p>
-          <a:p>
-            <a:pPr>
+              <a:rPr lang="ar-SA" sz="2000" b="1" dirty="0"/>
+              <a:t>الواجهة الأمامية (</a:t>
+            </a:r>
+            <a:r>
+              <a:rPr lang="en-US" sz="2000" b="1" dirty="0"/>
+              <a:t>Frontend</a:t>
+            </a:r>
+            <a:r>
+              <a:rPr lang="ar-SA" sz="2000" b="1" dirty="0"/>
+              <a:t>): </a:t>
+            </a:r>
+            <a:r>
+              <a:rPr lang="ar-SA" sz="2000" dirty="0"/>
+              <a:t>تقنيات الويب القياسية </a:t>
+            </a:r>
+            <a:r>
+              <a:rPr lang="en-US" sz="2000" dirty="0"/>
+              <a:t> (HTML, CSS, JavaScript)</a:t>
+            </a:r>
+            <a:r>
+              <a:rPr lang="ar-SA" sz="2000" dirty="0"/>
+              <a:t>.</a:t>
+            </a:r>
+          </a:p>
+          <a:p>
+            <a:pPr marL="285750" indent="-285750">
               <a:lnSpc>
                 <a:spcPct val="150000"/>
               </a:lnSpc>
@@ -6993,12 +7065,33 @@
               <a:buChar char="•"/>
             </a:pPr>
             <a:r>
-              <a:rPr lang="ar-SA" sz="1500" dirty="0"/>
-              <a:t>يجب أن يمكن النظام مقدم الخدمة من إنشاء استبيان جديد وإضافة أسئلة متنوعة (نصية مفتوحة، خيارات متعددة).</a:t>
-            </a:r>
-          </a:p>
-          <a:p>
-            <a:pPr>
+              <a:rPr lang="ar-SA" sz="2000" b="1" dirty="0"/>
+              <a:t>الذكاء الاصطناعي (</a:t>
+            </a:r>
+            <a:r>
+              <a:rPr lang="en-US" sz="2000" b="1" dirty="0"/>
+              <a:t> :(AI &amp; NLP</a:t>
+            </a:r>
+            <a:r>
+              <a:rPr lang="ar-SA" sz="2000" dirty="0"/>
+              <a:t>مكتبات ونماذج (</a:t>
+            </a:r>
+            <a:r>
+              <a:rPr lang="en-US" sz="2000" dirty="0"/>
+              <a:t> (NLP</a:t>
+            </a:r>
+            <a:r>
+              <a:rPr lang="ar-SA" sz="2000" dirty="0"/>
+              <a:t>عبر بيئة </a:t>
+            </a:r>
+            <a:r>
+              <a:rPr lang="en-US" sz="2000" dirty="0"/>
+              <a:t>.Python</a:t>
+            </a:r>
+            <a:endParaRPr lang="ar-SA" sz="2000" dirty="0"/>
+          </a:p>
+          <a:p>
+            <a:pPr marL="285750" indent="-285750">
               <a:lnSpc>
                 <a:spcPct val="150000"/>
               </a:lnSpc>
@@ -7006,167 +7099,28 @@
               <a:buChar char="•"/>
             </a:pPr>
             <a:r>
-              <a:rPr lang="ar-SA" sz="1500" dirty="0"/>
-              <a:t>يجب أن يتيح النظام لمقدم الخدمة تحديد "شروط الاستهداف" (</a:t>
-            </a:r>
-            <a:r>
-              <a:rPr lang="en-US" sz="1500" dirty="0"/>
-              <a:t>Targeting Criteria</a:t>
-            </a:r>
-            <a:r>
-              <a:rPr lang="ar-SA" sz="1500" dirty="0"/>
-              <a:t>) لكل استبيان بناءً على البيانات الديموغرافية.</a:t>
-            </a:r>
-          </a:p>
-          <a:p>
-            <a:pPr>
-              <a:lnSpc>
-                <a:spcPct val="150000"/>
-              </a:lnSpc>
-            </a:pPr>
-            <a:r>
-              <a:rPr lang="ar-SA" sz="1500" b="1" dirty="0"/>
-              <a:t>3. وحدة محرك المطابقة (</a:t>
-            </a:r>
-            <a:r>
-              <a:rPr lang="en-US" sz="1500" b="1" dirty="0"/>
-              <a:t> - Targeting Engine </a:t>
-            </a:r>
-            <a:r>
-              <a:rPr lang="ar-SA" sz="1500" b="1" dirty="0"/>
-              <a:t>النظام الأساسي)</a:t>
-            </a:r>
-            <a:endParaRPr lang="ar-SA" sz="1500" dirty="0"/>
-          </a:p>
-          <a:p>
-            <a:pPr>
-              <a:lnSpc>
-                <a:spcPct val="150000"/>
-              </a:lnSpc>
-              <a:buFont typeface="Arial" panose="020B0604020202020204" pitchFamily="34" charset="0"/>
-              <a:buChar char="•"/>
-            </a:pPr>
-            <a:r>
-              <a:rPr lang="ar-SA" sz="1500" dirty="0"/>
-              <a:t>يجب أن يقوم النظام بمطابقة شروط الاستبيان مع قاعدة بيانات المُجيبين بشكل تلقائي.</a:t>
-            </a:r>
-          </a:p>
-          <a:p>
-            <a:pPr>
-              <a:lnSpc>
-                <a:spcPct val="150000"/>
-              </a:lnSpc>
-              <a:buFont typeface="Arial" panose="020B0604020202020204" pitchFamily="34" charset="0"/>
-              <a:buChar char="•"/>
-            </a:pPr>
-            <a:r>
-              <a:rPr lang="ar-SA" sz="1500" dirty="0"/>
-              <a:t>يجب أن يعرض النظام الاستبيانات المتاحة فقط للمُجيبين الذين تتطابق بياناتهم مع شروط الاستهداف.</a:t>
-            </a:r>
-          </a:p>
-          <a:p>
-            <a:pPr>
-              <a:lnSpc>
-                <a:spcPct val="150000"/>
-              </a:lnSpc>
-            </a:pPr>
-            <a:r>
-              <a:rPr lang="ar-SA" sz="1500" b="1" dirty="0"/>
-              <a:t>4. وحدة الإجابات والذكاء الاصطناعي (</a:t>
-            </a:r>
-            <a:r>
-              <a:rPr lang="en-US" sz="1500" b="1" dirty="0"/>
-              <a:t>Responses &amp; AI Integration</a:t>
-            </a:r>
-            <a:r>
-              <a:rPr lang="ar-SA" sz="1500" b="1" dirty="0"/>
-              <a:t>)</a:t>
-            </a:r>
-            <a:endParaRPr lang="en-US" sz="1500" dirty="0"/>
-          </a:p>
-          <a:p>
-            <a:pPr>
-              <a:lnSpc>
-                <a:spcPct val="150000"/>
-              </a:lnSpc>
-              <a:buFont typeface="Arial" panose="020B0604020202020204" pitchFamily="34" charset="0"/>
-              <a:buChar char="•"/>
-            </a:pPr>
-            <a:r>
-              <a:rPr lang="ar-SA" sz="1500" dirty="0"/>
-              <a:t>يجب أن يتيح النظام للمُجيبين إرسال إجاباتهم وحفظها في قاعدة البيانات.</a:t>
-            </a:r>
-          </a:p>
-          <a:p>
-            <a:pPr>
-              <a:lnSpc>
-                <a:spcPct val="150000"/>
-              </a:lnSpc>
-              <a:buFont typeface="Arial" panose="020B0604020202020204" pitchFamily="34" charset="0"/>
-              <a:buChar char="•"/>
-            </a:pPr>
-            <a:r>
-              <a:rPr lang="ar-SA" sz="1500" dirty="0"/>
-              <a:t>يجب أن يقوم النظام بتمرير الإجابات النصية المفتوحة إلى نموذج معالجة اللغات الطبيعية </a:t>
-            </a:r>
-            <a:r>
-              <a:rPr lang="en-US" sz="1500" dirty="0"/>
-              <a:t>.(NLP)</a:t>
-            </a:r>
-          </a:p>
-          <a:p>
-            <a:pPr>
-              <a:lnSpc>
-                <a:spcPct val="150000"/>
-              </a:lnSpc>
-              <a:buFont typeface="Arial" panose="020B0604020202020204" pitchFamily="34" charset="0"/>
-              <a:buChar char="•"/>
-            </a:pPr>
-            <a:r>
-              <a:rPr lang="ar-SA" sz="1500" dirty="0"/>
-              <a:t>يجب أن يصنف النظام الإجابات النصية تلقائياً إلى مشاعر (إيجابية، سلبية، محايدة).</a:t>
-            </a:r>
-          </a:p>
-          <a:p>
-            <a:pPr>
-              <a:lnSpc>
-                <a:spcPct val="150000"/>
-              </a:lnSpc>
-            </a:pPr>
-            <a:r>
-              <a:rPr lang="ar-SA" sz="1500" b="1" dirty="0"/>
-              <a:t>5. وحدة التقارير ولوحات التحكم (</a:t>
-            </a:r>
-            <a:r>
-              <a:rPr lang="en-US" sz="1500" b="1" dirty="0"/>
-              <a:t>(Dashboards &amp; Reporting</a:t>
-            </a:r>
-            <a:endParaRPr lang="en-US" sz="1500" dirty="0"/>
-          </a:p>
-          <a:p>
-            <a:pPr>
-              <a:lnSpc>
-                <a:spcPct val="150000"/>
-              </a:lnSpc>
-              <a:buFont typeface="Arial" panose="020B0604020202020204" pitchFamily="34" charset="0"/>
-              <a:buChar char="•"/>
-            </a:pPr>
-            <a:r>
-              <a:rPr lang="ar-SA" sz="1500" dirty="0"/>
-              <a:t>يجب أن يوفر النظام لوحة تحكم لمقدم الخدمة تعرض إحصائيات حية لعدد المجيبين.</a:t>
-            </a:r>
-          </a:p>
-          <a:p>
-            <a:pPr>
-              <a:lnSpc>
-                <a:spcPct val="150000"/>
-              </a:lnSpc>
-              <a:buFont typeface="Arial" panose="020B0604020202020204" pitchFamily="34" charset="0"/>
-              <a:buChar char="•"/>
-            </a:pPr>
-            <a:r>
-              <a:rPr lang="ar-SA" sz="1500" dirty="0"/>
-              <a:t>يجب أن يعرض النظام نتائج تحليل المشاعر (الذكاء الاصطناعي) على شكل رسوم بيانية تفاعلية.</a:t>
+              <a:rPr lang="ar-SA" sz="2000" b="1" dirty="0"/>
+              <a:t>بيئة العمل الجماعي (</a:t>
+            </a:r>
+            <a:r>
+              <a:rPr lang="en-US" sz="2000" b="1" dirty="0"/>
+              <a:t>Version Control</a:t>
+            </a:r>
+            <a:r>
+              <a:rPr lang="ar-SA" sz="2000" b="1" dirty="0"/>
+              <a:t>): </a:t>
+            </a:r>
+            <a:r>
+              <a:rPr lang="ar-SA" sz="2000" dirty="0"/>
+              <a:t>استخدام </a:t>
+            </a:r>
+            <a:r>
+              <a:rPr lang="en-US" sz="2000" b="1" dirty="0"/>
+              <a:t>GitHub</a:t>
+            </a:r>
+            <a:r>
+              <a:rPr lang="ar-SA" sz="2000" dirty="0"/>
+              <a:t> لتنظيم العمل المشترك بين أعضاء الفريق.</a:t>
             </a:r>
           </a:p>
         </p:txBody>
@@ -7174,7 +7128,7 @@
     </p:spTree>
     <p:extLst>
       <p:ext uri="{BB962C8B-B14F-4D97-AF65-F5344CB8AC3E}">
-        <p14:creationId xmlns:p14="http://schemas.microsoft.com/office/powerpoint/2010/main" val="2484457270"/>
+        <p14:creationId xmlns:p14="http://schemas.microsoft.com/office/powerpoint/2010/main" val="480215245"/>
       </p:ext>
     </p:extLst>
   </p:cSld>
@@ -7201,292 +7155,781 @@
           <a:chExt cx="0" cy="0"/>
         </a:xfrm>
       </p:grpSpPr>
-      <p:sp>
-        <p:nvSpPr>
-          <p:cNvPr id="4" name="مربع نص 3">
+      <p:graphicFrame>
+        <p:nvGraphicFramePr>
+          <p:cNvPr id="2" name="جدول 1">
             <a:extLst>
               <a:ext uri="{FF2B5EF4-FFF2-40B4-BE49-F238E27FC236}">
-                <a16:creationId xmlns:a16="http://schemas.microsoft.com/office/drawing/2014/main" id="{94FE766C-8414-B6D3-12B6-103F4AC3BA32}"/>
+                <a16:creationId xmlns:a16="http://schemas.microsoft.com/office/drawing/2014/main" id="{F8542F93-70F0-31CE-132C-ADEF151D2F1A}"/>
               </a:ext>
             </a:extLst>
           </p:cNvPr>
-          <p:cNvSpPr txBox="1"/>
-          <p:nvPr/>
-        </p:nvSpPr>
-        <p:spPr>
-          <a:xfrm>
-            <a:off x="342122" y="0"/>
-            <a:ext cx="11849878" cy="5909823"/>
-          </a:xfrm>
-          <a:prstGeom prst="rect">
-            <a:avLst/>
-          </a:prstGeom>
-          <a:noFill/>
-        </p:spPr>
-        <p:txBody>
-          <a:bodyPr wrap="square" rtlCol="1">
-            <a:spAutoFit/>
-          </a:bodyPr>
-          <a:lstStyle/>
-          <a:p>
-            <a:pPr>
-              <a:lnSpc>
-                <a:spcPct val="150000"/>
-              </a:lnSpc>
-            </a:pPr>
-            <a:r>
-              <a:rPr lang="ar-SA" sz="2000" b="1" dirty="0">
-                <a:solidFill>
-                  <a:schemeClr val="accent1"/>
-                </a:solidFill>
-              </a:rPr>
-              <a:t>المتطلبات غير وظيفية</a:t>
-            </a:r>
-          </a:p>
-          <a:p>
-            <a:pPr>
-              <a:lnSpc>
-                <a:spcPct val="150000"/>
-              </a:lnSpc>
-            </a:pPr>
-            <a:r>
-              <a:rPr lang="ar-SA" b="1" dirty="0"/>
-              <a:t>1.  الأداء والسرعة (</a:t>
-            </a:r>
-            <a:r>
-              <a:rPr lang="en-US" b="1" dirty="0"/>
-              <a:t>(Performance</a:t>
-            </a:r>
-            <a:endParaRPr lang="en-US" dirty="0"/>
-          </a:p>
-          <a:p>
-            <a:pPr>
-              <a:lnSpc>
-                <a:spcPct val="150000"/>
-              </a:lnSpc>
-              <a:buFont typeface="Arial" panose="020B0604020202020204" pitchFamily="34" charset="0"/>
-              <a:buChar char="•"/>
-            </a:pPr>
-            <a:r>
-              <a:rPr lang="ar-SA" sz="1600" dirty="0"/>
-              <a:t>يجب ألا يتجاوز زمن استجابة النظام لتمرير الإجابات لنموذج الذكاء الاصطناعي (</a:t>
-            </a:r>
-            <a:r>
-              <a:rPr lang="en-US" sz="1600" dirty="0"/>
-              <a:t> (NLP</a:t>
-            </a:r>
-            <a:r>
-              <a:rPr lang="ar-SA" sz="1600" dirty="0"/>
-              <a:t>وتحليلها 3 إلى 5 ثوانٍ.</a:t>
-            </a:r>
-          </a:p>
-          <a:p>
-            <a:pPr>
-              <a:lnSpc>
-                <a:spcPct val="150000"/>
-              </a:lnSpc>
-              <a:buFont typeface="Arial" panose="020B0604020202020204" pitchFamily="34" charset="0"/>
-              <a:buChar char="•"/>
-            </a:pPr>
-            <a:r>
-              <a:rPr lang="ar-SA" sz="1600" dirty="0"/>
-              <a:t>يجب تحميل صفحات الواجهة الأمامية بسرعة لضمان عدم ملل المستخدم أثناء الإجابة.</a:t>
-            </a:r>
-          </a:p>
-          <a:p>
-            <a:pPr>
-              <a:lnSpc>
-                <a:spcPct val="150000"/>
-              </a:lnSpc>
-            </a:pPr>
-            <a:r>
-              <a:rPr lang="ar-SA" b="1" dirty="0"/>
-              <a:t>2. الدقة (</a:t>
-            </a:r>
-            <a:r>
-              <a:rPr lang="en-US" b="1" dirty="0"/>
-              <a:t>Accuracy</a:t>
-            </a:r>
-            <a:r>
-              <a:rPr lang="ar-SA" b="1" dirty="0"/>
-              <a:t>)</a:t>
-            </a:r>
-            <a:endParaRPr lang="en-US" dirty="0"/>
-          </a:p>
-          <a:p>
-            <a:pPr>
-              <a:lnSpc>
-                <a:spcPct val="150000"/>
-              </a:lnSpc>
-              <a:buFont typeface="Arial" panose="020B0604020202020204" pitchFamily="34" charset="0"/>
-              <a:buChar char="•"/>
-            </a:pPr>
-            <a:r>
-              <a:rPr lang="ar-SA" sz="1600" dirty="0"/>
-              <a:t>يجب أن يحقق نموذج معالجة اللغات الطبيعية دقة تتراوح بين 75% إلى 80% في تصنيف المشاعر (إيجابي، سلبي، محايد) بشكل صحيح.</a:t>
-            </a:r>
-          </a:p>
-          <a:p>
-            <a:pPr>
-              <a:lnSpc>
-                <a:spcPct val="150000"/>
-              </a:lnSpc>
-            </a:pPr>
-            <a:r>
-              <a:rPr lang="ar-SA" b="1" dirty="0"/>
-              <a:t>3. الأمان والخصوصية </a:t>
-            </a:r>
-            <a:r>
-              <a:rPr lang="en-US" b="1" dirty="0"/>
-              <a:t>(Security &amp; Privacy)</a:t>
-            </a:r>
-            <a:endParaRPr lang="en-US" dirty="0"/>
-          </a:p>
-          <a:p>
-            <a:pPr>
-              <a:lnSpc>
-                <a:spcPct val="150000"/>
-              </a:lnSpc>
-              <a:buFont typeface="Arial" panose="020B0604020202020204" pitchFamily="34" charset="0"/>
-              <a:buChar char="•"/>
-            </a:pPr>
-            <a:r>
-              <a:rPr lang="ar-SA" sz="1600" dirty="0"/>
-              <a:t>يجب تشفير كلمات مرور المستخدمين في قاعدة البيانات ولا تُحفظ كنصوص مكشوفة (</a:t>
-            </a:r>
-            <a:r>
-              <a:rPr lang="en-US" sz="1600" dirty="0"/>
-              <a:t>(Hashing</a:t>
-            </a:r>
-          </a:p>
-          <a:p>
-            <a:pPr>
-              <a:lnSpc>
-                <a:spcPct val="150000"/>
-              </a:lnSpc>
-              <a:buFont typeface="Arial" panose="020B0604020202020204" pitchFamily="34" charset="0"/>
-              <a:buChar char="•"/>
-            </a:pPr>
-            <a:r>
-              <a:rPr lang="ar-SA" sz="1600" dirty="0"/>
-              <a:t>يجب حماية البيانات الديموغرافية للمجيبين ومنع الوصول غير المصرح به إليها، وحماية النظام من ثغرات الحقن (</a:t>
-            </a:r>
-            <a:r>
-              <a:rPr lang="en-US" sz="1600" dirty="0"/>
-              <a:t>(SQL Injection</a:t>
-            </a:r>
-          </a:p>
-          <a:p>
-            <a:pPr>
-              <a:lnSpc>
-                <a:spcPct val="150000"/>
-              </a:lnSpc>
-            </a:pPr>
-            <a:r>
-              <a:rPr lang="en-US" b="1" dirty="0"/>
-              <a:t> </a:t>
-            </a:r>
-            <a:r>
-              <a:rPr lang="ar-SA" b="1" dirty="0"/>
-              <a:t>4</a:t>
-            </a:r>
-            <a:r>
-              <a:rPr lang="en-US" b="1" dirty="0"/>
-              <a:t>.</a:t>
-            </a:r>
-            <a:r>
-              <a:rPr lang="ar-SA" b="1" dirty="0"/>
-              <a:t>  قابلية الاستخدام (</a:t>
-            </a:r>
-            <a:r>
-              <a:rPr lang="en-US" b="1" dirty="0"/>
-              <a:t>Usability</a:t>
-            </a:r>
-            <a:r>
-              <a:rPr lang="ar-SA" b="1" dirty="0"/>
-              <a:t>)</a:t>
-            </a:r>
-            <a:endParaRPr lang="en-US" dirty="0"/>
-          </a:p>
-          <a:p>
-            <a:pPr>
-              <a:lnSpc>
-                <a:spcPct val="150000"/>
-              </a:lnSpc>
-              <a:buFont typeface="Arial" panose="020B0604020202020204" pitchFamily="34" charset="0"/>
-              <a:buChar char="•"/>
-            </a:pPr>
-            <a:r>
-              <a:rPr lang="ar-SA" sz="1600" dirty="0"/>
-              <a:t>يجب أن تكون واجهات المنصة متجاوبة (</a:t>
-            </a:r>
-            <a:r>
-              <a:rPr lang="en-US" sz="1600" dirty="0"/>
-              <a:t>Responsive</a:t>
-            </a:r>
-            <a:r>
-              <a:rPr lang="ar-SA" sz="1600" dirty="0"/>
-              <a:t>) وتعمل بكفاءة على شاشات الحواسيب والهواتف المحمولة.</a:t>
-            </a:r>
-          </a:p>
-          <a:p>
-            <a:pPr>
-              <a:lnSpc>
-                <a:spcPct val="150000"/>
-              </a:lnSpc>
-              <a:buFont typeface="Arial" panose="020B0604020202020204" pitchFamily="34" charset="0"/>
-              <a:buChar char="•"/>
-            </a:pPr>
-            <a:r>
-              <a:rPr lang="ar-SA" sz="1600" dirty="0"/>
-              <a:t>يجب أن يكون مسار المستخدم بديهياً لتمكين الشركة أو الباحث من تصميم ونشر استبيان بخطوات واضحة وبسيطة.</a:t>
-            </a:r>
-          </a:p>
-          <a:p>
-            <a:pPr>
-              <a:lnSpc>
-                <a:spcPct val="150000"/>
-              </a:lnSpc>
-            </a:pPr>
-            <a:r>
-              <a:rPr lang="ar-SA" b="1" dirty="0"/>
-              <a:t>5. التوافرية وقابلية التوسع (</a:t>
-            </a:r>
-            <a:r>
-              <a:rPr lang="en-US" b="1" dirty="0"/>
-              <a:t>Availability &amp; Scalability</a:t>
-            </a:r>
-            <a:r>
-              <a:rPr lang="ar-SA" b="1" dirty="0"/>
-              <a:t>)</a:t>
-            </a:r>
-            <a:endParaRPr lang="en-US" b="1" dirty="0"/>
-          </a:p>
-          <a:p>
-            <a:pPr>
-              <a:lnSpc>
-                <a:spcPct val="150000"/>
-              </a:lnSpc>
-            </a:pPr>
-            <a:r>
-              <a:rPr lang="ar-SA" sz="1600" dirty="0"/>
-              <a:t>يجب أن يتحمل النظام دخول عدد محدد من المستخدمين (مثلاً 50 مستخدماً) في نفس الوقت للإجابة على استبيان واحد دون تعطل الخادم (وهو رقم واقعي لاختبار مشروع جامعي).</a:t>
-            </a:r>
-          </a:p>
-          <a:p>
-            <a:pPr>
-              <a:lnSpc>
-                <a:spcPct val="150000"/>
-              </a:lnSpc>
-            </a:pPr>
-            <a:endParaRPr lang="ar-SA" sz="1600" dirty="0"/>
-          </a:p>
-        </p:txBody>
-      </p:sp>
+          <p:cNvGraphicFramePr>
+            <a:graphicFrameLocks noGrp="1"/>
+          </p:cNvGraphicFramePr>
+          <p:nvPr>
+            <p:extLst>
+              <p:ext uri="{D42A27DB-BD31-4B8C-83A1-F6EECF244321}">
+                <p14:modId xmlns:p14="http://schemas.microsoft.com/office/powerpoint/2010/main" val="3120303656"/>
+              </p:ext>
+            </p:extLst>
+          </p:nvPr>
+        </p:nvGraphicFramePr>
+        <p:xfrm>
+          <a:off x="670770" y="781490"/>
+          <a:ext cx="11187402" cy="4832047"/>
+        </p:xfrm>
+        <a:graphic>
+          <a:graphicData uri="http://schemas.openxmlformats.org/drawingml/2006/table">
+            <a:tbl>
+              <a:tblPr rtl="1" firstRow="1" bandRow="1">
+                <a:tableStyleId>{073A0DAA-6AF3-43AB-8588-CEC1D06C72B9}</a:tableStyleId>
+              </a:tblPr>
+              <a:tblGrid>
+                <a:gridCol w="5593701">
+                  <a:extLst>
+                    <a:ext uri="{9D8B030D-6E8A-4147-A177-3AD203B41FA5}">
+                      <a16:colId xmlns:a16="http://schemas.microsoft.com/office/drawing/2014/main" val="3535453323"/>
+                    </a:ext>
+                  </a:extLst>
+                </a:gridCol>
+                <a:gridCol w="5593701">
+                  <a:extLst>
+                    <a:ext uri="{9D8B030D-6E8A-4147-A177-3AD203B41FA5}">
+                      <a16:colId xmlns:a16="http://schemas.microsoft.com/office/drawing/2014/main" val="2621474338"/>
+                    </a:ext>
+                  </a:extLst>
+                </a:gridCol>
+              </a:tblGrid>
+              <a:tr h="768410">
+                <a:tc>
+                  <a:txBody>
+                    <a:bodyPr/>
+                    <a:lstStyle/>
+                    <a:p>
+                      <a:pPr marL="0" marR="0" lvl="0" indent="0" algn="r" defTabSz="914400" rtl="1" eaLnBrk="1" fontAlgn="auto" latinLnBrk="0" hangingPunct="1">
+                        <a:lnSpc>
+                          <a:spcPct val="100000"/>
+                        </a:lnSpc>
+                        <a:spcBef>
+                          <a:spcPts val="0"/>
+                        </a:spcBef>
+                        <a:spcAft>
+                          <a:spcPts val="0"/>
+                        </a:spcAft>
+                        <a:buClrTx/>
+                        <a:buSzTx/>
+                        <a:buFontTx/>
+                        <a:buNone/>
+                        <a:tabLst/>
+                        <a:defRPr/>
+                      </a:pPr>
+                      <a:r>
+                        <a:rPr lang="ar-SA" sz="2400" b="1" dirty="0">
+                          <a:solidFill>
+                            <a:schemeClr val="bg1"/>
+                          </a:solidFill>
+                        </a:rPr>
+                        <a:t>المتطلبات الوظيفية</a:t>
+                      </a:r>
+                    </a:p>
+                    <a:p>
+                      <a:pPr rtl="1"/>
+                      <a:endParaRPr lang="ar-SA" dirty="0"/>
+                    </a:p>
+                  </a:txBody>
+                  <a:tcPr/>
+                </a:tc>
+                <a:tc>
+                  <a:txBody>
+                    <a:bodyPr/>
+                    <a:lstStyle/>
+                    <a:p>
+                      <a:pPr marL="0" marR="0" lvl="0" indent="0" algn="r" defTabSz="914400" rtl="1" eaLnBrk="1" fontAlgn="auto" latinLnBrk="0" hangingPunct="1">
+                        <a:lnSpc>
+                          <a:spcPct val="100000"/>
+                        </a:lnSpc>
+                        <a:spcBef>
+                          <a:spcPts val="0"/>
+                        </a:spcBef>
+                        <a:spcAft>
+                          <a:spcPts val="0"/>
+                        </a:spcAft>
+                        <a:buClrTx/>
+                        <a:buSzTx/>
+                        <a:buFontTx/>
+                        <a:buNone/>
+                        <a:tabLst/>
+                        <a:defRPr/>
+                      </a:pPr>
+                      <a:r>
+                        <a:rPr lang="ar-SA" sz="2400" b="1" dirty="0">
+                          <a:solidFill>
+                            <a:schemeClr val="bg1"/>
+                          </a:solidFill>
+                        </a:rPr>
+                        <a:t>المتطلبات غير وظيفية</a:t>
+                      </a:r>
+                    </a:p>
+                    <a:p>
+                      <a:pPr rtl="1"/>
+                      <a:endParaRPr lang="ar-SA" dirty="0"/>
+                    </a:p>
+                  </a:txBody>
+                  <a:tcPr/>
+                </a:tc>
+                <a:extLst>
+                  <a:ext uri="{0D108BD9-81ED-4DB2-BD59-A6C34878D82A}">
+                    <a16:rowId xmlns:a16="http://schemas.microsoft.com/office/drawing/2014/main" val="3954437834"/>
+                  </a:ext>
+                </a:extLst>
+              </a:tr>
+              <a:tr h="779616">
+                <a:tc>
+                  <a:txBody>
+                    <a:bodyPr/>
+                    <a:lstStyle/>
+                    <a:p>
+                      <a:pPr marL="0" marR="0" lvl="0" indent="0" algn="r" defTabSz="914400" rtl="1" eaLnBrk="1" fontAlgn="auto" latinLnBrk="0" hangingPunct="1">
+                        <a:lnSpc>
+                          <a:spcPct val="150000"/>
+                        </a:lnSpc>
+                        <a:spcBef>
+                          <a:spcPts val="0"/>
+                        </a:spcBef>
+                        <a:spcAft>
+                          <a:spcPts val="0"/>
+                        </a:spcAft>
+                        <a:buClrTx/>
+                        <a:buSzTx/>
+                        <a:buFontTx/>
+                        <a:buNone/>
+                        <a:tabLst/>
+                        <a:defRPr/>
+                      </a:pPr>
+                      <a:r>
+                        <a:rPr kumimoji="0" lang="ar-SA" sz="1500" b="1" u="none" strike="noStrike" kern="1200" cap="none" spc="0" normalizeH="0" baseline="0" noProof="0" dirty="0">
+                          <a:ln>
+                            <a:noFill/>
+                          </a:ln>
+                          <a:solidFill>
+                            <a:prstClr val="black"/>
+                          </a:solidFill>
+                          <a:effectLst/>
+                          <a:uLnTx/>
+                          <a:uFillTx/>
+                        </a:rPr>
+                        <a:t>وحدة إدارة الحسابات والمصادقة </a:t>
+                      </a:r>
+                      <a:r>
+                        <a:rPr kumimoji="0" lang="en-US" sz="1500" b="1" u="none" strike="noStrike" kern="1200" cap="none" spc="0" normalizeH="0" baseline="0" noProof="0" dirty="0">
+                          <a:ln>
+                            <a:noFill/>
+                          </a:ln>
+                          <a:solidFill>
+                            <a:prstClr val="black"/>
+                          </a:solidFill>
+                          <a:effectLst/>
+                          <a:uLnTx/>
+                          <a:uFillTx/>
+                        </a:rPr>
+                        <a:t>Authentication &amp; User Management)</a:t>
+                      </a:r>
+                      <a:r>
+                        <a:rPr kumimoji="0" lang="ar-SA" sz="1500" b="1" u="none" strike="noStrike" kern="1200" cap="none" spc="0" normalizeH="0" baseline="0" noProof="0" dirty="0">
+                          <a:ln>
+                            <a:noFill/>
+                          </a:ln>
+                          <a:solidFill>
+                            <a:prstClr val="black"/>
+                          </a:solidFill>
+                          <a:effectLst/>
+                          <a:uLnTx/>
+                          <a:uFillTx/>
+                        </a:rPr>
+                        <a:t>)</a:t>
+                      </a:r>
+                      <a:endParaRPr kumimoji="0" lang="en-US" sz="1500" b="0" i="0" u="none" strike="noStrike" kern="1200" cap="none" spc="0" normalizeH="0" baseline="0" noProof="0" dirty="0">
+                        <a:ln>
+                          <a:noFill/>
+                        </a:ln>
+                        <a:solidFill>
+                          <a:prstClr val="black"/>
+                        </a:solidFill>
+                        <a:effectLst/>
+                        <a:uLnTx/>
+                        <a:uFillTx/>
+                        <a:latin typeface="Aptos" panose="02110004020202020204"/>
+                        <a:ea typeface="+mn-ea"/>
+                        <a:cs typeface="+mn-cs"/>
+                      </a:endParaRPr>
+                    </a:p>
+                  </a:txBody>
+                  <a:tcPr/>
+                </a:tc>
+                <a:tc>
+                  <a:txBody>
+                    <a:bodyPr/>
+                    <a:lstStyle/>
+                    <a:p>
+                      <a:pPr marL="0" marR="0" lvl="0" indent="0" algn="r" defTabSz="914400" rtl="1" eaLnBrk="1" fontAlgn="auto" latinLnBrk="0" hangingPunct="1">
+                        <a:lnSpc>
+                          <a:spcPct val="100000"/>
+                        </a:lnSpc>
+                        <a:spcBef>
+                          <a:spcPts val="0"/>
+                        </a:spcBef>
+                        <a:spcAft>
+                          <a:spcPts val="0"/>
+                        </a:spcAft>
+                        <a:buClrTx/>
+                        <a:buSzTx/>
+                        <a:buFontTx/>
+                        <a:buNone/>
+                        <a:tabLst/>
+                        <a:defRPr/>
+                      </a:pPr>
+                      <a:r>
+                        <a:rPr lang="ar-SA" b="1" dirty="0"/>
+                        <a:t> الأداء والسرعة (</a:t>
+                      </a:r>
+                      <a:r>
+                        <a:rPr lang="en-US" b="1" dirty="0"/>
+                        <a:t>(Performance</a:t>
+                      </a:r>
+                      <a:endParaRPr lang="en-US" dirty="0"/>
+                    </a:p>
+                    <a:p>
+                      <a:pPr rtl="1"/>
+                      <a:endParaRPr lang="ar-SA" dirty="0"/>
+                    </a:p>
+                  </a:txBody>
+                  <a:tcPr/>
+                </a:tc>
+                <a:extLst>
+                  <a:ext uri="{0D108BD9-81ED-4DB2-BD59-A6C34878D82A}">
+                    <a16:rowId xmlns:a16="http://schemas.microsoft.com/office/drawing/2014/main" val="1755937021"/>
+                  </a:ext>
+                </a:extLst>
+              </a:tr>
+              <a:tr h="771946">
+                <a:tc>
+                  <a:txBody>
+                    <a:bodyPr/>
+                    <a:lstStyle/>
+                    <a:p>
+                      <a:pPr marL="0" marR="0" lvl="0" indent="0" algn="r" defTabSz="914400" rtl="1" eaLnBrk="1" fontAlgn="auto" latinLnBrk="0" hangingPunct="1">
+                        <a:lnSpc>
+                          <a:spcPct val="150000"/>
+                        </a:lnSpc>
+                        <a:spcBef>
+                          <a:spcPts val="0"/>
+                        </a:spcBef>
+                        <a:spcAft>
+                          <a:spcPts val="0"/>
+                        </a:spcAft>
+                        <a:buClrTx/>
+                        <a:buSzTx/>
+                        <a:buFontTx/>
+                        <a:buNone/>
+                        <a:tabLst/>
+                        <a:defRPr/>
+                      </a:pPr>
+                      <a:r>
+                        <a:rPr kumimoji="0" lang="ar-SA" sz="1500" b="1" u="none" strike="noStrike" kern="1200" cap="none" spc="0" normalizeH="0" baseline="0" noProof="0" dirty="0">
+                          <a:ln>
+                            <a:noFill/>
+                          </a:ln>
+                          <a:solidFill>
+                            <a:prstClr val="black"/>
+                          </a:solidFill>
+                          <a:effectLst/>
+                          <a:uLnTx/>
+                          <a:uFillTx/>
+                        </a:rPr>
+                        <a:t>وحدة إدارة الاستبيانات (</a:t>
+                      </a:r>
+                      <a:r>
+                        <a:rPr kumimoji="0" lang="en-US" sz="1500" b="1" u="none" strike="noStrike" kern="1200" cap="none" spc="0" normalizeH="0" baseline="0" noProof="0" dirty="0">
+                          <a:ln>
+                            <a:noFill/>
+                          </a:ln>
+                          <a:solidFill>
+                            <a:prstClr val="black"/>
+                          </a:solidFill>
+                          <a:effectLst/>
+                          <a:uLnTx/>
+                          <a:uFillTx/>
+                        </a:rPr>
+                        <a:t> - Survey Management </a:t>
+                      </a:r>
+                      <a:r>
+                        <a:rPr kumimoji="0" lang="ar-SA" sz="1500" b="1" u="none" strike="noStrike" kern="1200" cap="none" spc="0" normalizeH="0" baseline="0" noProof="0" dirty="0">
+                          <a:ln>
+                            <a:noFill/>
+                          </a:ln>
+                          <a:solidFill>
+                            <a:prstClr val="black"/>
+                          </a:solidFill>
+                          <a:effectLst/>
+                          <a:uLnTx/>
+                          <a:uFillTx/>
+                        </a:rPr>
+                        <a:t>لمقدم الخدمة)</a:t>
+                      </a:r>
+                      <a:endParaRPr kumimoji="0" lang="ar-SA" sz="1500" b="0" i="0" u="none" strike="noStrike" kern="1200" cap="none" spc="0" normalizeH="0" baseline="0" noProof="0" dirty="0">
+                        <a:ln>
+                          <a:noFill/>
+                        </a:ln>
+                        <a:solidFill>
+                          <a:prstClr val="black"/>
+                        </a:solidFill>
+                        <a:effectLst/>
+                        <a:uLnTx/>
+                        <a:uFillTx/>
+                        <a:latin typeface="Aptos" panose="02110004020202020204"/>
+                        <a:ea typeface="+mn-ea"/>
+                        <a:cs typeface="Arial" panose="020B0604020202020204" pitchFamily="34" charset="0"/>
+                      </a:endParaRPr>
+                    </a:p>
+                  </a:txBody>
+                  <a:tcPr/>
+                </a:tc>
+                <a:tc>
+                  <a:txBody>
+                    <a:bodyPr/>
+                    <a:lstStyle/>
+                    <a:p>
+                      <a:pPr marL="0" marR="0" lvl="0" indent="0" algn="r" defTabSz="914400" rtl="1" eaLnBrk="1" fontAlgn="auto" latinLnBrk="0" hangingPunct="1">
+                        <a:lnSpc>
+                          <a:spcPct val="100000"/>
+                        </a:lnSpc>
+                        <a:spcBef>
+                          <a:spcPts val="0"/>
+                        </a:spcBef>
+                        <a:spcAft>
+                          <a:spcPts val="0"/>
+                        </a:spcAft>
+                        <a:buClrTx/>
+                        <a:buSzTx/>
+                        <a:buFontTx/>
+                        <a:buNone/>
+                        <a:tabLst/>
+                        <a:defRPr/>
+                      </a:pPr>
+                      <a:r>
+                        <a:rPr lang="ar-SA" b="1" dirty="0"/>
+                        <a:t> الدقة (</a:t>
+                      </a:r>
+                      <a:r>
+                        <a:rPr lang="en-US" b="1" dirty="0"/>
+                        <a:t>Accuracy</a:t>
+                      </a:r>
+                      <a:r>
+                        <a:rPr lang="ar-SA" b="1" dirty="0"/>
+                        <a:t>)</a:t>
+                      </a:r>
+                      <a:endParaRPr lang="en-US" dirty="0"/>
+                    </a:p>
+                    <a:p>
+                      <a:pPr rtl="1"/>
+                      <a:endParaRPr lang="ar-SA" dirty="0"/>
+                    </a:p>
+                  </a:txBody>
+                  <a:tcPr/>
+                </a:tc>
+                <a:extLst>
+                  <a:ext uri="{0D108BD9-81ED-4DB2-BD59-A6C34878D82A}">
+                    <a16:rowId xmlns:a16="http://schemas.microsoft.com/office/drawing/2014/main" val="3701672691"/>
+                  </a:ext>
+                </a:extLst>
+              </a:tr>
+              <a:tr h="771946">
+                <a:tc>
+                  <a:txBody>
+                    <a:bodyPr/>
+                    <a:lstStyle/>
+                    <a:p>
+                      <a:pPr marL="0" marR="0" lvl="0" indent="0" algn="r" defTabSz="914400" rtl="1" eaLnBrk="1" fontAlgn="auto" latinLnBrk="0" hangingPunct="1">
+                        <a:lnSpc>
+                          <a:spcPct val="150000"/>
+                        </a:lnSpc>
+                        <a:spcBef>
+                          <a:spcPts val="0"/>
+                        </a:spcBef>
+                        <a:spcAft>
+                          <a:spcPts val="0"/>
+                        </a:spcAft>
+                        <a:buClrTx/>
+                        <a:buSzTx/>
+                        <a:buFontTx/>
+                        <a:buNone/>
+                        <a:tabLst/>
+                        <a:defRPr/>
+                      </a:pPr>
+                      <a:r>
+                        <a:rPr kumimoji="0" lang="ar-SA" sz="1500" b="1" u="none" strike="noStrike" kern="1200" cap="none" spc="0" normalizeH="0" baseline="0" noProof="0" dirty="0">
+                          <a:ln>
+                            <a:noFill/>
+                          </a:ln>
+                          <a:solidFill>
+                            <a:prstClr val="black"/>
+                          </a:solidFill>
+                          <a:effectLst/>
+                          <a:uLnTx/>
+                          <a:uFillTx/>
+                        </a:rPr>
+                        <a:t> وحدة محرك المطابقة (</a:t>
+                      </a:r>
+                      <a:r>
+                        <a:rPr kumimoji="0" lang="en-US" sz="1500" b="1" u="none" strike="noStrike" kern="1200" cap="none" spc="0" normalizeH="0" baseline="0" noProof="0" dirty="0">
+                          <a:ln>
+                            <a:noFill/>
+                          </a:ln>
+                          <a:solidFill>
+                            <a:prstClr val="black"/>
+                          </a:solidFill>
+                          <a:effectLst/>
+                          <a:uLnTx/>
+                          <a:uFillTx/>
+                        </a:rPr>
+                        <a:t> - Targeting Engine </a:t>
+                      </a:r>
+                      <a:r>
+                        <a:rPr kumimoji="0" lang="ar-SA" sz="1500" b="1" u="none" strike="noStrike" kern="1200" cap="none" spc="0" normalizeH="0" baseline="0" noProof="0" dirty="0">
+                          <a:ln>
+                            <a:noFill/>
+                          </a:ln>
+                          <a:solidFill>
+                            <a:prstClr val="black"/>
+                          </a:solidFill>
+                          <a:effectLst/>
+                          <a:uLnTx/>
+                          <a:uFillTx/>
+                        </a:rPr>
+                        <a:t>النظام الأساسي)</a:t>
+                      </a:r>
+                      <a:endParaRPr kumimoji="0" lang="ar-SA" sz="1500" b="0" i="0" u="none" strike="noStrike" kern="1200" cap="none" spc="0" normalizeH="0" baseline="0" noProof="0" dirty="0">
+                        <a:ln>
+                          <a:noFill/>
+                        </a:ln>
+                        <a:solidFill>
+                          <a:prstClr val="black"/>
+                        </a:solidFill>
+                        <a:effectLst/>
+                        <a:uLnTx/>
+                        <a:uFillTx/>
+                        <a:latin typeface="Aptos" panose="02110004020202020204"/>
+                        <a:ea typeface="+mn-ea"/>
+                        <a:cs typeface="Arial" panose="020B0604020202020204" pitchFamily="34" charset="0"/>
+                      </a:endParaRPr>
+                    </a:p>
+                  </a:txBody>
+                  <a:tcPr/>
+                </a:tc>
+                <a:tc>
+                  <a:txBody>
+                    <a:bodyPr/>
+                    <a:lstStyle/>
+                    <a:p>
+                      <a:pPr marL="0" marR="0" lvl="0" indent="0" algn="r" defTabSz="914400" rtl="1" eaLnBrk="1" fontAlgn="auto" latinLnBrk="0" hangingPunct="1">
+                        <a:lnSpc>
+                          <a:spcPct val="100000"/>
+                        </a:lnSpc>
+                        <a:spcBef>
+                          <a:spcPts val="0"/>
+                        </a:spcBef>
+                        <a:spcAft>
+                          <a:spcPts val="0"/>
+                        </a:spcAft>
+                        <a:buClrTx/>
+                        <a:buSzTx/>
+                        <a:buFontTx/>
+                        <a:buNone/>
+                        <a:tabLst/>
+                        <a:defRPr/>
+                      </a:pPr>
+                      <a:r>
+                        <a:rPr lang="ar-SA" b="1" dirty="0"/>
+                        <a:t>الأمان والخصوصية </a:t>
+                      </a:r>
+                      <a:r>
+                        <a:rPr lang="en-US" b="1" dirty="0"/>
+                        <a:t>(Security &amp; Privacy)</a:t>
+                      </a:r>
+                      <a:endParaRPr lang="en-US" dirty="0"/>
+                    </a:p>
+                    <a:p>
+                      <a:pPr rtl="1"/>
+                      <a:endParaRPr lang="ar-SA" dirty="0"/>
+                    </a:p>
+                  </a:txBody>
+                  <a:tcPr/>
+                </a:tc>
+                <a:extLst>
+                  <a:ext uri="{0D108BD9-81ED-4DB2-BD59-A6C34878D82A}">
+                    <a16:rowId xmlns:a16="http://schemas.microsoft.com/office/drawing/2014/main" val="1480052897"/>
+                  </a:ext>
+                </a:extLst>
+              </a:tr>
+              <a:tr h="779616">
+                <a:tc>
+                  <a:txBody>
+                    <a:bodyPr/>
+                    <a:lstStyle/>
+                    <a:p>
+                      <a:pPr marL="0" marR="0" lvl="0" indent="0" algn="r" defTabSz="914400" rtl="1" eaLnBrk="1" fontAlgn="auto" latinLnBrk="0" hangingPunct="1">
+                        <a:lnSpc>
+                          <a:spcPct val="150000"/>
+                        </a:lnSpc>
+                        <a:spcBef>
+                          <a:spcPts val="0"/>
+                        </a:spcBef>
+                        <a:spcAft>
+                          <a:spcPts val="0"/>
+                        </a:spcAft>
+                        <a:buClrTx/>
+                        <a:buSzTx/>
+                        <a:buFontTx/>
+                        <a:buNone/>
+                        <a:tabLst/>
+                        <a:defRPr/>
+                      </a:pPr>
+                      <a:r>
+                        <a:rPr kumimoji="0" lang="ar-SA" sz="1500" b="1" u="none" strike="noStrike" kern="1200" cap="none" spc="0" normalizeH="0" baseline="0" noProof="0" dirty="0">
+                          <a:ln>
+                            <a:noFill/>
+                          </a:ln>
+                          <a:solidFill>
+                            <a:prstClr val="black"/>
+                          </a:solidFill>
+                          <a:effectLst/>
+                          <a:uLnTx/>
+                          <a:uFillTx/>
+                        </a:rPr>
+                        <a:t>وحدة الإجابات والذكاء الاصطناعي (</a:t>
+                      </a:r>
+                      <a:r>
+                        <a:rPr kumimoji="0" lang="en-US" sz="1500" b="1" u="none" strike="noStrike" kern="1200" cap="none" spc="0" normalizeH="0" baseline="0" noProof="0" dirty="0">
+                          <a:ln>
+                            <a:noFill/>
+                          </a:ln>
+                          <a:solidFill>
+                            <a:prstClr val="black"/>
+                          </a:solidFill>
+                          <a:effectLst/>
+                          <a:uLnTx/>
+                          <a:uFillTx/>
+                        </a:rPr>
+                        <a:t>Responses &amp; AI Integration</a:t>
+                      </a:r>
+                      <a:r>
+                        <a:rPr kumimoji="0" lang="ar-SA" sz="1500" b="1" u="none" strike="noStrike" kern="1200" cap="none" spc="0" normalizeH="0" baseline="0" noProof="0" dirty="0">
+                          <a:ln>
+                            <a:noFill/>
+                          </a:ln>
+                          <a:solidFill>
+                            <a:prstClr val="black"/>
+                          </a:solidFill>
+                          <a:effectLst/>
+                          <a:uLnTx/>
+                          <a:uFillTx/>
+                        </a:rPr>
+                        <a:t>)</a:t>
+                      </a:r>
+                      <a:endParaRPr kumimoji="0" lang="en-US" sz="1500" b="0" i="0" u="none" strike="noStrike" kern="1200" cap="none" spc="0" normalizeH="0" baseline="0" noProof="0" dirty="0">
+                        <a:ln>
+                          <a:noFill/>
+                        </a:ln>
+                        <a:solidFill>
+                          <a:prstClr val="black"/>
+                        </a:solidFill>
+                        <a:effectLst/>
+                        <a:uLnTx/>
+                        <a:uFillTx/>
+                        <a:latin typeface="Aptos" panose="02110004020202020204"/>
+                        <a:ea typeface="+mn-ea"/>
+                        <a:cs typeface="+mn-cs"/>
+                      </a:endParaRPr>
+                    </a:p>
+                  </a:txBody>
+                  <a:tcPr/>
+                </a:tc>
+                <a:tc>
+                  <a:txBody>
+                    <a:bodyPr/>
+                    <a:lstStyle/>
+                    <a:p>
+                      <a:pPr marL="0" marR="0" lvl="0" indent="0" algn="r" defTabSz="914400" rtl="1" eaLnBrk="1" fontAlgn="auto" latinLnBrk="0" hangingPunct="1">
+                        <a:lnSpc>
+                          <a:spcPct val="100000"/>
+                        </a:lnSpc>
+                        <a:spcBef>
+                          <a:spcPts val="0"/>
+                        </a:spcBef>
+                        <a:spcAft>
+                          <a:spcPts val="0"/>
+                        </a:spcAft>
+                        <a:buClrTx/>
+                        <a:buSzTx/>
+                        <a:buFontTx/>
+                        <a:buNone/>
+                        <a:tabLst/>
+                        <a:defRPr/>
+                      </a:pPr>
+                      <a:r>
+                        <a:rPr lang="ar-SA" b="1" dirty="0"/>
+                        <a:t>قابلية الاستخدام (</a:t>
+                      </a:r>
+                      <a:r>
+                        <a:rPr lang="en-US" b="1" dirty="0"/>
+                        <a:t>Usability</a:t>
+                      </a:r>
+                      <a:r>
+                        <a:rPr lang="ar-SA" b="1" dirty="0"/>
+                        <a:t>)</a:t>
+                      </a:r>
+                      <a:endParaRPr lang="en-US" dirty="0"/>
+                    </a:p>
+                    <a:p>
+                      <a:pPr rtl="1"/>
+                      <a:endParaRPr lang="ar-SA" dirty="0"/>
+                    </a:p>
+                  </a:txBody>
+                  <a:tcPr/>
+                </a:tc>
+                <a:extLst>
+                  <a:ext uri="{0D108BD9-81ED-4DB2-BD59-A6C34878D82A}">
+                    <a16:rowId xmlns:a16="http://schemas.microsoft.com/office/drawing/2014/main" val="1010387070"/>
+                  </a:ext>
+                </a:extLst>
+              </a:tr>
+              <a:tr h="960513">
+                <a:tc>
+                  <a:txBody>
+                    <a:bodyPr/>
+                    <a:lstStyle/>
+                    <a:p>
+                      <a:pPr marL="0" marR="0" lvl="0" indent="0" algn="r" defTabSz="914400" rtl="1" eaLnBrk="1" fontAlgn="auto" latinLnBrk="0" hangingPunct="1">
+                        <a:lnSpc>
+                          <a:spcPct val="150000"/>
+                        </a:lnSpc>
+                        <a:spcBef>
+                          <a:spcPts val="0"/>
+                        </a:spcBef>
+                        <a:spcAft>
+                          <a:spcPts val="0"/>
+                        </a:spcAft>
+                        <a:buClrTx/>
+                        <a:buSzTx/>
+                        <a:buFontTx/>
+                        <a:buNone/>
+                        <a:tabLst/>
+                        <a:defRPr/>
+                      </a:pPr>
+                      <a:r>
+                        <a:rPr kumimoji="0" lang="ar-SA" sz="1500" b="1" u="none" strike="noStrike" kern="1200" cap="none" spc="0" normalizeH="0" baseline="0" noProof="0" dirty="0">
+                          <a:ln>
+                            <a:noFill/>
+                          </a:ln>
+                          <a:solidFill>
+                            <a:prstClr val="black"/>
+                          </a:solidFill>
+                          <a:effectLst/>
+                          <a:uLnTx/>
+                          <a:uFillTx/>
+                        </a:rPr>
+                        <a:t>وحدة التقارير ولوحات التحكم (</a:t>
+                      </a:r>
+                      <a:r>
+                        <a:rPr kumimoji="0" lang="en-US" sz="1500" b="1" u="none" strike="noStrike" kern="1200" cap="none" spc="0" normalizeH="0" baseline="0" noProof="0" dirty="0">
+                          <a:ln>
+                            <a:noFill/>
+                          </a:ln>
+                          <a:solidFill>
+                            <a:prstClr val="black"/>
+                          </a:solidFill>
+                          <a:effectLst/>
+                          <a:uLnTx/>
+                          <a:uFillTx/>
+                        </a:rPr>
+                        <a:t>(Dashboards &amp; Reporting</a:t>
+                      </a:r>
+                      <a:endParaRPr kumimoji="0" lang="en-US" sz="1500" b="0" i="0" u="none" strike="noStrike" kern="1200" cap="none" spc="0" normalizeH="0" baseline="0" noProof="0" dirty="0">
+                        <a:ln>
+                          <a:noFill/>
+                        </a:ln>
+                        <a:solidFill>
+                          <a:prstClr val="black"/>
+                        </a:solidFill>
+                        <a:effectLst/>
+                        <a:uLnTx/>
+                        <a:uFillTx/>
+                        <a:latin typeface="Aptos" panose="02110004020202020204"/>
+                        <a:ea typeface="+mn-ea"/>
+                        <a:cs typeface="+mn-cs"/>
+                      </a:endParaRPr>
+                    </a:p>
+                  </a:txBody>
+                  <a:tcPr/>
+                </a:tc>
+                <a:tc>
+                  <a:txBody>
+                    <a:bodyPr/>
+                    <a:lstStyle/>
+                    <a:p>
+                      <a:pPr marL="0" marR="0" lvl="0" indent="0" algn="r" defTabSz="914400" rtl="1" eaLnBrk="1" fontAlgn="auto" latinLnBrk="0" hangingPunct="1">
+                        <a:lnSpc>
+                          <a:spcPct val="100000"/>
+                        </a:lnSpc>
+                        <a:spcBef>
+                          <a:spcPts val="0"/>
+                        </a:spcBef>
+                        <a:spcAft>
+                          <a:spcPts val="0"/>
+                        </a:spcAft>
+                        <a:buClrTx/>
+                        <a:buSzTx/>
+                        <a:buFontTx/>
+                        <a:buNone/>
+                        <a:tabLst/>
+                        <a:defRPr/>
+                      </a:pPr>
+                      <a:r>
+                        <a:rPr lang="ar-SA" b="1" dirty="0"/>
+                        <a:t> التوافرية وقابلية التوسع (</a:t>
+                      </a:r>
+                      <a:r>
+                        <a:rPr lang="en-US" b="1" dirty="0"/>
+                        <a:t>Availability &amp; Scalability</a:t>
+                      </a:r>
+                      <a:r>
+                        <a:rPr lang="ar-SA" b="1" dirty="0"/>
+                        <a:t>)</a:t>
+                      </a:r>
+                      <a:endParaRPr lang="en-US" b="1" dirty="0"/>
+                    </a:p>
+                    <a:p>
+                      <a:pPr rtl="1"/>
+                      <a:endParaRPr lang="ar-SA" dirty="0"/>
+                    </a:p>
+                  </a:txBody>
+                  <a:tcPr/>
+                </a:tc>
+                <a:extLst>
+                  <a:ext uri="{0D108BD9-81ED-4DB2-BD59-A6C34878D82A}">
+                    <a16:rowId xmlns:a16="http://schemas.microsoft.com/office/drawing/2014/main" val="2606740300"/>
+                  </a:ext>
+                </a:extLst>
+              </a:tr>
+            </a:tbl>
+          </a:graphicData>
+        </a:graphic>
+      </p:graphicFrame>
     </p:spTree>
     <p:extLst>
       <p:ext uri="{BB962C8B-B14F-4D97-AF65-F5344CB8AC3E}">
-        <p14:creationId xmlns:p14="http://schemas.microsoft.com/office/powerpoint/2010/main" val="2662615565"/>
+        <p14:creationId xmlns:p14="http://schemas.microsoft.com/office/powerpoint/2010/main" val="2484457270"/>
       </p:ext>
     </p:extLst>
   </p:cSld>

--- a/Smart Opinion Survey Platform.pptx
+++ b/Smart Opinion Survey Platform.pptx
@@ -269,7 +269,7 @@
           <a:p>
             <a:fld id="{096A8431-2457-4B17-8EAD-CB7DD7790385}" type="datetimeFigureOut">
               <a:rPr lang="ar-SA" smtClean="0"/>
-              <a:t>24/09/47</a:t>
+              <a:t>27/09/47</a:t>
             </a:fld>
             <a:endParaRPr lang="ar-SA"/>
           </a:p>
@@ -467,7 +467,7 @@
           <a:p>
             <a:fld id="{096A8431-2457-4B17-8EAD-CB7DD7790385}" type="datetimeFigureOut">
               <a:rPr lang="ar-SA" smtClean="0"/>
-              <a:t>24/09/47</a:t>
+              <a:t>27/09/47</a:t>
             </a:fld>
             <a:endParaRPr lang="ar-SA"/>
           </a:p>
@@ -675,7 +675,7 @@
           <a:p>
             <a:fld id="{096A8431-2457-4B17-8EAD-CB7DD7790385}" type="datetimeFigureOut">
               <a:rPr lang="ar-SA" smtClean="0"/>
-              <a:t>24/09/47</a:t>
+              <a:t>27/09/47</a:t>
             </a:fld>
             <a:endParaRPr lang="ar-SA"/>
           </a:p>
@@ -873,7 +873,7 @@
           <a:p>
             <a:fld id="{096A8431-2457-4B17-8EAD-CB7DD7790385}" type="datetimeFigureOut">
               <a:rPr lang="ar-SA" smtClean="0"/>
-              <a:t>24/09/47</a:t>
+              <a:t>27/09/47</a:t>
             </a:fld>
             <a:endParaRPr lang="ar-SA"/>
           </a:p>
@@ -1148,7 +1148,7 @@
           <a:p>
             <a:fld id="{096A8431-2457-4B17-8EAD-CB7DD7790385}" type="datetimeFigureOut">
               <a:rPr lang="ar-SA" smtClean="0"/>
-              <a:t>24/09/47</a:t>
+              <a:t>27/09/47</a:t>
             </a:fld>
             <a:endParaRPr lang="ar-SA"/>
           </a:p>
@@ -1413,7 +1413,7 @@
           <a:p>
             <a:fld id="{096A8431-2457-4B17-8EAD-CB7DD7790385}" type="datetimeFigureOut">
               <a:rPr lang="ar-SA" smtClean="0"/>
-              <a:t>24/09/47</a:t>
+              <a:t>27/09/47</a:t>
             </a:fld>
             <a:endParaRPr lang="ar-SA"/>
           </a:p>
@@ -1825,7 +1825,7 @@
           <a:p>
             <a:fld id="{096A8431-2457-4B17-8EAD-CB7DD7790385}" type="datetimeFigureOut">
               <a:rPr lang="ar-SA" smtClean="0"/>
-              <a:t>24/09/47</a:t>
+              <a:t>27/09/47</a:t>
             </a:fld>
             <a:endParaRPr lang="ar-SA"/>
           </a:p>
@@ -1966,7 +1966,7 @@
           <a:p>
             <a:fld id="{096A8431-2457-4B17-8EAD-CB7DD7790385}" type="datetimeFigureOut">
               <a:rPr lang="ar-SA" smtClean="0"/>
-              <a:t>24/09/47</a:t>
+              <a:t>27/09/47</a:t>
             </a:fld>
             <a:endParaRPr lang="ar-SA"/>
           </a:p>
@@ -2079,7 +2079,7 @@
           <a:p>
             <a:fld id="{096A8431-2457-4B17-8EAD-CB7DD7790385}" type="datetimeFigureOut">
               <a:rPr lang="ar-SA" smtClean="0"/>
-              <a:t>24/09/47</a:t>
+              <a:t>27/09/47</a:t>
             </a:fld>
             <a:endParaRPr lang="ar-SA"/>
           </a:p>
@@ -2390,7 +2390,7 @@
           <a:p>
             <a:fld id="{096A8431-2457-4B17-8EAD-CB7DD7790385}" type="datetimeFigureOut">
               <a:rPr lang="ar-SA" smtClean="0"/>
-              <a:t>24/09/47</a:t>
+              <a:t>27/09/47</a:t>
             </a:fld>
             <a:endParaRPr lang="ar-SA"/>
           </a:p>
@@ -2678,7 +2678,7 @@
           <a:p>
             <a:fld id="{096A8431-2457-4B17-8EAD-CB7DD7790385}" type="datetimeFigureOut">
               <a:rPr lang="ar-SA" smtClean="0"/>
-              <a:t>24/09/47</a:t>
+              <a:t>27/09/47</a:t>
             </a:fld>
             <a:endParaRPr lang="ar-SA"/>
           </a:p>
@@ -2919,7 +2919,7 @@
           <a:p>
             <a:fld id="{096A8431-2457-4B17-8EAD-CB7DD7790385}" type="datetimeFigureOut">
               <a:rPr lang="ar-SA" smtClean="0"/>
-              <a:t>24/09/47</a:t>
+              <a:t>27/09/47</a:t>
             </a:fld>
             <a:endParaRPr lang="ar-SA"/>
           </a:p>
@@ -4306,7 +4306,15 @@
             </a:pPr>
             <a:r>
               <a:rPr lang="ar-SA" sz="2000" b="1" dirty="0"/>
-              <a:t> التغذية الراجعة:</a:t>
+              <a:t> التغذية الراجعة</a:t>
+            </a:r>
+            <a:r>
+              <a:rPr lang="en-US" sz="2000" b="1" dirty="0"/>
+              <a:t> (Feedback) </a:t>
+            </a:r>
+            <a:r>
+              <a:rPr lang="ar-SA" sz="2000" b="1" dirty="0"/>
+              <a:t>:</a:t>
             </a:r>
             <a:r>
               <a:rPr lang="ar-SA" sz="2000" dirty="0"/>
